--- a/presentation/token_cost_agent.pptx
+++ b/presentation/token_cost_agent.pptx
@@ -519,22 +519,27 @@
           <a:lstStyle/>
           <a:p>
             <a:r>
-              <a:t>AGENT / 정정판</a:t>
-            </a:r>
-          </a:p>
-          <a:p>
-            <a:r>
-              <a:t>라우터 · A/B 사다리 · 의도 이력 · 출력 예산</a:t>
-            </a:r>
-          </a:p>
-          <a:p>
-            <a:r>
-              <a:t>동작하는 배선을 검증한다. 품질 동등 절감 효과는 별도 A/B가 필요하다.</a:t>
+              <a:t>에이전트 셋팅편이다. 목표는 '기본값을 낮추고, 필요할 때만 올리는' 배선이다.</a:t>
+            </a:r>
+          </a:p>
+          <a:p>
+            <a:r>
+              <a:t>오늘 보여주는 것은 참조 구현과 회귀 테스트다. 절감 효과의 실제 A/B는 별도 실험이 필요하다.</a:t>
+            </a:r>
+          </a:p>
+          <a:p>
+            <a:r>
+              <a:t>라우터 오류율·검출률은 측정하지 않았고, 그렇게 표기한다.</a:t>
             </a:r>
           </a:p>
           <a:p>
             <a:r>
               <a:t>근거: agent_setup/ · tests/</a:t>
+            </a:r>
+          </a:p>
+          <a:p>
+            <a:r>
+              <a:t>증거 범위: AGENT / 2026-09-20</a:t>
             </a:r>
           </a:p>
         </p:txBody>
@@ -604,32 +609,27 @@
           <a:lstStyle/>
           <a:p>
             <a:r>
-              <a:t>정책 시뮬레이션 / 소프트웨어 테스트</a:t>
-            </a:r>
-          </a:p>
-          <a:p>
-            <a:r>
-              <a:t>기존 3.06배는 고정 발화를 다른 정책으로 처리한다는 비용 재생이었다.</a:t>
-            </a:r>
-          </a:p>
-          <a:p>
-            <a:r>
-              <a:t>지금은 respec의 무료 중단과 실행 비용을 분리하고, 총 입력 증가분을 한 번만 더한다.</a:t>
-            </a:r>
-          </a:p>
-          <a:p>
-            <a:r>
-              <a:t>A·오케스트레이터는 범위·리셋·출력 상한·진단 후 적용 비용을 공통 함수로 계산.</a:t>
-            </a:r>
-          </a:p>
-          <a:p>
-            <a:r>
-              <a:t>새 task_id의 의도 이력을 분리해 앞 작업의 재작업 상태가 새 작업으로 새지 않게 한다.</a:t>
-            </a:r>
-          </a:p>
-          <a:p>
-            <a:r>
-              <a:t>근거: analysis/lean_vs_full.py · agent_setup/orchestrator.py</a:t>
+              <a:t>이 부분이 없으면 '새 작업인데 이전 작업의 리워크로 판정'되는 오작동이 생긴다.</a:t>
+            </a:r>
+          </a:p>
+          <a:p>
+            <a:r>
+              <a:t>회귀 테스트로 새 작업·동일 문구·교차 작업을 검증한다.</a:t>
+            </a:r>
+          </a:p>
+          <a:p>
+            <a:r>
+              <a:t>로그에 task_id와 판정 근거를 남겨 사후 추적이 가능하게 했다.</a:t>
+            </a:r>
+          </a:p>
+          <a:p>
+            <a:r>
+              <a:t>근거: agent_setup/orchestrator.py</a:t>
+            </a:r>
+          </a:p>
+          <a:p>
+            <a:r>
+              <a:t>증거 범위: 상태 관리</a:t>
             </a:r>
           </a:p>
         </p:txBody>
@@ -699,32 +699,27 @@
           <a:lstStyle/>
           <a:p>
             <a:r>
-              <a:t>오프라인 회귀·변조 테스트</a:t>
-            </a:r>
-          </a:p>
-          <a:p>
-            <a:r>
-              <a:t>슬라이드 240 → 999 변조를 거부: 실제 PPTX의 모든 텍스트와 생성 근거를 대조.</a:t>
-            </a:r>
-          </a:p>
-          <a:p>
-            <a:r>
-              <a:t>모바일 1열 → 2열 변조, 동작 없는 메모 HTML을 브라우저 AC가 거부.</a:t>
-            </a:r>
-          </a:p>
-          <a:p>
-            <a:r>
-              <a:t>실패 assertion은 exit 1. shell pipefail로 파이프 뒤에서도 실패를 보존.</a:t>
-            </a:r>
-          </a:p>
-          <a:p>
-            <a:r>
-              <a:t>mock은 요청 구조·계산 검증일 뿐 새 live 측정으로 소개하지 않는다.</a:t>
-            </a:r>
-          </a:p>
-          <a:p>
-            <a:r>
-              <a:t>근거: tests/ · tools/verify_deck.py · tools/browser_ac.py</a:t>
+              <a:t>두 경로(진단 후 적용 / 곧바로 적용)에서 같은 값이 나오지 않으면 정책 비교가 무의미해진다.</a:t>
+            </a:r>
+          </a:p>
+          <a:p>
+            <a:r>
+              <a:t>단가는 실제 계약이 아니라 명시적 시나리오다. 실제 전달문 비용은 usage로 측정한다.</a:t>
+            </a:r>
+          </a:p>
+          <a:p>
+            <a:r>
+              <a:t>이 값은 회귀 테스트의 기준값이며 절감 실적이 아니다.</a:t>
+            </a:r>
+          </a:p>
+          <a:p>
+            <a:r>
+              <a:t>근거: agent_setup/router.py · tests/</a:t>
+            </a:r>
+          </a:p>
+          <a:p>
+            <a:r>
+              <a:t>증거 범위: 비용 회귀</a:t>
             </a:r>
           </a:p>
         </p:txBody>
@@ -794,32 +789,27 @@
           <a:lstStyle/>
           <a:p>
             <a:r>
-              <a:t>공식 스키마 + mock 회귀</a:t>
-            </a:r>
-          </a:p>
-          <a:p>
-            <a:r>
-              <a:t>Gemini promptTokenCount는 캐시 입력을 포함. cost()에 전체 prompt와 cached를 전달.</a:t>
-            </a:r>
-          </a:p>
-          <a:p>
-            <a:r>
-              <a:t>Gemini Content는 role + parts. 모델 응답의 thoughtSignature와 functionCall id를 보존.</a:t>
-            </a:r>
-          </a:p>
-          <a:p>
-            <a:r>
-              <a:t>툴 내용은 두 번째 요청에서 처음 입력되고 세 번째 요청에서 재전송된다.</a:t>
-            </a:r>
-          </a:p>
-          <a:p>
-            <a:r>
-              <a:t>요청 실패·절단·키 없음은 미검증/실패로 기록. 3벤더 ‘확인됨’을 미리 출력하지 않는다.</a:t>
-            </a:r>
-          </a:p>
-          <a:p>
-            <a:r>
-              <a:t>근거: experiments/exp10_thinking_cross_vendor.py · exp11_tool_output_bloat.py</a:t>
+              <a:t>이중 계상은 비용을 부풀려 절감을 과장하는 대표적 실수다.</a:t>
+            </a:r>
+          </a:p>
+          <a:p>
+            <a:r>
+              <a:t>4,700은 페르소나 시나리오를 맞춘 값이지 독립 실측 캘리브레이션이 아니다. 동일 자료 내부 정합만 확인했다.</a:t>
+            </a:r>
+          </a:p>
+          <a:p>
+            <a:r>
+              <a:t>역산 오차는 0.147%이고, 이 수치는 문서에 한계와 함께 남긴다.</a:t>
+            </a:r>
+          </a:p>
+          <a:p>
+            <a:r>
+              <a:t>근거: analysis/calibrate_growth.py</a:t>
+            </a:r>
+          </a:p>
+          <a:p>
+            <a:r>
+              <a:t>증거 범위: 비용 산식</a:t>
             </a:r>
           </a:p>
         </p:txBody>
@@ -889,27 +879,27 @@
           <a:lstStyle/>
           <a:p>
             <a:r>
-              <a:t>공식 조건 + 경계값 회귀 테스트</a:t>
-            </a:r>
-          </a:p>
-          <a:p>
-            <a:r>
-              <a:t>Sonnet 4.6: 1,024 / Opus 4.6: 4,096 (공식 문서 확인일 2026-09-20)</a:t>
-            </a:r>
-          </a:p>
-          <a:p>
-            <a:r>
-              <a:t>짧은 프리픽스를 1K 공통 규칙으로 할인하지 않는다. 미확인 기준은 ‘미확인’으로 둔다.</a:t>
-            </a:r>
-          </a:p>
-          <a:p>
-            <a:r>
-              <a:t>적격성 충족은 히트 보장이 아니다. 실제 cache usage·TTL·쓰기/저장료를 본다.</a:t>
-            </a:r>
-          </a:p>
-          <a:p>
-            <a:r>
-              <a:t>근거: platform.claude.com/docs/en/build-with-claude/prompt-caching</a:t>
+              <a:t>에이전트는 같은 접두부를 매 턴 다시 보낸다. 캐시의 이득이 가장 큰 워크로드다.</a:t>
+            </a:r>
+          </a:p>
+          <a:p>
+            <a:r>
+              <a:t>최소 길이 미달이면 할인 가정을 하지 않는다. 모델별 조건을 pricing에 모아 두었다.</a:t>
+            </a:r>
+          </a:p>
+          <a:p>
+            <a:r>
+              <a:t>프롬프트를 자주 바꾸면 캐시가 깨진다. 변경 주기를 정하고 측정한다.</a:t>
+            </a:r>
+          </a:p>
+          <a:p>
+            <a:r>
+              <a:t>근거: agent_setup/config.py</a:t>
+            </a:r>
+          </a:p>
+          <a:p>
+            <a:r>
+              <a:t>증거 범위: 캐싱 배선</a:t>
             </a:r>
           </a:p>
         </p:txBody>
@@ -979,27 +969,27 @@
           <a:lstStyle/>
           <a:p>
             <a:r>
-              <a:t>첫 쓰기 비용 포함 시나리오</a:t>
-            </a:r>
-          </a:p>
-          <a:p>
-            <a:r>
-              <a:t>고정 20,000 + 가변 1,000, 출력 1,500, 100회, Sonnet: $8.550 → $3.219</a:t>
-            </a:r>
-          </a:p>
-          <a:p>
-            <a:r>
-              <a:t>히트 0, 매번 쓰기 가정은 $10.050. 캐시 없음보다 비쌀 수 있다.</a:t>
-            </a:r>
-          </a:p>
-          <a:p>
-            <a:r>
-              <a:t>‘캐싱 90%’는 캐시 읽기 단가 할인이다. 전체 세션 절감률과 다르다.</a:t>
+              <a:t>고정 20,000 + 가변 1,000 + 출력 1,500, Sonnet 단가, 100콜 조건의 계산이다.</a:t>
+            </a:r>
+          </a:p>
+          <a:p>
+            <a:r>
+              <a:t>히트율은 가정값이다. 실제 값은 자기 usage의 cache_read 필드로 측정해야 한다.</a:t>
+            </a:r>
+          </a:p>
+          <a:p>
+            <a:r>
+              <a:t>저장료·TTL·최소 길이는 모델별로 다르다. 미확인 기준은 할인 가정을 하지 않는다.</a:t>
             </a:r>
           </a:p>
           <a:p>
             <a:r>
               <a:t>근거: experiments/exp03_prompt_caching.py</a:t>
+            </a:r>
+          </a:p>
+          <a:p>
+            <a:r>
+              <a:t>증거 범위: 비용 시나리오 (100콜)</a:t>
             </a:r>
           </a:p>
         </p:txBody>
@@ -1069,32 +1059,27 @@
           <a:lstStyle/>
           <a:p>
             <a:r>
-              <a:t>역사적 시나리오 / 수정 시나리오</a:t>
-            </a:r>
-          </a:p>
-          <a:p>
-            <a:r>
-              <a:t>기존: A 6턴 / B 2턴, 출력 확대 2.9배, effort 0.35, 한국어 사고 승수 1.44 등 가정.</a:t>
-            </a:r>
-          </a:p>
-          <a:p>
-            <a:r>
-              <a:t>기본: 사고 언어 승수는 1.0, 최소 길이 미달 캐싱은 미적용.</a:t>
-            </a:r>
-          </a:p>
-          <a:p>
-            <a:r>
-              <a:t>두 조건 모두 일부 실파일 인코딩이 포함된 비용 모형. 실제 품질 동등 A/B가 아니다.</a:t>
-            </a:r>
-          </a:p>
-          <a:p>
-            <a:r>
-              <a:t>python demo/compare_personas.py --scenario legacy 로 기존 발표 수치 재현.</a:t>
-            </a:r>
-          </a:p>
-          <a:p>
-            <a:r>
-              <a:t>근거: demo/results.json · demo/results_current.json</a:t>
+              <a:t>20턴 세션에 캐싱만 걸면 $1.91(+17%) — 이력 누적은 그대로 남기 때문이다.</a:t>
+            </a:r>
+          </a:p>
+          <a:p>
+            <a:r>
+              <a:t>요약은 품질에 영향을 준다. 압축 과정에서 잃는 정보가 재작업을 만들면 절감이 상쇄된다.</a:t>
+            </a:r>
+          </a:p>
+          <a:p>
+            <a:r>
+              <a:t>주기를 바꿔 가며 재작업률과 총비용을 함께 측정할 것을 권한다.</a:t>
+            </a:r>
+          </a:p>
+          <a:p>
+            <a:r>
+              <a:t>근거: experiments/exp04_agent_loop_sdd.py</a:t>
+            </a:r>
+          </a:p>
+          <a:p>
+            <a:r>
+              <a:t>증거 범위: 비용 시나리오</a:t>
             </a:r>
           </a:p>
         </p:txBody>
@@ -1164,32 +1149,32 @@
           <a:lstStyle/>
           <a:p>
             <a:r>
-              <a:t>SDD 비용 시나리오</a:t>
-            </a:r>
-          </a:p>
-          <a:p>
-            <a:r>
-              <a:t>40턴 → 12턴은 모델의 입력 가정. 스펙이 실제 이만큼 줄였다는 관측은 없다.</a:t>
-            </a:r>
-          </a:p>
-          <a:p>
-            <a:r>
-              <a:t>스펙 작성: 입력 3,000 + 출력 4,000 비용을 이미 포함한다.</a:t>
-            </a:r>
-          </a:p>
-          <a:p>
-            <a:r>
-              <a:t>기존 약 71%는 캐시 예열 비용 제외. 기본은 사이클별 첫 쓰기까지 포함한다.</a:t>
-            </a:r>
-          </a:p>
-          <a:p>
-            <a:r>
-              <a:t>주장 유지: 짧고 결정적인 스펙을 우선 시도하되 재작업·품질·총비용으로 검증한다.</a:t>
-            </a:r>
-          </a:p>
-          <a:p>
-            <a:r>
-              <a:t>근거: experiments/exp04_agent_loop_sdd.py (--warm-cache = legacy)</a:t>
+              <a:t>EXTERNAL=0은 '추가 종량 API 금액이 0'이라는 모델링 선택이다. 총비용이 0이라는 뜻이 아니다.</a:t>
+            </a:r>
+          </a:p>
+          <a:p>
+            <a:r>
+              <a:t>약관·품질·재현성은 별도로 확인해야 한다. 라우터가 이를 보증하지 않는다.</a:t>
+            </a:r>
+          </a:p>
+          <a:p>
+            <a:r>
+              <a:t>사람의 검토 시간과 구독료는 이 계산 밖이다.</a:t>
+            </a:r>
+          </a:p>
+          <a:p>
+            <a:r>
+              <a:t>복사·정리 단계에서 스펙 형식을 고정하면 다음 단계 입력이 줄어든다.</a:t>
+            </a:r>
+          </a:p>
+          <a:p>
+            <a:r>
+              <a:t>근거: lab/pricing.py TIER_SCENARIOS</a:t>
+            </a:r>
+          </a:p>
+          <a:p>
+            <a:r>
+              <a:t>증거 범위: 경로 분리</a:t>
             </a:r>
           </a:p>
         </p:txBody>
@@ -1259,32 +1244,27 @@
           <a:lstStyle/>
           <a:p>
             <a:r>
-              <a:t>재현 자료</a:t>
-            </a:r>
-          </a:p>
-          <a:p>
-            <a:r>
-              <a:t>results/audit_metrics.json: 저장 로그 통계 + 로컬 측정 + 시나리오를 분리한 지표.</a:t>
-            </a:r>
-          </a:p>
-          <a:p>
-            <a:r>
-              <a:t>docs/CORRECTIONS.md: 무엇을 유지하고 무엇을 바꿨는지 상세 설명.</a:t>
-            </a:r>
-          </a:p>
-          <a:p>
-            <a:r>
-              <a:t>SOURCES.md: 공식 단가, 논문 표, 외부 케이스의 비교 조건.</a:t>
-            </a:r>
-          </a:p>
-          <a:p>
-            <a:r>
-              <a:t>원본 110행은 보존. 없는 원자료를 재측정 없이 만들어 넣지 않는다.</a:t>
-            </a:r>
-          </a:p>
-          <a:p>
-            <a:r>
-              <a:t>근거: python tools/reproduce_audit.py · python tools/verify_deck.py</a:t>
+              <a:t>자동화의 목적은 사람을 빼는 것이 아니라 기본값을 낮추는 것이다.</a:t>
+            </a:r>
+          </a:p>
+          <a:p>
+            <a:r>
+              <a:t>측정 없는 자동화는 조용히 손해를 만들 수 있다(미스 캐싱이 대표적이다).</a:t>
+            </a:r>
+          </a:p>
+          <a:p>
+            <a:r>
+              <a:t>이상 징후가 보이면 티어를 고정해 비교하는 폴백을 둔다.</a:t>
+            </a:r>
+          </a:p>
+          <a:p>
+            <a:r>
+              <a:t>근거: agent_setup/antigravity/AGENTS.md · docs/CORRECTIONS.md</a:t>
+            </a:r>
+          </a:p>
+          <a:p>
+            <a:r>
+              <a:t>증거 범위: 운영</a:t>
             </a:r>
           </a:p>
         </p:txBody>
@@ -1354,27 +1334,27 @@
           <a:lstStyle/>
           <a:p>
             <a:r>
-              <a:t>다음 실행</a:t>
-            </a:r>
-          </a:p>
-          <a:p>
-            <a:r>
-              <a:t>주장은 유지한다: 불필요한 생성·사고·재전송은 줄일 가치가 있다.</a:t>
-            </a:r>
-          </a:p>
-          <a:p>
-            <a:r>
-              <a:t>배수는 모델·단가·과제·시나리오에 붙여 말한다. 절감만으로 품질을 대신하지 않는다.</a:t>
-            </a:r>
-          </a:p>
-          <a:p>
-            <a:r>
-              <a:t>정확도·재작업·총비용을 함께 측정해 실제 배포 정책을 선택한다.</a:t>
+              <a:t>두 가지 모두 설정 수준에서 시작할 수 있고 되돌리기 쉽다.</a:t>
+            </a:r>
+          </a:p>
+          <a:p>
+            <a:r>
+              <a:t>효과는 자기 로그에서 확인한다. 이 저장소의 값은 출발점이다.</a:t>
+            </a:r>
+          </a:p>
+          <a:p>
+            <a:r>
+              <a:t>질문·재현 결과는 저장소 이슈로 남기면 다음 사람이 같은 실수를 반복하지 않는다.</a:t>
             </a:r>
           </a:p>
           <a:p>
             <a:r>
               <a:t>근거: github.com/giyeop-cody/token-cost-lab</a:t>
+            </a:r>
+          </a:p>
+          <a:p>
+            <a:r>
+              <a:t>증거 범위: 마무리</a:t>
             </a:r>
           </a:p>
         </p:txBody>
@@ -1444,32 +1424,27 @@
           <a:lstStyle/>
           <a:p>
             <a:r>
-              <a:t>검증 범위</a:t>
-            </a:r>
-          </a:p>
-          <a:p>
-            <a:r>
-              <a:t>API 저장 로그: 80건 언어 비교 + 30건 사고 예산 스윕</a:t>
-            </a:r>
-          </a:p>
-          <a:p>
-            <a:r>
-              <a:t>새 로컬 실측: 대응 번역문 1,012쌍의 토크나이저 인코딩</a:t>
-            </a:r>
-          </a:p>
-          <a:p>
-            <a:r>
-              <a:t>브라우저·mock: 코드 동작 검증 / 비용 시나리오: 정책 효과 실측 아님</a:t>
-            </a:r>
-          </a:p>
-          <a:p>
-            <a:r>
-              <a:t>이번 정정의 새 유료 API 호출은 0회다.</a:t>
-            </a:r>
-          </a:p>
-          <a:p>
-            <a:r>
-              <a:t>근거: results/audit_metrics.json · tests/</a:t>
+              <a:t>입력은 한 번에 병렬 처리되고 출력은 한 토큰씩 생성되기 때문에 단가가 다르다.</a:t>
+            </a:r>
+          </a:p>
+          <a:p>
+            <a:r>
+              <a:t>캐시 읽기 단가는 입력의 0.1배 수준(모델별로 다름)이다. 이 비대칭이 오늘 전략의 근거다.</a:t>
+            </a:r>
+          </a:p>
+          <a:p>
+            <a:r>
+              <a:t>가격은 공개 리스트 기준이며 계약·무료 티어·세금·도구 비용은 별도다. 실제 청구서로 검증해야 한다.</a:t>
+            </a:r>
+          </a:p>
+          <a:p>
+            <a:r>
+              <a:t>근거: experiments/exp02_output_to_input.py</a:t>
+            </a:r>
+          </a:p>
+          <a:p>
+            <a:r>
+              <a:t>증거 범위: 가격표 실측</a:t>
             </a:r>
           </a:p>
         </p:txBody>
@@ -1539,32 +1514,27 @@
           <a:lstStyle/>
           <a:p>
             <a:r>
-              <a:t>실무 권장 / 조건부 효과</a:t>
-            </a:r>
-          </a:p>
-          <a:p>
-            <a:r>
-              <a:t>① 영어는 토큰 효율과 추론 정확도에 유리할 수 있다. 사용자에게는 필요한 언어로 답한다.</a:t>
-            </a:r>
-          </a:p>
-          <a:p>
-            <a:r>
-              <a:t>② KISS/DRY/YAGNI: 불필요한 코드·전체 재출력·재작업을 줄인다.</a:t>
-            </a:r>
-          </a:p>
-          <a:p>
-            <a:r>
-              <a:t>③ 설명 길이와 사고 예산을 과제에 맞춘다. 정확도 게이트를 함께 둔다.</a:t>
-            </a:r>
-          </a:p>
-          <a:p>
-            <a:r>
-              <a:t>④ 스펙에 결정을 먼저 적는다. 스펙 작성 비용과 실제 재작업 변화를 함께 잰다.</a:t>
-            </a:r>
-          </a:p>
-          <a:p>
-            <a:r>
-              <a:t>근거: README.md · SOURCES.md</a:t>
+              <a:t>같은 툴 작업량을 가정하고 메인·자식·요약 비용을 모두 합산한 값이다.</a:t>
+            </a:r>
+          </a:p>
+          <a:p>
+            <a:r>
+              <a:t>서브에이전트는 요약 품질과 실패·재시도 특성이 다르다. 비용만으로 우열을 단정하지 않는다.</a:t>
+            </a:r>
+          </a:p>
+          <a:p>
+            <a:r>
+              <a:t>과거의 -87%는 자식·요약을 빼고 계산한 값이어서 전체 절감으로 쓰지 않는다.</a:t>
+            </a:r>
+          </a:p>
+          <a:p>
+            <a:r>
+              <a:t>근거: experiments/exp11_tool_output_bloat.py</a:t>
+            </a:r>
+          </a:p>
+          <a:p>
+            <a:r>
+              <a:t>증거 범위: 전체 시스템 비용 시나리오</a:t>
             </a:r>
           </a:p>
         </p:txBody>
@@ -1634,27 +1604,27 @@
           <a:lstStyle/>
           <a:p>
             <a:r>
-              <a:t>참조 구현 + 반례 회귀 테스트</a:t>
-            </a:r>
-          </a:p>
-          <a:p>
-            <a:r>
-              <a:t>설계·구현·설명 목적을 파일·검색·변환 같은 부수 단어보다 먼저 본다.</a:t>
-            </a:r>
-          </a:p>
-          <a:p>
-            <a:r>
-              <a:t>구성한 반례 테스트는 회귀 검증이지 실사용 오류율 추정이 아니다.</a:t>
-            </a:r>
-          </a:p>
-          <a:p>
-            <a:r>
-              <a:t>기본 tier 단가는 모델의 공식 가격이 아니라 명시적 비용 시나리오다.</a:t>
-            </a:r>
-          </a:p>
-          <a:p>
-            <a:r>
-              <a:t>근거: agent_setup/router.py · tests/test_regressions.py</a:t>
+              <a:t>벤치마크에서 잡은 임계값을 그대로 프로덕션에 쓰면 절감이 과대 추정된다.</a:t>
+            </a:r>
+          </a:p>
+          <a:p>
+            <a:r>
+              <a:t>저볼륨에서는 라우팅 오버헤드가 절감을 상쇄한다. 반복률과 볼륨을 먼저 본다.</a:t>
+            </a:r>
+          </a:p>
+          <a:p>
+            <a:r>
+              <a:t>라우터 오류율·검출률은 이 저장소에서 측정하지 않았다. 참조 구현의 회귀 테스트만 있다.</a:t>
+            </a:r>
+          </a:p>
+          <a:p>
+            <a:r>
+              <a:t>근거: experiments/exp06_other_levers.py</a:t>
+            </a:r>
+          </a:p>
+          <a:p>
+            <a:r>
+              <a:t>증거 범위: 시나리오 (10,000콜)</a:t>
             </a:r>
           </a:p>
         </p:txBody>
@@ -1724,27 +1694,27 @@
           <a:lstStyle/>
           <a:p>
             <a:r>
-              <a:t>참조 정책</a:t>
-            </a:r>
-          </a:p>
-          <a:p>
-            <a:r>
-              <a:t>A: 테스트가 검출한 실패를 턴 안에서 처리.</a:t>
-            </a:r>
-          </a:p>
-          <a:p>
-            <a:r>
-              <a:t>B: 사용자 반려를 의도 이력과 함께 판정.</a:t>
-            </a:r>
-          </a:p>
-          <a:p>
-            <a:r>
-              <a:t>검출할 AC가 부실하면 A가 놓친다. 문자열 검사만으로 기능을 보증하지 않는다.</a:t>
-            </a:r>
-          </a:p>
-          <a:p>
-            <a:r>
-              <a:t>근거: agent_setup/router.py · ladder_b.py</a:t>
+              <a:t>분류는 규칙 기반이다. 학습된 라우터가 아니라 조건표에 가깝다.</a:t>
+            </a:r>
+          </a:p>
+          <a:p>
+            <a:r>
+              <a:t>구성한 반례 테스트는 회귀 검증이지 실사용 오류율 추정이 아니다.</a:t>
+            </a:r>
+          </a:p>
+          <a:p>
+            <a:r>
+              <a:t>오분류가 나면 상위 티어로 올리는 안전장치를 함께 둔다.</a:t>
+            </a:r>
+          </a:p>
+          <a:p>
+            <a:r>
+              <a:t>근거: agent_setup/router.py</a:t>
+            </a:r>
+          </a:p>
+          <a:p>
+            <a:r>
+              <a:t>증거 범위: 라우팅 배선</a:t>
             </a:r>
           </a:p>
         </p:txBody>
@@ -1814,27 +1784,27 @@
           <a:lstStyle/>
           <a:p>
             <a:r>
-              <a:t>상태 관리 회귀</a:t>
-            </a:r>
-          </a:p>
-          <a:p>
-            <a:r>
-              <a:t>이전 작업의 anchor·streak·rung을 새 작업에 전달하지 않는다.</a:t>
-            </a:r>
-          </a:p>
-          <a:p>
-            <a:r>
-              <a:t>다른 작업을 번갈아 실행해도 각자의 의도와 시도 횟수를 유지한다.</a:t>
-            </a:r>
-          </a:p>
-          <a:p>
-            <a:r>
-              <a:t>초기화 전 inner 호출은 명시적 오류, respec은 실행 중단으로 처리.</a:t>
-            </a:r>
-          </a:p>
-          <a:p>
-            <a:r>
-              <a:t>근거: agent_setup/orchestrator.py</a:t>
+              <a:t>셋을 섞어 부르면 처방도 섞인다. 발표·회의에서 용어를 먼저 통일한다.</a:t>
+            </a:r>
+          </a:p>
+          <a:p>
+            <a:r>
+              <a:t>라우팅은 단가표, 리워크는 대화 이력 누적, 워크플로는 단계 배치가 대상이다.</a:t>
+            </a:r>
+          </a:p>
+          <a:p>
+            <a:r>
+              <a:t>효과를 말할 때는 어떤 정책의 값인지 명시한다.</a:t>
+            </a:r>
+          </a:p>
+          <a:p>
+            <a:r>
+              <a:t>근거: agent_setup/antigravity/AGENTS.md</a:t>
+            </a:r>
+          </a:p>
+          <a:p>
+            <a:r>
+              <a:t>증거 범위: 정책 구분</a:t>
             </a:r>
           </a:p>
         </p:txBody>
@@ -1904,27 +1874,27 @@
           <a:lstStyle/>
           <a:p>
             <a:r>
-              <a:t>비용 산식 교정</a:t>
-            </a:r>
-          </a:p>
-          <a:p>
-            <a:r>
-              <a:t>turn_growth_tok은 직전 출력·사용자 발화 등을 포함한 총 입력 증가분.</a:t>
-            </a:r>
-          </a:p>
-          <a:p>
-            <a:r>
-              <a:t>출력 2,500을 다시 더하던 이중 계상을 제거.</a:t>
-            </a:r>
-          </a:p>
-          <a:p>
-            <a:r>
-              <a:t>4,700은 페르소나 시나리오를 맞춘 값이다. 독립 실측 캘리브레이션은 아니다.</a:t>
-            </a:r>
-          </a:p>
-          <a:p>
-            <a:r>
-              <a:t>근거: analysis/calibrate_growth.py · agent_setup/config.py</a:t>
+              <a:t>검출할 AC가 부실하면 A가 실패를 놓친다. 그래서 AC를 코드로 강제한다.</a:t>
+            </a:r>
+          </a:p>
+          <a:p>
+            <a:r>
+              <a:t>respec(다시 스펙)은 실행을 멈추는 무료 경로이고, 실행 비용만 청구된다.</a:t>
+            </a:r>
+          </a:p>
+          <a:p>
+            <a:r>
+              <a:t>이 정책의 값은 회귀 테스트로 고정한다. 실제 품질 효과는 미측정이다.</a:t>
+            </a:r>
+          </a:p>
+          <a:p>
+            <a:r>
+              <a:t>근거: agent_setup/router.py</a:t>
+            </a:r>
+          </a:p>
+          <a:p>
+            <a:r>
+              <a:t>증거 범위: 정책 A</a:t>
             </a:r>
           </a:p>
         </p:txBody>
@@ -1994,27 +1964,27 @@
           <a:lstStyle/>
           <a:p>
             <a:r>
-              <a:t>공통 decision_cost 회귀</a:t>
-            </a:r>
-          </a:p>
-          <a:p>
-            <a:r>
-              <a:t>입력 1,800, file 범위 1.6, reset 600 → 입력 예산 3,480.</a:t>
-            </a:r>
-          </a:p>
-          <a:p>
-            <a:r>
-              <a:t>LARGE 진단 400 출력 + MID 적용 2,500 출력을 함께 계상.</a:t>
-            </a:r>
-          </a:p>
-          <a:p>
-            <a:r>
-              <a:t>tier 단가와 고정 입력 예산의 시나리오다. 실제 전달문 비용은 usage로 측정한다.</a:t>
-            </a:r>
-          </a:p>
-          <a:p>
-            <a:r>
-              <a:t>근거: agent_setup/router.py · orchestrator.py</a:t>
+              <a:t>과거 '0/5 → 4/5'로 소개했던 수치는 원자료가 없어 철회했다. 지금 값은 저장 발화 재생 결과다.</a:t>
+            </a:r>
+          </a:p>
+          <a:p>
+            <a:r>
+              <a:t>재생은 가정 없는 재현이지만 표본이 짧다(6턴). 분류 정확도를 보장하지 않는다.</a:t>
+            </a:r>
+          </a:p>
+          <a:p>
+            <a:r>
+              <a:t>분류가 애매하면 escalate가 아니라 질문을 반환하도록 설계했다.</a:t>
+            </a:r>
+          </a:p>
+          <a:p>
+            <a:r>
+              <a:t>근거: analysis/replay_logs.py</a:t>
+            </a:r>
+          </a:p>
+          <a:p>
+            <a:r>
+              <a:t>증거 범위: 정책 B (로그 재생)</a:t>
             </a:r>
           </a:p>
         </p:txBody>
@@ -2084,27 +2054,32 @@
           <a:lstStyle/>
           <a:p>
             <a:r>
-              <a:t>비용 범위</a:t>
-            </a:r>
-          </a:p>
-          <a:p>
-            <a:r>
-              <a:t>EXTERNAL=0은 추가 종량 API 금액만 세는 모델링 선택.</a:t>
-            </a:r>
-          </a:p>
-          <a:p>
-            <a:r>
-              <a:t>구독료·사람의 스펙 작성 시간·복사/검토 비용은 별도다.</a:t>
-            </a:r>
-          </a:p>
-          <a:p>
-            <a:r>
-              <a:t>라우터가 웹 세션의 품질·약관 적합성을 자동 보증하지 않는다.</a:t>
-            </a:r>
-          </a:p>
-          <a:p>
-            <a:r>
-              <a:t>근거: lab/pricing.py TIER_SCENARIOS</a:t>
+              <a:t>고정 발화를 두 정책으로 처리했을 때의 지출 차이다. 실제 A/B 실측이 아니다.</a:t>
+            </a:r>
+          </a:p>
+          <a:p>
+            <a:r>
+              <a:t>'12배' 같은 큰 수치는 대조군을 최상위 모델로 잡았을 때만 나온다 — 그 조건을 말하지 않으면 과장이 된다.</a:t>
+            </a:r>
+          </a:p>
+          <a:p>
+            <a:r>
+              <a:t>1턴·2턴처럼 짧은 리워크에서도 이득이 나는지가 도입 판단의 핵심이다.</a:t>
+            </a:r>
+          </a:p>
+          <a:p>
+            <a:r>
+              <a:t>이 값은 정책 지출 모형의 재생값이다. respec 경로는 실행을 하지 않으므로 지출이 늘지 않는다.</a:t>
+            </a:r>
+          </a:p>
+          <a:p>
+            <a:r>
+              <a:t>근거: analysis/lean_vs_full.py</a:t>
+            </a:r>
+          </a:p>
+          <a:p>
+            <a:r>
+              <a:t>증거 범위: 정책 시나리오 재생</a:t>
             </a:r>
           </a:p>
         </p:txBody>
@@ -5228,7 +5203,7 @@
                 <a:ea typeface="NanumGothic"/>
                 <a:cs typeface="NanumGothic"/>
               </a:rPr>
-              <a:t>AGENT / 정정판</a:t>
+              <a:t>AGENT / 2026-09-20</a:t>
             </a:r>
           </a:p>
         </p:txBody>
@@ -5300,7 +5275,7 @@
                 <a:ea typeface="NanumGothic"/>
                 <a:cs typeface="NanumGothic"/>
               </a:rPr>
-              <a:t>참조 구현과 효과 검증은 다르다</a:t>
+              <a:t>라우팅 · 사다리 · 상태 분리 · 예산</a:t>
             </a:r>
           </a:p>
         </p:txBody>
@@ -5336,7 +5311,7 @@
                 <a:ea typeface="NanumGothic"/>
                 <a:cs typeface="NanumGothic"/>
               </a:rPr>
-              <a:t>라우터 · A/B 사다리 · 의도 이력 · 출력 예산</a:t>
+              <a:t>모든 요청에 최상위 모델을 쓰지 않는다</a:t>
             </a:r>
           </a:p>
         </p:txBody>
@@ -5372,14 +5347,50 @@
                 <a:ea typeface="NanumGothic"/>
                 <a:cs typeface="NanumGothic"/>
               </a:rPr>
-              <a:t>동작하는 배선을 검증한다. 품질 동등 절감 효과는 별도 A/B가 필요하다.</a:t>
-            </a:r>
-          </a:p>
-        </p:txBody>
-      </p:sp>
-      <p:sp>
-        <p:nvSpPr>
-          <p:cNvPr id="9" name="audit:source"/>
+              <a:t>실패가 반복되면 그때 올린다</a:t>
+            </a:r>
+          </a:p>
+        </p:txBody>
+      </p:sp>
+      <p:sp>
+        <p:nvSpPr>
+          <p:cNvPr id="9" name="audit:body-2"/>
+          <p:cNvSpPr txBox="1"/>
+          <p:nvPr/>
+        </p:nvSpPr>
+        <p:spPr>
+          <a:xfrm>
+            <a:off x="777240" y="4142231"/>
+            <a:ext cx="10652760" cy="612648"/>
+          </a:xfrm>
+          <a:prstGeom prst="rect">
+            <a:avLst/>
+          </a:prstGeom>
+          <a:noFill/>
+        </p:spPr>
+        <p:txBody>
+          <a:bodyPr wrap="square" lIns="0" rIns="0" tIns="0" bIns="0">
+            <a:spAutoFit/>
+          </a:bodyPr>
+          <a:lstStyle/>
+          <a:p>
+            <a:r>
+              <a:rPr sz="1750" b="0">
+                <a:solidFill>
+                  <a:srgbClr val="ECF1F6"/>
+                </a:solidFill>
+                <a:latin typeface="NanumGothic"/>
+                <a:ea typeface="NanumGothic"/>
+                <a:cs typeface="NanumGothic"/>
+              </a:rPr>
+              <a:t>작업별 상태와 비용을 코드로 관리한다</a:t>
+            </a:r>
+          </a:p>
+        </p:txBody>
+      </p:sp>
+      <p:sp>
+        <p:nvSpPr>
+          <p:cNvPr id="10" name="audit:source"/>
           <p:cNvSpPr txBox="1"/>
           <p:nvPr/>
         </p:nvSpPr>
@@ -5415,7 +5426,7 @@
       </p:sp>
       <p:sp>
         <p:nvSpPr>
-          <p:cNvPr id="10" name="audit:footer"/>
+          <p:cNvPr id="11" name="audit:footer"/>
           <p:cNvSpPr txBox="1"/>
           <p:nvPr/>
         </p:nvSpPr>
@@ -5585,7 +5596,7 @@
                 <a:ea typeface="NanumGothic"/>
                 <a:cs typeface="NanumGothic"/>
               </a:rPr>
-              <a:t>정책 시뮬레이션 / 소프트웨어 테스트</a:t>
+              <a:t>상태 관리</a:t>
             </a:r>
           </a:p>
         </p:txBody>
@@ -5621,7 +5632,7 @@
                 <a:ea typeface="NanumGothic"/>
                 <a:cs typeface="NanumGothic"/>
               </a:rPr>
-              <a:t>사다리 재생은 정책 A/B 실측이 아니다</a:t>
+              <a:t>상태를 작업별로 분리한다</a:t>
             </a:r>
           </a:p>
         </p:txBody>
@@ -5657,7 +5668,7 @@
                 <a:ea typeface="NanumGothic"/>
                 <a:cs typeface="NanumGothic"/>
               </a:rPr>
-              <a:t>리플레이는 유용하다. 명칭을 바꾼다.</a:t>
+              <a:t>새 작업은 새 상태로 시작</a:t>
             </a:r>
           </a:p>
         </p:txBody>
@@ -5693,7 +5704,7 @@
                 <a:ea typeface="NanumGothic"/>
                 <a:cs typeface="NanumGothic"/>
               </a:rPr>
-              <a:t>기존 3.06배는 고정 발화를 다른 정책으로 처리한다는 비용 재생이었다.</a:t>
+              <a:t>task_id별로 의도 이력·시도 횟수·범위를 추적한다</a:t>
             </a:r>
           </a:p>
         </p:txBody>
@@ -5729,7 +5740,7 @@
                 <a:ea typeface="NanumGothic"/>
                 <a:cs typeface="NanumGothic"/>
               </a:rPr>
-              <a:t>지금은 respec의 무료 중단과 실행 비용을 분리하고, 총 입력 증가분을 한 번만 더한다.</a:t>
+              <a:t>앞 작업의 반려 상태가 새 작업으로 새지 않는다</a:t>
             </a:r>
           </a:p>
         </p:txBody>
@@ -5765,50 +5776,14 @@
                 <a:ea typeface="NanumGothic"/>
                 <a:cs typeface="NanumGothic"/>
               </a:rPr>
-              <a:t>A·오케스트레이터는 범위·리셋·출력 상한·진단 후 적용 비용을 공통 함수로 계산.</a:t>
-            </a:r>
-          </a:p>
-        </p:txBody>
-      </p:sp>
-      <p:sp>
-        <p:nvSpPr>
-          <p:cNvPr id="10" name="audit:body-3"/>
-          <p:cNvSpPr txBox="1"/>
-          <p:nvPr/>
-        </p:nvSpPr>
-        <p:spPr>
-          <a:xfrm>
-            <a:off x="777240" y="4782312"/>
-            <a:ext cx="10652760" cy="612648"/>
-          </a:xfrm>
-          <a:prstGeom prst="rect">
-            <a:avLst/>
-          </a:prstGeom>
-          <a:noFill/>
-        </p:spPr>
-        <p:txBody>
-          <a:bodyPr wrap="square" lIns="0" rIns="0" tIns="0" bIns="0">
-            <a:spAutoFit/>
-          </a:bodyPr>
-          <a:lstStyle/>
-          <a:p>
-            <a:r>
-              <a:rPr sz="1750" b="0">
-                <a:solidFill>
-                  <a:srgbClr val="ECF1F6"/>
-                </a:solidFill>
-                <a:latin typeface="NanumGothic"/>
-                <a:ea typeface="NanumGothic"/>
-                <a:cs typeface="NanumGothic"/>
-              </a:rPr>
-              <a:t>새 task_id의 의도 이력을 분리해 앞 작업의 재작업 상태가 새 작업으로 새지 않게 한다.</a:t>
-            </a:r>
-          </a:p>
-        </p:txBody>
-      </p:sp>
-      <p:sp>
-        <p:nvSpPr>
-          <p:cNvPr id="11" name="audit:source"/>
+              <a:t>초기화 전 내부 호출은 명시적 오류로 처리</a:t>
+            </a:r>
+          </a:p>
+        </p:txBody>
+      </p:sp>
+      <p:sp>
+        <p:nvSpPr>
+          <p:cNvPr id="10" name="audit:source"/>
           <p:cNvSpPr txBox="1"/>
           <p:nvPr/>
         </p:nvSpPr>
@@ -5837,14 +5812,14 @@
                 <a:ea typeface="NanumGothic"/>
                 <a:cs typeface="NanumGothic"/>
               </a:rPr>
-              <a:t>analysis/lean_vs_full.py · agent_setup/orchestrator.py</a:t>
-            </a:r>
-          </a:p>
-        </p:txBody>
-      </p:sp>
-      <p:sp>
-        <p:nvSpPr>
-          <p:cNvPr id="12" name="audit:footer"/>
+              <a:t>agent_setup/orchestrator.py</a:t>
+            </a:r>
+          </a:p>
+        </p:txBody>
+      </p:sp>
+      <p:sp>
+        <p:nvSpPr>
+          <p:cNvPr id="11" name="audit:footer"/>
           <p:cNvSpPr txBox="1"/>
           <p:nvPr/>
         </p:nvSpPr>
@@ -6014,7 +5989,7 @@
                 <a:ea typeface="NanumGothic"/>
                 <a:cs typeface="NanumGothic"/>
               </a:rPr>
-              <a:t>오프라인 회귀·변조 테스트</a:t>
+              <a:t>비용 회귀</a:t>
             </a:r>
           </a:p>
         </p:txBody>
@@ -6050,7 +6025,7 @@
                 <a:ea typeface="NanumGothic"/>
                 <a:cs typeface="NanumGothic"/>
               </a:rPr>
-              <a:t>검증기가 실패를 놓치지 않게 한다</a:t>
+              <a:t>진단과 적용은 같은 함수로 계산한다</a:t>
             </a:r>
           </a:p>
         </p:txBody>
@@ -6086,7 +6061,7 @@
                 <a:ea typeface="NanumGothic"/>
                 <a:cs typeface="NanumGothic"/>
               </a:rPr>
-              <a:t>거짓 통과를 반례로 검사</a:t>
+              <a:t>$0.05875 (같은 단계·같은 가정)</a:t>
             </a:r>
           </a:p>
         </p:txBody>
@@ -6122,7 +6097,7 @@
                 <a:ea typeface="NanumGothic"/>
                 <a:cs typeface="NanumGothic"/>
               </a:rPr>
-              <a:t>슬라이드 240 → 999 변조를 거부: 실제 PPTX의 모든 텍스트와 생성 근거를 대조.</a:t>
+              <a:t>범위 · 리셋 · 출력 상한 · 진단/적용을 한 곳에서 계산</a:t>
             </a:r>
           </a:p>
         </p:txBody>
@@ -6158,7 +6133,7 @@
                 <a:ea typeface="NanumGothic"/>
                 <a:cs typeface="NanumGothic"/>
               </a:rPr>
-              <a:t>모바일 1열 → 2열 변조, 동작 없는 메모 HTML을 브라우저 AC가 거부.</a:t>
+              <a:t>두 경로가 같은 값을 내는지 테스트로 고정</a:t>
             </a:r>
           </a:p>
         </p:txBody>
@@ -6194,50 +6169,14 @@
                 <a:ea typeface="NanumGothic"/>
                 <a:cs typeface="NanumGothic"/>
               </a:rPr>
-              <a:t>실패 assertion은 exit 1. shell pipefail로 파이프 뒤에서도 실패를 보존.</a:t>
-            </a:r>
-          </a:p>
-        </p:txBody>
-      </p:sp>
-      <p:sp>
-        <p:nvSpPr>
-          <p:cNvPr id="10" name="audit:body-3"/>
-          <p:cNvSpPr txBox="1"/>
-          <p:nvPr/>
-        </p:nvSpPr>
-        <p:spPr>
-          <a:xfrm>
-            <a:off x="777240" y="4782312"/>
-            <a:ext cx="10652760" cy="612648"/>
-          </a:xfrm>
-          <a:prstGeom prst="rect">
-            <a:avLst/>
-          </a:prstGeom>
-          <a:noFill/>
-        </p:spPr>
-        <p:txBody>
-          <a:bodyPr wrap="square" lIns="0" rIns="0" tIns="0" bIns="0">
-            <a:spAutoFit/>
-          </a:bodyPr>
-          <a:lstStyle/>
-          <a:p>
-            <a:r>
-              <a:rPr sz="1750" b="0">
-                <a:solidFill>
-                  <a:srgbClr val="ECF1F6"/>
-                </a:solidFill>
-                <a:latin typeface="NanumGothic"/>
-                <a:ea typeface="NanumGothic"/>
-                <a:cs typeface="NanumGothic"/>
-              </a:rPr>
-              <a:t>mock은 요청 구조·계산 검증일 뿐 새 live 측정으로 소개하지 않는다.</a:t>
-            </a:r>
-          </a:p>
-        </p:txBody>
-      </p:sp>
-      <p:sp>
-        <p:nvSpPr>
-          <p:cNvPr id="11" name="audit:source"/>
+              <a:t>티어 단가와 고정 입력 예산은 시나리오 값</a:t>
+            </a:r>
+          </a:p>
+        </p:txBody>
+      </p:sp>
+      <p:sp>
+        <p:nvSpPr>
+          <p:cNvPr id="10" name="audit:source"/>
           <p:cNvSpPr txBox="1"/>
           <p:nvPr/>
         </p:nvSpPr>
@@ -6266,14 +6205,14 @@
                 <a:ea typeface="NanumGothic"/>
                 <a:cs typeface="NanumGothic"/>
               </a:rPr>
-              <a:t>tests/ · tools/verify_deck.py · tools/browser_ac.py</a:t>
-            </a:r>
-          </a:p>
-        </p:txBody>
-      </p:sp>
-      <p:sp>
-        <p:nvSpPr>
-          <p:cNvPr id="12" name="audit:footer"/>
+              <a:t>agent_setup/router.py · tests/</a:t>
+            </a:r>
+          </a:p>
+        </p:txBody>
+      </p:sp>
+      <p:sp>
+        <p:nvSpPr>
+          <p:cNvPr id="11" name="audit:footer"/>
           <p:cNvSpPr txBox="1"/>
           <p:nvPr/>
         </p:nvSpPr>
@@ -6443,7 +6382,7 @@
                 <a:ea typeface="NanumGothic"/>
                 <a:cs typeface="NanumGothic"/>
               </a:rPr>
-              <a:t>공식 스키마 + mock 회귀</a:t>
+              <a:t>비용 산식</a:t>
             </a:r>
           </a:p>
         </p:txBody>
@@ -6479,7 +6418,7 @@
                 <a:ea typeface="NanumGothic"/>
                 <a:cs typeface="NanumGothic"/>
               </a:rPr>
-              <a:t>API usage를 다룰 때의 세 가지 규칙</a:t>
+              <a:t>입력 증가분을 두 번 더하지 않는다</a:t>
             </a:r>
           </a:p>
         </p:txBody>
@@ -6515,7 +6454,7 @@
                 <a:ea typeface="NanumGothic"/>
                 <a:cs typeface="NanumGothic"/>
               </a:rPr>
-              <a:t>캐시를 두 번 빼지 않는다</a:t>
+              <a:t>4,700을 한 번만 더한다</a:t>
             </a:r>
           </a:p>
         </p:txBody>
@@ -6551,7 +6490,7 @@
                 <a:ea typeface="NanumGothic"/>
                 <a:cs typeface="NanumGothic"/>
               </a:rPr>
-              <a:t>Gemini promptTokenCount는 캐시 입력을 포함. cost()에 전체 prompt와 cached를 전달.</a:t>
+              <a:t>증가분은 직전 출력과 사용자 발화를 포함한 총량</a:t>
             </a:r>
           </a:p>
         </p:txBody>
@@ -6587,7 +6526,7 @@
                 <a:ea typeface="NanumGothic"/>
                 <a:cs typeface="NanumGothic"/>
               </a:rPr>
-              <a:t>Gemini Content는 role + parts. 모델 응답의 thoughtSignature와 functionCall id를 보존.</a:t>
+              <a:t>출력 토큰을 다시 더하면 이중 계상이 된다</a:t>
             </a:r>
           </a:p>
         </p:txBody>
@@ -6623,50 +6562,14 @@
                 <a:ea typeface="NanumGothic"/>
                 <a:cs typeface="NanumGothic"/>
               </a:rPr>
-              <a:t>툴 내용은 두 번째 요청에서 처음 입력되고 세 번째 요청에서 재전송된다.</a:t>
-            </a:r>
-          </a:p>
-        </p:txBody>
-      </p:sp>
-      <p:sp>
-        <p:nvSpPr>
-          <p:cNvPr id="10" name="audit:body-3"/>
-          <p:cNvSpPr txBox="1"/>
-          <p:nvPr/>
-        </p:nvSpPr>
-        <p:spPr>
-          <a:xfrm>
-            <a:off x="777240" y="4782312"/>
-            <a:ext cx="10652760" cy="612648"/>
-          </a:xfrm>
-          <a:prstGeom prst="rect">
-            <a:avLst/>
-          </a:prstGeom>
-          <a:noFill/>
-        </p:spPr>
-        <p:txBody>
-          <a:bodyPr wrap="square" lIns="0" rIns="0" tIns="0" bIns="0">
-            <a:spAutoFit/>
-          </a:bodyPr>
-          <a:lstStyle/>
-          <a:p>
-            <a:r>
-              <a:rPr sz="1750" b="0">
-                <a:solidFill>
-                  <a:srgbClr val="ECF1F6"/>
-                </a:solidFill>
-                <a:latin typeface="NanumGothic"/>
-                <a:ea typeface="NanumGothic"/>
-                <a:cs typeface="NanumGothic"/>
-              </a:rPr>
-              <a:t>요청 실패·절단·키 없음은 미검증/실패로 기록. 3벤더 ‘확인됨’을 미리 출력하지 않는다.</a:t>
-            </a:r>
-          </a:p>
-        </p:txBody>
-      </p:sp>
-      <p:sp>
-        <p:nvSpPr>
-          <p:cNvPr id="11" name="audit:source"/>
+              <a:t>누적 예: 1,419 → 6,119 → 10,819</a:t>
+            </a:r>
+          </a:p>
+        </p:txBody>
+      </p:sp>
+      <p:sp>
+        <p:nvSpPr>
+          <p:cNvPr id="10" name="audit:source"/>
           <p:cNvSpPr txBox="1"/>
           <p:nvPr/>
         </p:nvSpPr>
@@ -6695,14 +6598,14 @@
                 <a:ea typeface="NanumGothic"/>
                 <a:cs typeface="NanumGothic"/>
               </a:rPr>
-              <a:t>experiments/exp10_thinking_cross_vendor.py · exp11_tool_output_bloat.py</a:t>
-            </a:r>
-          </a:p>
-        </p:txBody>
-      </p:sp>
-      <p:sp>
-        <p:nvSpPr>
-          <p:cNvPr id="12" name="audit:footer"/>
+              <a:t>analysis/calibrate_growth.py</a:t>
+            </a:r>
+          </a:p>
+        </p:txBody>
+      </p:sp>
+      <p:sp>
+        <p:nvSpPr>
+          <p:cNvPr id="11" name="audit:footer"/>
           <p:cNvSpPr txBox="1"/>
           <p:nvPr/>
         </p:nvSpPr>
@@ -6872,7 +6775,7 @@
                 <a:ea typeface="NanumGothic"/>
                 <a:cs typeface="NanumGothic"/>
               </a:rPr>
-              <a:t>공식 조건 + 경계값 회귀 테스트</a:t>
+              <a:t>캐싱 배선</a:t>
             </a:r>
           </a:p>
         </p:txBody>
@@ -6908,7 +6811,7 @@
                 <a:ea typeface="NanumGothic"/>
                 <a:cs typeface="NanumGothic"/>
               </a:rPr>
-              <a:t>캐시 적격성은 모델별로 다르다</a:t>
+              <a:t>고정 접두부를 캐시에 태운다</a:t>
             </a:r>
           </a:p>
         </p:txBody>
@@ -6944,7 +6847,7 @@
                 <a:ea typeface="NanumGothic"/>
                 <a:cs typeface="NanumGothic"/>
               </a:rPr>
-              <a:t>Haiku 4.5: 최소 4,096 토큰</a:t>
+              <a:t>규약·시스템 프롬프트는 매 턴 그대로</a:t>
             </a:r>
           </a:p>
         </p:txBody>
@@ -6980,7 +6883,7 @@
                 <a:ea typeface="NanumGothic"/>
                 <a:cs typeface="NanumGothic"/>
               </a:rPr>
-              <a:t>Sonnet 4.6: 1,024 / Opus 4.6: 4,096 (공식 문서 확인일 2026-09-20)</a:t>
+              <a:t>툴 정의와 규약 파일을 맨 앞 고정 블록으로 모은다</a:t>
             </a:r>
           </a:p>
         </p:txBody>
@@ -7016,7 +6919,7 @@
                 <a:ea typeface="NanumGothic"/>
                 <a:cs typeface="NanumGothic"/>
               </a:rPr>
-              <a:t>짧은 프리픽스를 1K 공통 규칙으로 할인하지 않는다. 미확인 기준은 ‘미확인’으로 둔다.</a:t>
+              <a:t>변하는 값(사용자 입력·타임스탬프)은 뒤로 보낸다</a:t>
             </a:r>
           </a:p>
         </p:txBody>
@@ -7052,7 +6955,7 @@
                 <a:ea typeface="NanumGothic"/>
                 <a:cs typeface="NanumGothic"/>
               </a:rPr>
-              <a:t>적격성 충족은 히트 보장이 아니다. 실제 cache usage·TTL·쓰기/저장료를 본다.</a:t>
+              <a:t>적중률을 대시보드로 본다</a:t>
             </a:r>
           </a:p>
         </p:txBody>
@@ -7088,7 +6991,7 @@
                 <a:ea typeface="NanumGothic"/>
                 <a:cs typeface="NanumGothic"/>
               </a:rPr>
-              <a:t>platform.claude.com/docs/en/build-with-claude/prompt-caching</a:t>
+              <a:t>agent_setup/config.py</a:t>
             </a:r>
           </a:p>
         </p:txBody>
@@ -7265,7 +7168,7 @@
                 <a:ea typeface="NanumGothic"/>
                 <a:cs typeface="NanumGothic"/>
               </a:rPr>
-              <a:t>첫 쓰기 비용 포함 시나리오</a:t>
+              <a:t>비용 시나리오 (100콜)</a:t>
             </a:r>
           </a:p>
         </p:txBody>
@@ -7301,7 +7204,7 @@
                 <a:ea typeface="NanumGothic"/>
                 <a:cs typeface="NanumGothic"/>
               </a:rPr>
-              <a:t>캐싱의 손익은 조건으로 재현한다</a:t>
+              <a:t>캐싱 · 오늘 바로 켤 수 있는 레버</a:t>
             </a:r>
           </a:p>
         </p:txBody>
@@ -7337,7 +7240,7 @@
                 <a:ea typeface="NanumGothic"/>
                 <a:cs typeface="NanumGothic"/>
               </a:rPr>
-              <a:t>기본 시나리오 62.35% 절감</a:t>
+              <a:t>$8.55 → $3.22 (62.4% 절감)</a:t>
             </a:r>
           </a:p>
         </p:txBody>
@@ -7373,7 +7276,7 @@
                 <a:ea typeface="NanumGothic"/>
                 <a:cs typeface="NanumGothic"/>
               </a:rPr>
-              <a:t>고정 20,000 + 가변 1,000, 출력 1,500, 100회, Sonnet: $8.550 → $3.219</a:t>
+              <a:t>쓰기 프리미엄은 두 번째 호출에서 회수된다</a:t>
             </a:r>
           </a:p>
         </p:txBody>
@@ -7409,7 +7312,7 @@
                 <a:ea typeface="NanumGothic"/>
                 <a:cs typeface="NanumGothic"/>
               </a:rPr>
-              <a:t>히트 0, 매번 쓰기 가정은 $10.050. 캐시 없음보다 비쌀 수 있다.</a:t>
+              <a:t>고정 블록(시스템 · 툴 정의 · 규약)을 맨 앞으로 모은다</a:t>
             </a:r>
           </a:p>
         </p:txBody>
@@ -7445,7 +7348,7 @@
                 <a:ea typeface="NanumGothic"/>
                 <a:cs typeface="NanumGothic"/>
               </a:rPr>
-              <a:t>‘캐싱 90%’는 캐시 읽기 단가 할인이다. 전체 세션 절감률과 다르다.</a:t>
+              <a:t>최소 길이를 확인한다 — Haiku 4.5는 4,096토큰</a:t>
             </a:r>
           </a:p>
         </p:txBody>
@@ -7658,7 +7561,7 @@
                 <a:ea typeface="NanumGothic"/>
                 <a:cs typeface="NanumGothic"/>
               </a:rPr>
-              <a:t>역사적 시나리오 / 수정 시나리오</a:t>
+              <a:t>비용 시나리오</a:t>
             </a:r>
           </a:p>
         </p:txBody>
@@ -7694,7 +7597,7 @@
                 <a:ea typeface="NanumGothic"/>
                 <a:cs typeface="NanumGothic"/>
               </a:rPr>
-              <a:t>20.8배는 페르소나 시나리오로 보존</a:t>
+              <a:t>긴 세션은 컴팩션으로 접는다</a:t>
             </a:r>
           </a:p>
         </p:txBody>
@@ -7730,7 +7633,7 @@
                 <a:ea typeface="NanumGothic"/>
                 <a:cs typeface="NanumGothic"/>
               </a:rPr>
-              <a:t>기존 20.8배 / 수정 기본 19.0배</a:t>
+              <a:t>$2.32 → $0.93 (60% 절감)</a:t>
             </a:r>
           </a:p>
         </p:txBody>
@@ -7766,7 +7669,7 @@
                 <a:ea typeface="NanumGothic"/>
                 <a:cs typeface="NanumGothic"/>
               </a:rPr>
-              <a:t>기존: A 6턴 / B 2턴, 출력 확대 2.9배, effort 0.35, 한국어 사고 승수 1.44 등 가정.</a:t>
+              <a:t>10턴마다 접으면 $1.23 (47% 절감)</a:t>
             </a:r>
           </a:p>
         </p:txBody>
@@ -7802,7 +7705,7 @@
                 <a:ea typeface="NanumGothic"/>
                 <a:cs typeface="NanumGothic"/>
               </a:rPr>
-              <a:t>기본: 사고 언어 승수는 1.0, 최소 길이 미달 캐싱은 미적용.</a:t>
+              <a:t>너무 자주 접으면 요약 호출이 이득을 먹는다</a:t>
             </a:r>
           </a:p>
         </p:txBody>
@@ -7838,50 +7741,14 @@
                 <a:ea typeface="NanumGothic"/>
                 <a:cs typeface="NanumGothic"/>
               </a:rPr>
-              <a:t>두 조건 모두 일부 실파일 인코딩이 포함된 비용 모형. 실제 품질 동등 A/B가 아니다.</a:t>
-            </a:r>
-          </a:p>
-        </p:txBody>
-      </p:sp>
-      <p:sp>
-        <p:nvSpPr>
-          <p:cNvPr id="10" name="audit:body-3"/>
-          <p:cNvSpPr txBox="1"/>
-          <p:nvPr/>
-        </p:nvSpPr>
-        <p:spPr>
-          <a:xfrm>
-            <a:off x="777240" y="4782312"/>
-            <a:ext cx="10652760" cy="612648"/>
-          </a:xfrm>
-          <a:prstGeom prst="rect">
-            <a:avLst/>
-          </a:prstGeom>
-          <a:noFill/>
-        </p:spPr>
-        <p:txBody>
-          <a:bodyPr wrap="square" lIns="0" rIns="0" tIns="0" bIns="0">
-            <a:spAutoFit/>
-          </a:bodyPr>
-          <a:lstStyle/>
-          <a:p>
-            <a:r>
-              <a:rPr sz="1750" b="0">
-                <a:solidFill>
-                  <a:srgbClr val="ECF1F6"/>
-                </a:solidFill>
-                <a:latin typeface="NanumGothic"/>
-                <a:ea typeface="NanumGothic"/>
-                <a:cs typeface="NanumGothic"/>
-              </a:rPr>
-              <a:t>python demo/compare_personas.py --scenario legacy 로 기존 발표 수치 재현.</a:t>
-            </a:r>
-          </a:p>
-        </p:txBody>
-      </p:sp>
-      <p:sp>
-        <p:nvSpPr>
-          <p:cNvPr id="11" name="audit:source"/>
+              <a:t>최적 주기는 세션 길이와 요약 비용으로 정해진다</a:t>
+            </a:r>
+          </a:p>
+        </p:txBody>
+      </p:sp>
+      <p:sp>
+        <p:nvSpPr>
+          <p:cNvPr id="10" name="audit:source"/>
           <p:cNvSpPr txBox="1"/>
           <p:nvPr/>
         </p:nvSpPr>
@@ -7910,14 +7777,14 @@
                 <a:ea typeface="NanumGothic"/>
                 <a:cs typeface="NanumGothic"/>
               </a:rPr>
-              <a:t>demo/results.json · demo/results_current.json</a:t>
-            </a:r>
-          </a:p>
-        </p:txBody>
-      </p:sp>
-      <p:sp>
-        <p:nvSpPr>
-          <p:cNvPr id="12" name="audit:footer"/>
+              <a:t>experiments/exp04_agent_loop_sdd.py</a:t>
+            </a:r>
+          </a:p>
+        </p:txBody>
+      </p:sp>
+      <p:sp>
+        <p:nvSpPr>
+          <p:cNvPr id="11" name="audit:footer"/>
           <p:cNvSpPr txBox="1"/>
           <p:nvPr/>
         </p:nvSpPr>
@@ -8087,7 +7954,7 @@
                 <a:ea typeface="NanumGothic"/>
                 <a:cs typeface="NanumGothic"/>
               </a:rPr>
-              <a:t>SDD 비용 시나리오</a:t>
+              <a:t>경로 분리</a:t>
             </a:r>
           </a:p>
         </p:txBody>
@@ -8123,7 +7990,7 @@
                 <a:ea typeface="NanumGothic"/>
                 <a:cs typeface="NanumGothic"/>
               </a:rPr>
-              <a:t>SDD 절감은 ‘턴 감소’ 가정에 달린다</a:t>
+              <a:t>웹 세션으로 넘기는 경로</a:t>
             </a:r>
           </a:p>
         </p:txBody>
@@ -8159,7 +8026,7 @@
                 <a:ea typeface="NanumGothic"/>
                 <a:cs typeface="NanumGothic"/>
               </a:rPr>
-              <a:t>기존 71.0% / cold-cache 68.7%</a:t>
+              <a:t>구독제 경로는 증분 API 비용 0으로 모델링</a:t>
             </a:r>
           </a:p>
         </p:txBody>
@@ -8195,7 +8062,7 @@
                 <a:ea typeface="NanumGothic"/>
                 <a:cs typeface="NanumGothic"/>
               </a:rPr>
-              <a:t>40턴 → 12턴은 모델의 입력 가정. 스펙이 실제 이만큼 줄였다는 관측은 없다.</a:t>
+              <a:t>조사·정리는 웹 세션에서, 코드는 API에서</a:t>
             </a:r>
           </a:p>
         </p:txBody>
@@ -8231,7 +8098,7 @@
                 <a:ea typeface="NanumGothic"/>
                 <a:cs typeface="NanumGothic"/>
               </a:rPr>
-              <a:t>스펙 작성: 입력 3,000 + 출력 4,000 비용을 이미 포함한다.</a:t>
+              <a:t>옮겨 붙일 때 수용 기준 형식을 그대로 쓴다</a:t>
             </a:r>
           </a:p>
         </p:txBody>
@@ -8267,50 +8134,14 @@
                 <a:ea typeface="NanumGothic"/>
                 <a:cs typeface="NanumGothic"/>
               </a:rPr>
-              <a:t>기존 약 71%는 캐시 예열 비용 제외. 기본은 사이클별 첫 쓰기까지 포함한다.</a:t>
-            </a:r>
-          </a:p>
-        </p:txBody>
-      </p:sp>
-      <p:sp>
-        <p:nvSpPr>
-          <p:cNvPr id="10" name="audit:body-3"/>
-          <p:cNvSpPr txBox="1"/>
-          <p:nvPr/>
-        </p:nvSpPr>
-        <p:spPr>
-          <a:xfrm>
-            <a:off x="777240" y="4782312"/>
-            <a:ext cx="10652760" cy="612648"/>
-          </a:xfrm>
-          <a:prstGeom prst="rect">
-            <a:avLst/>
-          </a:prstGeom>
-          <a:noFill/>
-        </p:spPr>
-        <p:txBody>
-          <a:bodyPr wrap="square" lIns="0" rIns="0" tIns="0" bIns="0">
-            <a:spAutoFit/>
-          </a:bodyPr>
-          <a:lstStyle/>
-          <a:p>
-            <a:r>
-              <a:rPr sz="1750" b="0">
-                <a:solidFill>
-                  <a:srgbClr val="ECF1F6"/>
-                </a:solidFill>
-                <a:latin typeface="NanumGothic"/>
-                <a:ea typeface="NanumGothic"/>
-                <a:cs typeface="NanumGothic"/>
-              </a:rPr>
-              <a:t>주장 유지: 짧고 결정적인 스펙을 우선 시도하되 재작업·품질·총비용으로 검증한다.</a:t>
-            </a:r>
-          </a:p>
-        </p:txBody>
-      </p:sp>
-      <p:sp>
-        <p:nvSpPr>
-          <p:cNvPr id="11" name="audit:source"/>
+              <a:t>이 경로의 증분 종량 비용은 0으로 모델링한다</a:t>
+            </a:r>
+          </a:p>
+        </p:txBody>
+      </p:sp>
+      <p:sp>
+        <p:nvSpPr>
+          <p:cNvPr id="10" name="audit:source"/>
           <p:cNvSpPr txBox="1"/>
           <p:nvPr/>
         </p:nvSpPr>
@@ -8339,14 +8170,14 @@
                 <a:ea typeface="NanumGothic"/>
                 <a:cs typeface="NanumGothic"/>
               </a:rPr>
-              <a:t>experiments/exp04_agent_loop_sdd.py (--warm-cache = legacy)</a:t>
-            </a:r>
-          </a:p>
-        </p:txBody>
-      </p:sp>
-      <p:sp>
-        <p:nvSpPr>
-          <p:cNvPr id="12" name="audit:footer"/>
+              <a:t>lab/pricing.py TIER_SCENARIOS</a:t>
+            </a:r>
+          </a:p>
+        </p:txBody>
+      </p:sp>
+      <p:sp>
+        <p:nvSpPr>
+          <p:cNvPr id="11" name="audit:footer"/>
           <p:cNvSpPr txBox="1"/>
           <p:nvPr/>
         </p:nvSpPr>
@@ -8516,7 +8347,7 @@
                 <a:ea typeface="NanumGothic"/>
                 <a:cs typeface="NanumGothic"/>
               </a:rPr>
-              <a:t>재현 자료</a:t>
+              <a:t>운영</a:t>
             </a:r>
           </a:p>
         </p:txBody>
@@ -8552,7 +8383,7 @@
                 <a:ea typeface="NanumGothic"/>
                 <a:cs typeface="NanumGothic"/>
               </a:rPr>
-              <a:t>숫자를 직접 확인할 수 있게 남긴다</a:t>
+              <a:t>적용 순서와 측정 루프</a:t>
             </a:r>
           </a:p>
         </p:txBody>
@@ -8588,7 +8419,7 @@
                 <a:ea typeface="NanumGothic"/>
                 <a:cs typeface="NanumGothic"/>
               </a:rPr>
-              <a:t>원자료 · 산식 · 기준일 · 재현 명령</a:t>
+              <a:t>켜고 → 재고 → 고친다</a:t>
             </a:r>
           </a:p>
         </p:txBody>
@@ -8624,7 +8455,7 @@
                 <a:ea typeface="NanumGothic"/>
                 <a:cs typeface="NanumGothic"/>
               </a:rPr>
-              <a:t>results/audit_metrics.json: 저장 로그 통계 + 로컬 측정 + 시나리오를 분리한 지표.</a:t>
+              <a:t>되돌리기 쉬운 것부터 켠다 (캐시 · effort · 배치)</a:t>
             </a:r>
           </a:p>
         </p:txBody>
@@ -8660,7 +8491,7 @@
                 <a:ea typeface="NanumGothic"/>
                 <a:cs typeface="NanumGothic"/>
               </a:rPr>
-              <a:t>docs/CORRECTIONS.md: 무엇을 유지하고 무엇을 바꿨는지 상세 설명.</a:t>
+              <a:t>적중률·reasoning 비율·턴 수를 주간으로 본다</a:t>
             </a:r>
           </a:p>
         </p:txBody>
@@ -8696,50 +8527,14 @@
                 <a:ea typeface="NanumGothic"/>
                 <a:cs typeface="NanumGothic"/>
               </a:rPr>
-              <a:t>SOURCES.md: 공식 단가, 논문 표, 외부 케이스의 비교 조건.</a:t>
-            </a:r>
-          </a:p>
-        </p:txBody>
-      </p:sp>
-      <p:sp>
-        <p:nvSpPr>
-          <p:cNvPr id="10" name="audit:body-3"/>
-          <p:cNvSpPr txBox="1"/>
-          <p:nvPr/>
-        </p:nvSpPr>
-        <p:spPr>
-          <a:xfrm>
-            <a:off x="777240" y="4782312"/>
-            <a:ext cx="10652760" cy="612648"/>
-          </a:xfrm>
-          <a:prstGeom prst="rect">
-            <a:avLst/>
-          </a:prstGeom>
-          <a:noFill/>
-        </p:spPr>
-        <p:txBody>
-          <a:bodyPr wrap="square" lIns="0" rIns="0" tIns="0" bIns="0">
-            <a:spAutoFit/>
-          </a:bodyPr>
-          <a:lstStyle/>
-          <a:p>
-            <a:r>
-              <a:rPr sz="1750" b="0">
-                <a:solidFill>
-                  <a:srgbClr val="ECF1F6"/>
-                </a:solidFill>
-                <a:latin typeface="NanumGothic"/>
-                <a:ea typeface="NanumGothic"/>
-                <a:cs typeface="NanumGothic"/>
-              </a:rPr>
-              <a:t>원본 110행은 보존. 없는 원자료를 재측정 없이 만들어 넣지 않는다.</a:t>
-            </a:r>
-          </a:p>
-        </p:txBody>
-      </p:sp>
-      <p:sp>
-        <p:nvSpPr>
-          <p:cNvPr id="11" name="audit:source"/>
+              <a:t>절감률 목표가 아니라 품질 게이트를 먼저 정한다</a:t>
+            </a:r>
+          </a:p>
+        </p:txBody>
+      </p:sp>
+      <p:sp>
+        <p:nvSpPr>
+          <p:cNvPr id="10" name="audit:source"/>
           <p:cNvSpPr txBox="1"/>
           <p:nvPr/>
         </p:nvSpPr>
@@ -8768,14 +8563,14 @@
                 <a:ea typeface="NanumGothic"/>
                 <a:cs typeface="NanumGothic"/>
               </a:rPr>
-              <a:t>python tools/reproduce_audit.py · python tools/verify_deck.py</a:t>
-            </a:r>
-          </a:p>
-        </p:txBody>
-      </p:sp>
-      <p:sp>
-        <p:nvSpPr>
-          <p:cNvPr id="12" name="audit:footer"/>
+              <a:t>agent_setup/antigravity/AGENTS.md · docs/CORRECTIONS.md</a:t>
+            </a:r>
+          </a:p>
+        </p:txBody>
+      </p:sp>
+      <p:sp>
+        <p:nvSpPr>
+          <p:cNvPr id="11" name="audit:footer"/>
           <p:cNvSpPr txBox="1"/>
           <p:nvPr/>
         </p:nvSpPr>
@@ -8945,7 +8740,7 @@
                 <a:ea typeface="NanumGothic"/>
                 <a:cs typeface="NanumGothic"/>
               </a:rPr>
-              <a:t>다음 실행</a:t>
+              <a:t>마무리</a:t>
             </a:r>
           </a:p>
         </p:txBody>
@@ -8981,7 +8776,7 @@
                 <a:ea typeface="NanumGothic"/>
                 <a:cs typeface="NanumGothic"/>
               </a:rPr>
-              <a:t>작게 바꾸고, 자기 usage와 품질로 확인한다</a:t>
+              <a:t>마무리 · 오늘 붙일 것 하나</a:t>
             </a:r>
           </a:p>
         </p:txBody>
@@ -9017,7 +8812,7 @@
                 <a:ea typeface="NanumGothic"/>
                 <a:cs typeface="NanumGothic"/>
               </a:rPr>
-              <a:t>영어 · 간결함 · 스펙 · 컨텍스트 관리</a:t>
+              <a:t>라우터 한 줄, 캐시 한 블록</a:t>
             </a:r>
           </a:p>
         </p:txBody>
@@ -9053,7 +8848,7 @@
                 <a:ea typeface="NanumGothic"/>
                 <a:cs typeface="NanumGothic"/>
               </a:rPr>
-              <a:t>주장은 유지한다: 불필요한 생성·사고·재전송은 줄일 가치가 있다.</a:t>
+              <a:t>규약 파일을 프리픽스로 고정한다</a:t>
             </a:r>
           </a:p>
         </p:txBody>
@@ -9089,7 +8884,7 @@
                 <a:ea typeface="NanumGothic"/>
                 <a:cs typeface="NanumGothic"/>
               </a:rPr>
-              <a:t>배수는 모델·단가·과제·시나리오에 붙여 말한다. 절감만으로 품질을 대신하지 않는다.</a:t>
+              <a:t>기본 티어를 한 단계 낮추고 실패 시 올린다</a:t>
             </a:r>
           </a:p>
         </p:txBody>
@@ -9125,7 +8920,7 @@
                 <a:ea typeface="NanumGothic"/>
                 <a:cs typeface="NanumGothic"/>
               </a:rPr>
-              <a:t>정확도·재작업·총비용을 함께 측정해 실제 배포 정책을 선택한다.</a:t>
+              <a:t>다음 주에 같은 작업의 비용을 다시 잰다</a:t>
             </a:r>
           </a:p>
         </p:txBody>
@@ -9338,7 +9133,7 @@
                 <a:ea typeface="NanumGothic"/>
                 <a:cs typeface="NanumGothic"/>
               </a:rPr>
-              <a:t>검증 범위</a:t>
+              <a:t>가격표 실측</a:t>
             </a:r>
           </a:p>
         </p:txBody>
@@ -9374,7 +9169,7 @@
                 <a:ea typeface="NanumGothic"/>
                 <a:cs typeface="NanumGothic"/>
               </a:rPr>
-              <a:t>숫자마다 증거의 종류를 붙인다</a:t>
+              <a:t>청구서의 구조</a:t>
             </a:r>
           </a:p>
         </p:txBody>
@@ -9410,7 +9205,7 @@
                 <a:ea typeface="NanumGothic"/>
                 <a:cs typeface="NanumGothic"/>
               </a:rPr>
-              <a:t>측정 ≠ 가정 ≠ 인과 효과</a:t>
+              <a:t>출력은 입력의 2~8배</a:t>
             </a:r>
           </a:p>
         </p:txBody>
@@ -9446,7 +9241,7 @@
                 <a:ea typeface="NanumGothic"/>
                 <a:cs typeface="NanumGothic"/>
               </a:rPr>
-              <a:t>API 저장 로그: 80건 언어 비교 + 30건 사고 예산 스윕</a:t>
+              <a:t>캐시된 입력과 비교하면 최대 50배까지 벌어진다</a:t>
             </a:r>
           </a:p>
         </p:txBody>
@@ -9482,7 +9277,7 @@
                 <a:ea typeface="NanumGothic"/>
                 <a:cs typeface="NanumGothic"/>
               </a:rPr>
-              <a:t>새 로컬 실측: 대응 번역문 1,012쌍의 토크나이저 인코딩</a:t>
+              <a:t>사고 토큰은 출력 단가로 청구된다</a:t>
             </a:r>
           </a:p>
         </p:txBody>
@@ -9518,50 +9313,14 @@
                 <a:ea typeface="NanumGothic"/>
                 <a:cs typeface="NanumGothic"/>
               </a:rPr>
-              <a:t>브라우저·mock: 코드 동작 검증 / 비용 시나리오: 정책 효과 실측 아님</a:t>
-            </a:r>
-          </a:p>
-        </p:txBody>
-      </p:sp>
-      <p:sp>
-        <p:nvSpPr>
-          <p:cNvPr id="10" name="audit:body-3"/>
-          <p:cNvSpPr txBox="1"/>
-          <p:nvPr/>
-        </p:nvSpPr>
-        <p:spPr>
-          <a:xfrm>
-            <a:off x="777240" y="4782312"/>
-            <a:ext cx="10652760" cy="612648"/>
-          </a:xfrm>
-          <a:prstGeom prst="rect">
-            <a:avLst/>
-          </a:prstGeom>
-          <a:noFill/>
-        </p:spPr>
-        <p:txBody>
-          <a:bodyPr wrap="square" lIns="0" rIns="0" tIns="0" bIns="0">
-            <a:spAutoFit/>
-          </a:bodyPr>
-          <a:lstStyle/>
-          <a:p>
-            <a:r>
-              <a:rPr sz="1750" b="0">
-                <a:solidFill>
-                  <a:srgbClr val="ECF1F6"/>
-                </a:solidFill>
-                <a:latin typeface="NanumGothic"/>
-                <a:ea typeface="NanumGothic"/>
-                <a:cs typeface="NanumGothic"/>
-              </a:rPr>
-              <a:t>이번 정정의 새 유료 API 호출은 0회다.</a:t>
-            </a:r>
-          </a:p>
-        </p:txBody>
-      </p:sp>
-      <p:sp>
-        <p:nvSpPr>
-          <p:cNvPr id="11" name="audit:source"/>
+              <a:t>그래서 '덜 쓰기'보다 '다시 안 보내기'가 크다</a:t>
+            </a:r>
+          </a:p>
+        </p:txBody>
+      </p:sp>
+      <p:sp>
+        <p:nvSpPr>
+          <p:cNvPr id="10" name="audit:source"/>
           <p:cNvSpPr txBox="1"/>
           <p:nvPr/>
         </p:nvSpPr>
@@ -9590,14 +9349,14 @@
                 <a:ea typeface="NanumGothic"/>
                 <a:cs typeface="NanumGothic"/>
               </a:rPr>
-              <a:t>results/audit_metrics.json · tests/</a:t>
-            </a:r>
-          </a:p>
-        </p:txBody>
-      </p:sp>
-      <p:sp>
-        <p:nvSpPr>
-          <p:cNvPr id="12" name="audit:footer"/>
+              <a:t>experiments/exp02_output_to_input.py</a:t>
+            </a:r>
+          </a:p>
+        </p:txBody>
+      </p:sp>
+      <p:sp>
+        <p:nvSpPr>
+          <p:cNvPr id="11" name="audit:footer"/>
           <p:cNvSpPr txBox="1"/>
           <p:nvPr/>
         </p:nvSpPr>
@@ -9767,7 +9526,7 @@
                 <a:ea typeface="NanumGothic"/>
                 <a:cs typeface="NanumGothic"/>
               </a:rPr>
-              <a:t>실무 권장 / 조건부 효과</a:t>
+              <a:t>전체 시스템 비용 시나리오</a:t>
             </a:r>
           </a:p>
         </p:txBody>
@@ -9803,7 +9562,7 @@
                 <a:ea typeface="NanumGothic"/>
                 <a:cs typeface="NanumGothic"/>
               </a:rPr>
-              <a:t>네 가지 원칙은 그대로 쓴다</a:t>
+              <a:t>툴 출력과 서브에이전트는 전체 비용으로 본다</a:t>
             </a:r>
           </a:p>
         </p:txBody>
@@ -9839,7 +9598,7 @@
                 <a:ea typeface="NanumGothic"/>
                 <a:cs typeface="NanumGothic"/>
               </a:rPr>
-              <a:t>필요한 결과만, 적합한 설정으로</a:t>
+              <a:t>$5.6010 → $2.7360</a:t>
             </a:r>
           </a:p>
         </p:txBody>
@@ -9875,7 +9634,7 @@
                 <a:ea typeface="NanumGothic"/>
                 <a:cs typeface="NanumGothic"/>
               </a:rPr>
-              <a:t>① 영어는 토큰 효율과 추론 정확도에 유리할 수 있다. 사용자에게는 필요한 언어로 답한다.</a:t>
+              <a:t>툴 읽기 누적 전송 1,680,000 토큰 (20턴)</a:t>
             </a:r>
           </a:p>
         </p:txBody>
@@ -9911,7 +9670,7 @@
                 <a:ea typeface="NanumGothic"/>
                 <a:cs typeface="NanumGothic"/>
               </a:rPr>
-              <a:t>② KISS/DRY/YAGNI: 불필요한 코드·전체 재출력·재작업을 줄인다.</a:t>
+              <a:t>컴팩션 $3.4425 · 서브에이전트 $2.736</a:t>
             </a:r>
           </a:p>
         </p:txBody>
@@ -9947,50 +9706,14 @@
                 <a:ea typeface="NanumGothic"/>
                 <a:cs typeface="NanumGothic"/>
               </a:rPr>
-              <a:t>③ 설명 길이와 사고 예산을 과제에 맞춘다. 정확도 게이트를 함께 둔다.</a:t>
-            </a:r>
-          </a:p>
-        </p:txBody>
-      </p:sp>
-      <p:sp>
-        <p:nvSpPr>
-          <p:cNvPr id="10" name="audit:body-3"/>
-          <p:cNvSpPr txBox="1"/>
-          <p:nvPr/>
-        </p:nvSpPr>
-        <p:spPr>
-          <a:xfrm>
-            <a:off x="777240" y="4782312"/>
-            <a:ext cx="10652760" cy="612648"/>
-          </a:xfrm>
-          <a:prstGeom prst="rect">
-            <a:avLst/>
-          </a:prstGeom>
-          <a:noFill/>
-        </p:spPr>
-        <p:txBody>
-          <a:bodyPr wrap="square" lIns="0" rIns="0" tIns="0" bIns="0">
-            <a:spAutoFit/>
-          </a:bodyPr>
-          <a:lstStyle/>
-          <a:p>
-            <a:r>
-              <a:rPr sz="1750" b="0">
-                <a:solidFill>
-                  <a:srgbClr val="ECF1F6"/>
-                </a:solidFill>
-                <a:latin typeface="NanumGothic"/>
-                <a:ea typeface="NanumGothic"/>
-                <a:cs typeface="NanumGothic"/>
-              </a:rPr>
-              <a:t>④ 스펙에 결정을 먼저 적는다. 스펙 작성 비용과 실제 재작업 변화를 함께 잰다.</a:t>
-            </a:r>
-          </a:p>
-        </p:txBody>
-      </p:sp>
-      <p:sp>
-        <p:nvSpPr>
-          <p:cNvPr id="11" name="audit:source"/>
+              <a:t>자식 호출·요약 비용까지 포함해 비교한다</a:t>
+            </a:r>
+          </a:p>
+        </p:txBody>
+      </p:sp>
+      <p:sp>
+        <p:nvSpPr>
+          <p:cNvPr id="10" name="audit:source"/>
           <p:cNvSpPr txBox="1"/>
           <p:nvPr/>
         </p:nvSpPr>
@@ -10019,14 +9742,14 @@
                 <a:ea typeface="NanumGothic"/>
                 <a:cs typeface="NanumGothic"/>
               </a:rPr>
-              <a:t>README.md · SOURCES.md</a:t>
-            </a:r>
-          </a:p>
-        </p:txBody>
-      </p:sp>
-      <p:sp>
-        <p:nvSpPr>
-          <p:cNvPr id="12" name="audit:footer"/>
+              <a:t>experiments/exp11_tool_output_bloat.py</a:t>
+            </a:r>
+          </a:p>
+        </p:txBody>
+      </p:sp>
+      <p:sp>
+        <p:nvSpPr>
+          <p:cNvPr id="11" name="audit:footer"/>
           <p:cNvSpPr txBox="1"/>
           <p:nvPr/>
         </p:nvSpPr>
@@ -10196,7 +9919,7 @@
                 <a:ea typeface="NanumGothic"/>
                 <a:cs typeface="NanumGothic"/>
               </a:rPr>
-              <a:t>참조 구현 + 반례 회귀 테스트</a:t>
+              <a:t>시나리오 (10,000콜)</a:t>
             </a:r>
           </a:p>
         </p:txBody>
@@ -10232,7 +9955,7 @@
                 <a:ea typeface="NanumGothic"/>
                 <a:cs typeface="NanumGothic"/>
               </a:rPr>
-              <a:t>라우팅은 단어보다 작업 목적을 본다</a:t>
+              <a:t>모델 라우팅 · 쉬운 요청에 비싼 모델을 쓰지 않는다</a:t>
             </a:r>
           </a:p>
         </p:txBody>
@@ -10268,7 +9991,7 @@
                 <a:ea typeface="NanumGothic"/>
                 <a:cs typeface="NanumGothic"/>
               </a:rPr>
-              <a:t>파일 업로드 ‘구현’ → IMPLEMENT</a:t>
+              <a:t>전부 강 $350 → 절반 $184</a:t>
             </a:r>
           </a:p>
         </p:txBody>
@@ -10304,7 +10027,7 @@
                 <a:ea typeface="NanumGothic"/>
                 <a:cs typeface="NanumGothic"/>
               </a:rPr>
-              <a:t>설계·구현·설명 목적을 파일·검색·변환 같은 부수 단어보다 먼저 본다.</a:t>
+              <a:t>절반만 라우팅해도 47% 절감</a:t>
             </a:r>
           </a:p>
         </p:txBody>
@@ -10340,7 +10063,7 @@
                 <a:ea typeface="NanumGothic"/>
                 <a:cs typeface="NanumGothic"/>
               </a:rPr>
-              <a:t>구성한 반례 테스트는 회귀 검증이지 실사용 오류율 추정이 아니다.</a:t>
+              <a:t>공격적 라우팅은 $35.17 (90% 절감)</a:t>
             </a:r>
           </a:p>
         </p:txBody>
@@ -10376,7 +10099,7 @@
                 <a:ea typeface="NanumGothic"/>
                 <a:cs typeface="NanumGothic"/>
               </a:rPr>
-              <a:t>기본 tier 단가는 모델의 공식 가격이 아니라 명시적 비용 시나리오다.</a:t>
+              <a:t>품질 측정 도구가 먼저다 — 임계값은 주기적으로 재보정</a:t>
             </a:r>
           </a:p>
         </p:txBody>
@@ -10412,7 +10135,7 @@
                 <a:ea typeface="NanumGothic"/>
                 <a:cs typeface="NanumGothic"/>
               </a:rPr>
-              <a:t>agent_setup/router.py · tests/test_regressions.py</a:t>
+              <a:t>experiments/exp06_other_levers.py</a:t>
             </a:r>
           </a:p>
         </p:txBody>
@@ -10589,7 +10312,7 @@
                 <a:ea typeface="NanumGothic"/>
                 <a:cs typeface="NanumGothic"/>
               </a:rPr>
-              <a:t>참조 정책</a:t>
+              <a:t>라우팅 배선</a:t>
             </a:r>
           </a:p>
         </p:txBody>
@@ -10625,7 +10348,7 @@
                 <a:ea typeface="NanumGothic"/>
                 <a:cs typeface="NanumGothic"/>
               </a:rPr>
-              <a:t>A와 B는 다른 실패를 처리한다</a:t>
+              <a:t>무엇을 자동화하는가</a:t>
             </a:r>
           </a:p>
         </p:txBody>
@@ -10661,7 +10384,7 @@
                 <a:ea typeface="NanumGothic"/>
                 <a:cs typeface="NanumGothic"/>
               </a:rPr>
-              <a:t>내부 AC 실패 / 사용자 반려</a:t>
+              <a:t>요청마다 사람이 모델을 고르지 않는다</a:t>
             </a:r>
           </a:p>
         </p:txBody>
@@ -10697,7 +10420,7 @@
                 <a:ea typeface="NanumGothic"/>
                 <a:cs typeface="NanumGothic"/>
               </a:rPr>
-              <a:t>A: 테스트가 검출한 실패를 턴 안에서 처리.</a:t>
+              <a:t>설계 · 구현 · 설명 · 정형 작업을 분류해 티어를 고른다</a:t>
             </a:r>
           </a:p>
         </p:txBody>
@@ -10733,7 +10456,7 @@
                 <a:ea typeface="NanumGothic"/>
                 <a:cs typeface="NanumGothic"/>
               </a:rPr>
-              <a:t>B: 사용자 반려를 의도 이력과 함께 판정.</a:t>
+              <a:t>부수 단어(파일 업로드·검색)보다 작업 목적을 먼저 본다</a:t>
             </a:r>
           </a:p>
         </p:txBody>
@@ -10769,7 +10492,7 @@
                 <a:ea typeface="NanumGothic"/>
                 <a:cs typeface="NanumGothic"/>
               </a:rPr>
-              <a:t>검출할 AC가 부실하면 A가 놓친다. 문자열 검사만으로 기능을 보증하지 않는다.</a:t>
+              <a:t>비용 예산과 출력 상한을 함께 건다</a:t>
             </a:r>
           </a:p>
         </p:txBody>
@@ -10805,7 +10528,7 @@
                 <a:ea typeface="NanumGothic"/>
                 <a:cs typeface="NanumGothic"/>
               </a:rPr>
-              <a:t>agent_setup/router.py · ladder_b.py</a:t>
+              <a:t>agent_setup/router.py</a:t>
             </a:r>
           </a:p>
         </p:txBody>
@@ -10982,7 +10705,7 @@
                 <a:ea typeface="NanumGothic"/>
                 <a:cs typeface="NanumGothic"/>
               </a:rPr>
-              <a:t>상태 관리 회귀</a:t>
+              <a:t>정책 구분</a:t>
             </a:r>
           </a:p>
         </p:txBody>
@@ -11018,7 +10741,7 @@
                 <a:ea typeface="NanumGothic"/>
                 <a:cs typeface="NanumGothic"/>
               </a:rPr>
-              <a:t>새 작업은 별도의 상태를 가진다</a:t>
+              <a:t>두 정책을 섞지 않는다</a:t>
             </a:r>
           </a:p>
         </p:txBody>
@@ -11054,7 +10777,7 @@
                 <a:ea typeface="NanumGothic"/>
                 <a:cs typeface="NanumGothic"/>
               </a:rPr>
-              <a:t>task_id별 IntentTracker</a:t>
+              <a:t>라우팅 · 리워크 · 워크플로 컨트롤</a:t>
             </a:r>
           </a:p>
         </p:txBody>
@@ -11090,7 +10813,7 @@
                 <a:ea typeface="NanumGothic"/>
                 <a:cs typeface="NanumGothic"/>
               </a:rPr>
-              <a:t>이전 작업의 anchor·streak·rung을 새 작업에 전달하지 않는다.</a:t>
+              <a:t>라우팅: 요청 한 건을 어느 티어로 보낼지 고른다</a:t>
             </a:r>
           </a:p>
         </p:txBody>
@@ -11126,7 +10849,7 @@
                 <a:ea typeface="NanumGothic"/>
                 <a:cs typeface="NanumGothic"/>
               </a:rPr>
-              <a:t>다른 작업을 번갈아 실행해도 각자의 의도와 시도 횟수를 유지한다.</a:t>
+              <a:t>리워크: 같은 일을 다시 시키는 구간을 관리한다</a:t>
             </a:r>
           </a:p>
         </p:txBody>
@@ -11162,7 +10885,7 @@
                 <a:ea typeface="NanumGothic"/>
                 <a:cs typeface="NanumGothic"/>
               </a:rPr>
-              <a:t>초기화 전 inner 호출은 명시적 오류, respec은 실행 중단으로 처리.</a:t>
+              <a:t>워크플로 컨트롤: 앞의 둘을 포함하는 상위 개념</a:t>
             </a:r>
           </a:p>
         </p:txBody>
@@ -11198,7 +10921,7 @@
                 <a:ea typeface="NanumGothic"/>
                 <a:cs typeface="NanumGothic"/>
               </a:rPr>
-              <a:t>agent_setup/orchestrator.py</a:t>
+              <a:t>agent_setup/antigravity/AGENTS.md</a:t>
             </a:r>
           </a:p>
         </p:txBody>
@@ -11375,7 +11098,7 @@
                 <a:ea typeface="NanumGothic"/>
                 <a:cs typeface="NanumGothic"/>
               </a:rPr>
-              <a:t>비용 산식 교정</a:t>
+              <a:t>정책 A</a:t>
             </a:r>
           </a:p>
         </p:txBody>
@@ -11411,7 +11134,7 @@
                 <a:ea typeface="NanumGothic"/>
                 <a:cs typeface="NanumGothic"/>
               </a:rPr>
-              <a:t>입력 증가분은 정의부터 통일한다</a:t>
+              <a:t>사다리 A · 내부 실패가 올린다</a:t>
             </a:r>
           </a:p>
         </p:txBody>
@@ -11447,7 +11170,7 @@
                 <a:ea typeface="NanumGothic"/>
                 <a:cs typeface="NanumGothic"/>
               </a:rPr>
-              <a:t>4,700을 더한다. 7,200이 아니다.</a:t>
+              <a:t>테스트가 실패하면 턴 안에서 올린다</a:t>
             </a:r>
           </a:p>
         </p:txBody>
@@ -11483,7 +11206,7 @@
                 <a:ea typeface="NanumGothic"/>
                 <a:cs typeface="NanumGothic"/>
               </a:rPr>
-              <a:t>turn_growth_tok은 직전 출력·사용자 발화 등을 포함한 총 입력 증가분.</a:t>
+              <a:t>수용 기준(AC)이 없으면 올릴 근거도 없다</a:t>
             </a:r>
           </a:p>
         </p:txBody>
@@ -11519,7 +11242,7 @@
                 <a:ea typeface="NanumGothic"/>
                 <a:cs typeface="NanumGothic"/>
               </a:rPr>
-              <a:t>출력 2,500을 다시 더하던 이중 계상을 제거.</a:t>
+              <a:t>같은 실패가 반복될수록 누적 비용이 커진다</a:t>
             </a:r>
           </a:p>
         </p:txBody>
@@ -11555,7 +11278,7 @@
                 <a:ea typeface="NanumGothic"/>
                 <a:cs typeface="NanumGothic"/>
               </a:rPr>
-              <a:t>4,700은 페르소나 시나리오를 맞춘 값이다. 독립 실측 캘리브레이션은 아니다.</a:t>
+              <a:t>진단과 적용을 같은 함수로 계산한다</a:t>
             </a:r>
           </a:p>
         </p:txBody>
@@ -11591,7 +11314,7 @@
                 <a:ea typeface="NanumGothic"/>
                 <a:cs typeface="NanumGothic"/>
               </a:rPr>
-              <a:t>analysis/calibrate_growth.py · agent_setup/config.py</a:t>
+              <a:t>agent_setup/router.py</a:t>
             </a:r>
           </a:p>
         </p:txBody>
@@ -11768,7 +11491,7 @@
                 <a:ea typeface="NanumGothic"/>
                 <a:cs typeface="NanumGothic"/>
               </a:rPr>
-              <a:t>공통 decision_cost 회귀</a:t>
+              <a:t>정책 B (로그 재생)</a:t>
             </a:r>
           </a:p>
         </p:txBody>
@@ -11804,7 +11527,7 @@
                 <a:ea typeface="NanumGothic"/>
                 <a:cs typeface="NanumGothic"/>
               </a:rPr>
-              <a:t>상위 모델 진단 뒤 적용도 비용이다</a:t>
+              <a:t>사다리 B · 사용자 반려가 올린다</a:t>
             </a:r>
           </a:p>
         </p:txBody>
@@ -11840,7 +11563,7 @@
                 <a:ea typeface="NanumGothic"/>
                 <a:cs typeface="NanumGothic"/>
               </a:rPr>
-              <a:t>$0.05875 / 같은 단계·같은 가정</a:t>
+              <a:t>저장 발화 6턴에서 3회 에스컬레이션</a:t>
             </a:r>
           </a:p>
         </p:txBody>
@@ -11876,7 +11599,7 @@
                 <a:ea typeface="NanumGothic"/>
                 <a:cs typeface="NanumGothic"/>
               </a:rPr>
-              <a:t>입력 1,800, file 범위 1.6, reset 600 → 입력 예산 3,480.</a:t>
+              <a:t>같은 의도의 반복을 감지해 올린다</a:t>
             </a:r>
           </a:p>
         </p:txBody>
@@ -11912,7 +11635,7 @@
                 <a:ea typeface="NanumGothic"/>
                 <a:cs typeface="NanumGothic"/>
               </a:rPr>
-              <a:t>LARGE 진단 400 출력 + MID 적용 2,500 출력을 함께 계상.</a:t>
+              <a:t>스펙 변경·신규 작업은 '반려'가 아니다</a:t>
             </a:r>
           </a:p>
         </p:txBody>
@@ -11948,7 +11671,7 @@
                 <a:ea typeface="NanumGothic"/>
                 <a:cs typeface="NanumGothic"/>
               </a:rPr>
-              <a:t>tier 단가와 고정 입력 예산의 시나리오다. 실제 전달문 비용은 usage로 측정한다.</a:t>
+              <a:t>분류 신호가 없으면 올리지 않고 되묻는다</a:t>
             </a:r>
           </a:p>
         </p:txBody>
@@ -11984,7 +11707,7 @@
                 <a:ea typeface="NanumGothic"/>
                 <a:cs typeface="NanumGothic"/>
               </a:rPr>
-              <a:t>agent_setup/router.py · orchestrator.py</a:t>
+              <a:t>analysis/replay_logs.py</a:t>
             </a:r>
           </a:p>
         </p:txBody>
@@ -12161,7 +11884,7 @@
                 <a:ea typeface="NanumGothic"/>
                 <a:cs typeface="NanumGothic"/>
               </a:rPr>
-              <a:t>비용 범위</a:t>
+              <a:t>정책 시나리오 재생</a:t>
             </a:r>
           </a:p>
         </p:txBody>
@@ -12197,7 +11920,7 @@
                 <a:ea typeface="NanumGothic"/>
                 <a:cs typeface="NanumGothic"/>
               </a:rPr>
-              <a:t>정액제 웹 경로도 공짜는 아니다</a:t>
+              <a:t>작은 모델이 지휘한다</a:t>
             </a:r>
           </a:p>
         </p:txBody>
@@ -12233,7 +11956,7 @@
                 <a:ea typeface="NanumGothic"/>
                 <a:cs typeface="NanumGothic"/>
               </a:rPr>
-              <a:t>증분 API 비용과 총비용을 구분</a:t>
+              <a:t>사다리 2.81배 (1턴 27% · 2턴 43%)</a:t>
             </a:r>
           </a:p>
         </p:txBody>
@@ -12269,7 +11992,7 @@
                 <a:ea typeface="NanumGothic"/>
                 <a:cs typeface="NanumGothic"/>
               </a:rPr>
-              <a:t>EXTERNAL=0은 추가 종량 API 금액만 세는 모델링 선택.</a:t>
+              <a:t>실패가 반복되면 격차가 커진다 — 6회 2.80배</a:t>
             </a:r>
           </a:p>
         </p:txBody>
@@ -12305,7 +12028,7 @@
                 <a:ea typeface="NanumGothic"/>
                 <a:cs typeface="NanumGothic"/>
               </a:rPr>
-              <a:t>구독료·사람의 스펙 작성 시간·복사/검토 비용은 별도다.</a:t>
+              <a:t>짧은 리워크에서도 이득 — 1턴 27% · 2턴 43%</a:t>
             </a:r>
           </a:p>
         </p:txBody>
@@ -12341,7 +12064,7 @@
                 <a:ea typeface="NanumGothic"/>
                 <a:cs typeface="NanumGothic"/>
               </a:rPr>
-              <a:t>라우터가 웹 세션의 품질·약관 적합성을 자동 보증하지 않는다.</a:t>
+              <a:t>respec이면 실행 전에 멈추므로 실행 비용만 계산</a:t>
             </a:r>
           </a:p>
         </p:txBody>
@@ -12377,7 +12100,7 @@
                 <a:ea typeface="NanumGothic"/>
                 <a:cs typeface="NanumGothic"/>
               </a:rPr>
-              <a:t>lab/pricing.py TIER_SCENARIOS</a:t>
+              <a:t>analysis/lean_vs_full.py</a:t>
             </a:r>
           </a:p>
         </p:txBody>

--- a/presentation/token_cost_agent.pptx
+++ b/presentation/token_cost_agent.pptx
@@ -23,6 +23,10 @@
     <p:sldId id="271" r:id="rId23"/>
     <p:sldId id="272" r:id="rId24"/>
     <p:sldId id="273" r:id="rId25"/>
+    <p:sldId id="274" r:id="rId26"/>
+    <p:sldId id="275" r:id="rId27"/>
+    <p:sldId id="276" r:id="rId28"/>
+    <p:sldId id="277" r:id="rId29"/>
   </p:sldIdLst>
   <p:sldSz cx="12191695" cy="6858000" type="screen4x3"/>
   <p:notesSz cx="6858000" cy="9144000"/>
@@ -609,27 +613,27 @@
           <a:lstStyle/>
           <a:p>
             <a:r>
-              <a:t>이 부분이 없으면 '새 작업인데 이전 작업의 리워크로 판정'되는 오작동이 생긴다.</a:t>
-            </a:r>
-          </a:p>
-          <a:p>
-            <a:r>
-              <a:t>회귀 테스트로 새 작업·동일 문구·교차 작업을 검증한다.</a:t>
-            </a:r>
-          </a:p>
-          <a:p>
-            <a:r>
-              <a:t>로그에 task_id와 판정 근거를 남겨 사후 추적이 가능하게 했다.</a:t>
-            </a:r>
-          </a:p>
-          <a:p>
-            <a:r>
-              <a:t>근거: agent_setup/orchestrator.py</a:t>
-            </a:r>
-          </a:p>
-          <a:p>
-            <a:r>
-              <a:t>증거 범위: 상태 관리</a:t>
+              <a:t>각 레버의 절감률을 순서대로 곱한 값이다. 실제 도입에서는 서로 겹치는 부분이 생긴다.</a:t>
+            </a:r>
+          </a:p>
+          <a:p>
+            <a:r>
+              <a:t>검증된 상한도 아니다. 자기 데이터로 A/B를 돌려 확정해야 한다.</a:t>
+            </a:r>
+          </a:p>
+          <a:p>
+            <a:r>
+              <a:t>발표에서는 '이론적 상한'이라는 표현보다 '순차 가정의 산술'이라고 말한다.</a:t>
+            </a:r>
+          </a:p>
+          <a:p>
+            <a:r>
+              <a:t>근거: experiments/exp06_other_levers.py</a:t>
+            </a:r>
+          </a:p>
+          <a:p>
+            <a:r>
+              <a:t>증거 범위: 순차 시나리오</a:t>
             </a:r>
           </a:p>
         </p:txBody>
@@ -699,27 +703,27 @@
           <a:lstStyle/>
           <a:p>
             <a:r>
-              <a:t>두 경로(진단 후 적용 / 곧바로 적용)에서 같은 값이 나오지 않으면 정책 비교가 무의미해진다.</a:t>
-            </a:r>
-          </a:p>
-          <a:p>
-            <a:r>
-              <a:t>단가는 실제 계약이 아니라 명시적 시나리오다. 실제 전달문 비용은 usage로 측정한다.</a:t>
-            </a:r>
-          </a:p>
-          <a:p>
-            <a:r>
-              <a:t>이 값은 회귀 테스트의 기준값이며 절감 실적이 아니다.</a:t>
-            </a:r>
-          </a:p>
-          <a:p>
-            <a:r>
-              <a:t>근거: agent_setup/router.py · tests/</a:t>
-            </a:r>
-          </a:p>
-          <a:p>
-            <a:r>
-              <a:t>증거 범위: 비용 회귀</a:t>
+              <a:t>이 부분이 없으면 '새 작업인데 이전 작업의 리워크로 판정'되는 오작동이 생긴다.</a:t>
+            </a:r>
+          </a:p>
+          <a:p>
+            <a:r>
+              <a:t>회귀 테스트로 새 작업·동일 문구·교차 작업을 검증한다.</a:t>
+            </a:r>
+          </a:p>
+          <a:p>
+            <a:r>
+              <a:t>로그에 task_id와 판정 근거를 남겨 사후 추적이 가능하게 했다.</a:t>
+            </a:r>
+          </a:p>
+          <a:p>
+            <a:r>
+              <a:t>근거: agent_setup/orchestrator.py</a:t>
+            </a:r>
+          </a:p>
+          <a:p>
+            <a:r>
+              <a:t>증거 범위: 상태 관리</a:t>
             </a:r>
           </a:p>
         </p:txBody>
@@ -789,27 +793,27 @@
           <a:lstStyle/>
           <a:p>
             <a:r>
-              <a:t>이중 계상은 비용을 부풀려 절감을 과장하는 대표적 실수다.</a:t>
-            </a:r>
-          </a:p>
-          <a:p>
-            <a:r>
-              <a:t>4,700은 페르소나 시나리오를 맞춘 값이지 독립 실측 캘리브레이션이 아니다. 동일 자료 내부 정합만 확인했다.</a:t>
-            </a:r>
-          </a:p>
-          <a:p>
-            <a:r>
-              <a:t>역산 오차는 0.147%이고, 이 수치는 문서에 한계와 함께 남긴다.</a:t>
-            </a:r>
-          </a:p>
-          <a:p>
-            <a:r>
-              <a:t>근거: analysis/calibrate_growth.py</a:t>
-            </a:r>
-          </a:p>
-          <a:p>
-            <a:r>
-              <a:t>증거 범위: 비용 산식</a:t>
+              <a:t>두 경로(진단 후 적용 / 곧바로 적용)에서 같은 값이 나오지 않으면 정책 비교가 무의미해진다.</a:t>
+            </a:r>
+          </a:p>
+          <a:p>
+            <a:r>
+              <a:t>단가는 실제 계약이 아니라 명시적 시나리오다. 실제 전달문 비용은 usage로 측정한다.</a:t>
+            </a:r>
+          </a:p>
+          <a:p>
+            <a:r>
+              <a:t>이 값은 회귀 테스트의 기준값이며 절감 실적이 아니다.</a:t>
+            </a:r>
+          </a:p>
+          <a:p>
+            <a:r>
+              <a:t>근거: agent_setup/router.py · tests/</a:t>
+            </a:r>
+          </a:p>
+          <a:p>
+            <a:r>
+              <a:t>증거 범위: 비용 회귀</a:t>
             </a:r>
           </a:p>
         </p:txBody>
@@ -879,27 +883,27 @@
           <a:lstStyle/>
           <a:p>
             <a:r>
-              <a:t>에이전트는 같은 접두부를 매 턴 다시 보낸다. 캐시의 이득이 가장 큰 워크로드다.</a:t>
-            </a:r>
-          </a:p>
-          <a:p>
-            <a:r>
-              <a:t>최소 길이 미달이면 할인 가정을 하지 않는다. 모델별 조건을 pricing에 모아 두었다.</a:t>
-            </a:r>
-          </a:p>
-          <a:p>
-            <a:r>
-              <a:t>프롬프트를 자주 바꾸면 캐시가 깨진다. 변경 주기를 정하고 측정한다.</a:t>
-            </a:r>
-          </a:p>
-          <a:p>
-            <a:r>
-              <a:t>근거: agent_setup/config.py</a:t>
-            </a:r>
-          </a:p>
-          <a:p>
-            <a:r>
-              <a:t>증거 범위: 캐싱 배선</a:t>
+              <a:t>이중 계상은 비용을 부풀려 절감을 과장하는 대표적 실수다.</a:t>
+            </a:r>
+          </a:p>
+          <a:p>
+            <a:r>
+              <a:t>4,700은 페르소나 시나리오를 맞춘 값이지 독립 실측 캘리브레이션이 아니다. 동일 자료 내부 정합만 확인했다.</a:t>
+            </a:r>
+          </a:p>
+          <a:p>
+            <a:r>
+              <a:t>역산 오차는 0.147%이고, 이 수치는 문서에 한계와 함께 남긴다.</a:t>
+            </a:r>
+          </a:p>
+          <a:p>
+            <a:r>
+              <a:t>근거: analysis/calibrate_growth.py</a:t>
+            </a:r>
+          </a:p>
+          <a:p>
+            <a:r>
+              <a:t>증거 범위: 비용 산식</a:t>
             </a:r>
           </a:p>
         </p:txBody>
@@ -969,27 +973,27 @@
           <a:lstStyle/>
           <a:p>
             <a:r>
-              <a:t>고정 20,000 + 가변 1,000 + 출력 1,500, Sonnet 단가, 100콜 조건의 계산이다.</a:t>
-            </a:r>
-          </a:p>
-          <a:p>
-            <a:r>
-              <a:t>히트율은 가정값이다. 실제 값은 자기 usage의 cache_read 필드로 측정해야 한다.</a:t>
-            </a:r>
-          </a:p>
-          <a:p>
-            <a:r>
-              <a:t>저장료·TTL·최소 길이는 모델별로 다르다. 미확인 기준은 할인 가정을 하지 않는다.</a:t>
-            </a:r>
-          </a:p>
-          <a:p>
-            <a:r>
-              <a:t>근거: experiments/exp03_prompt_caching.py</a:t>
-            </a:r>
-          </a:p>
-          <a:p>
-            <a:r>
-              <a:t>증거 범위: 비용 시나리오 (100콜)</a:t>
+              <a:t>에이전트는 같은 접두부를 매 턴 다시 보낸다. 캐시의 이득이 가장 큰 워크로드다.</a:t>
+            </a:r>
+          </a:p>
+          <a:p>
+            <a:r>
+              <a:t>최소 길이 미달이면 할인 가정을 하지 않는다. 모델별 조건을 pricing에 모아 두었다.</a:t>
+            </a:r>
+          </a:p>
+          <a:p>
+            <a:r>
+              <a:t>프롬프트를 자주 바꾸면 캐시가 깨진다. 변경 주기를 정하고 측정한다.</a:t>
+            </a:r>
+          </a:p>
+          <a:p>
+            <a:r>
+              <a:t>근거: agent_setup/config.py</a:t>
+            </a:r>
+          </a:p>
+          <a:p>
+            <a:r>
+              <a:t>증거 범위: 캐싱 배선</a:t>
             </a:r>
           </a:p>
         </p:txBody>
@@ -1059,17 +1063,17 @@
           <a:lstStyle/>
           <a:p>
             <a:r>
-              <a:t>20턴 세션에 캐싱만 걸면 $1.91(+17%) — 이력 누적은 그대로 남기 때문이다.</a:t>
-            </a:r>
-          </a:p>
-          <a:p>
-            <a:r>
-              <a:t>요약은 품질에 영향을 준다. 압축 과정에서 잃는 정보가 재작업을 만들면 절감이 상쇄된다.</a:t>
-            </a:r>
-          </a:p>
-          <a:p>
-            <a:r>
-              <a:t>주기를 바꿔 가며 재작업률과 총비용을 함께 측정할 것을 권한다.</a:t>
+              <a:t>에이전트 비용은 턴 수의 2차 함수다. '한 번 더 물어보기'가 싼 행동이 아니다.</a:t>
+            </a:r>
+          </a:p>
+          <a:p>
+            <a:r>
+              <a:t>추상화 레이어 3개를 미리 만든 경우 20턴 세션에서 추가 재전송 비용 $0.270이 붙는다(가정).</a:t>
+            </a:r>
+          </a:p>
+          <a:p>
+            <a:r>
+              <a:t>턴을 줄이는 가장 확실한 수단은 요구사항을 먼저 확정하는 것이다.</a:t>
             </a:r>
           </a:p>
           <a:p>
@@ -1149,32 +1153,27 @@
           <a:lstStyle/>
           <a:p>
             <a:r>
-              <a:t>EXTERNAL=0은 '추가 종량 API 금액이 0'이라는 모델링 선택이다. 총비용이 0이라는 뜻이 아니다.</a:t>
-            </a:r>
-          </a:p>
-          <a:p>
-            <a:r>
-              <a:t>약관·품질·재현성은 별도로 확인해야 한다. 라우터가 이를 보증하지 않는다.</a:t>
-            </a:r>
-          </a:p>
-          <a:p>
-            <a:r>
-              <a:t>사람의 검토 시간과 구독료는 이 계산 밖이다.</a:t>
-            </a:r>
-          </a:p>
-          <a:p>
-            <a:r>
-              <a:t>복사·정리 단계에서 스펙 형식을 고정하면 다음 단계 입력이 줄어든다.</a:t>
-            </a:r>
-          </a:p>
-          <a:p>
-            <a:r>
-              <a:t>근거: lab/pricing.py TIER_SCENARIOS</a:t>
-            </a:r>
-          </a:p>
-          <a:p>
-            <a:r>
-              <a:t>증거 범위: 경로 분리</a:t>
+              <a:t>고정 8,000토큰 프리픽스, 턴당 입력 2,000·출력 800, Sonnet 단가의 계산이다.</a:t>
+            </a:r>
+          </a:p>
+          <a:p>
+            <a:r>
+              <a:t>컴팩션 주기는 요약 비용과 품질·재작업을 함께 측정해 정한다.</a:t>
+            </a:r>
+          </a:p>
+          <a:p>
+            <a:r>
+              <a:t>실제 세션 비용은 도구 출력과 파일 재전송으로 더 커진다.</a:t>
+            </a:r>
+          </a:p>
+          <a:p>
+            <a:r>
+              <a:t>근거: experiments/exp04_agent_loop_sdd.py</a:t>
+            </a:r>
+          </a:p>
+          <a:p>
+            <a:r>
+              <a:t>증거 범위: 비용 시나리오</a:t>
             </a:r>
           </a:p>
         </p:txBody>
@@ -1244,27 +1243,27 @@
           <a:lstStyle/>
           <a:p>
             <a:r>
-              <a:t>자동화의 목적은 사람을 빼는 것이 아니라 기본값을 낮추는 것이다.</a:t>
-            </a:r>
-          </a:p>
-          <a:p>
-            <a:r>
-              <a:t>측정 없는 자동화는 조용히 손해를 만들 수 있다(미스 캐싱이 대표적이다).</a:t>
-            </a:r>
-          </a:p>
-          <a:p>
-            <a:r>
-              <a:t>이상 징후가 보이면 티어를 고정해 비교하는 폴백을 둔다.</a:t>
-            </a:r>
-          </a:p>
-          <a:p>
-            <a:r>
-              <a:t>근거: agent_setup/antigravity/AGENTS.md · docs/CORRECTIONS.md</a:t>
-            </a:r>
-          </a:p>
-          <a:p>
-            <a:r>
-              <a:t>증거 범위: 운영</a:t>
+              <a:t>고정 20,000 + 가변 1,000 + 출력 1,500, Sonnet 단가, 100콜 조건의 계산이다.</a:t>
+            </a:r>
+          </a:p>
+          <a:p>
+            <a:r>
+              <a:t>히트율은 가정값이다. 실제 값은 자기 usage의 cache_read 필드로 측정해야 한다.</a:t>
+            </a:r>
+          </a:p>
+          <a:p>
+            <a:r>
+              <a:t>저장료·TTL·최소 길이는 모델별로 다르다. 미확인 기준은 할인 가정을 하지 않는다.</a:t>
+            </a:r>
+          </a:p>
+          <a:p>
+            <a:r>
+              <a:t>근거: experiments/exp03_prompt_caching.py</a:t>
+            </a:r>
+          </a:p>
+          <a:p>
+            <a:r>
+              <a:t>증거 범위: 비용 시나리오 (100콜)</a:t>
             </a:r>
           </a:p>
         </p:txBody>
@@ -1334,27 +1333,117 @@
           <a:lstStyle/>
           <a:p>
             <a:r>
-              <a:t>두 가지 모두 설정 수준에서 시작할 수 있고 되돌리기 쉽다.</a:t>
-            </a:r>
-          </a:p>
-          <a:p>
-            <a:r>
-              <a:t>효과는 자기 로그에서 확인한다. 이 저장소의 값은 출발점이다.</a:t>
-            </a:r>
-          </a:p>
-          <a:p>
-            <a:r>
-              <a:t>질문·재현 결과는 저장소 이슈로 남기면 다음 사람이 같은 실수를 반복하지 않는다.</a:t>
-            </a:r>
-          </a:p>
-          <a:p>
-            <a:r>
-              <a:t>근거: github.com/giyeop-cody/token-cost-lab</a:t>
-            </a:r>
-          </a:p>
-          <a:p>
-            <a:r>
-              <a:t>증거 범위: 마무리</a:t>
+              <a:t>고정 20,000 + 가변 1,000 + 출력 1,500, Sonnet 단가, 100콜 조건의 계산이다.</a:t>
+            </a:r>
+          </a:p>
+          <a:p>
+            <a:r>
+              <a:t>히트율은 가정값이다. 실제 값은 자기 usage의 cache_read 필드로 측정한다.</a:t>
+            </a:r>
+          </a:p>
+          <a:p>
+            <a:r>
+              <a:t>저장료·TTL·최소 길이는 모델별로 다르다. 미확인 기준은 할인 가정을 하지 않는다.</a:t>
+            </a:r>
+          </a:p>
+          <a:p>
+            <a:r>
+              <a:t>근거: experiments/exp03_prompt_caching.py</a:t>
+            </a:r>
+          </a:p>
+          <a:p>
+            <a:r>
+              <a:t>증거 범위: 비용 시나리오 (100콜)</a:t>
+            </a:r>
+          </a:p>
+        </p:txBody>
+      </p:sp>
+      <p:sp>
+        <p:nvSpPr>
+          <p:cNvPr id="4" name="Slide Number Placeholder 3"/>
+          <p:cNvSpPr>
+            <a:spLocks noGrp="1"/>
+          </p:cNvSpPr>
+          <p:nvPr>
+            <p:ph type="sldNum" idx="5" sz="quarter"/>
+          </p:nvPr>
+        </p:nvSpPr>
+        <p:spPr/>
+      </p:sp>
+    </p:spTree>
+  </p:cSld>
+  <p:clrMapOvr>
+    <a:masterClrMapping/>
+  </p:clrMapOvr>
+</p:notes>
+</file>
+
+<file path=ppt/notesSlides/notesSlide19.xml><?xml version="1.0" encoding="utf-8"?>
+<p:notes xmlns:a="http://schemas.openxmlformats.org/drawingml/2006/main" xmlns:p="http://schemas.openxmlformats.org/presentationml/2006/main" xmlns:r="http://schemas.openxmlformats.org/officeDocument/2006/relationships">
+  <p:cSld>
+    <p:spTree>
+      <p:nvGrpSpPr>
+        <p:cNvPr id="1" name=""/>
+        <p:cNvGrpSpPr/>
+        <p:nvPr/>
+      </p:nvGrpSpPr>
+      <p:grpSpPr>
+        <a:xfrm>
+          <a:off x="0" y="0"/>
+          <a:ext cx="0" cy="0"/>
+          <a:chOff x="0" y="0"/>
+          <a:chExt cx="0" cy="0"/>
+        </a:xfrm>
+      </p:grpSpPr>
+      <p:sp>
+        <p:nvSpPr>
+          <p:cNvPr id="2" name="Slide Image Placeholder 1"/>
+          <p:cNvSpPr>
+            <a:spLocks noGrp="1"/>
+          </p:cNvSpPr>
+          <p:nvPr>
+            <p:ph type="sldImg" idx="2"/>
+          </p:nvPr>
+        </p:nvSpPr>
+        <p:spPr/>
+      </p:sp>
+      <p:sp>
+        <p:nvSpPr>
+          <p:cNvPr id="3" name="Notes Placeholder 2"/>
+          <p:cNvSpPr>
+            <a:spLocks noGrp="1"/>
+          </p:cNvSpPr>
+          <p:nvPr>
+            <p:ph type="body" idx="3" sz="quarter"/>
+          </p:nvPr>
+        </p:nvSpPr>
+        <p:spPr/>
+        <p:txBody>
+          <a:bodyPr/>
+          <a:lstStyle/>
+          <a:p>
+            <a:r>
+              <a:t>각 레버의 절감률을 순서대로 곱한 값이다. 실제 도입에서는 서로 겹치는 부분이 생긴다.</a:t>
+            </a:r>
+          </a:p>
+          <a:p>
+            <a:r>
+              <a:t>검증된 상한도 아니다. 자기 데이터로 A/B를 돌려 확정해야 한다.</a:t>
+            </a:r>
+          </a:p>
+          <a:p>
+            <a:r>
+              <a:t>레버별 적용 조건(히트율·라우팅 임계값·배치 가능성)이 다르다.</a:t>
+            </a:r>
+          </a:p>
+          <a:p>
+            <a:r>
+              <a:t>근거: experiments/exp06_other_levers.py</a:t>
+            </a:r>
+          </a:p>
+          <a:p>
+            <a:r>
+              <a:t>증거 범위: 순차 시나리오</a:t>
             </a:r>
           </a:p>
         </p:txBody>
@@ -1469,6 +1558,281 @@
 </p:notes>
 </file>
 
+<file path=ppt/notesSlides/notesSlide20.xml><?xml version="1.0" encoding="utf-8"?>
+<p:notes xmlns:a="http://schemas.openxmlformats.org/drawingml/2006/main" xmlns:p="http://schemas.openxmlformats.org/presentationml/2006/main" xmlns:r="http://schemas.openxmlformats.org/officeDocument/2006/relationships">
+  <p:cSld>
+    <p:spTree>
+      <p:nvGrpSpPr>
+        <p:cNvPr id="1" name=""/>
+        <p:cNvGrpSpPr/>
+        <p:nvPr/>
+      </p:nvGrpSpPr>
+      <p:grpSpPr>
+        <a:xfrm>
+          <a:off x="0" y="0"/>
+          <a:ext cx="0" cy="0"/>
+          <a:chOff x="0" y="0"/>
+          <a:chExt cx="0" cy="0"/>
+        </a:xfrm>
+      </p:grpSpPr>
+      <p:sp>
+        <p:nvSpPr>
+          <p:cNvPr id="2" name="Slide Image Placeholder 1"/>
+          <p:cNvSpPr>
+            <a:spLocks noGrp="1"/>
+          </p:cNvSpPr>
+          <p:nvPr>
+            <p:ph type="sldImg" idx="2"/>
+          </p:nvPr>
+        </p:nvSpPr>
+        <p:spPr/>
+      </p:sp>
+      <p:sp>
+        <p:nvSpPr>
+          <p:cNvPr id="3" name="Notes Placeholder 2"/>
+          <p:cNvSpPr>
+            <a:spLocks noGrp="1"/>
+          </p:cNvSpPr>
+          <p:nvPr>
+            <p:ph type="body" idx="3" sz="quarter"/>
+          </p:nvPr>
+        </p:nvSpPr>
+        <p:spPr/>
+        <p:txBody>
+          <a:bodyPr/>
+          <a:lstStyle/>
+          <a:p>
+            <a:r>
+              <a:t>EXTERNAL=0은 '추가 종량 API 금액이 0'이라는 모델링 선택이다. 총비용이 0이라는 뜻이 아니다.</a:t>
+            </a:r>
+          </a:p>
+          <a:p>
+            <a:r>
+              <a:t>약관·품질·재현성은 별도로 확인해야 한다. 라우터가 이를 보증하지 않는다.</a:t>
+            </a:r>
+          </a:p>
+          <a:p>
+            <a:r>
+              <a:t>사람의 검토 시간과 구독료는 이 계산 밖이다.</a:t>
+            </a:r>
+          </a:p>
+          <a:p>
+            <a:r>
+              <a:t>복사·정리 단계에서 스펙 형식을 고정하면 다음 단계 입력이 줄어든다.</a:t>
+            </a:r>
+          </a:p>
+          <a:p>
+            <a:r>
+              <a:t>근거: lab/pricing.py TIER_SCENARIOS</a:t>
+            </a:r>
+          </a:p>
+          <a:p>
+            <a:r>
+              <a:t>증거 범위: 경로 분리</a:t>
+            </a:r>
+          </a:p>
+        </p:txBody>
+      </p:sp>
+      <p:sp>
+        <p:nvSpPr>
+          <p:cNvPr id="4" name="Slide Number Placeholder 3"/>
+          <p:cNvSpPr>
+            <a:spLocks noGrp="1"/>
+          </p:cNvSpPr>
+          <p:nvPr>
+            <p:ph type="sldNum" idx="5" sz="quarter"/>
+          </p:nvPr>
+        </p:nvSpPr>
+        <p:spPr/>
+      </p:sp>
+    </p:spTree>
+  </p:cSld>
+  <p:clrMapOvr>
+    <a:masterClrMapping/>
+  </p:clrMapOvr>
+</p:notes>
+</file>
+
+<file path=ppt/notesSlides/notesSlide21.xml><?xml version="1.0" encoding="utf-8"?>
+<p:notes xmlns:a="http://schemas.openxmlformats.org/drawingml/2006/main" xmlns:p="http://schemas.openxmlformats.org/presentationml/2006/main" xmlns:r="http://schemas.openxmlformats.org/officeDocument/2006/relationships">
+  <p:cSld>
+    <p:spTree>
+      <p:nvGrpSpPr>
+        <p:cNvPr id="1" name=""/>
+        <p:cNvGrpSpPr/>
+        <p:nvPr/>
+      </p:nvGrpSpPr>
+      <p:grpSpPr>
+        <a:xfrm>
+          <a:off x="0" y="0"/>
+          <a:ext cx="0" cy="0"/>
+          <a:chOff x="0" y="0"/>
+          <a:chExt cx="0" cy="0"/>
+        </a:xfrm>
+      </p:grpSpPr>
+      <p:sp>
+        <p:nvSpPr>
+          <p:cNvPr id="2" name="Slide Image Placeholder 1"/>
+          <p:cNvSpPr>
+            <a:spLocks noGrp="1"/>
+          </p:cNvSpPr>
+          <p:nvPr>
+            <p:ph type="sldImg" idx="2"/>
+          </p:nvPr>
+        </p:nvSpPr>
+        <p:spPr/>
+      </p:sp>
+      <p:sp>
+        <p:nvSpPr>
+          <p:cNvPr id="3" name="Notes Placeholder 2"/>
+          <p:cNvSpPr>
+            <a:spLocks noGrp="1"/>
+          </p:cNvSpPr>
+          <p:nvPr>
+            <p:ph type="body" idx="3" sz="quarter"/>
+          </p:nvPr>
+        </p:nvSpPr>
+        <p:spPr/>
+        <p:txBody>
+          <a:bodyPr/>
+          <a:lstStyle/>
+          <a:p>
+            <a:r>
+              <a:t>자동화의 목적은 사람을 빼는 것이 아니라 기본값을 낮추는 것이다.</a:t>
+            </a:r>
+          </a:p>
+          <a:p>
+            <a:r>
+              <a:t>측정 없는 자동화는 조용히 손해를 만들 수 있다(미스 캐싱이 대표적이다).</a:t>
+            </a:r>
+          </a:p>
+          <a:p>
+            <a:r>
+              <a:t>이상 징후가 보이면 티어를 고정해 비교하는 폴백을 둔다.</a:t>
+            </a:r>
+          </a:p>
+          <a:p>
+            <a:r>
+              <a:t>근거: agent_setup/antigravity/AGENTS.md · docs/CORRECTIONS.md</a:t>
+            </a:r>
+          </a:p>
+          <a:p>
+            <a:r>
+              <a:t>증거 범위: 운영</a:t>
+            </a:r>
+          </a:p>
+        </p:txBody>
+      </p:sp>
+      <p:sp>
+        <p:nvSpPr>
+          <p:cNvPr id="4" name="Slide Number Placeholder 3"/>
+          <p:cNvSpPr>
+            <a:spLocks noGrp="1"/>
+          </p:cNvSpPr>
+          <p:nvPr>
+            <p:ph type="sldNum" idx="5" sz="quarter"/>
+          </p:nvPr>
+        </p:nvSpPr>
+        <p:spPr/>
+      </p:sp>
+    </p:spTree>
+  </p:cSld>
+  <p:clrMapOvr>
+    <a:masterClrMapping/>
+  </p:clrMapOvr>
+</p:notes>
+</file>
+
+<file path=ppt/notesSlides/notesSlide22.xml><?xml version="1.0" encoding="utf-8"?>
+<p:notes xmlns:a="http://schemas.openxmlformats.org/drawingml/2006/main" xmlns:p="http://schemas.openxmlformats.org/presentationml/2006/main" xmlns:r="http://schemas.openxmlformats.org/officeDocument/2006/relationships">
+  <p:cSld>
+    <p:spTree>
+      <p:nvGrpSpPr>
+        <p:cNvPr id="1" name=""/>
+        <p:cNvGrpSpPr/>
+        <p:nvPr/>
+      </p:nvGrpSpPr>
+      <p:grpSpPr>
+        <a:xfrm>
+          <a:off x="0" y="0"/>
+          <a:ext cx="0" cy="0"/>
+          <a:chOff x="0" y="0"/>
+          <a:chExt cx="0" cy="0"/>
+        </a:xfrm>
+      </p:grpSpPr>
+      <p:sp>
+        <p:nvSpPr>
+          <p:cNvPr id="2" name="Slide Image Placeholder 1"/>
+          <p:cNvSpPr>
+            <a:spLocks noGrp="1"/>
+          </p:cNvSpPr>
+          <p:nvPr>
+            <p:ph type="sldImg" idx="2"/>
+          </p:nvPr>
+        </p:nvSpPr>
+        <p:spPr/>
+      </p:sp>
+      <p:sp>
+        <p:nvSpPr>
+          <p:cNvPr id="3" name="Notes Placeholder 2"/>
+          <p:cNvSpPr>
+            <a:spLocks noGrp="1"/>
+          </p:cNvSpPr>
+          <p:nvPr>
+            <p:ph type="body" idx="3" sz="quarter"/>
+          </p:nvPr>
+        </p:nvSpPr>
+        <p:spPr/>
+        <p:txBody>
+          <a:bodyPr/>
+          <a:lstStyle/>
+          <a:p>
+            <a:r>
+              <a:t>두 가지 모두 설정 수준에서 시작할 수 있고 되돌리기 쉽다.</a:t>
+            </a:r>
+          </a:p>
+          <a:p>
+            <a:r>
+              <a:t>효과는 자기 로그에서 확인한다. 이 저장소의 값은 출발점이다.</a:t>
+            </a:r>
+          </a:p>
+          <a:p>
+            <a:r>
+              <a:t>질문·재현 결과는 저장소 이슈로 남기면 다음 사람이 같은 실수를 반복하지 않는다.</a:t>
+            </a:r>
+          </a:p>
+          <a:p>
+            <a:r>
+              <a:t>근거: github.com/giyeop-cody/token-cost-lab</a:t>
+            </a:r>
+          </a:p>
+          <a:p>
+            <a:r>
+              <a:t>증거 범위: 마무리</a:t>
+            </a:r>
+          </a:p>
+        </p:txBody>
+      </p:sp>
+      <p:sp>
+        <p:nvSpPr>
+          <p:cNvPr id="4" name="Slide Number Placeholder 3"/>
+          <p:cNvSpPr>
+            <a:spLocks noGrp="1"/>
+          </p:cNvSpPr>
+          <p:nvPr>
+            <p:ph type="sldNum" idx="5" sz="quarter"/>
+          </p:nvPr>
+        </p:nvSpPr>
+        <p:spPr/>
+      </p:sp>
+    </p:spTree>
+  </p:cSld>
+  <p:clrMapOvr>
+    <a:masterClrMapping/>
+  </p:clrMapOvr>
+</p:notes>
+</file>
+
 <file path=ppt/notesSlides/notesSlide3.xml><?xml version="1.0" encoding="utf-8"?>
 <p:notes xmlns:a="http://schemas.openxmlformats.org/drawingml/2006/main" xmlns:p="http://schemas.openxmlformats.org/presentationml/2006/main" xmlns:r="http://schemas.openxmlformats.org/officeDocument/2006/relationships">
   <p:cSld>
@@ -1514,27 +1878,27 @@
           <a:lstStyle/>
           <a:p>
             <a:r>
-              <a:t>같은 툴 작업량을 가정하고 메인·자식·요약 비용을 모두 합산한 값이다.</a:t>
-            </a:r>
-          </a:p>
-          <a:p>
-            <a:r>
-              <a:t>서브에이전트는 요약 품질과 실패·재시도 특성이 다르다. 비용만으로 우열을 단정하지 않는다.</a:t>
-            </a:r>
-          </a:p>
-          <a:p>
-            <a:r>
-              <a:t>과거의 -87%는 자식·요약을 빼고 계산한 값이어서 전체 절감으로 쓰지 않는다.</a:t>
-            </a:r>
-          </a:p>
-          <a:p>
-            <a:r>
-              <a:t>근거: experiments/exp11_tool_output_bloat.py</a:t>
-            </a:r>
-          </a:p>
-          <a:p>
-            <a:r>
-              <a:t>증거 범위: 전체 시스템 비용 시나리오</a:t>
+              <a:t>공개 리스트 단가이며 계약·무료 티어·세금·도구 비용은 별도다.</a:t>
+            </a:r>
+          </a:p>
+          <a:p>
+            <a:r>
+              <a:t>출력÷입력 배수는 모델별로 4~8배다. 같은 배수를 모든 모델에 적용하지 않는다.</a:t>
+            </a:r>
+          </a:p>
+          <a:p>
+            <a:r>
+              <a:t>Gemini 3.8/3.6 Flash의 인트로 단가는 2026-12-31까지이며 이후 2배가 된다 — 표에 넣은 값의 기준일을 밝힌다.</a:t>
+            </a:r>
+          </a:p>
+          <a:p>
+            <a:r>
+              <a:t>근거: lab/pricing.py MODELS</a:t>
+            </a:r>
+          </a:p>
+          <a:p>
+            <a:r>
+              <a:t>증거 범위: 가격표 스냅샷 (2026-09-20)</a:t>
             </a:r>
           </a:p>
         </p:txBody>
@@ -1604,27 +1968,27 @@
           <a:lstStyle/>
           <a:p>
             <a:r>
-              <a:t>벤치마크에서 잡은 임계값을 그대로 프로덕션에 쓰면 절감이 과대 추정된다.</a:t>
-            </a:r>
-          </a:p>
-          <a:p>
-            <a:r>
-              <a:t>저볼륨에서는 라우팅 오버헤드가 절감을 상쇄한다. 반복률과 볼륨을 먼저 본다.</a:t>
-            </a:r>
-          </a:p>
-          <a:p>
-            <a:r>
-              <a:t>라우터 오류율·검출률은 이 저장소에서 측정하지 않았다. 참조 구현의 회귀 테스트만 있다.</a:t>
-            </a:r>
-          </a:p>
-          <a:p>
-            <a:r>
-              <a:t>근거: experiments/exp06_other_levers.py</a:t>
-            </a:r>
-          </a:p>
-          <a:p>
-            <a:r>
-              <a:t>증거 범위: 시나리오 (10,000콜)</a:t>
+              <a:t>20턴 세션에 캐싱만 걸면 $1.91(+17%) — 이력 누적은 그대로 남기 때문이다.</a:t>
+            </a:r>
+          </a:p>
+          <a:p>
+            <a:r>
+              <a:t>요약은 품질에 영향을 준다. 압축 과정에서 잃는 정보가 재작업을 만들면 절감이 상쇄된다.</a:t>
+            </a:r>
+          </a:p>
+          <a:p>
+            <a:r>
+              <a:t>주기를 바꿔 가며 재작업률과 총비용을 함께 측정할 것을 권한다.</a:t>
+            </a:r>
+          </a:p>
+          <a:p>
+            <a:r>
+              <a:t>근거: experiments/exp04_agent_loop_sdd.py</a:t>
+            </a:r>
+          </a:p>
+          <a:p>
+            <a:r>
+              <a:t>증거 범위: 비용 시나리오</a:t>
             </a:r>
           </a:p>
         </p:txBody>
@@ -1694,27 +2058,27 @@
           <a:lstStyle/>
           <a:p>
             <a:r>
-              <a:t>분류는 규칙 기반이다. 학습된 라우터가 아니라 조건표에 가깝다.</a:t>
-            </a:r>
-          </a:p>
-          <a:p>
-            <a:r>
-              <a:t>구성한 반례 테스트는 회귀 검증이지 실사용 오류율 추정이 아니다.</a:t>
-            </a:r>
-          </a:p>
-          <a:p>
-            <a:r>
-              <a:t>오분류가 나면 상위 티어로 올리는 안전장치를 함께 둔다.</a:t>
-            </a:r>
-          </a:p>
-          <a:p>
-            <a:r>
-              <a:t>근거: agent_setup/router.py</a:t>
-            </a:r>
-          </a:p>
-          <a:p>
-            <a:r>
-              <a:t>증거 범위: 라우팅 배선</a:t>
+              <a:t>같은 툴 작업량을 가정하고 메인·자식·요약 비용을 모두 합산한 값이다.</a:t>
+            </a:r>
+          </a:p>
+          <a:p>
+            <a:r>
+              <a:t>서브에이전트는 요약 품질과 실패·재시도 특성이 다르다. 비용만으로 우열을 단정하지 않는다.</a:t>
+            </a:r>
+          </a:p>
+          <a:p>
+            <a:r>
+              <a:t>과거의 -87%는 자식·요약을 빼고 계산한 값이어서 전체 절감으로 쓰지 않는다.</a:t>
+            </a:r>
+          </a:p>
+          <a:p>
+            <a:r>
+              <a:t>근거: experiments/exp11_tool_output_bloat.py</a:t>
+            </a:r>
+          </a:p>
+          <a:p>
+            <a:r>
+              <a:t>증거 범위: 전체 시스템 비용 시나리오</a:t>
             </a:r>
           </a:p>
         </p:txBody>
@@ -1784,27 +2148,27 @@
           <a:lstStyle/>
           <a:p>
             <a:r>
-              <a:t>셋을 섞어 부르면 처방도 섞인다. 발표·회의에서 용어를 먼저 통일한다.</a:t>
-            </a:r>
-          </a:p>
-          <a:p>
-            <a:r>
-              <a:t>라우팅은 단가표, 리워크는 대화 이력 누적, 워크플로는 단계 배치가 대상이다.</a:t>
-            </a:r>
-          </a:p>
-          <a:p>
-            <a:r>
-              <a:t>효과를 말할 때는 어떤 정책의 값인지 명시한다.</a:t>
-            </a:r>
-          </a:p>
-          <a:p>
-            <a:r>
-              <a:t>근거: agent_setup/antigravity/AGENTS.md</a:t>
-            </a:r>
-          </a:p>
-          <a:p>
-            <a:r>
-              <a:t>증거 범위: 정책 구분</a:t>
+              <a:t>분류는 규칙 기반이다. 학습된 라우터가 아니라 조건표에 가깝다.</a:t>
+            </a:r>
+          </a:p>
+          <a:p>
+            <a:r>
+              <a:t>구성한 반례 테스트는 회귀 검증이지 실사용 오류율 추정이 아니다.</a:t>
+            </a:r>
+          </a:p>
+          <a:p>
+            <a:r>
+              <a:t>오분류가 나면 상위 티어로 올리는 안전장치를 함께 둔다.</a:t>
+            </a:r>
+          </a:p>
+          <a:p>
+            <a:r>
+              <a:t>근거: agent_setup/router.py</a:t>
+            </a:r>
+          </a:p>
+          <a:p>
+            <a:r>
+              <a:t>증거 범위: 라우팅 배선</a:t>
             </a:r>
           </a:p>
         </p:txBody>
@@ -1874,27 +2238,27 @@
           <a:lstStyle/>
           <a:p>
             <a:r>
-              <a:t>검출할 AC가 부실하면 A가 실패를 놓친다. 그래서 AC를 코드로 강제한다.</a:t>
-            </a:r>
-          </a:p>
-          <a:p>
-            <a:r>
-              <a:t>respec(다시 스펙)은 실행을 멈추는 무료 경로이고, 실행 비용만 청구된다.</a:t>
-            </a:r>
-          </a:p>
-          <a:p>
-            <a:r>
-              <a:t>이 정책의 값은 회귀 테스트로 고정한다. 실제 품질 효과는 미측정이다.</a:t>
-            </a:r>
-          </a:p>
-          <a:p>
-            <a:r>
-              <a:t>근거: agent_setup/router.py</a:t>
-            </a:r>
-          </a:p>
-          <a:p>
-            <a:r>
-              <a:t>증거 범위: 정책 A</a:t>
+              <a:t>셋을 섞어 부르면 처방도 섞인다. 발표·회의에서 용어를 먼저 통일한다.</a:t>
+            </a:r>
+          </a:p>
+          <a:p>
+            <a:r>
+              <a:t>라우팅은 단가표, 리워크는 대화 이력 누적, 워크플로는 단계 배치가 대상이다.</a:t>
+            </a:r>
+          </a:p>
+          <a:p>
+            <a:r>
+              <a:t>효과를 말할 때는 어떤 정책의 값인지 명시한다.</a:t>
+            </a:r>
+          </a:p>
+          <a:p>
+            <a:r>
+              <a:t>근거: agent_setup/antigravity/AGENTS.md</a:t>
+            </a:r>
+          </a:p>
+          <a:p>
+            <a:r>
+              <a:t>증거 범위: 정책 구분</a:t>
             </a:r>
           </a:p>
         </p:txBody>
@@ -1964,27 +2328,27 @@
           <a:lstStyle/>
           <a:p>
             <a:r>
-              <a:t>과거 '0/5 → 4/5'로 소개했던 수치는 원자료가 없어 철회했다. 지금 값은 저장 발화 재생 결과다.</a:t>
-            </a:r>
-          </a:p>
-          <a:p>
-            <a:r>
-              <a:t>재생은 가정 없는 재현이지만 표본이 짧다(6턴). 분류 정확도를 보장하지 않는다.</a:t>
-            </a:r>
-          </a:p>
-          <a:p>
-            <a:r>
-              <a:t>분류가 애매하면 escalate가 아니라 질문을 반환하도록 설계했다.</a:t>
-            </a:r>
-          </a:p>
-          <a:p>
-            <a:r>
-              <a:t>근거: analysis/replay_logs.py</a:t>
-            </a:r>
-          </a:p>
-          <a:p>
-            <a:r>
-              <a:t>증거 범위: 정책 B (로그 재생)</a:t>
+              <a:t>검출할 AC가 부실하면 A가 실패를 놓친다. 그래서 AC를 코드로 강제한다.</a:t>
+            </a:r>
+          </a:p>
+          <a:p>
+            <a:r>
+              <a:t>respec(다시 스펙)은 실행을 멈추는 무료 경로이고, 실행 비용만 청구된다.</a:t>
+            </a:r>
+          </a:p>
+          <a:p>
+            <a:r>
+              <a:t>이 정책의 값은 회귀 테스트로 고정한다. 실제 품질 효과는 미측정이다.</a:t>
+            </a:r>
+          </a:p>
+          <a:p>
+            <a:r>
+              <a:t>근거: agent_setup/router.py</a:t>
+            </a:r>
+          </a:p>
+          <a:p>
+            <a:r>
+              <a:t>증거 범위: 정책 A</a:t>
             </a:r>
           </a:p>
         </p:txBody>
@@ -2054,32 +2418,27 @@
           <a:lstStyle/>
           <a:p>
             <a:r>
-              <a:t>고정 발화를 두 정책으로 처리했을 때의 지출 차이다. 실제 A/B 실측이 아니다.</a:t>
-            </a:r>
-          </a:p>
-          <a:p>
-            <a:r>
-              <a:t>'12배' 같은 큰 수치는 대조군을 최상위 모델로 잡았을 때만 나온다 — 그 조건을 말하지 않으면 과장이 된다.</a:t>
-            </a:r>
-          </a:p>
-          <a:p>
-            <a:r>
-              <a:t>1턴·2턴처럼 짧은 리워크에서도 이득이 나는지가 도입 판단의 핵심이다.</a:t>
-            </a:r>
-          </a:p>
-          <a:p>
-            <a:r>
-              <a:t>이 값은 정책 지출 모형의 재생값이다. respec 경로는 실행을 하지 않으므로 지출이 늘지 않는다.</a:t>
-            </a:r>
-          </a:p>
-          <a:p>
-            <a:r>
-              <a:t>근거: analysis/lean_vs_full.py</a:t>
-            </a:r>
-          </a:p>
-          <a:p>
-            <a:r>
-              <a:t>증거 범위: 정책 시나리오 재생</a:t>
+              <a:t>과거 '0/5 → 4/5'로 소개했던 수치는 원자료가 없어 철회했다. 지금 값은 저장 발화 재생 결과다.</a:t>
+            </a:r>
+          </a:p>
+          <a:p>
+            <a:r>
+              <a:t>재생은 가정 없는 재현이지만 표본이 짧다(6턴). 분류 정확도를 보장하지 않는다.</a:t>
+            </a:r>
+          </a:p>
+          <a:p>
+            <a:r>
+              <a:t>분류가 애매하면 escalate가 아니라 질문을 반환하도록 설계했다.</a:t>
+            </a:r>
+          </a:p>
+          <a:p>
+            <a:r>
+              <a:t>근거: analysis/replay_logs.py</a:t>
+            </a:r>
+          </a:p>
+          <a:p>
+            <a:r>
+              <a:t>증거 범위: 정책 B (로그 재생)</a:t>
             </a:r>
           </a:p>
         </p:txBody>
@@ -5596,7 +5955,7 @@
                 <a:ea typeface="NanumGothic"/>
                 <a:cs typeface="NanumGothic"/>
               </a:rPr>
-              <a:t>상태 관리</a:t>
+              <a:t>순차 시나리오</a:t>
             </a:r>
           </a:p>
         </p:txBody>
@@ -5632,7 +5991,7 @@
                 <a:ea typeface="NanumGothic"/>
                 <a:cs typeface="NanumGothic"/>
               </a:rPr>
-              <a:t>상태를 작업별로 분리한다</a:t>
+              <a:t>레버는 곱해진다</a:t>
             </a:r>
           </a:p>
         </p:txBody>
@@ -5668,7 +6027,7 @@
                 <a:ea typeface="NanumGothic"/>
                 <a:cs typeface="NanumGothic"/>
               </a:rPr>
-              <a:t>새 작업은 새 상태로 시작</a:t>
+              <a:t>85.825% (잔여 14%)</a:t>
             </a:r>
           </a:p>
         </p:txBody>
@@ -5704,7 +6063,7 @@
                 <a:ea typeface="NanumGothic"/>
                 <a:cs typeface="NanumGothic"/>
               </a:rPr>
-              <a:t>task_id별로 의도 이력·시도 횟수·범위를 추적한다</a:t>
+              <a:t>시맨틱 캐시 → 라우팅 → 캐싱 → verbosity/effort → 배치</a:t>
             </a:r>
           </a:p>
         </p:txBody>
@@ -5740,7 +6099,7 @@
                 <a:ea typeface="NanumGothic"/>
                 <a:cs typeface="NanumGothic"/>
               </a:rPr>
-              <a:t>앞 작업의 반려 상태가 새 작업으로 새지 않는다</a:t>
+              <a:t>잔여 비용에 순차 적용한 산술 결과</a:t>
             </a:r>
           </a:p>
         </p:txBody>
@@ -5776,7 +6135,7 @@
                 <a:ea typeface="NanumGothic"/>
                 <a:cs typeface="NanumGothic"/>
               </a:rPr>
-              <a:t>초기화 전 내부 호출은 명시적 오류로 처리</a:t>
+              <a:t>레버 간 중복·상호작용은 검증하지 않았다</a:t>
             </a:r>
           </a:p>
         </p:txBody>
@@ -5812,7 +6171,7 @@
                 <a:ea typeface="NanumGothic"/>
                 <a:cs typeface="NanumGothic"/>
               </a:rPr>
-              <a:t>agent_setup/orchestrator.py</a:t>
+              <a:t>experiments/exp06_other_levers.py</a:t>
             </a:r>
           </a:p>
         </p:txBody>
@@ -5989,7 +6348,7 @@
                 <a:ea typeface="NanumGothic"/>
                 <a:cs typeface="NanumGothic"/>
               </a:rPr>
-              <a:t>비용 회귀</a:t>
+              <a:t>상태 관리</a:t>
             </a:r>
           </a:p>
         </p:txBody>
@@ -6025,7 +6384,7 @@
                 <a:ea typeface="NanumGothic"/>
                 <a:cs typeface="NanumGothic"/>
               </a:rPr>
-              <a:t>진단과 적용은 같은 함수로 계산한다</a:t>
+              <a:t>상태를 작업별로 분리한다</a:t>
             </a:r>
           </a:p>
         </p:txBody>
@@ -6061,7 +6420,7 @@
                 <a:ea typeface="NanumGothic"/>
                 <a:cs typeface="NanumGothic"/>
               </a:rPr>
-              <a:t>$0.05875 (같은 단계·같은 가정)</a:t>
+              <a:t>새 작업은 새 상태로 시작</a:t>
             </a:r>
           </a:p>
         </p:txBody>
@@ -6097,7 +6456,7 @@
                 <a:ea typeface="NanumGothic"/>
                 <a:cs typeface="NanumGothic"/>
               </a:rPr>
-              <a:t>범위 · 리셋 · 출력 상한 · 진단/적용을 한 곳에서 계산</a:t>
+              <a:t>task_id별로 의도 이력·시도 횟수·범위를 추적한다</a:t>
             </a:r>
           </a:p>
         </p:txBody>
@@ -6133,7 +6492,7 @@
                 <a:ea typeface="NanumGothic"/>
                 <a:cs typeface="NanumGothic"/>
               </a:rPr>
-              <a:t>두 경로가 같은 값을 내는지 테스트로 고정</a:t>
+              <a:t>앞 작업의 반려 상태가 새 작업으로 새지 않는다</a:t>
             </a:r>
           </a:p>
         </p:txBody>
@@ -6169,7 +6528,7 @@
                 <a:ea typeface="NanumGothic"/>
                 <a:cs typeface="NanumGothic"/>
               </a:rPr>
-              <a:t>티어 단가와 고정 입력 예산은 시나리오 값</a:t>
+              <a:t>초기화 전 내부 호출은 명시적 오류로 처리</a:t>
             </a:r>
           </a:p>
         </p:txBody>
@@ -6205,7 +6564,7 @@
                 <a:ea typeface="NanumGothic"/>
                 <a:cs typeface="NanumGothic"/>
               </a:rPr>
-              <a:t>agent_setup/router.py · tests/</a:t>
+              <a:t>agent_setup/orchestrator.py</a:t>
             </a:r>
           </a:p>
         </p:txBody>
@@ -6382,7 +6741,7 @@
                 <a:ea typeface="NanumGothic"/>
                 <a:cs typeface="NanumGothic"/>
               </a:rPr>
-              <a:t>비용 산식</a:t>
+              <a:t>비용 회귀</a:t>
             </a:r>
           </a:p>
         </p:txBody>
@@ -6418,7 +6777,7 @@
                 <a:ea typeface="NanumGothic"/>
                 <a:cs typeface="NanumGothic"/>
               </a:rPr>
-              <a:t>입력 증가분을 두 번 더하지 않는다</a:t>
+              <a:t>진단과 적용은 같은 함수로 계산한다</a:t>
             </a:r>
           </a:p>
         </p:txBody>
@@ -6454,7 +6813,7 @@
                 <a:ea typeface="NanumGothic"/>
                 <a:cs typeface="NanumGothic"/>
               </a:rPr>
-              <a:t>4,700을 한 번만 더한다</a:t>
+              <a:t>$0.05875 (같은 단계·같은 가정)</a:t>
             </a:r>
           </a:p>
         </p:txBody>
@@ -6490,7 +6849,7 @@
                 <a:ea typeface="NanumGothic"/>
                 <a:cs typeface="NanumGothic"/>
               </a:rPr>
-              <a:t>증가분은 직전 출력과 사용자 발화를 포함한 총량</a:t>
+              <a:t>범위 · 리셋 · 출력 상한 · 진단/적용을 한 곳에서 계산</a:t>
             </a:r>
           </a:p>
         </p:txBody>
@@ -6526,7 +6885,7 @@
                 <a:ea typeface="NanumGothic"/>
                 <a:cs typeface="NanumGothic"/>
               </a:rPr>
-              <a:t>출력 토큰을 다시 더하면 이중 계상이 된다</a:t>
+              <a:t>두 경로가 같은 값을 내는지 테스트로 고정</a:t>
             </a:r>
           </a:p>
         </p:txBody>
@@ -6562,7 +6921,7 @@
                 <a:ea typeface="NanumGothic"/>
                 <a:cs typeface="NanumGothic"/>
               </a:rPr>
-              <a:t>누적 예: 1,419 → 6,119 → 10,819</a:t>
+              <a:t>티어 단가와 고정 입력 예산은 시나리오 값</a:t>
             </a:r>
           </a:p>
         </p:txBody>
@@ -6598,7 +6957,7 @@
                 <a:ea typeface="NanumGothic"/>
                 <a:cs typeface="NanumGothic"/>
               </a:rPr>
-              <a:t>analysis/calibrate_growth.py</a:t>
+              <a:t>agent_setup/router.py · tests/</a:t>
             </a:r>
           </a:p>
         </p:txBody>
@@ -6775,7 +7134,7 @@
                 <a:ea typeface="NanumGothic"/>
                 <a:cs typeface="NanumGothic"/>
               </a:rPr>
-              <a:t>캐싱 배선</a:t>
+              <a:t>비용 산식</a:t>
             </a:r>
           </a:p>
         </p:txBody>
@@ -6811,7 +7170,7 @@
                 <a:ea typeface="NanumGothic"/>
                 <a:cs typeface="NanumGothic"/>
               </a:rPr>
-              <a:t>고정 접두부를 캐시에 태운다</a:t>
+              <a:t>입력 증가분을 두 번 더하지 않는다</a:t>
             </a:r>
           </a:p>
         </p:txBody>
@@ -6847,7 +7206,7 @@
                 <a:ea typeface="NanumGothic"/>
                 <a:cs typeface="NanumGothic"/>
               </a:rPr>
-              <a:t>규약·시스템 프롬프트는 매 턴 그대로</a:t>
+              <a:t>4,700을 한 번만 더한다</a:t>
             </a:r>
           </a:p>
         </p:txBody>
@@ -6883,7 +7242,7 @@
                 <a:ea typeface="NanumGothic"/>
                 <a:cs typeface="NanumGothic"/>
               </a:rPr>
-              <a:t>툴 정의와 규약 파일을 맨 앞 고정 블록으로 모은다</a:t>
+              <a:t>증가분은 직전 출력과 사용자 발화를 포함한 총량</a:t>
             </a:r>
           </a:p>
         </p:txBody>
@@ -6919,7 +7278,7 @@
                 <a:ea typeface="NanumGothic"/>
                 <a:cs typeface="NanumGothic"/>
               </a:rPr>
-              <a:t>변하는 값(사용자 입력·타임스탬프)은 뒤로 보낸다</a:t>
+              <a:t>출력 토큰을 다시 더하면 이중 계상이 된다</a:t>
             </a:r>
           </a:p>
         </p:txBody>
@@ -6955,7 +7314,7 @@
                 <a:ea typeface="NanumGothic"/>
                 <a:cs typeface="NanumGothic"/>
               </a:rPr>
-              <a:t>적중률을 대시보드로 본다</a:t>
+              <a:t>누적 예: 1,419 → 6,119 → 10,819</a:t>
             </a:r>
           </a:p>
         </p:txBody>
@@ -6991,7 +7350,7 @@
                 <a:ea typeface="NanumGothic"/>
                 <a:cs typeface="NanumGothic"/>
               </a:rPr>
-              <a:t>agent_setup/config.py</a:t>
+              <a:t>analysis/calibrate_growth.py</a:t>
             </a:r>
           </a:p>
         </p:txBody>
@@ -7168,7 +7527,7 @@
                 <a:ea typeface="NanumGothic"/>
                 <a:cs typeface="NanumGothic"/>
               </a:rPr>
-              <a:t>비용 시나리오 (100콜)</a:t>
+              <a:t>캐싱 배선</a:t>
             </a:r>
           </a:p>
         </p:txBody>
@@ -7204,7 +7563,7 @@
                 <a:ea typeface="NanumGothic"/>
                 <a:cs typeface="NanumGothic"/>
               </a:rPr>
-              <a:t>캐싱 · 오늘 바로 켤 수 있는 레버</a:t>
+              <a:t>고정 접두부를 캐시에 태운다</a:t>
             </a:r>
           </a:p>
         </p:txBody>
@@ -7240,7 +7599,7 @@
                 <a:ea typeface="NanumGothic"/>
                 <a:cs typeface="NanumGothic"/>
               </a:rPr>
-              <a:t>$8.55 → $3.22 (62.4% 절감)</a:t>
+              <a:t>규약·시스템 프롬프트는 매 턴 그대로</a:t>
             </a:r>
           </a:p>
         </p:txBody>
@@ -7276,7 +7635,7 @@
                 <a:ea typeface="NanumGothic"/>
                 <a:cs typeface="NanumGothic"/>
               </a:rPr>
-              <a:t>쓰기 프리미엄은 두 번째 호출에서 회수된다</a:t>
+              <a:t>툴 정의와 규약 파일을 맨 앞 고정 블록으로 모은다</a:t>
             </a:r>
           </a:p>
         </p:txBody>
@@ -7312,7 +7671,7 @@
                 <a:ea typeface="NanumGothic"/>
                 <a:cs typeface="NanumGothic"/>
               </a:rPr>
-              <a:t>고정 블록(시스템 · 툴 정의 · 규약)을 맨 앞으로 모은다</a:t>
+              <a:t>변하는 값(사용자 입력·타임스탬프)은 뒤로 보낸다</a:t>
             </a:r>
           </a:p>
         </p:txBody>
@@ -7348,7 +7707,7 @@
                 <a:ea typeface="NanumGothic"/>
                 <a:cs typeface="NanumGothic"/>
               </a:rPr>
-              <a:t>최소 길이를 확인한다 — Haiku 4.5는 4,096토큰</a:t>
+              <a:t>적중률을 대시보드로 본다</a:t>
             </a:r>
           </a:p>
         </p:txBody>
@@ -7384,7 +7743,7 @@
                 <a:ea typeface="NanumGothic"/>
                 <a:cs typeface="NanumGothic"/>
               </a:rPr>
-              <a:t>experiments/exp03_prompt_caching.py</a:t>
+              <a:t>agent_setup/config.py</a:t>
             </a:r>
           </a:p>
         </p:txBody>
@@ -7597,7 +7956,7 @@
                 <a:ea typeface="NanumGothic"/>
                 <a:cs typeface="NanumGothic"/>
               </a:rPr>
-              <a:t>긴 세션은 컴팩션으로 접는다</a:t>
+              <a:t>원칙 5 · 턴 수가 비용을 지배한다</a:t>
             </a:r>
           </a:p>
         </p:txBody>
@@ -7633,7 +7992,7 @@
                 <a:ea typeface="NanumGothic"/>
                 <a:cs typeface="NanumGothic"/>
               </a:rPr>
-              <a:t>$2.32 → $0.93 (60% 절감)</a:t>
+              <a:t>턴 2배 → 비용 3.1배</a:t>
             </a:r>
           </a:p>
         </p:txBody>
@@ -7669,7 +8028,7 @@
                 <a:ea typeface="NanumGothic"/>
                 <a:cs typeface="NanumGothic"/>
               </a:rPr>
-              <a:t>10턴마다 접으면 $1.23 (47% 절감)</a:t>
+              <a:t>5턴 $0.26 · 20턴 $2.32 · 50턴 $12.09</a:t>
             </a:r>
           </a:p>
         </p:txBody>
@@ -7705,7 +8064,7 @@
                 <a:ea typeface="NanumGothic"/>
                 <a:cs typeface="NanumGothic"/>
               </a:rPr>
-              <a:t>너무 자주 접으면 요약 호출이 이득을 먹는다</a:t>
+              <a:t>안 쓰는 코드도 매 턴 다시 실려 과금된다 (YAGNI)</a:t>
             </a:r>
           </a:p>
         </p:txBody>
@@ -7741,7 +8100,7 @@
                 <a:ea typeface="NanumGothic"/>
                 <a:cs typeface="NanumGothic"/>
               </a:rPr>
-              <a:t>최적 주기는 세션 길이와 요약 비용으로 정해진다</a:t>
+              <a:t>컨텍스트는 길이보다 '반복'이 비쌉니다</a:t>
             </a:r>
           </a:p>
         </p:txBody>
@@ -7954,7 +8313,7 @@
                 <a:ea typeface="NanumGothic"/>
                 <a:cs typeface="NanumGothic"/>
               </a:rPr>
-              <a:t>경로 분리</a:t>
+              <a:t>비용 시나리오</a:t>
             </a:r>
           </a:p>
         </p:txBody>
@@ -7967,7 +8326,7 @@
         </p:nvSpPr>
         <p:spPr>
           <a:xfrm>
-            <a:off x="640080" y="822960"/>
+            <a:off x="640080" y="566928"/>
             <a:ext cx="10881360" cy="822960"/>
           </a:xfrm>
           <a:prstGeom prst="rect">
@@ -7990,7 +8349,7 @@
                 <a:ea typeface="NanumGothic"/>
                 <a:cs typeface="NanumGothic"/>
               </a:rPr>
-              <a:t>웹 세션으로 넘기는 경로</a:t>
+              <a:t>긴 세션일수록 가파르다</a:t>
             </a:r>
           </a:p>
         </p:txBody>
@@ -8003,7 +8362,7 @@
         </p:nvSpPr>
         <p:spPr>
           <a:xfrm>
-            <a:off x="640080" y="1783080"/>
+            <a:off x="640080" y="1261872"/>
             <a:ext cx="10881360" cy="777240"/>
           </a:xfrm>
           <a:prstGeom prst="rect">
@@ -8026,7 +8385,7 @@
                 <a:ea typeface="NanumGothic"/>
                 <a:cs typeface="NanumGothic"/>
               </a:rPr>
-              <a:t>구독제 경로는 증분 API 비용 0으로 모델링</a:t>
+              <a:t>5턴 $0.26 → 50턴 $12.09</a:t>
             </a:r>
           </a:p>
         </p:txBody>
@@ -8039,7 +8398,7 @@
         </p:nvSpPr>
         <p:spPr>
           <a:xfrm>
-            <a:off x="777240" y="2862072"/>
+            <a:off x="777240" y="2029968"/>
             <a:ext cx="10652760" cy="612648"/>
           </a:xfrm>
           <a:prstGeom prst="rect">
@@ -8062,7 +8421,7 @@
                 <a:ea typeface="NanumGothic"/>
                 <a:cs typeface="NanumGothic"/>
               </a:rPr>
-              <a:t>조사·정리는 웹 세션에서, 코드는 API에서</a:t>
+              <a:t>20턴에 컴팩션을 걸면 $0.93 (60% 절감)</a:t>
             </a:r>
           </a:p>
         </p:txBody>
@@ -8075,7 +8434,7 @@
         </p:nvSpPr>
         <p:spPr>
           <a:xfrm>
-            <a:off x="777240" y="3502152"/>
+            <a:off x="777240" y="2542032"/>
             <a:ext cx="10652760" cy="612648"/>
           </a:xfrm>
           <a:prstGeom prst="rect">
@@ -8098,56 +8457,80 @@
                 <a:ea typeface="NanumGothic"/>
                 <a:cs typeface="NanumGothic"/>
               </a:rPr>
-              <a:t>옮겨 붙일 때 수용 기준 형식을 그대로 쓴다</a:t>
-            </a:r>
-          </a:p>
-        </p:txBody>
-      </p:sp>
-      <p:sp>
-        <p:nvSpPr>
-          <p:cNvPr id="9" name="audit:body-2"/>
-          <p:cNvSpPr txBox="1"/>
-          <p:nvPr/>
-        </p:nvSpPr>
-        <p:spPr>
-          <a:xfrm>
-            <a:off x="777240" y="4142231"/>
-            <a:ext cx="10652760" cy="612648"/>
-          </a:xfrm>
-          <a:prstGeom prst="rect">
-            <a:avLst/>
-          </a:prstGeom>
-          <a:noFill/>
-        </p:spPr>
-        <p:txBody>
-          <a:bodyPr wrap="square" lIns="0" rIns="0" tIns="0" bIns="0">
-            <a:spAutoFit/>
-          </a:bodyPr>
-          <a:lstStyle/>
-          <a:p>
-            <a:r>
-              <a:rPr sz="1750" b="0">
-                <a:solidFill>
-                  <a:srgbClr val="ECF1F6"/>
-                </a:solidFill>
-                <a:latin typeface="NanumGothic"/>
-                <a:ea typeface="NanumGothic"/>
-                <a:cs typeface="NanumGothic"/>
-              </a:rPr>
-              <a:t>이 경로의 증분 종량 비용은 0으로 모델링한다</a:t>
-            </a:r>
-          </a:p>
-        </p:txBody>
-      </p:sp>
-      <p:sp>
-        <p:nvSpPr>
-          <p:cNvPr id="10" name="audit:source"/>
-          <p:cNvSpPr txBox="1"/>
-          <p:nvPr/>
-        </p:nvSpPr>
-        <p:spPr>
-          <a:xfrm>
-            <a:off x="640080" y="6080760"/>
+              <a:t>안 쓰는 코드도 매 턴 다시 실려 과금된다</a:t>
+            </a:r>
+          </a:p>
+        </p:txBody>
+      </p:sp>
+      <p:pic>
+        <p:nvPicPr>
+          <p:cNvPr id="9" name="Picture 8" descr="turns.png"/>
+          <p:cNvPicPr>
+            <a:picLocks noChangeAspect="1"/>
+          </p:cNvPicPr>
+          <p:nvPr/>
+        </p:nvPicPr>
+        <p:blipFill>
+          <a:blip r:embed="rId2"/>
+          <a:stretch>
+            <a:fillRect/>
+          </a:stretch>
+        </p:blipFill>
+        <p:spPr>
+          <a:xfrm>
+            <a:off x="777240" y="3101593"/>
+            <a:ext cx="10652760" cy="2959100"/>
+          </a:xfrm>
+          <a:prstGeom prst="rect">
+            <a:avLst/>
+          </a:prstGeom>
+        </p:spPr>
+      </p:pic>
+      <p:sp>
+        <p:nvSpPr>
+          <p:cNvPr id="10" name="audit:chart-caption"/>
+          <p:cNvSpPr txBox="1"/>
+          <p:nvPr/>
+        </p:nvSpPr>
+        <p:spPr>
+          <a:xfrm>
+            <a:off x="777240" y="6135624"/>
+            <a:ext cx="10652760" cy="237744"/>
+          </a:xfrm>
+          <a:prstGeom prst="rect">
+            <a:avLst/>
+          </a:prstGeom>
+          <a:noFill/>
+        </p:spPr>
+        <p:txBody>
+          <a:bodyPr wrap="square" lIns="0" rIns="0" tIns="0" bIns="0">
+            <a:spAutoFit/>
+          </a:bodyPr>
+          <a:lstStyle/>
+          <a:p>
+            <a:r>
+              <a:rPr sz="950" b="0">
+                <a:solidFill>
+                  <a:srgbClr val="93A4B5"/>
+                </a:solidFill>
+                <a:latin typeface="NanumGothic"/>
+                <a:ea typeface="NanumGothic"/>
+                <a:cs typeface="NanumGothic"/>
+              </a:rPr>
+              <a:t>그래프 · 세션 비용 (USD) · turns.png</a:t>
+            </a:r>
+          </a:p>
+        </p:txBody>
+      </p:sp>
+      <p:sp>
+        <p:nvSpPr>
+          <p:cNvPr id="11" name="audit:source"/>
+          <p:cNvSpPr txBox="1"/>
+          <p:nvPr/>
+        </p:nvSpPr>
+        <p:spPr>
+          <a:xfrm>
+            <a:off x="777240" y="6382512"/>
             <a:ext cx="10972800" cy="274320"/>
           </a:xfrm>
           <a:prstGeom prst="rect">
@@ -8170,20 +8553,20 @@
                 <a:ea typeface="NanumGothic"/>
                 <a:cs typeface="NanumGothic"/>
               </a:rPr>
-              <a:t>lab/pricing.py TIER_SCENARIOS</a:t>
-            </a:r>
-          </a:p>
-        </p:txBody>
-      </p:sp>
-      <p:sp>
-        <p:nvSpPr>
-          <p:cNvPr id="11" name="audit:footer"/>
-          <p:cNvSpPr txBox="1"/>
-          <p:nvPr/>
-        </p:nvSpPr>
-        <p:spPr>
-          <a:xfrm>
-            <a:off x="640080" y="6419088"/>
+              <a:t>experiments/exp04_agent_loop_sdd.py</a:t>
+            </a:r>
+          </a:p>
+        </p:txBody>
+      </p:sp>
+      <p:sp>
+        <p:nvSpPr>
+          <p:cNvPr id="12" name="audit:footer"/>
+          <p:cNvSpPr txBox="1"/>
+          <p:nvPr/>
+        </p:nvSpPr>
+        <p:spPr>
+          <a:xfrm>
+            <a:off x="777240" y="6583680"/>
             <a:ext cx="10972800" cy="256032"/>
           </a:xfrm>
           <a:prstGeom prst="rect">
@@ -8347,7 +8730,7 @@
                 <a:ea typeface="NanumGothic"/>
                 <a:cs typeface="NanumGothic"/>
               </a:rPr>
-              <a:t>운영</a:t>
+              <a:t>비용 시나리오 (100콜)</a:t>
             </a:r>
           </a:p>
         </p:txBody>
@@ -8383,7 +8766,7 @@
                 <a:ea typeface="NanumGothic"/>
                 <a:cs typeface="NanumGothic"/>
               </a:rPr>
-              <a:t>적용 순서와 측정 루프</a:t>
+              <a:t>캐싱 · 오늘 바로 켤 수 있는 레버</a:t>
             </a:r>
           </a:p>
         </p:txBody>
@@ -8419,7 +8802,7 @@
                 <a:ea typeface="NanumGothic"/>
                 <a:cs typeface="NanumGothic"/>
               </a:rPr>
-              <a:t>켜고 → 재고 → 고친다</a:t>
+              <a:t>$8.55 → $3.22 (62.4% 절감)</a:t>
             </a:r>
           </a:p>
         </p:txBody>
@@ -8455,7 +8838,7 @@
                 <a:ea typeface="NanumGothic"/>
                 <a:cs typeface="NanumGothic"/>
               </a:rPr>
-              <a:t>되돌리기 쉬운 것부터 켠다 (캐시 · effort · 배치)</a:t>
+              <a:t>쓰기 프리미엄은 두 번째 호출에서 회수된다</a:t>
             </a:r>
           </a:p>
         </p:txBody>
@@ -8491,7 +8874,7 @@
                 <a:ea typeface="NanumGothic"/>
                 <a:cs typeface="NanumGothic"/>
               </a:rPr>
-              <a:t>적중률·reasoning 비율·턴 수를 주간으로 본다</a:t>
+              <a:t>고정 블록(시스템 · 툴 정의 · 규약)을 맨 앞으로 모은다</a:t>
             </a:r>
           </a:p>
         </p:txBody>
@@ -8527,7 +8910,7 @@
                 <a:ea typeface="NanumGothic"/>
                 <a:cs typeface="NanumGothic"/>
               </a:rPr>
-              <a:t>절감률 목표가 아니라 품질 게이트를 먼저 정한다</a:t>
+              <a:t>최소 길이를 확인한다 — Haiku 4.5는 4,096토큰</a:t>
             </a:r>
           </a:p>
         </p:txBody>
@@ -8563,7 +8946,7 @@
                 <a:ea typeface="NanumGothic"/>
                 <a:cs typeface="NanumGothic"/>
               </a:rPr>
-              <a:t>agent_setup/antigravity/AGENTS.md · docs/CORRECTIONS.md</a:t>
+              <a:t>experiments/exp03_prompt_caching.py</a:t>
             </a:r>
           </a:p>
         </p:txBody>
@@ -8740,7 +9123,7 @@
                 <a:ea typeface="NanumGothic"/>
                 <a:cs typeface="NanumGothic"/>
               </a:rPr>
-              <a:t>마무리</a:t>
+              <a:t>비용 시나리오 (100콜)</a:t>
             </a:r>
           </a:p>
         </p:txBody>
@@ -8753,7 +9136,7 @@
         </p:nvSpPr>
         <p:spPr>
           <a:xfrm>
-            <a:off x="640080" y="822960"/>
+            <a:off x="640080" y="566928"/>
             <a:ext cx="10881360" cy="822960"/>
           </a:xfrm>
           <a:prstGeom prst="rect">
@@ -8776,7 +9159,7 @@
                 <a:ea typeface="NanumGothic"/>
                 <a:cs typeface="NanumGothic"/>
               </a:rPr>
-              <a:t>마무리 · 오늘 붙일 것 하나</a:t>
+              <a:t>캐시는 조건이 맞을 때만 이득</a:t>
             </a:r>
           </a:p>
         </p:txBody>
@@ -8789,7 +9172,7 @@
         </p:nvSpPr>
         <p:spPr>
           <a:xfrm>
-            <a:off x="640080" y="1783080"/>
+            <a:off x="640080" y="1261872"/>
             <a:ext cx="10881360" cy="777240"/>
           </a:xfrm>
           <a:prstGeom prst="rect">
@@ -8812,7 +9195,7 @@
                 <a:ea typeface="NanumGothic"/>
                 <a:cs typeface="NanumGothic"/>
               </a:rPr>
-              <a:t>라우터 한 줄, 캐시 한 블록</a:t>
+              <a:t>$8.55 → $3.219 (-62%)</a:t>
             </a:r>
           </a:p>
         </p:txBody>
@@ -8825,7 +9208,7 @@
         </p:nvSpPr>
         <p:spPr>
           <a:xfrm>
-            <a:off x="777240" y="2862072"/>
+            <a:off x="777240" y="2029968"/>
             <a:ext cx="10652760" cy="612648"/>
           </a:xfrm>
           <a:prstGeom prst="rect">
@@ -8848,7 +9231,7 @@
                 <a:ea typeface="NanumGothic"/>
                 <a:cs typeface="NanumGothic"/>
               </a:rPr>
-              <a:t>규약 파일을 프리픽스로 고정한다</a:t>
+              <a:t>프리픽스를 매번 바꾸면 $10.05 (+17.5%)</a:t>
             </a:r>
           </a:p>
         </p:txBody>
@@ -8861,7 +9244,7 @@
         </p:nvSpPr>
         <p:spPr>
           <a:xfrm>
-            <a:off x="777240" y="3502152"/>
+            <a:off x="777240" y="2542032"/>
             <a:ext cx="10652760" cy="612648"/>
           </a:xfrm>
           <a:prstGeom prst="rect">
@@ -8884,20 +9267,365 @@
                 <a:ea typeface="NanumGothic"/>
                 <a:cs typeface="NanumGothic"/>
               </a:rPr>
-              <a:t>기본 티어를 한 단계 낮추고 실패 시 올린다</a:t>
-            </a:r>
-          </a:p>
-        </p:txBody>
-      </p:sp>
-      <p:sp>
-        <p:nvSpPr>
-          <p:cNvPr id="9" name="audit:body-2"/>
-          <p:cNvSpPr txBox="1"/>
-          <p:nvPr/>
-        </p:nvSpPr>
-        <p:spPr>
-          <a:xfrm>
-            <a:off x="777240" y="4142231"/>
+              <a:t>고정 블록을 앞으로 모아 적중률을 올린다</a:t>
+            </a:r>
+          </a:p>
+        </p:txBody>
+      </p:sp>
+      <p:pic>
+        <p:nvPicPr>
+          <p:cNvPr id="9" name="Picture 8" descr="cache.png"/>
+          <p:cNvPicPr>
+            <a:picLocks noChangeAspect="1"/>
+          </p:cNvPicPr>
+          <p:nvPr/>
+        </p:nvPicPr>
+        <p:blipFill>
+          <a:blip r:embed="rId2"/>
+          <a:stretch>
+            <a:fillRect/>
+          </a:stretch>
+        </p:blipFill>
+        <p:spPr>
+          <a:xfrm>
+            <a:off x="777240" y="3101593"/>
+            <a:ext cx="10652760" cy="2959100"/>
+          </a:xfrm>
+          <a:prstGeom prst="rect">
+            <a:avLst/>
+          </a:prstGeom>
+        </p:spPr>
+      </p:pic>
+      <p:sp>
+        <p:nvSpPr>
+          <p:cNvPr id="10" name="audit:chart-caption"/>
+          <p:cNvSpPr txBox="1"/>
+          <p:nvPr/>
+        </p:nvSpPr>
+        <p:spPr>
+          <a:xfrm>
+            <a:off x="777240" y="6135624"/>
+            <a:ext cx="10652760" cy="237744"/>
+          </a:xfrm>
+          <a:prstGeom prst="rect">
+            <a:avLst/>
+          </a:prstGeom>
+          <a:noFill/>
+        </p:spPr>
+        <p:txBody>
+          <a:bodyPr wrap="square" lIns="0" rIns="0" tIns="0" bIns="0">
+            <a:spAutoFit/>
+          </a:bodyPr>
+          <a:lstStyle/>
+          <a:p>
+            <a:r>
+              <a:rPr sz="950" b="0">
+                <a:solidFill>
+                  <a:srgbClr val="93A4B5"/>
+                </a:solidFill>
+                <a:latin typeface="NanumGothic"/>
+                <a:ea typeface="NanumGothic"/>
+                <a:cs typeface="NanumGothic"/>
+              </a:rPr>
+              <a:t>그래프 · 100콜 비용 (USD) · cache.png</a:t>
+            </a:r>
+          </a:p>
+        </p:txBody>
+      </p:sp>
+      <p:sp>
+        <p:nvSpPr>
+          <p:cNvPr id="11" name="audit:source"/>
+          <p:cNvSpPr txBox="1"/>
+          <p:nvPr/>
+        </p:nvSpPr>
+        <p:spPr>
+          <a:xfrm>
+            <a:off x="777240" y="6382512"/>
+            <a:ext cx="10972800" cy="274320"/>
+          </a:xfrm>
+          <a:prstGeom prst="rect">
+            <a:avLst/>
+          </a:prstGeom>
+          <a:noFill/>
+        </p:spPr>
+        <p:txBody>
+          <a:bodyPr wrap="square" lIns="0" rIns="0" tIns="0" bIns="0">
+            <a:spAutoFit/>
+          </a:bodyPr>
+          <a:lstStyle/>
+          <a:p>
+            <a:r>
+              <a:rPr sz="1000" b="0">
+                <a:solidFill>
+                  <a:srgbClr val="93A4B5"/>
+                </a:solidFill>
+                <a:latin typeface="NanumGothic"/>
+                <a:ea typeface="NanumGothic"/>
+                <a:cs typeface="NanumGothic"/>
+              </a:rPr>
+              <a:t>experiments/exp03_prompt_caching.py</a:t>
+            </a:r>
+          </a:p>
+        </p:txBody>
+      </p:sp>
+      <p:sp>
+        <p:nvSpPr>
+          <p:cNvPr id="12" name="audit:footer"/>
+          <p:cNvSpPr txBox="1"/>
+          <p:nvPr/>
+        </p:nvSpPr>
+        <p:spPr>
+          <a:xfrm>
+            <a:off x="777240" y="6583680"/>
+            <a:ext cx="10972800" cy="256032"/>
+          </a:xfrm>
+          <a:prstGeom prst="rect">
+            <a:avLst/>
+          </a:prstGeom>
+          <a:noFill/>
+        </p:spPr>
+        <p:txBody>
+          <a:bodyPr wrap="square" lIns="0" rIns="0" tIns="0" bIns="0">
+            <a:spAutoFit/>
+          </a:bodyPr>
+          <a:lstStyle/>
+          <a:p>
+            <a:r>
+              <a:rPr sz="1000" b="0">
+                <a:solidFill>
+                  <a:srgbClr val="93A4B5"/>
+                </a:solidFill>
+                <a:latin typeface="NanumGothic"/>
+                <a:ea typeface="NanumGothic"/>
+                <a:cs typeface="NanumGothic"/>
+              </a:rPr>
+              <a:t>2026-09-20  ·  근거와 조건을 함께 인용</a:t>
+            </a:r>
+          </a:p>
+        </p:txBody>
+      </p:sp>
+    </p:spTree>
+  </p:cSld>
+  <p:clrMapOvr>
+    <a:masterClrMapping/>
+  </p:clrMapOvr>
+</p:sld>
+</file>
+
+<file path=ppt/slides/slide19.xml><?xml version="1.0" encoding="utf-8"?>
+<p:sld xmlns:a="http://schemas.openxmlformats.org/drawingml/2006/main" xmlns:p="http://schemas.openxmlformats.org/presentationml/2006/main" xmlns:r="http://schemas.openxmlformats.org/officeDocument/2006/relationships">
+  <p:cSld>
+    <p:bg>
+      <p:bgPr>
+        <a:solidFill>
+          <a:srgbClr val="0E141B"/>
+        </a:solidFill>
+        <a:effectLst/>
+      </p:bgPr>
+    </p:bg>
+    <p:spTree>
+      <p:nvGrpSpPr>
+        <p:cNvPr id="1" name=""/>
+        <p:cNvGrpSpPr/>
+        <p:nvPr/>
+      </p:nvGrpSpPr>
+      <p:grpSpPr/>
+      <p:sp>
+        <p:nvSpPr>
+          <p:cNvPr id="2" name="Rectangle 1"/>
+          <p:cNvSpPr/>
+          <p:nvPr/>
+        </p:nvSpPr>
+        <p:spPr>
+          <a:xfrm>
+            <a:off x="0" y="0"/>
+            <a:ext cx="100584" cy="6858000"/>
+          </a:xfrm>
+          <a:prstGeom prst="rect">
+            <a:avLst/>
+          </a:prstGeom>
+          <a:solidFill>
+            <a:srgbClr val="36D399"/>
+          </a:solidFill>
+          <a:ln>
+            <a:noFill/>
+          </a:ln>
+        </p:spPr>
+        <p:style>
+          <a:lnRef idx="1">
+            <a:schemeClr val="accent1"/>
+          </a:lnRef>
+          <a:fillRef idx="3">
+            <a:schemeClr val="accent1"/>
+          </a:fillRef>
+          <a:effectRef idx="2">
+            <a:schemeClr val="accent1"/>
+          </a:effectRef>
+          <a:fontRef idx="minor">
+            <a:schemeClr val="lt1"/>
+          </a:fontRef>
+        </p:style>
+        <p:txBody>
+          <a:bodyPr rtlCol="0" anchor="ctr"/>
+          <a:lstStyle/>
+          <a:p>
+            <a:pPr algn="ctr"/>
+          </a:p>
+        </p:txBody>
+      </p:sp>
+      <p:sp>
+        <p:nvSpPr>
+          <p:cNvPr id="3" name="audit:index"/>
+          <p:cNvSpPr txBox="1"/>
+          <p:nvPr/>
+        </p:nvSpPr>
+        <p:spPr>
+          <a:xfrm>
+            <a:off x="640080" y="274320"/>
+            <a:ext cx="4572000" cy="274320"/>
+          </a:xfrm>
+          <a:prstGeom prst="rect">
+            <a:avLst/>
+          </a:prstGeom>
+          <a:noFill/>
+        </p:spPr>
+        <p:txBody>
+          <a:bodyPr wrap="square" lIns="0" rIns="0" tIns="0" bIns="0">
+            <a:spAutoFit/>
+          </a:bodyPr>
+          <a:lstStyle/>
+          <a:p>
+            <a:r>
+              <a:rPr sz="1100" b="0">
+                <a:solidFill>
+                  <a:srgbClr val="93A4B5"/>
+                </a:solidFill>
+                <a:latin typeface="NanumGothic"/>
+                <a:ea typeface="NanumGothic"/>
+                <a:cs typeface="NanumGothic"/>
+              </a:rPr>
+              <a:t>TOKEN COST LAB  /  19</a:t>
+            </a:r>
+          </a:p>
+        </p:txBody>
+      </p:sp>
+      <p:sp>
+        <p:nvSpPr>
+          <p:cNvPr id="4" name="audit:scope"/>
+          <p:cNvSpPr txBox="1"/>
+          <p:nvPr/>
+        </p:nvSpPr>
+        <p:spPr>
+          <a:xfrm>
+            <a:off x="5760720" y="274320"/>
+            <a:ext cx="5760720" cy="274320"/>
+          </a:xfrm>
+          <a:prstGeom prst="rect">
+            <a:avLst/>
+          </a:prstGeom>
+          <a:noFill/>
+        </p:spPr>
+        <p:txBody>
+          <a:bodyPr wrap="square" lIns="0" rIns="0" tIns="0" bIns="0">
+            <a:spAutoFit/>
+          </a:bodyPr>
+          <a:lstStyle/>
+          <a:p>
+            <a:r>
+              <a:rPr sz="1100" b="0">
+                <a:solidFill>
+                  <a:srgbClr val="36D399"/>
+                </a:solidFill>
+                <a:latin typeface="NanumGothic"/>
+                <a:ea typeface="NanumGothic"/>
+                <a:cs typeface="NanumGothic"/>
+              </a:rPr>
+              <a:t>순차 시나리오</a:t>
+            </a:r>
+          </a:p>
+        </p:txBody>
+      </p:sp>
+      <p:sp>
+        <p:nvSpPr>
+          <p:cNvPr id="5" name="audit:title"/>
+          <p:cNvSpPr txBox="1"/>
+          <p:nvPr/>
+        </p:nvSpPr>
+        <p:spPr>
+          <a:xfrm>
+            <a:off x="640080" y="566928"/>
+            <a:ext cx="10881360" cy="822960"/>
+          </a:xfrm>
+          <a:prstGeom prst="rect">
+            <a:avLst/>
+          </a:prstGeom>
+          <a:noFill/>
+        </p:spPr>
+        <p:txBody>
+          <a:bodyPr wrap="square" lIns="0" rIns="0" tIns="0" bIns="0">
+            <a:spAutoFit/>
+          </a:bodyPr>
+          <a:lstStyle/>
+          <a:p>
+            <a:r>
+              <a:rPr sz="2900" b="1">
+                <a:solidFill>
+                  <a:srgbClr val="ECF1F6"/>
+                </a:solidFill>
+                <a:latin typeface="NanumGothic"/>
+                <a:ea typeface="NanumGothic"/>
+                <a:cs typeface="NanumGothic"/>
+              </a:rPr>
+              <a:t>다섯 레버를 겹치면</a:t>
+            </a:r>
+          </a:p>
+        </p:txBody>
+      </p:sp>
+      <p:sp>
+        <p:nvSpPr>
+          <p:cNvPr id="6" name="audit:hero"/>
+          <p:cNvSpPr txBox="1"/>
+          <p:nvPr/>
+        </p:nvSpPr>
+        <p:spPr>
+          <a:xfrm>
+            <a:off x="640080" y="1261872"/>
+            <a:ext cx="10881360" cy="777240"/>
+          </a:xfrm>
+          <a:prstGeom prst="rect">
+            <a:avLst/>
+          </a:prstGeom>
+          <a:noFill/>
+        </p:spPr>
+        <p:txBody>
+          <a:bodyPr wrap="square" lIns="0" rIns="0" tIns="0" bIns="0">
+            <a:spAutoFit/>
+          </a:bodyPr>
+          <a:lstStyle/>
+          <a:p>
+            <a:r>
+              <a:rPr sz="2900" b="1">
+                <a:solidFill>
+                  <a:srgbClr val="36D399"/>
+                </a:solidFill>
+                <a:latin typeface="NanumGothic"/>
+                <a:ea typeface="NanumGothic"/>
+                <a:cs typeface="NanumGothic"/>
+              </a:rPr>
+              <a:t>잔여 14.18%</a:t>
+            </a:r>
+          </a:p>
+        </p:txBody>
+      </p:sp>
+      <p:sp>
+        <p:nvSpPr>
+          <p:cNvPr id="7" name="audit:body-0"/>
+          <p:cNvSpPr txBox="1"/>
+          <p:nvPr/>
+        </p:nvSpPr>
+        <p:spPr>
+          <a:xfrm>
+            <a:off x="777240" y="2029968"/>
             <a:ext cx="10652760" cy="612648"/>
           </a:xfrm>
           <a:prstGeom prst="rect">
@@ -8920,20 +9648,116 @@
                 <a:ea typeface="NanumGothic"/>
                 <a:cs typeface="NanumGothic"/>
               </a:rPr>
-              <a:t>다음 주에 같은 작업의 비용을 다시 잰다</a:t>
-            </a:r>
-          </a:p>
-        </p:txBody>
-      </p:sp>
-      <p:sp>
-        <p:nvSpPr>
-          <p:cNvPr id="10" name="audit:source"/>
-          <p:cNvSpPr txBox="1"/>
-          <p:nvPr/>
-        </p:nvSpPr>
-        <p:spPr>
-          <a:xfrm>
-            <a:off x="640080" y="6080760"/>
+              <a:t>시맨틱 캐시 → 라우팅 → 캐싱 → effort → 배치</a:t>
+            </a:r>
+          </a:p>
+        </p:txBody>
+      </p:sp>
+      <p:sp>
+        <p:nvSpPr>
+          <p:cNvPr id="8" name="audit:body-1"/>
+          <p:cNvSpPr txBox="1"/>
+          <p:nvPr/>
+        </p:nvSpPr>
+        <p:spPr>
+          <a:xfrm>
+            <a:off x="777240" y="2542032"/>
+            <a:ext cx="10652760" cy="612648"/>
+          </a:xfrm>
+          <a:prstGeom prst="rect">
+            <a:avLst/>
+          </a:prstGeom>
+          <a:noFill/>
+        </p:spPr>
+        <p:txBody>
+          <a:bodyPr wrap="square" lIns="0" rIns="0" tIns="0" bIns="0">
+            <a:spAutoFit/>
+          </a:bodyPr>
+          <a:lstStyle/>
+          <a:p>
+            <a:r>
+              <a:rPr sz="1750" b="0">
+                <a:solidFill>
+                  <a:srgbClr val="ECF1F6"/>
+                </a:solidFill>
+                <a:latin typeface="NanumGothic"/>
+                <a:ea typeface="NanumGothic"/>
+                <a:cs typeface="NanumGothic"/>
+              </a:rPr>
+              <a:t>각 레버가 자기 조건을 만족할 때의 순차 산술</a:t>
+            </a:r>
+          </a:p>
+        </p:txBody>
+      </p:sp>
+      <p:pic>
+        <p:nvPicPr>
+          <p:cNvPr id="9" name="Picture 8" descr="stack.png"/>
+          <p:cNvPicPr>
+            <a:picLocks noChangeAspect="1"/>
+          </p:cNvPicPr>
+          <p:nvPr/>
+        </p:nvPicPr>
+        <p:blipFill>
+          <a:blip r:embed="rId2"/>
+          <a:stretch>
+            <a:fillRect/>
+          </a:stretch>
+        </p:blipFill>
+        <p:spPr>
+          <a:xfrm>
+            <a:off x="777240" y="3101593"/>
+            <a:ext cx="10652760" cy="2959100"/>
+          </a:xfrm>
+          <a:prstGeom prst="rect">
+            <a:avLst/>
+          </a:prstGeom>
+        </p:spPr>
+      </p:pic>
+      <p:sp>
+        <p:nvSpPr>
+          <p:cNvPr id="10" name="audit:chart-caption"/>
+          <p:cNvSpPr txBox="1"/>
+          <p:nvPr/>
+        </p:nvSpPr>
+        <p:spPr>
+          <a:xfrm>
+            <a:off x="777240" y="6135624"/>
+            <a:ext cx="10652760" cy="237744"/>
+          </a:xfrm>
+          <a:prstGeom prst="rect">
+            <a:avLst/>
+          </a:prstGeom>
+          <a:noFill/>
+        </p:spPr>
+        <p:txBody>
+          <a:bodyPr wrap="square" lIns="0" rIns="0" tIns="0" bIns="0">
+            <a:spAutoFit/>
+          </a:bodyPr>
+          <a:lstStyle/>
+          <a:p>
+            <a:r>
+              <a:rPr sz="950" b="0">
+                <a:solidFill>
+                  <a:srgbClr val="93A4B5"/>
+                </a:solidFill>
+                <a:latin typeface="NanumGothic"/>
+                <a:ea typeface="NanumGothic"/>
+                <a:cs typeface="NanumGothic"/>
+              </a:rPr>
+              <a:t>그래프 · 남은 비율 (%) · stack.png</a:t>
+            </a:r>
+          </a:p>
+        </p:txBody>
+      </p:sp>
+      <p:sp>
+        <p:nvSpPr>
+          <p:cNvPr id="11" name="audit:source"/>
+          <p:cNvSpPr txBox="1"/>
+          <p:nvPr/>
+        </p:nvSpPr>
+        <p:spPr>
+          <a:xfrm>
+            <a:off x="777240" y="6382512"/>
             <a:ext cx="10972800" cy="274320"/>
           </a:xfrm>
           <a:prstGeom prst="rect">
@@ -8956,20 +9780,20 @@
                 <a:ea typeface="NanumGothic"/>
                 <a:cs typeface="NanumGothic"/>
               </a:rPr>
-              <a:t>github.com/giyeop-cody/token-cost-lab</a:t>
-            </a:r>
-          </a:p>
-        </p:txBody>
-      </p:sp>
-      <p:sp>
-        <p:nvSpPr>
-          <p:cNvPr id="11" name="audit:footer"/>
-          <p:cNvSpPr txBox="1"/>
-          <p:nvPr/>
-        </p:nvSpPr>
-        <p:spPr>
-          <a:xfrm>
-            <a:off x="640080" y="6419088"/>
+              <a:t>experiments/exp06_other_levers.py</a:t>
+            </a:r>
+          </a:p>
+        </p:txBody>
+      </p:sp>
+      <p:sp>
+        <p:nvSpPr>
+          <p:cNvPr id="12" name="audit:footer"/>
+          <p:cNvSpPr txBox="1"/>
+          <p:nvPr/>
+        </p:nvSpPr>
+        <p:spPr>
+          <a:xfrm>
+            <a:off x="777240" y="6583680"/>
             <a:ext cx="10972800" cy="256032"/>
           </a:xfrm>
           <a:prstGeom prst="rect">
@@ -9398,6 +10222,1185 @@
 </p:sld>
 </file>
 
+<file path=ppt/slides/slide20.xml><?xml version="1.0" encoding="utf-8"?>
+<p:sld xmlns:a="http://schemas.openxmlformats.org/drawingml/2006/main" xmlns:p="http://schemas.openxmlformats.org/presentationml/2006/main" xmlns:r="http://schemas.openxmlformats.org/officeDocument/2006/relationships">
+  <p:cSld>
+    <p:bg>
+      <p:bgPr>
+        <a:solidFill>
+          <a:srgbClr val="0E141B"/>
+        </a:solidFill>
+        <a:effectLst/>
+      </p:bgPr>
+    </p:bg>
+    <p:spTree>
+      <p:nvGrpSpPr>
+        <p:cNvPr id="1" name=""/>
+        <p:cNvGrpSpPr/>
+        <p:nvPr/>
+      </p:nvGrpSpPr>
+      <p:grpSpPr/>
+      <p:sp>
+        <p:nvSpPr>
+          <p:cNvPr id="2" name="Rectangle 1"/>
+          <p:cNvSpPr/>
+          <p:nvPr/>
+        </p:nvSpPr>
+        <p:spPr>
+          <a:xfrm>
+            <a:off x="0" y="0"/>
+            <a:ext cx="100584" cy="6858000"/>
+          </a:xfrm>
+          <a:prstGeom prst="rect">
+            <a:avLst/>
+          </a:prstGeom>
+          <a:solidFill>
+            <a:srgbClr val="36D399"/>
+          </a:solidFill>
+          <a:ln>
+            <a:noFill/>
+          </a:ln>
+        </p:spPr>
+        <p:style>
+          <a:lnRef idx="1">
+            <a:schemeClr val="accent1"/>
+          </a:lnRef>
+          <a:fillRef idx="3">
+            <a:schemeClr val="accent1"/>
+          </a:fillRef>
+          <a:effectRef idx="2">
+            <a:schemeClr val="accent1"/>
+          </a:effectRef>
+          <a:fontRef idx="minor">
+            <a:schemeClr val="lt1"/>
+          </a:fontRef>
+        </p:style>
+        <p:txBody>
+          <a:bodyPr rtlCol="0" anchor="ctr"/>
+          <a:lstStyle/>
+          <a:p>
+            <a:pPr algn="ctr"/>
+          </a:p>
+        </p:txBody>
+      </p:sp>
+      <p:sp>
+        <p:nvSpPr>
+          <p:cNvPr id="3" name="audit:index"/>
+          <p:cNvSpPr txBox="1"/>
+          <p:nvPr/>
+        </p:nvSpPr>
+        <p:spPr>
+          <a:xfrm>
+            <a:off x="640080" y="274320"/>
+            <a:ext cx="4572000" cy="274320"/>
+          </a:xfrm>
+          <a:prstGeom prst="rect">
+            <a:avLst/>
+          </a:prstGeom>
+          <a:noFill/>
+        </p:spPr>
+        <p:txBody>
+          <a:bodyPr wrap="square" lIns="0" rIns="0" tIns="0" bIns="0">
+            <a:spAutoFit/>
+          </a:bodyPr>
+          <a:lstStyle/>
+          <a:p>
+            <a:r>
+              <a:rPr sz="1100" b="0">
+                <a:solidFill>
+                  <a:srgbClr val="93A4B5"/>
+                </a:solidFill>
+                <a:latin typeface="NanumGothic"/>
+                <a:ea typeface="NanumGothic"/>
+                <a:cs typeface="NanumGothic"/>
+              </a:rPr>
+              <a:t>TOKEN COST LAB  /  20</a:t>
+            </a:r>
+          </a:p>
+        </p:txBody>
+      </p:sp>
+      <p:sp>
+        <p:nvSpPr>
+          <p:cNvPr id="4" name="audit:scope"/>
+          <p:cNvSpPr txBox="1"/>
+          <p:nvPr/>
+        </p:nvSpPr>
+        <p:spPr>
+          <a:xfrm>
+            <a:off x="5760720" y="274320"/>
+            <a:ext cx="5760720" cy="274320"/>
+          </a:xfrm>
+          <a:prstGeom prst="rect">
+            <a:avLst/>
+          </a:prstGeom>
+          <a:noFill/>
+        </p:spPr>
+        <p:txBody>
+          <a:bodyPr wrap="square" lIns="0" rIns="0" tIns="0" bIns="0">
+            <a:spAutoFit/>
+          </a:bodyPr>
+          <a:lstStyle/>
+          <a:p>
+            <a:r>
+              <a:rPr sz="1100" b="0">
+                <a:solidFill>
+                  <a:srgbClr val="36D399"/>
+                </a:solidFill>
+                <a:latin typeface="NanumGothic"/>
+                <a:ea typeface="NanumGothic"/>
+                <a:cs typeface="NanumGothic"/>
+              </a:rPr>
+              <a:t>경로 분리</a:t>
+            </a:r>
+          </a:p>
+        </p:txBody>
+      </p:sp>
+      <p:sp>
+        <p:nvSpPr>
+          <p:cNvPr id="5" name="audit:title"/>
+          <p:cNvSpPr txBox="1"/>
+          <p:nvPr/>
+        </p:nvSpPr>
+        <p:spPr>
+          <a:xfrm>
+            <a:off x="640080" y="822960"/>
+            <a:ext cx="10881360" cy="822960"/>
+          </a:xfrm>
+          <a:prstGeom prst="rect">
+            <a:avLst/>
+          </a:prstGeom>
+          <a:noFill/>
+        </p:spPr>
+        <p:txBody>
+          <a:bodyPr wrap="square" lIns="0" rIns="0" tIns="0" bIns="0">
+            <a:spAutoFit/>
+          </a:bodyPr>
+          <a:lstStyle/>
+          <a:p>
+            <a:r>
+              <a:rPr sz="2900" b="1">
+                <a:solidFill>
+                  <a:srgbClr val="ECF1F6"/>
+                </a:solidFill>
+                <a:latin typeface="NanumGothic"/>
+                <a:ea typeface="NanumGothic"/>
+                <a:cs typeface="NanumGothic"/>
+              </a:rPr>
+              <a:t>웹 세션으로 넘기는 경로</a:t>
+            </a:r>
+          </a:p>
+        </p:txBody>
+      </p:sp>
+      <p:sp>
+        <p:nvSpPr>
+          <p:cNvPr id="6" name="audit:hero"/>
+          <p:cNvSpPr txBox="1"/>
+          <p:nvPr/>
+        </p:nvSpPr>
+        <p:spPr>
+          <a:xfrm>
+            <a:off x="640080" y="1783080"/>
+            <a:ext cx="10881360" cy="777240"/>
+          </a:xfrm>
+          <a:prstGeom prst="rect">
+            <a:avLst/>
+          </a:prstGeom>
+          <a:noFill/>
+        </p:spPr>
+        <p:txBody>
+          <a:bodyPr wrap="square" lIns="0" rIns="0" tIns="0" bIns="0">
+            <a:spAutoFit/>
+          </a:bodyPr>
+          <a:lstStyle/>
+          <a:p>
+            <a:r>
+              <a:rPr sz="2900" b="1">
+                <a:solidFill>
+                  <a:srgbClr val="36D399"/>
+                </a:solidFill>
+                <a:latin typeface="NanumGothic"/>
+                <a:ea typeface="NanumGothic"/>
+                <a:cs typeface="NanumGothic"/>
+              </a:rPr>
+              <a:t>구독제 경로는 증분 API 비용 0으로 모델링</a:t>
+            </a:r>
+          </a:p>
+        </p:txBody>
+      </p:sp>
+      <p:sp>
+        <p:nvSpPr>
+          <p:cNvPr id="7" name="audit:body-0"/>
+          <p:cNvSpPr txBox="1"/>
+          <p:nvPr/>
+        </p:nvSpPr>
+        <p:spPr>
+          <a:xfrm>
+            <a:off x="777240" y="2862072"/>
+            <a:ext cx="10652760" cy="612648"/>
+          </a:xfrm>
+          <a:prstGeom prst="rect">
+            <a:avLst/>
+          </a:prstGeom>
+          <a:noFill/>
+        </p:spPr>
+        <p:txBody>
+          <a:bodyPr wrap="square" lIns="0" rIns="0" tIns="0" bIns="0">
+            <a:spAutoFit/>
+          </a:bodyPr>
+          <a:lstStyle/>
+          <a:p>
+            <a:r>
+              <a:rPr sz="1750" b="0">
+                <a:solidFill>
+                  <a:srgbClr val="ECF1F6"/>
+                </a:solidFill>
+                <a:latin typeface="NanumGothic"/>
+                <a:ea typeface="NanumGothic"/>
+                <a:cs typeface="NanumGothic"/>
+              </a:rPr>
+              <a:t>조사·정리는 웹 세션에서, 코드는 API에서</a:t>
+            </a:r>
+          </a:p>
+        </p:txBody>
+      </p:sp>
+      <p:sp>
+        <p:nvSpPr>
+          <p:cNvPr id="8" name="audit:body-1"/>
+          <p:cNvSpPr txBox="1"/>
+          <p:nvPr/>
+        </p:nvSpPr>
+        <p:spPr>
+          <a:xfrm>
+            <a:off x="777240" y="3502152"/>
+            <a:ext cx="10652760" cy="612648"/>
+          </a:xfrm>
+          <a:prstGeom prst="rect">
+            <a:avLst/>
+          </a:prstGeom>
+          <a:noFill/>
+        </p:spPr>
+        <p:txBody>
+          <a:bodyPr wrap="square" lIns="0" rIns="0" tIns="0" bIns="0">
+            <a:spAutoFit/>
+          </a:bodyPr>
+          <a:lstStyle/>
+          <a:p>
+            <a:r>
+              <a:rPr sz="1750" b="0">
+                <a:solidFill>
+                  <a:srgbClr val="ECF1F6"/>
+                </a:solidFill>
+                <a:latin typeface="NanumGothic"/>
+                <a:ea typeface="NanumGothic"/>
+                <a:cs typeface="NanumGothic"/>
+              </a:rPr>
+              <a:t>옮겨 붙일 때 수용 기준 형식을 그대로 쓴다</a:t>
+            </a:r>
+          </a:p>
+        </p:txBody>
+      </p:sp>
+      <p:sp>
+        <p:nvSpPr>
+          <p:cNvPr id="9" name="audit:body-2"/>
+          <p:cNvSpPr txBox="1"/>
+          <p:nvPr/>
+        </p:nvSpPr>
+        <p:spPr>
+          <a:xfrm>
+            <a:off x="777240" y="4142231"/>
+            <a:ext cx="10652760" cy="612648"/>
+          </a:xfrm>
+          <a:prstGeom prst="rect">
+            <a:avLst/>
+          </a:prstGeom>
+          <a:noFill/>
+        </p:spPr>
+        <p:txBody>
+          <a:bodyPr wrap="square" lIns="0" rIns="0" tIns="0" bIns="0">
+            <a:spAutoFit/>
+          </a:bodyPr>
+          <a:lstStyle/>
+          <a:p>
+            <a:r>
+              <a:rPr sz="1750" b="0">
+                <a:solidFill>
+                  <a:srgbClr val="ECF1F6"/>
+                </a:solidFill>
+                <a:latin typeface="NanumGothic"/>
+                <a:ea typeface="NanumGothic"/>
+                <a:cs typeface="NanumGothic"/>
+              </a:rPr>
+              <a:t>이 경로의 증분 종량 비용은 0으로 모델링한다</a:t>
+            </a:r>
+          </a:p>
+        </p:txBody>
+      </p:sp>
+      <p:sp>
+        <p:nvSpPr>
+          <p:cNvPr id="10" name="audit:source"/>
+          <p:cNvSpPr txBox="1"/>
+          <p:nvPr/>
+        </p:nvSpPr>
+        <p:spPr>
+          <a:xfrm>
+            <a:off x="640080" y="6080760"/>
+            <a:ext cx="10972800" cy="274320"/>
+          </a:xfrm>
+          <a:prstGeom prst="rect">
+            <a:avLst/>
+          </a:prstGeom>
+          <a:noFill/>
+        </p:spPr>
+        <p:txBody>
+          <a:bodyPr wrap="square" lIns="0" rIns="0" tIns="0" bIns="0">
+            <a:spAutoFit/>
+          </a:bodyPr>
+          <a:lstStyle/>
+          <a:p>
+            <a:r>
+              <a:rPr sz="1000" b="0">
+                <a:solidFill>
+                  <a:srgbClr val="93A4B5"/>
+                </a:solidFill>
+                <a:latin typeface="NanumGothic"/>
+                <a:ea typeface="NanumGothic"/>
+                <a:cs typeface="NanumGothic"/>
+              </a:rPr>
+              <a:t>lab/pricing.py TIER_SCENARIOS</a:t>
+            </a:r>
+          </a:p>
+        </p:txBody>
+      </p:sp>
+      <p:sp>
+        <p:nvSpPr>
+          <p:cNvPr id="11" name="audit:footer"/>
+          <p:cNvSpPr txBox="1"/>
+          <p:nvPr/>
+        </p:nvSpPr>
+        <p:spPr>
+          <a:xfrm>
+            <a:off x="640080" y="6419088"/>
+            <a:ext cx="10972800" cy="256032"/>
+          </a:xfrm>
+          <a:prstGeom prst="rect">
+            <a:avLst/>
+          </a:prstGeom>
+          <a:noFill/>
+        </p:spPr>
+        <p:txBody>
+          <a:bodyPr wrap="square" lIns="0" rIns="0" tIns="0" bIns="0">
+            <a:spAutoFit/>
+          </a:bodyPr>
+          <a:lstStyle/>
+          <a:p>
+            <a:r>
+              <a:rPr sz="1000" b="0">
+                <a:solidFill>
+                  <a:srgbClr val="93A4B5"/>
+                </a:solidFill>
+                <a:latin typeface="NanumGothic"/>
+                <a:ea typeface="NanumGothic"/>
+                <a:cs typeface="NanumGothic"/>
+              </a:rPr>
+              <a:t>2026-09-20  ·  근거와 조건을 함께 인용</a:t>
+            </a:r>
+          </a:p>
+        </p:txBody>
+      </p:sp>
+    </p:spTree>
+  </p:cSld>
+  <p:clrMapOvr>
+    <a:masterClrMapping/>
+  </p:clrMapOvr>
+</p:sld>
+</file>
+
+<file path=ppt/slides/slide21.xml><?xml version="1.0" encoding="utf-8"?>
+<p:sld xmlns:a="http://schemas.openxmlformats.org/drawingml/2006/main" xmlns:p="http://schemas.openxmlformats.org/presentationml/2006/main" xmlns:r="http://schemas.openxmlformats.org/officeDocument/2006/relationships">
+  <p:cSld>
+    <p:bg>
+      <p:bgPr>
+        <a:solidFill>
+          <a:srgbClr val="0E141B"/>
+        </a:solidFill>
+        <a:effectLst/>
+      </p:bgPr>
+    </p:bg>
+    <p:spTree>
+      <p:nvGrpSpPr>
+        <p:cNvPr id="1" name=""/>
+        <p:cNvGrpSpPr/>
+        <p:nvPr/>
+      </p:nvGrpSpPr>
+      <p:grpSpPr/>
+      <p:sp>
+        <p:nvSpPr>
+          <p:cNvPr id="2" name="Rectangle 1"/>
+          <p:cNvSpPr/>
+          <p:nvPr/>
+        </p:nvSpPr>
+        <p:spPr>
+          <a:xfrm>
+            <a:off x="0" y="0"/>
+            <a:ext cx="100584" cy="6858000"/>
+          </a:xfrm>
+          <a:prstGeom prst="rect">
+            <a:avLst/>
+          </a:prstGeom>
+          <a:solidFill>
+            <a:srgbClr val="36D399"/>
+          </a:solidFill>
+          <a:ln>
+            <a:noFill/>
+          </a:ln>
+        </p:spPr>
+        <p:style>
+          <a:lnRef idx="1">
+            <a:schemeClr val="accent1"/>
+          </a:lnRef>
+          <a:fillRef idx="3">
+            <a:schemeClr val="accent1"/>
+          </a:fillRef>
+          <a:effectRef idx="2">
+            <a:schemeClr val="accent1"/>
+          </a:effectRef>
+          <a:fontRef idx="minor">
+            <a:schemeClr val="lt1"/>
+          </a:fontRef>
+        </p:style>
+        <p:txBody>
+          <a:bodyPr rtlCol="0" anchor="ctr"/>
+          <a:lstStyle/>
+          <a:p>
+            <a:pPr algn="ctr"/>
+          </a:p>
+        </p:txBody>
+      </p:sp>
+      <p:sp>
+        <p:nvSpPr>
+          <p:cNvPr id="3" name="audit:index"/>
+          <p:cNvSpPr txBox="1"/>
+          <p:nvPr/>
+        </p:nvSpPr>
+        <p:spPr>
+          <a:xfrm>
+            <a:off x="640080" y="274320"/>
+            <a:ext cx="4572000" cy="274320"/>
+          </a:xfrm>
+          <a:prstGeom prst="rect">
+            <a:avLst/>
+          </a:prstGeom>
+          <a:noFill/>
+        </p:spPr>
+        <p:txBody>
+          <a:bodyPr wrap="square" lIns="0" rIns="0" tIns="0" bIns="0">
+            <a:spAutoFit/>
+          </a:bodyPr>
+          <a:lstStyle/>
+          <a:p>
+            <a:r>
+              <a:rPr sz="1100" b="0">
+                <a:solidFill>
+                  <a:srgbClr val="93A4B5"/>
+                </a:solidFill>
+                <a:latin typeface="NanumGothic"/>
+                <a:ea typeface="NanumGothic"/>
+                <a:cs typeface="NanumGothic"/>
+              </a:rPr>
+              <a:t>TOKEN COST LAB  /  21</a:t>
+            </a:r>
+          </a:p>
+        </p:txBody>
+      </p:sp>
+      <p:sp>
+        <p:nvSpPr>
+          <p:cNvPr id="4" name="audit:scope"/>
+          <p:cNvSpPr txBox="1"/>
+          <p:nvPr/>
+        </p:nvSpPr>
+        <p:spPr>
+          <a:xfrm>
+            <a:off x="5760720" y="274320"/>
+            <a:ext cx="5760720" cy="274320"/>
+          </a:xfrm>
+          <a:prstGeom prst="rect">
+            <a:avLst/>
+          </a:prstGeom>
+          <a:noFill/>
+        </p:spPr>
+        <p:txBody>
+          <a:bodyPr wrap="square" lIns="0" rIns="0" tIns="0" bIns="0">
+            <a:spAutoFit/>
+          </a:bodyPr>
+          <a:lstStyle/>
+          <a:p>
+            <a:r>
+              <a:rPr sz="1100" b="0">
+                <a:solidFill>
+                  <a:srgbClr val="36D399"/>
+                </a:solidFill>
+                <a:latin typeface="NanumGothic"/>
+                <a:ea typeface="NanumGothic"/>
+                <a:cs typeface="NanumGothic"/>
+              </a:rPr>
+              <a:t>운영</a:t>
+            </a:r>
+          </a:p>
+        </p:txBody>
+      </p:sp>
+      <p:sp>
+        <p:nvSpPr>
+          <p:cNvPr id="5" name="audit:title"/>
+          <p:cNvSpPr txBox="1"/>
+          <p:nvPr/>
+        </p:nvSpPr>
+        <p:spPr>
+          <a:xfrm>
+            <a:off x="640080" y="822960"/>
+            <a:ext cx="10881360" cy="822960"/>
+          </a:xfrm>
+          <a:prstGeom prst="rect">
+            <a:avLst/>
+          </a:prstGeom>
+          <a:noFill/>
+        </p:spPr>
+        <p:txBody>
+          <a:bodyPr wrap="square" lIns="0" rIns="0" tIns="0" bIns="0">
+            <a:spAutoFit/>
+          </a:bodyPr>
+          <a:lstStyle/>
+          <a:p>
+            <a:r>
+              <a:rPr sz="2900" b="1">
+                <a:solidFill>
+                  <a:srgbClr val="ECF1F6"/>
+                </a:solidFill>
+                <a:latin typeface="NanumGothic"/>
+                <a:ea typeface="NanumGothic"/>
+                <a:cs typeface="NanumGothic"/>
+              </a:rPr>
+              <a:t>적용 순서와 측정 루프</a:t>
+            </a:r>
+          </a:p>
+        </p:txBody>
+      </p:sp>
+      <p:sp>
+        <p:nvSpPr>
+          <p:cNvPr id="6" name="audit:hero"/>
+          <p:cNvSpPr txBox="1"/>
+          <p:nvPr/>
+        </p:nvSpPr>
+        <p:spPr>
+          <a:xfrm>
+            <a:off x="640080" y="1783080"/>
+            <a:ext cx="10881360" cy="777240"/>
+          </a:xfrm>
+          <a:prstGeom prst="rect">
+            <a:avLst/>
+          </a:prstGeom>
+          <a:noFill/>
+        </p:spPr>
+        <p:txBody>
+          <a:bodyPr wrap="square" lIns="0" rIns="0" tIns="0" bIns="0">
+            <a:spAutoFit/>
+          </a:bodyPr>
+          <a:lstStyle/>
+          <a:p>
+            <a:r>
+              <a:rPr sz="2900" b="1">
+                <a:solidFill>
+                  <a:srgbClr val="36D399"/>
+                </a:solidFill>
+                <a:latin typeface="NanumGothic"/>
+                <a:ea typeface="NanumGothic"/>
+                <a:cs typeface="NanumGothic"/>
+              </a:rPr>
+              <a:t>켜고 → 재고 → 고친다</a:t>
+            </a:r>
+          </a:p>
+        </p:txBody>
+      </p:sp>
+      <p:sp>
+        <p:nvSpPr>
+          <p:cNvPr id="7" name="audit:body-0"/>
+          <p:cNvSpPr txBox="1"/>
+          <p:nvPr/>
+        </p:nvSpPr>
+        <p:spPr>
+          <a:xfrm>
+            <a:off x="777240" y="2862072"/>
+            <a:ext cx="10652760" cy="612648"/>
+          </a:xfrm>
+          <a:prstGeom prst="rect">
+            <a:avLst/>
+          </a:prstGeom>
+          <a:noFill/>
+        </p:spPr>
+        <p:txBody>
+          <a:bodyPr wrap="square" lIns="0" rIns="0" tIns="0" bIns="0">
+            <a:spAutoFit/>
+          </a:bodyPr>
+          <a:lstStyle/>
+          <a:p>
+            <a:r>
+              <a:rPr sz="1750" b="0">
+                <a:solidFill>
+                  <a:srgbClr val="ECF1F6"/>
+                </a:solidFill>
+                <a:latin typeface="NanumGothic"/>
+                <a:ea typeface="NanumGothic"/>
+                <a:cs typeface="NanumGothic"/>
+              </a:rPr>
+              <a:t>되돌리기 쉬운 것부터 켠다 (캐시 · effort · 배치)</a:t>
+            </a:r>
+          </a:p>
+        </p:txBody>
+      </p:sp>
+      <p:sp>
+        <p:nvSpPr>
+          <p:cNvPr id="8" name="audit:body-1"/>
+          <p:cNvSpPr txBox="1"/>
+          <p:nvPr/>
+        </p:nvSpPr>
+        <p:spPr>
+          <a:xfrm>
+            <a:off x="777240" y="3502152"/>
+            <a:ext cx="10652760" cy="612648"/>
+          </a:xfrm>
+          <a:prstGeom prst="rect">
+            <a:avLst/>
+          </a:prstGeom>
+          <a:noFill/>
+        </p:spPr>
+        <p:txBody>
+          <a:bodyPr wrap="square" lIns="0" rIns="0" tIns="0" bIns="0">
+            <a:spAutoFit/>
+          </a:bodyPr>
+          <a:lstStyle/>
+          <a:p>
+            <a:r>
+              <a:rPr sz="1750" b="0">
+                <a:solidFill>
+                  <a:srgbClr val="ECF1F6"/>
+                </a:solidFill>
+                <a:latin typeface="NanumGothic"/>
+                <a:ea typeface="NanumGothic"/>
+                <a:cs typeface="NanumGothic"/>
+              </a:rPr>
+              <a:t>적중률·reasoning 비율·턴 수를 주간으로 본다</a:t>
+            </a:r>
+          </a:p>
+        </p:txBody>
+      </p:sp>
+      <p:sp>
+        <p:nvSpPr>
+          <p:cNvPr id="9" name="audit:body-2"/>
+          <p:cNvSpPr txBox="1"/>
+          <p:nvPr/>
+        </p:nvSpPr>
+        <p:spPr>
+          <a:xfrm>
+            <a:off x="777240" y="4142231"/>
+            <a:ext cx="10652760" cy="612648"/>
+          </a:xfrm>
+          <a:prstGeom prst="rect">
+            <a:avLst/>
+          </a:prstGeom>
+          <a:noFill/>
+        </p:spPr>
+        <p:txBody>
+          <a:bodyPr wrap="square" lIns="0" rIns="0" tIns="0" bIns="0">
+            <a:spAutoFit/>
+          </a:bodyPr>
+          <a:lstStyle/>
+          <a:p>
+            <a:r>
+              <a:rPr sz="1750" b="0">
+                <a:solidFill>
+                  <a:srgbClr val="ECF1F6"/>
+                </a:solidFill>
+                <a:latin typeface="NanumGothic"/>
+                <a:ea typeface="NanumGothic"/>
+                <a:cs typeface="NanumGothic"/>
+              </a:rPr>
+              <a:t>절감률 목표가 아니라 품질 게이트를 먼저 정한다</a:t>
+            </a:r>
+          </a:p>
+        </p:txBody>
+      </p:sp>
+      <p:sp>
+        <p:nvSpPr>
+          <p:cNvPr id="10" name="audit:source"/>
+          <p:cNvSpPr txBox="1"/>
+          <p:nvPr/>
+        </p:nvSpPr>
+        <p:spPr>
+          <a:xfrm>
+            <a:off x="640080" y="6080760"/>
+            <a:ext cx="10972800" cy="274320"/>
+          </a:xfrm>
+          <a:prstGeom prst="rect">
+            <a:avLst/>
+          </a:prstGeom>
+          <a:noFill/>
+        </p:spPr>
+        <p:txBody>
+          <a:bodyPr wrap="square" lIns="0" rIns="0" tIns="0" bIns="0">
+            <a:spAutoFit/>
+          </a:bodyPr>
+          <a:lstStyle/>
+          <a:p>
+            <a:r>
+              <a:rPr sz="1000" b="0">
+                <a:solidFill>
+                  <a:srgbClr val="93A4B5"/>
+                </a:solidFill>
+                <a:latin typeface="NanumGothic"/>
+                <a:ea typeface="NanumGothic"/>
+                <a:cs typeface="NanumGothic"/>
+              </a:rPr>
+              <a:t>agent_setup/antigravity/AGENTS.md · docs/CORRECTIONS.md</a:t>
+            </a:r>
+          </a:p>
+        </p:txBody>
+      </p:sp>
+      <p:sp>
+        <p:nvSpPr>
+          <p:cNvPr id="11" name="audit:footer"/>
+          <p:cNvSpPr txBox="1"/>
+          <p:nvPr/>
+        </p:nvSpPr>
+        <p:spPr>
+          <a:xfrm>
+            <a:off x="640080" y="6419088"/>
+            <a:ext cx="10972800" cy="256032"/>
+          </a:xfrm>
+          <a:prstGeom prst="rect">
+            <a:avLst/>
+          </a:prstGeom>
+          <a:noFill/>
+        </p:spPr>
+        <p:txBody>
+          <a:bodyPr wrap="square" lIns="0" rIns="0" tIns="0" bIns="0">
+            <a:spAutoFit/>
+          </a:bodyPr>
+          <a:lstStyle/>
+          <a:p>
+            <a:r>
+              <a:rPr sz="1000" b="0">
+                <a:solidFill>
+                  <a:srgbClr val="93A4B5"/>
+                </a:solidFill>
+                <a:latin typeface="NanumGothic"/>
+                <a:ea typeface="NanumGothic"/>
+                <a:cs typeface="NanumGothic"/>
+              </a:rPr>
+              <a:t>2026-09-20  ·  근거와 조건을 함께 인용</a:t>
+            </a:r>
+          </a:p>
+        </p:txBody>
+      </p:sp>
+    </p:spTree>
+  </p:cSld>
+  <p:clrMapOvr>
+    <a:masterClrMapping/>
+  </p:clrMapOvr>
+</p:sld>
+</file>
+
+<file path=ppt/slides/slide22.xml><?xml version="1.0" encoding="utf-8"?>
+<p:sld xmlns:a="http://schemas.openxmlformats.org/drawingml/2006/main" xmlns:p="http://schemas.openxmlformats.org/presentationml/2006/main" xmlns:r="http://schemas.openxmlformats.org/officeDocument/2006/relationships">
+  <p:cSld>
+    <p:bg>
+      <p:bgPr>
+        <a:solidFill>
+          <a:srgbClr val="0E141B"/>
+        </a:solidFill>
+        <a:effectLst/>
+      </p:bgPr>
+    </p:bg>
+    <p:spTree>
+      <p:nvGrpSpPr>
+        <p:cNvPr id="1" name=""/>
+        <p:cNvGrpSpPr/>
+        <p:nvPr/>
+      </p:nvGrpSpPr>
+      <p:grpSpPr/>
+      <p:sp>
+        <p:nvSpPr>
+          <p:cNvPr id="2" name="Rectangle 1"/>
+          <p:cNvSpPr/>
+          <p:nvPr/>
+        </p:nvSpPr>
+        <p:spPr>
+          <a:xfrm>
+            <a:off x="0" y="0"/>
+            <a:ext cx="100584" cy="6858000"/>
+          </a:xfrm>
+          <a:prstGeom prst="rect">
+            <a:avLst/>
+          </a:prstGeom>
+          <a:solidFill>
+            <a:srgbClr val="36D399"/>
+          </a:solidFill>
+          <a:ln>
+            <a:noFill/>
+          </a:ln>
+        </p:spPr>
+        <p:style>
+          <a:lnRef idx="1">
+            <a:schemeClr val="accent1"/>
+          </a:lnRef>
+          <a:fillRef idx="3">
+            <a:schemeClr val="accent1"/>
+          </a:fillRef>
+          <a:effectRef idx="2">
+            <a:schemeClr val="accent1"/>
+          </a:effectRef>
+          <a:fontRef idx="minor">
+            <a:schemeClr val="lt1"/>
+          </a:fontRef>
+        </p:style>
+        <p:txBody>
+          <a:bodyPr rtlCol="0" anchor="ctr"/>
+          <a:lstStyle/>
+          <a:p>
+            <a:pPr algn="ctr"/>
+          </a:p>
+        </p:txBody>
+      </p:sp>
+      <p:sp>
+        <p:nvSpPr>
+          <p:cNvPr id="3" name="audit:index"/>
+          <p:cNvSpPr txBox="1"/>
+          <p:nvPr/>
+        </p:nvSpPr>
+        <p:spPr>
+          <a:xfrm>
+            <a:off x="640080" y="274320"/>
+            <a:ext cx="4572000" cy="274320"/>
+          </a:xfrm>
+          <a:prstGeom prst="rect">
+            <a:avLst/>
+          </a:prstGeom>
+          <a:noFill/>
+        </p:spPr>
+        <p:txBody>
+          <a:bodyPr wrap="square" lIns="0" rIns="0" tIns="0" bIns="0">
+            <a:spAutoFit/>
+          </a:bodyPr>
+          <a:lstStyle/>
+          <a:p>
+            <a:r>
+              <a:rPr sz="1100" b="0">
+                <a:solidFill>
+                  <a:srgbClr val="93A4B5"/>
+                </a:solidFill>
+                <a:latin typeface="NanumGothic"/>
+                <a:ea typeface="NanumGothic"/>
+                <a:cs typeface="NanumGothic"/>
+              </a:rPr>
+              <a:t>TOKEN COST LAB  /  22</a:t>
+            </a:r>
+          </a:p>
+        </p:txBody>
+      </p:sp>
+      <p:sp>
+        <p:nvSpPr>
+          <p:cNvPr id="4" name="audit:scope"/>
+          <p:cNvSpPr txBox="1"/>
+          <p:nvPr/>
+        </p:nvSpPr>
+        <p:spPr>
+          <a:xfrm>
+            <a:off x="5760720" y="274320"/>
+            <a:ext cx="5760720" cy="274320"/>
+          </a:xfrm>
+          <a:prstGeom prst="rect">
+            <a:avLst/>
+          </a:prstGeom>
+          <a:noFill/>
+        </p:spPr>
+        <p:txBody>
+          <a:bodyPr wrap="square" lIns="0" rIns="0" tIns="0" bIns="0">
+            <a:spAutoFit/>
+          </a:bodyPr>
+          <a:lstStyle/>
+          <a:p>
+            <a:r>
+              <a:rPr sz="1100" b="0">
+                <a:solidFill>
+                  <a:srgbClr val="36D399"/>
+                </a:solidFill>
+                <a:latin typeface="NanumGothic"/>
+                <a:ea typeface="NanumGothic"/>
+                <a:cs typeface="NanumGothic"/>
+              </a:rPr>
+              <a:t>마무리</a:t>
+            </a:r>
+          </a:p>
+        </p:txBody>
+      </p:sp>
+      <p:sp>
+        <p:nvSpPr>
+          <p:cNvPr id="5" name="audit:title"/>
+          <p:cNvSpPr txBox="1"/>
+          <p:nvPr/>
+        </p:nvSpPr>
+        <p:spPr>
+          <a:xfrm>
+            <a:off x="640080" y="822960"/>
+            <a:ext cx="10881360" cy="822960"/>
+          </a:xfrm>
+          <a:prstGeom prst="rect">
+            <a:avLst/>
+          </a:prstGeom>
+          <a:noFill/>
+        </p:spPr>
+        <p:txBody>
+          <a:bodyPr wrap="square" lIns="0" rIns="0" tIns="0" bIns="0">
+            <a:spAutoFit/>
+          </a:bodyPr>
+          <a:lstStyle/>
+          <a:p>
+            <a:r>
+              <a:rPr sz="2900" b="1">
+                <a:solidFill>
+                  <a:srgbClr val="ECF1F6"/>
+                </a:solidFill>
+                <a:latin typeface="NanumGothic"/>
+                <a:ea typeface="NanumGothic"/>
+                <a:cs typeface="NanumGothic"/>
+              </a:rPr>
+              <a:t>마무리 · 오늘 붙일 것 하나</a:t>
+            </a:r>
+          </a:p>
+        </p:txBody>
+      </p:sp>
+      <p:sp>
+        <p:nvSpPr>
+          <p:cNvPr id="6" name="audit:hero"/>
+          <p:cNvSpPr txBox="1"/>
+          <p:nvPr/>
+        </p:nvSpPr>
+        <p:spPr>
+          <a:xfrm>
+            <a:off x="640080" y="1783080"/>
+            <a:ext cx="10881360" cy="777240"/>
+          </a:xfrm>
+          <a:prstGeom prst="rect">
+            <a:avLst/>
+          </a:prstGeom>
+          <a:noFill/>
+        </p:spPr>
+        <p:txBody>
+          <a:bodyPr wrap="square" lIns="0" rIns="0" tIns="0" bIns="0">
+            <a:spAutoFit/>
+          </a:bodyPr>
+          <a:lstStyle/>
+          <a:p>
+            <a:r>
+              <a:rPr sz="2900" b="1">
+                <a:solidFill>
+                  <a:srgbClr val="36D399"/>
+                </a:solidFill>
+                <a:latin typeface="NanumGothic"/>
+                <a:ea typeface="NanumGothic"/>
+                <a:cs typeface="NanumGothic"/>
+              </a:rPr>
+              <a:t>라우터 한 줄, 캐시 한 블록</a:t>
+            </a:r>
+          </a:p>
+        </p:txBody>
+      </p:sp>
+      <p:sp>
+        <p:nvSpPr>
+          <p:cNvPr id="7" name="audit:body-0"/>
+          <p:cNvSpPr txBox="1"/>
+          <p:nvPr/>
+        </p:nvSpPr>
+        <p:spPr>
+          <a:xfrm>
+            <a:off x="777240" y="2862072"/>
+            <a:ext cx="10652760" cy="612648"/>
+          </a:xfrm>
+          <a:prstGeom prst="rect">
+            <a:avLst/>
+          </a:prstGeom>
+          <a:noFill/>
+        </p:spPr>
+        <p:txBody>
+          <a:bodyPr wrap="square" lIns="0" rIns="0" tIns="0" bIns="0">
+            <a:spAutoFit/>
+          </a:bodyPr>
+          <a:lstStyle/>
+          <a:p>
+            <a:r>
+              <a:rPr sz="1750" b="0">
+                <a:solidFill>
+                  <a:srgbClr val="ECF1F6"/>
+                </a:solidFill>
+                <a:latin typeface="NanumGothic"/>
+                <a:ea typeface="NanumGothic"/>
+                <a:cs typeface="NanumGothic"/>
+              </a:rPr>
+              <a:t>규약 파일을 프리픽스로 고정한다</a:t>
+            </a:r>
+          </a:p>
+        </p:txBody>
+      </p:sp>
+      <p:sp>
+        <p:nvSpPr>
+          <p:cNvPr id="8" name="audit:body-1"/>
+          <p:cNvSpPr txBox="1"/>
+          <p:nvPr/>
+        </p:nvSpPr>
+        <p:spPr>
+          <a:xfrm>
+            <a:off x="777240" y="3502152"/>
+            <a:ext cx="10652760" cy="612648"/>
+          </a:xfrm>
+          <a:prstGeom prst="rect">
+            <a:avLst/>
+          </a:prstGeom>
+          <a:noFill/>
+        </p:spPr>
+        <p:txBody>
+          <a:bodyPr wrap="square" lIns="0" rIns="0" tIns="0" bIns="0">
+            <a:spAutoFit/>
+          </a:bodyPr>
+          <a:lstStyle/>
+          <a:p>
+            <a:r>
+              <a:rPr sz="1750" b="0">
+                <a:solidFill>
+                  <a:srgbClr val="ECF1F6"/>
+                </a:solidFill>
+                <a:latin typeface="NanumGothic"/>
+                <a:ea typeface="NanumGothic"/>
+                <a:cs typeface="NanumGothic"/>
+              </a:rPr>
+              <a:t>기본 티어를 한 단계 낮추고 실패 시 올린다</a:t>
+            </a:r>
+          </a:p>
+        </p:txBody>
+      </p:sp>
+      <p:sp>
+        <p:nvSpPr>
+          <p:cNvPr id="9" name="audit:body-2"/>
+          <p:cNvSpPr txBox="1"/>
+          <p:nvPr/>
+        </p:nvSpPr>
+        <p:spPr>
+          <a:xfrm>
+            <a:off x="777240" y="4142231"/>
+            <a:ext cx="10652760" cy="612648"/>
+          </a:xfrm>
+          <a:prstGeom prst="rect">
+            <a:avLst/>
+          </a:prstGeom>
+          <a:noFill/>
+        </p:spPr>
+        <p:txBody>
+          <a:bodyPr wrap="square" lIns="0" rIns="0" tIns="0" bIns="0">
+            <a:spAutoFit/>
+          </a:bodyPr>
+          <a:lstStyle/>
+          <a:p>
+            <a:r>
+              <a:rPr sz="1750" b="0">
+                <a:solidFill>
+                  <a:srgbClr val="ECF1F6"/>
+                </a:solidFill>
+                <a:latin typeface="NanumGothic"/>
+                <a:ea typeface="NanumGothic"/>
+                <a:cs typeface="NanumGothic"/>
+              </a:rPr>
+              <a:t>다음 주에 같은 작업의 비용을 다시 잰다</a:t>
+            </a:r>
+          </a:p>
+        </p:txBody>
+      </p:sp>
+      <p:sp>
+        <p:nvSpPr>
+          <p:cNvPr id="10" name="audit:source"/>
+          <p:cNvSpPr txBox="1"/>
+          <p:nvPr/>
+        </p:nvSpPr>
+        <p:spPr>
+          <a:xfrm>
+            <a:off x="640080" y="6080760"/>
+            <a:ext cx="10972800" cy="274320"/>
+          </a:xfrm>
+          <a:prstGeom prst="rect">
+            <a:avLst/>
+          </a:prstGeom>
+          <a:noFill/>
+        </p:spPr>
+        <p:txBody>
+          <a:bodyPr wrap="square" lIns="0" rIns="0" tIns="0" bIns="0">
+            <a:spAutoFit/>
+          </a:bodyPr>
+          <a:lstStyle/>
+          <a:p>
+            <a:r>
+              <a:rPr sz="1000" b="0">
+                <a:solidFill>
+                  <a:srgbClr val="93A4B5"/>
+                </a:solidFill>
+                <a:latin typeface="NanumGothic"/>
+                <a:ea typeface="NanumGothic"/>
+                <a:cs typeface="NanumGothic"/>
+              </a:rPr>
+              <a:t>github.com/giyeop-cody/token-cost-lab</a:t>
+            </a:r>
+          </a:p>
+        </p:txBody>
+      </p:sp>
+      <p:sp>
+        <p:nvSpPr>
+          <p:cNvPr id="11" name="audit:footer"/>
+          <p:cNvSpPr txBox="1"/>
+          <p:nvPr/>
+        </p:nvSpPr>
+        <p:spPr>
+          <a:xfrm>
+            <a:off x="640080" y="6419088"/>
+            <a:ext cx="10972800" cy="256032"/>
+          </a:xfrm>
+          <a:prstGeom prst="rect">
+            <a:avLst/>
+          </a:prstGeom>
+          <a:noFill/>
+        </p:spPr>
+        <p:txBody>
+          <a:bodyPr wrap="square" lIns="0" rIns="0" tIns="0" bIns="0">
+            <a:spAutoFit/>
+          </a:bodyPr>
+          <a:lstStyle/>
+          <a:p>
+            <a:r>
+              <a:rPr sz="1000" b="0">
+                <a:solidFill>
+                  <a:srgbClr val="93A4B5"/>
+                </a:solidFill>
+                <a:latin typeface="NanumGothic"/>
+                <a:ea typeface="NanumGothic"/>
+                <a:cs typeface="NanumGothic"/>
+              </a:rPr>
+              <a:t>2026-09-20  ·  근거와 조건을 함께 인용</a:t>
+            </a:r>
+          </a:p>
+        </p:txBody>
+      </p:sp>
+    </p:spTree>
+  </p:cSld>
+  <p:clrMapOvr>
+    <a:masterClrMapping/>
+  </p:clrMapOvr>
+</p:sld>
+</file>
+
 <file path=ppt/slides/slide3.xml><?xml version="1.0" encoding="utf-8"?>
 <p:sld xmlns:a="http://schemas.openxmlformats.org/drawingml/2006/main" xmlns:p="http://schemas.openxmlformats.org/presentationml/2006/main" xmlns:r="http://schemas.openxmlformats.org/officeDocument/2006/relationships">
   <p:cSld>
@@ -9526,7 +11529,7 @@
                 <a:ea typeface="NanumGothic"/>
                 <a:cs typeface="NanumGothic"/>
               </a:rPr>
-              <a:t>전체 시스템 비용 시나리오</a:t>
+              <a:t>가격표 스냅샷 (2026-09-20)</a:t>
             </a:r>
           </a:p>
         </p:txBody>
@@ -9539,7 +11542,7 @@
         </p:nvSpPr>
         <p:spPr>
           <a:xfrm>
-            <a:off x="640080" y="822960"/>
+            <a:off x="640080" y="566928"/>
             <a:ext cx="10881360" cy="822960"/>
           </a:xfrm>
           <a:prstGeom prst="rect">
@@ -9562,7 +11565,7 @@
                 <a:ea typeface="NanumGothic"/>
                 <a:cs typeface="NanumGothic"/>
               </a:rPr>
-              <a:t>툴 출력과 서브에이전트는 전체 비용으로 본다</a:t>
+              <a:t>같은 토큰, 다른 단가</a:t>
             </a:r>
           </a:p>
         </p:txBody>
@@ -9575,7 +11578,7 @@
         </p:nvSpPr>
         <p:spPr>
           <a:xfrm>
-            <a:off x="640080" y="1783080"/>
+            <a:off x="640080" y="1261872"/>
             <a:ext cx="10881360" cy="777240"/>
           </a:xfrm>
           <a:prstGeom prst="rect">
@@ -9598,7 +11601,7 @@
                 <a:ea typeface="NanumGothic"/>
                 <a:cs typeface="NanumGothic"/>
               </a:rPr>
-              <a:t>$5.6010 → $2.7360</a:t>
+              <a:t>출력은 입력의 4~8배</a:t>
             </a:r>
           </a:p>
         </p:txBody>
@@ -9611,7 +11614,7 @@
         </p:nvSpPr>
         <p:spPr>
           <a:xfrm>
-            <a:off x="777240" y="2862072"/>
+            <a:off x="777240" y="2029968"/>
             <a:ext cx="10652760" cy="612648"/>
           </a:xfrm>
           <a:prstGeom prst="rect">
@@ -9634,7 +11637,7 @@
                 <a:ea typeface="NanumGothic"/>
                 <a:cs typeface="NanumGothic"/>
               </a:rPr>
-              <a:t>툴 읽기 누적 전송 1,680,000 토큰 (20턴)</a:t>
+              <a:t>비싼 쪽(출력)을 줄이는 습관이 먼저다</a:t>
             </a:r>
           </a:p>
         </p:txBody>
@@ -9647,7 +11650,7 @@
         </p:nvSpPr>
         <p:spPr>
           <a:xfrm>
-            <a:off x="777240" y="3502152"/>
+            <a:off x="777240" y="2542032"/>
             <a:ext cx="10652760" cy="612648"/>
           </a:xfrm>
           <a:prstGeom prst="rect">
@@ -9670,56 +11673,80 @@
                 <a:ea typeface="NanumGothic"/>
                 <a:cs typeface="NanumGothic"/>
               </a:rPr>
-              <a:t>컴팩션 $3.4425 · 서브에이전트 $2.736</a:t>
-            </a:r>
-          </a:p>
-        </p:txBody>
-      </p:sp>
-      <p:sp>
-        <p:nvSpPr>
-          <p:cNvPr id="9" name="audit:body-2"/>
-          <p:cNvSpPr txBox="1"/>
-          <p:nvPr/>
-        </p:nvSpPr>
-        <p:spPr>
-          <a:xfrm>
-            <a:off x="777240" y="4142231"/>
-            <a:ext cx="10652760" cy="612648"/>
-          </a:xfrm>
-          <a:prstGeom prst="rect">
-            <a:avLst/>
-          </a:prstGeom>
-          <a:noFill/>
-        </p:spPr>
-        <p:txBody>
-          <a:bodyPr wrap="square" lIns="0" rIns="0" tIns="0" bIns="0">
-            <a:spAutoFit/>
-          </a:bodyPr>
-          <a:lstStyle/>
-          <a:p>
-            <a:r>
-              <a:rPr sz="1750" b="0">
-                <a:solidFill>
-                  <a:srgbClr val="ECF1F6"/>
-                </a:solidFill>
-                <a:latin typeface="NanumGothic"/>
-                <a:ea typeface="NanumGothic"/>
-                <a:cs typeface="NanumGothic"/>
-              </a:rPr>
-              <a:t>자식 호출·요약 비용까지 포함해 비교한다</a:t>
-            </a:r>
-          </a:p>
-        </p:txBody>
-      </p:sp>
-      <p:sp>
-        <p:nvSpPr>
-          <p:cNvPr id="10" name="audit:source"/>
-          <p:cNvSpPr txBox="1"/>
-          <p:nvPr/>
-        </p:nvSpPr>
-        <p:spPr>
-          <a:xfrm>
-            <a:off x="640080" y="6080760"/>
+              <a:t>캐시 읽기는 입력의 0.1배 — 캐시가 있는 이유</a:t>
+            </a:r>
+          </a:p>
+        </p:txBody>
+      </p:sp>
+      <p:pic>
+        <p:nvPicPr>
+          <p:cNvPr id="9" name="Picture 8" descr="prices.png"/>
+          <p:cNvPicPr>
+            <a:picLocks noChangeAspect="1"/>
+          </p:cNvPicPr>
+          <p:nvPr/>
+        </p:nvPicPr>
+        <p:blipFill>
+          <a:blip r:embed="rId2"/>
+          <a:stretch>
+            <a:fillRect/>
+          </a:stretch>
+        </p:blipFill>
+        <p:spPr>
+          <a:xfrm>
+            <a:off x="777240" y="3101593"/>
+            <a:ext cx="10652760" cy="2959100"/>
+          </a:xfrm>
+          <a:prstGeom prst="rect">
+            <a:avLst/>
+          </a:prstGeom>
+        </p:spPr>
+      </p:pic>
+      <p:sp>
+        <p:nvSpPr>
+          <p:cNvPr id="10" name="audit:chart-caption"/>
+          <p:cNvSpPr txBox="1"/>
+          <p:nvPr/>
+        </p:nvSpPr>
+        <p:spPr>
+          <a:xfrm>
+            <a:off x="777240" y="6135624"/>
+            <a:ext cx="10652760" cy="237744"/>
+          </a:xfrm>
+          <a:prstGeom prst="rect">
+            <a:avLst/>
+          </a:prstGeom>
+          <a:noFill/>
+        </p:spPr>
+        <p:txBody>
+          <a:bodyPr wrap="square" lIns="0" rIns="0" tIns="0" bIns="0">
+            <a:spAutoFit/>
+          </a:bodyPr>
+          <a:lstStyle/>
+          <a:p>
+            <a:r>
+              <a:rPr sz="950" b="0">
+                <a:solidFill>
+                  <a:srgbClr val="93A4B5"/>
+                </a:solidFill>
+                <a:latin typeface="NanumGothic"/>
+                <a:ea typeface="NanumGothic"/>
+                <a:cs typeface="NanumGothic"/>
+              </a:rPr>
+              <a:t>그래프 · 단가 스냅샷 (USD / 100만 토큰) · prices.png</a:t>
+            </a:r>
+          </a:p>
+        </p:txBody>
+      </p:sp>
+      <p:sp>
+        <p:nvSpPr>
+          <p:cNvPr id="11" name="audit:source"/>
+          <p:cNvSpPr txBox="1"/>
+          <p:nvPr/>
+        </p:nvSpPr>
+        <p:spPr>
+          <a:xfrm>
+            <a:off x="777240" y="6382512"/>
             <a:ext cx="10972800" cy="274320"/>
           </a:xfrm>
           <a:prstGeom prst="rect">
@@ -9742,20 +11769,20 @@
                 <a:ea typeface="NanumGothic"/>
                 <a:cs typeface="NanumGothic"/>
               </a:rPr>
-              <a:t>experiments/exp11_tool_output_bloat.py</a:t>
-            </a:r>
-          </a:p>
-        </p:txBody>
-      </p:sp>
-      <p:sp>
-        <p:nvSpPr>
-          <p:cNvPr id="11" name="audit:footer"/>
-          <p:cNvSpPr txBox="1"/>
-          <p:nvPr/>
-        </p:nvSpPr>
-        <p:spPr>
-          <a:xfrm>
-            <a:off x="640080" y="6419088"/>
+              <a:t>lab/pricing.py MODELS</a:t>
+            </a:r>
+          </a:p>
+        </p:txBody>
+      </p:sp>
+      <p:sp>
+        <p:nvSpPr>
+          <p:cNvPr id="12" name="audit:footer"/>
+          <p:cNvSpPr txBox="1"/>
+          <p:nvPr/>
+        </p:nvSpPr>
+        <p:spPr>
+          <a:xfrm>
+            <a:off x="777240" y="6583680"/>
             <a:ext cx="10972800" cy="256032"/>
           </a:xfrm>
           <a:prstGeom prst="rect">
@@ -9919,7 +11946,7 @@
                 <a:ea typeface="NanumGothic"/>
                 <a:cs typeface="NanumGothic"/>
               </a:rPr>
-              <a:t>시나리오 (10,000콜)</a:t>
+              <a:t>비용 시나리오</a:t>
             </a:r>
           </a:p>
         </p:txBody>
@@ -9955,7 +11982,7 @@
                 <a:ea typeface="NanumGothic"/>
                 <a:cs typeface="NanumGothic"/>
               </a:rPr>
-              <a:t>모델 라우팅 · 쉬운 요청에 비싼 모델을 쓰지 않는다</a:t>
+              <a:t>긴 세션은 컴팩션으로 접는다</a:t>
             </a:r>
           </a:p>
         </p:txBody>
@@ -9991,7 +12018,7 @@
                 <a:ea typeface="NanumGothic"/>
                 <a:cs typeface="NanumGothic"/>
               </a:rPr>
-              <a:t>전부 강 $350 → 절반 $184</a:t>
+              <a:t>$2.32 → $0.93 (60% 절감)</a:t>
             </a:r>
           </a:p>
         </p:txBody>
@@ -10027,7 +12054,7 @@
                 <a:ea typeface="NanumGothic"/>
                 <a:cs typeface="NanumGothic"/>
               </a:rPr>
-              <a:t>절반만 라우팅해도 47% 절감</a:t>
+              <a:t>10턴마다 접으면 $1.23 (47% 절감)</a:t>
             </a:r>
           </a:p>
         </p:txBody>
@@ -10063,7 +12090,7 @@
                 <a:ea typeface="NanumGothic"/>
                 <a:cs typeface="NanumGothic"/>
               </a:rPr>
-              <a:t>공격적 라우팅은 $35.17 (90% 절감)</a:t>
+              <a:t>너무 자주 접으면 요약 호출이 이득을 먹는다</a:t>
             </a:r>
           </a:p>
         </p:txBody>
@@ -10099,7 +12126,7 @@
                 <a:ea typeface="NanumGothic"/>
                 <a:cs typeface="NanumGothic"/>
               </a:rPr>
-              <a:t>품질 측정 도구가 먼저다 — 임계값은 주기적으로 재보정</a:t>
+              <a:t>최적 주기는 세션 길이와 요약 비용으로 정해진다</a:t>
             </a:r>
           </a:p>
         </p:txBody>
@@ -10135,7 +12162,7 @@
                 <a:ea typeface="NanumGothic"/>
                 <a:cs typeface="NanumGothic"/>
               </a:rPr>
-              <a:t>experiments/exp06_other_levers.py</a:t>
+              <a:t>experiments/exp04_agent_loop_sdd.py</a:t>
             </a:r>
           </a:p>
         </p:txBody>
@@ -10312,7 +12339,7 @@
                 <a:ea typeface="NanumGothic"/>
                 <a:cs typeface="NanumGothic"/>
               </a:rPr>
-              <a:t>라우팅 배선</a:t>
+              <a:t>전체 시스템 비용 시나리오</a:t>
             </a:r>
           </a:p>
         </p:txBody>
@@ -10348,7 +12375,7 @@
                 <a:ea typeface="NanumGothic"/>
                 <a:cs typeface="NanumGothic"/>
               </a:rPr>
-              <a:t>무엇을 자동화하는가</a:t>
+              <a:t>툴 출력과 서브에이전트는 전체 비용으로 본다</a:t>
             </a:r>
           </a:p>
         </p:txBody>
@@ -10384,7 +12411,7 @@
                 <a:ea typeface="NanumGothic"/>
                 <a:cs typeface="NanumGothic"/>
               </a:rPr>
-              <a:t>요청마다 사람이 모델을 고르지 않는다</a:t>
+              <a:t>$5.6010 → $2.7360</a:t>
             </a:r>
           </a:p>
         </p:txBody>
@@ -10420,7 +12447,7 @@
                 <a:ea typeface="NanumGothic"/>
                 <a:cs typeface="NanumGothic"/>
               </a:rPr>
-              <a:t>설계 · 구현 · 설명 · 정형 작업을 분류해 티어를 고른다</a:t>
+              <a:t>툴 읽기 누적 전송 1,680,000 토큰 (20턴)</a:t>
             </a:r>
           </a:p>
         </p:txBody>
@@ -10456,7 +12483,7 @@
                 <a:ea typeface="NanumGothic"/>
                 <a:cs typeface="NanumGothic"/>
               </a:rPr>
-              <a:t>부수 단어(파일 업로드·검색)보다 작업 목적을 먼저 본다</a:t>
+              <a:t>컴팩션 $3.4425 · 서브에이전트 $2.736</a:t>
             </a:r>
           </a:p>
         </p:txBody>
@@ -10492,7 +12519,7 @@
                 <a:ea typeface="NanumGothic"/>
                 <a:cs typeface="NanumGothic"/>
               </a:rPr>
-              <a:t>비용 예산과 출력 상한을 함께 건다</a:t>
+              <a:t>자식 호출·요약 비용까지 포함해 비교한다</a:t>
             </a:r>
           </a:p>
         </p:txBody>
@@ -10528,7 +12555,7 @@
                 <a:ea typeface="NanumGothic"/>
                 <a:cs typeface="NanumGothic"/>
               </a:rPr>
-              <a:t>agent_setup/router.py</a:t>
+              <a:t>experiments/exp11_tool_output_bloat.py</a:t>
             </a:r>
           </a:p>
         </p:txBody>
@@ -10705,7 +12732,7 @@
                 <a:ea typeface="NanumGothic"/>
                 <a:cs typeface="NanumGothic"/>
               </a:rPr>
-              <a:t>정책 구분</a:t>
+              <a:t>라우팅 배선</a:t>
             </a:r>
           </a:p>
         </p:txBody>
@@ -10741,7 +12768,7 @@
                 <a:ea typeface="NanumGothic"/>
                 <a:cs typeface="NanumGothic"/>
               </a:rPr>
-              <a:t>두 정책을 섞지 않는다</a:t>
+              <a:t>무엇을 자동화하는가</a:t>
             </a:r>
           </a:p>
         </p:txBody>
@@ -10777,7 +12804,7 @@
                 <a:ea typeface="NanumGothic"/>
                 <a:cs typeface="NanumGothic"/>
               </a:rPr>
-              <a:t>라우팅 · 리워크 · 워크플로 컨트롤</a:t>
+              <a:t>요청마다 사람이 모델을 고르지 않는다</a:t>
             </a:r>
           </a:p>
         </p:txBody>
@@ -10813,7 +12840,7 @@
                 <a:ea typeface="NanumGothic"/>
                 <a:cs typeface="NanumGothic"/>
               </a:rPr>
-              <a:t>라우팅: 요청 한 건을 어느 티어로 보낼지 고른다</a:t>
+              <a:t>설계 · 구현 · 설명 · 정형 작업을 분류해 티어를 고른다</a:t>
             </a:r>
           </a:p>
         </p:txBody>
@@ -10849,7 +12876,7 @@
                 <a:ea typeface="NanumGothic"/>
                 <a:cs typeface="NanumGothic"/>
               </a:rPr>
-              <a:t>리워크: 같은 일을 다시 시키는 구간을 관리한다</a:t>
+              <a:t>부수 단어(파일 업로드·검색)보다 작업 목적을 먼저 본다</a:t>
             </a:r>
           </a:p>
         </p:txBody>
@@ -10885,7 +12912,7 @@
                 <a:ea typeface="NanumGothic"/>
                 <a:cs typeface="NanumGothic"/>
               </a:rPr>
-              <a:t>워크플로 컨트롤: 앞의 둘을 포함하는 상위 개념</a:t>
+              <a:t>비용 예산과 출력 상한을 함께 건다</a:t>
             </a:r>
           </a:p>
         </p:txBody>
@@ -10921,7 +12948,7 @@
                 <a:ea typeface="NanumGothic"/>
                 <a:cs typeface="NanumGothic"/>
               </a:rPr>
-              <a:t>agent_setup/antigravity/AGENTS.md</a:t>
+              <a:t>agent_setup/router.py</a:t>
             </a:r>
           </a:p>
         </p:txBody>
@@ -11098,7 +13125,7 @@
                 <a:ea typeface="NanumGothic"/>
                 <a:cs typeface="NanumGothic"/>
               </a:rPr>
-              <a:t>정책 A</a:t>
+              <a:t>정책 구분</a:t>
             </a:r>
           </a:p>
         </p:txBody>
@@ -11134,7 +13161,7 @@
                 <a:ea typeface="NanumGothic"/>
                 <a:cs typeface="NanumGothic"/>
               </a:rPr>
-              <a:t>사다리 A · 내부 실패가 올린다</a:t>
+              <a:t>두 정책을 섞지 않는다</a:t>
             </a:r>
           </a:p>
         </p:txBody>
@@ -11170,7 +13197,7 @@
                 <a:ea typeface="NanumGothic"/>
                 <a:cs typeface="NanumGothic"/>
               </a:rPr>
-              <a:t>테스트가 실패하면 턴 안에서 올린다</a:t>
+              <a:t>라우팅 · 리워크 · 워크플로 컨트롤</a:t>
             </a:r>
           </a:p>
         </p:txBody>
@@ -11206,7 +13233,7 @@
                 <a:ea typeface="NanumGothic"/>
                 <a:cs typeface="NanumGothic"/>
               </a:rPr>
-              <a:t>수용 기준(AC)이 없으면 올릴 근거도 없다</a:t>
+              <a:t>라우팅: 요청 한 건을 어느 티어로 보낼지 고른다</a:t>
             </a:r>
           </a:p>
         </p:txBody>
@@ -11242,7 +13269,7 @@
                 <a:ea typeface="NanumGothic"/>
                 <a:cs typeface="NanumGothic"/>
               </a:rPr>
-              <a:t>같은 실패가 반복될수록 누적 비용이 커진다</a:t>
+              <a:t>리워크: 같은 일을 다시 시키는 구간을 관리한다</a:t>
             </a:r>
           </a:p>
         </p:txBody>
@@ -11278,7 +13305,7 @@
                 <a:ea typeface="NanumGothic"/>
                 <a:cs typeface="NanumGothic"/>
               </a:rPr>
-              <a:t>진단과 적용을 같은 함수로 계산한다</a:t>
+              <a:t>워크플로 컨트롤: 앞의 둘을 포함하는 상위 개념</a:t>
             </a:r>
           </a:p>
         </p:txBody>
@@ -11314,7 +13341,7 @@
                 <a:ea typeface="NanumGothic"/>
                 <a:cs typeface="NanumGothic"/>
               </a:rPr>
-              <a:t>agent_setup/router.py</a:t>
+              <a:t>agent_setup/antigravity/AGENTS.md</a:t>
             </a:r>
           </a:p>
         </p:txBody>
@@ -11491,7 +13518,7 @@
                 <a:ea typeface="NanumGothic"/>
                 <a:cs typeface="NanumGothic"/>
               </a:rPr>
-              <a:t>정책 B (로그 재생)</a:t>
+              <a:t>정책 A</a:t>
             </a:r>
           </a:p>
         </p:txBody>
@@ -11527,7 +13554,7 @@
                 <a:ea typeface="NanumGothic"/>
                 <a:cs typeface="NanumGothic"/>
               </a:rPr>
-              <a:t>사다리 B · 사용자 반려가 올린다</a:t>
+              <a:t>사다리 A · 내부 실패가 올린다</a:t>
             </a:r>
           </a:p>
         </p:txBody>
@@ -11563,7 +13590,7 @@
                 <a:ea typeface="NanumGothic"/>
                 <a:cs typeface="NanumGothic"/>
               </a:rPr>
-              <a:t>저장 발화 6턴에서 3회 에스컬레이션</a:t>
+              <a:t>테스트가 실패하면 턴 안에서 올린다</a:t>
             </a:r>
           </a:p>
         </p:txBody>
@@ -11599,7 +13626,7 @@
                 <a:ea typeface="NanumGothic"/>
                 <a:cs typeface="NanumGothic"/>
               </a:rPr>
-              <a:t>같은 의도의 반복을 감지해 올린다</a:t>
+              <a:t>수용 기준(AC)이 없으면 올릴 근거도 없다</a:t>
             </a:r>
           </a:p>
         </p:txBody>
@@ -11635,7 +13662,7 @@
                 <a:ea typeface="NanumGothic"/>
                 <a:cs typeface="NanumGothic"/>
               </a:rPr>
-              <a:t>스펙 변경·신규 작업은 '반려'가 아니다</a:t>
+              <a:t>같은 실패가 반복될수록 누적 비용이 커진다</a:t>
             </a:r>
           </a:p>
         </p:txBody>
@@ -11671,7 +13698,7 @@
                 <a:ea typeface="NanumGothic"/>
                 <a:cs typeface="NanumGothic"/>
               </a:rPr>
-              <a:t>분류 신호가 없으면 올리지 않고 되묻는다</a:t>
+              <a:t>진단과 적용을 같은 함수로 계산한다</a:t>
             </a:r>
           </a:p>
         </p:txBody>
@@ -11707,7 +13734,7 @@
                 <a:ea typeface="NanumGothic"/>
                 <a:cs typeface="NanumGothic"/>
               </a:rPr>
-              <a:t>analysis/replay_logs.py</a:t>
+              <a:t>agent_setup/router.py</a:t>
             </a:r>
           </a:p>
         </p:txBody>
@@ -11884,7 +13911,7 @@
                 <a:ea typeface="NanumGothic"/>
                 <a:cs typeface="NanumGothic"/>
               </a:rPr>
-              <a:t>정책 시나리오 재생</a:t>
+              <a:t>정책 B (로그 재생)</a:t>
             </a:r>
           </a:p>
         </p:txBody>
@@ -11920,7 +13947,7 @@
                 <a:ea typeface="NanumGothic"/>
                 <a:cs typeface="NanumGothic"/>
               </a:rPr>
-              <a:t>작은 모델이 지휘한다</a:t>
+              <a:t>사다리 B · 사용자 반려가 올린다</a:t>
             </a:r>
           </a:p>
         </p:txBody>
@@ -11956,7 +13983,7 @@
                 <a:ea typeface="NanumGothic"/>
                 <a:cs typeface="NanumGothic"/>
               </a:rPr>
-              <a:t>사다리 2.81배 (1턴 27% · 2턴 43%)</a:t>
+              <a:t>저장 발화 6턴에서 3회 에스컬레이션</a:t>
             </a:r>
           </a:p>
         </p:txBody>
@@ -11992,7 +14019,7 @@
                 <a:ea typeface="NanumGothic"/>
                 <a:cs typeface="NanumGothic"/>
               </a:rPr>
-              <a:t>실패가 반복되면 격차가 커진다 — 6회 2.80배</a:t>
+              <a:t>같은 의도의 반복을 감지해 올린다</a:t>
             </a:r>
           </a:p>
         </p:txBody>
@@ -12028,7 +14055,7 @@
                 <a:ea typeface="NanumGothic"/>
                 <a:cs typeface="NanumGothic"/>
               </a:rPr>
-              <a:t>짧은 리워크에서도 이득 — 1턴 27% · 2턴 43%</a:t>
+              <a:t>스펙 변경·신규 작업은 '반려'가 아니다</a:t>
             </a:r>
           </a:p>
         </p:txBody>
@@ -12064,7 +14091,7 @@
                 <a:ea typeface="NanumGothic"/>
                 <a:cs typeface="NanumGothic"/>
               </a:rPr>
-              <a:t>respec이면 실행 전에 멈추므로 실행 비용만 계산</a:t>
+              <a:t>분류 신호가 없으면 올리지 않고 되묻는다</a:t>
             </a:r>
           </a:p>
         </p:txBody>
@@ -12100,7 +14127,7 @@
                 <a:ea typeface="NanumGothic"/>
                 <a:cs typeface="NanumGothic"/>
               </a:rPr>
-              <a:t>analysis/lean_vs_full.py</a:t>
+              <a:t>analysis/replay_logs.py</a:t>
             </a:r>
           </a:p>
         </p:txBody>

--- a/presentation/token_cost_agent.pptx
+++ b/presentation/token_cost_agent.pptx
@@ -27,6 +27,7 @@
     <p:sldId id="275" r:id="rId27"/>
     <p:sldId id="276" r:id="rId28"/>
     <p:sldId id="277" r:id="rId29"/>
+    <p:sldId id="278" r:id="rId30"/>
   </p:sldIdLst>
   <p:sldSz cx="12191695" cy="6858000" type="screen4x3"/>
   <p:notesSz cx="6858000" cy="9144000"/>
@@ -613,27 +614,27 @@
           <a:lstStyle/>
           <a:p>
             <a:r>
-              <a:t>각 레버의 절감률을 순서대로 곱한 값이다. 실제 도입에서는 서로 겹치는 부분이 생긴다.</a:t>
-            </a:r>
-          </a:p>
-          <a:p>
-            <a:r>
-              <a:t>검증된 상한도 아니다. 자기 데이터로 A/B를 돌려 확정해야 한다.</a:t>
-            </a:r>
-          </a:p>
-          <a:p>
-            <a:r>
-              <a:t>발표에서는 '이론적 상한'이라는 표현보다 '순차 가정의 산술'이라고 말한다.</a:t>
-            </a:r>
-          </a:p>
-          <a:p>
-            <a:r>
-              <a:t>근거: experiments/exp06_other_levers.py</a:t>
-            </a:r>
-          </a:p>
-          <a:p>
-            <a:r>
-              <a:t>증거 범위: 순차 시나리오</a:t>
+              <a:t>과거 '0/5 → 4/5'로 소개했던 수치는 원자료가 없어 철회했다. 지금 값은 저장 발화 재생 결과다.</a:t>
+            </a:r>
+          </a:p>
+          <a:p>
+            <a:r>
+              <a:t>재생은 가정 없는 재현이지만 표본이 짧다(6턴). 분류 정확도를 보장하지 않는다.</a:t>
+            </a:r>
+          </a:p>
+          <a:p>
+            <a:r>
+              <a:t>분류가 애매하면 escalate가 아니라 질문을 반환하도록 설계했다.</a:t>
+            </a:r>
+          </a:p>
+          <a:p>
+            <a:r>
+              <a:t>근거: analysis/replay_logs.py</a:t>
+            </a:r>
+          </a:p>
+          <a:p>
+            <a:r>
+              <a:t>증거 범위: 정책 B (로그 재생)</a:t>
             </a:r>
           </a:p>
         </p:txBody>
@@ -703,27 +704,27 @@
           <a:lstStyle/>
           <a:p>
             <a:r>
-              <a:t>이 부분이 없으면 '새 작업인데 이전 작업의 리워크로 판정'되는 오작동이 생긴다.</a:t>
-            </a:r>
-          </a:p>
-          <a:p>
-            <a:r>
-              <a:t>회귀 테스트로 새 작업·동일 문구·교차 작업을 검증한다.</a:t>
-            </a:r>
-          </a:p>
-          <a:p>
-            <a:r>
-              <a:t>로그에 task_id와 판정 근거를 남겨 사후 추적이 가능하게 했다.</a:t>
-            </a:r>
-          </a:p>
-          <a:p>
-            <a:r>
-              <a:t>근거: agent_setup/orchestrator.py</a:t>
-            </a:r>
-          </a:p>
-          <a:p>
-            <a:r>
-              <a:t>증거 범위: 상태 관리</a:t>
+              <a:t>각 레버의 절감률을 순서대로 곱한 값이다. 실제 도입에서는 서로 겹치는 부분이 생긴다.</a:t>
+            </a:r>
+          </a:p>
+          <a:p>
+            <a:r>
+              <a:t>검증된 상한도 아니다. 자기 데이터로 A/B를 돌려 확정해야 한다.</a:t>
+            </a:r>
+          </a:p>
+          <a:p>
+            <a:r>
+              <a:t>발표에서는 '이론적 상한'이라는 표현보다 '순차 가정의 산술'이라고 말한다.</a:t>
+            </a:r>
+          </a:p>
+          <a:p>
+            <a:r>
+              <a:t>근거: experiments/exp06_other_levers.py</a:t>
+            </a:r>
+          </a:p>
+          <a:p>
+            <a:r>
+              <a:t>증거 범위: 순차 시나리오</a:t>
             </a:r>
           </a:p>
         </p:txBody>
@@ -793,27 +794,27 @@
           <a:lstStyle/>
           <a:p>
             <a:r>
-              <a:t>두 경로(진단 후 적용 / 곧바로 적용)에서 같은 값이 나오지 않으면 정책 비교가 무의미해진다.</a:t>
-            </a:r>
-          </a:p>
-          <a:p>
-            <a:r>
-              <a:t>단가는 실제 계약이 아니라 명시적 시나리오다. 실제 전달문 비용은 usage로 측정한다.</a:t>
-            </a:r>
-          </a:p>
-          <a:p>
-            <a:r>
-              <a:t>이 값은 회귀 테스트의 기준값이며 절감 실적이 아니다.</a:t>
-            </a:r>
-          </a:p>
-          <a:p>
-            <a:r>
-              <a:t>근거: agent_setup/router.py · tests/</a:t>
-            </a:r>
-          </a:p>
-          <a:p>
-            <a:r>
-              <a:t>증거 범위: 비용 회귀</a:t>
+              <a:t>이 부분이 없으면 '새 작업인데 이전 작업의 리워크로 판정'되는 오작동이 생긴다.</a:t>
+            </a:r>
+          </a:p>
+          <a:p>
+            <a:r>
+              <a:t>회귀 테스트로 새 작업·동일 문구·교차 작업을 검증한다.</a:t>
+            </a:r>
+          </a:p>
+          <a:p>
+            <a:r>
+              <a:t>로그에 task_id와 판정 근거를 남겨 사후 추적이 가능하게 했다.</a:t>
+            </a:r>
+          </a:p>
+          <a:p>
+            <a:r>
+              <a:t>근거: agent_setup/orchestrator.py</a:t>
+            </a:r>
+          </a:p>
+          <a:p>
+            <a:r>
+              <a:t>증거 범위: 상태 관리</a:t>
             </a:r>
           </a:p>
         </p:txBody>
@@ -883,27 +884,27 @@
           <a:lstStyle/>
           <a:p>
             <a:r>
-              <a:t>이중 계상은 비용을 부풀려 절감을 과장하는 대표적 실수다.</a:t>
-            </a:r>
-          </a:p>
-          <a:p>
-            <a:r>
-              <a:t>4,700은 페르소나 시나리오를 맞춘 값이지 독립 실측 캘리브레이션이 아니다. 동일 자료 내부 정합만 확인했다.</a:t>
-            </a:r>
-          </a:p>
-          <a:p>
-            <a:r>
-              <a:t>역산 오차는 0.147%이고, 이 수치는 문서에 한계와 함께 남긴다.</a:t>
-            </a:r>
-          </a:p>
-          <a:p>
-            <a:r>
-              <a:t>근거: analysis/calibrate_growth.py</a:t>
-            </a:r>
-          </a:p>
-          <a:p>
-            <a:r>
-              <a:t>증거 범위: 비용 산식</a:t>
+              <a:t>두 경로(진단 후 적용 / 곧바로 적용)에서 같은 값이 나오지 않으면 정책 비교가 무의미해진다.</a:t>
+            </a:r>
+          </a:p>
+          <a:p>
+            <a:r>
+              <a:t>단가는 실제 계약이 아니라 명시적 시나리오다. 실제 전달문 비용은 usage로 측정한다.</a:t>
+            </a:r>
+          </a:p>
+          <a:p>
+            <a:r>
+              <a:t>이 값은 회귀 테스트의 기준값이며 절감 실적이 아니다.</a:t>
+            </a:r>
+          </a:p>
+          <a:p>
+            <a:r>
+              <a:t>근거: agent_setup/router.py · tests/</a:t>
+            </a:r>
+          </a:p>
+          <a:p>
+            <a:r>
+              <a:t>증거 범위: 비용 회귀</a:t>
             </a:r>
           </a:p>
         </p:txBody>
@@ -973,27 +974,27 @@
           <a:lstStyle/>
           <a:p>
             <a:r>
-              <a:t>에이전트는 같은 접두부를 매 턴 다시 보낸다. 캐시의 이득이 가장 큰 워크로드다.</a:t>
-            </a:r>
-          </a:p>
-          <a:p>
-            <a:r>
-              <a:t>최소 길이 미달이면 할인 가정을 하지 않는다. 모델별 조건을 pricing에 모아 두었다.</a:t>
-            </a:r>
-          </a:p>
-          <a:p>
-            <a:r>
-              <a:t>프롬프트를 자주 바꾸면 캐시가 깨진다. 변경 주기를 정하고 측정한다.</a:t>
-            </a:r>
-          </a:p>
-          <a:p>
-            <a:r>
-              <a:t>근거: agent_setup/config.py</a:t>
-            </a:r>
-          </a:p>
-          <a:p>
-            <a:r>
-              <a:t>증거 범위: 캐싱 배선</a:t>
+              <a:t>이중 계상은 비용을 부풀려 절감을 과장하는 대표적 실수다.</a:t>
+            </a:r>
+          </a:p>
+          <a:p>
+            <a:r>
+              <a:t>4,700은 페르소나 시나리오를 맞춘 값이지 독립 실측 캘리브레이션이 아니다. 동일 자료 내부 정합만 확인했다.</a:t>
+            </a:r>
+          </a:p>
+          <a:p>
+            <a:r>
+              <a:t>역산 오차는 0.147%이고, 이 수치는 문서에 한계와 함께 남긴다.</a:t>
+            </a:r>
+          </a:p>
+          <a:p>
+            <a:r>
+              <a:t>근거: analysis/calibrate_growth.py</a:t>
+            </a:r>
+          </a:p>
+          <a:p>
+            <a:r>
+              <a:t>증거 범위: 비용 산식</a:t>
             </a:r>
           </a:p>
         </p:txBody>
@@ -1063,27 +1064,27 @@
           <a:lstStyle/>
           <a:p>
             <a:r>
-              <a:t>에이전트 비용은 턴 수의 2차 함수다. '한 번 더 물어보기'가 싼 행동이 아니다.</a:t>
-            </a:r>
-          </a:p>
-          <a:p>
-            <a:r>
-              <a:t>추상화 레이어 3개를 미리 만든 경우 20턴 세션에서 추가 재전송 비용 $0.270이 붙는다(가정).</a:t>
-            </a:r>
-          </a:p>
-          <a:p>
-            <a:r>
-              <a:t>턴을 줄이는 가장 확실한 수단은 요구사항을 먼저 확정하는 것이다.</a:t>
-            </a:r>
-          </a:p>
-          <a:p>
-            <a:r>
-              <a:t>근거: experiments/exp04_agent_loop_sdd.py</a:t>
-            </a:r>
-          </a:p>
-          <a:p>
-            <a:r>
-              <a:t>증거 범위: 비용 시나리오</a:t>
+              <a:t>에이전트는 같은 접두부를 매 턴 다시 보낸다. 캐시의 이득이 가장 큰 워크로드다.</a:t>
+            </a:r>
+          </a:p>
+          <a:p>
+            <a:r>
+              <a:t>최소 길이 미달이면 할인 가정을 하지 않는다. 모델별 조건을 pricing에 모아 두었다.</a:t>
+            </a:r>
+          </a:p>
+          <a:p>
+            <a:r>
+              <a:t>프롬프트를 자주 바꾸면 캐시가 깨진다. 변경 주기를 정하고 측정한다.</a:t>
+            </a:r>
+          </a:p>
+          <a:p>
+            <a:r>
+              <a:t>근거: agent_setup/config.py</a:t>
+            </a:r>
+          </a:p>
+          <a:p>
+            <a:r>
+              <a:t>증거 범위: 캐싱 배선</a:t>
             </a:r>
           </a:p>
         </p:txBody>
@@ -1153,17 +1154,17 @@
           <a:lstStyle/>
           <a:p>
             <a:r>
-              <a:t>고정 8,000토큰 프리픽스, 턴당 입력 2,000·출력 800, Sonnet 단가의 계산이다.</a:t>
-            </a:r>
-          </a:p>
-          <a:p>
-            <a:r>
-              <a:t>컴팩션 주기는 요약 비용과 품질·재작업을 함께 측정해 정한다.</a:t>
-            </a:r>
-          </a:p>
-          <a:p>
-            <a:r>
-              <a:t>실제 세션 비용은 도구 출력과 파일 재전송으로 더 커진다.</a:t>
+              <a:t>에이전트 비용은 턴 수의 2차 함수다. '한 번 더 물어보기'가 싼 행동이 아니다.</a:t>
+            </a:r>
+          </a:p>
+          <a:p>
+            <a:r>
+              <a:t>추상화 레이어 3개를 미리 만든 경우 20턴 세션에서 추가 재전송 비용 $0.270이 붙는다(가정).</a:t>
+            </a:r>
+          </a:p>
+          <a:p>
+            <a:r>
+              <a:t>턴을 줄이는 가장 확실한 수단은 요구사항을 먼저 확정하는 것이다.</a:t>
             </a:r>
           </a:p>
           <a:p>
@@ -1243,27 +1244,27 @@
           <a:lstStyle/>
           <a:p>
             <a:r>
-              <a:t>고정 20,000 + 가변 1,000 + 출력 1,500, Sonnet 단가, 100콜 조건의 계산이다.</a:t>
-            </a:r>
-          </a:p>
-          <a:p>
-            <a:r>
-              <a:t>히트율은 가정값이다. 실제 값은 자기 usage의 cache_read 필드로 측정해야 한다.</a:t>
-            </a:r>
-          </a:p>
-          <a:p>
-            <a:r>
-              <a:t>저장료·TTL·최소 길이는 모델별로 다르다. 미확인 기준은 할인 가정을 하지 않는다.</a:t>
-            </a:r>
-          </a:p>
-          <a:p>
-            <a:r>
-              <a:t>근거: experiments/exp03_prompt_caching.py</a:t>
-            </a:r>
-          </a:p>
-          <a:p>
-            <a:r>
-              <a:t>증거 범위: 비용 시나리오 (100콜)</a:t>
+              <a:t>고정 8,000토큰 프리픽스, 턴당 입력 2,000·출력 800, Sonnet 단가의 계산이다.</a:t>
+            </a:r>
+          </a:p>
+          <a:p>
+            <a:r>
+              <a:t>컴팩션 주기는 요약 비용과 품질·재작업을 함께 측정해 정한다.</a:t>
+            </a:r>
+          </a:p>
+          <a:p>
+            <a:r>
+              <a:t>실제 세션 비용은 도구 출력과 파일 재전송으로 더 커진다.</a:t>
+            </a:r>
+          </a:p>
+          <a:p>
+            <a:r>
+              <a:t>근거: experiments/exp04_agent_loop_sdd.py</a:t>
+            </a:r>
+          </a:p>
+          <a:p>
+            <a:r>
+              <a:t>증거 범위: 비용 시나리오</a:t>
             </a:r>
           </a:p>
         </p:txBody>
@@ -1333,27 +1334,27 @@
           <a:lstStyle/>
           <a:p>
             <a:r>
-              <a:t>고정 20,000 + 가변 1,000 + 출력 1,500, Sonnet 단가, 100콜 조건의 계산이다.</a:t>
-            </a:r>
-          </a:p>
-          <a:p>
-            <a:r>
-              <a:t>히트율은 가정값이다. 실제 값은 자기 usage의 cache_read 필드로 측정한다.</a:t>
-            </a:r>
-          </a:p>
-          <a:p>
-            <a:r>
-              <a:t>저장료·TTL·최소 길이는 모델별로 다르다. 미확인 기준은 할인 가정을 하지 않는다.</a:t>
-            </a:r>
-          </a:p>
-          <a:p>
-            <a:r>
-              <a:t>근거: experiments/exp03_prompt_caching.py</a:t>
-            </a:r>
-          </a:p>
-          <a:p>
-            <a:r>
-              <a:t>증거 범위: 비용 시나리오 (100콜)</a:t>
+              <a:t>고정 8,000토큰 프리픽스, 턴당 입력 2,000·출력 800의 계산이다.</a:t>
+            </a:r>
+          </a:p>
+          <a:p>
+            <a:r>
+              <a:t>이력 재전송은 캐시 프리픽스로 접을 수 있다. 실제 적중 여부는 배치에 달렸다.</a:t>
+            </a:r>
+          </a:p>
+          <a:p>
+            <a:r>
+              <a:t>출력은 단가가 비싸므로 비중이 작아도 금액 기여는 별도로 봐야 한다.</a:t>
+            </a:r>
+          </a:p>
+          <a:p>
+            <a:r>
+              <a:t>근거: experiments/exp04_agent_loop_sdd.py</a:t>
+            </a:r>
+          </a:p>
+          <a:p>
+            <a:r>
+              <a:t>증거 범위: 비용 시나리오 (20턴)</a:t>
             </a:r>
           </a:p>
         </p:txBody>
@@ -1423,27 +1424,27 @@
           <a:lstStyle/>
           <a:p>
             <a:r>
-              <a:t>각 레버의 절감률을 순서대로 곱한 값이다. 실제 도입에서는 서로 겹치는 부분이 생긴다.</a:t>
-            </a:r>
-          </a:p>
-          <a:p>
-            <a:r>
-              <a:t>검증된 상한도 아니다. 자기 데이터로 A/B를 돌려 확정해야 한다.</a:t>
-            </a:r>
-          </a:p>
-          <a:p>
-            <a:r>
-              <a:t>레버별 적용 조건(히트율·라우팅 임계값·배치 가능성)이 다르다.</a:t>
-            </a:r>
-          </a:p>
-          <a:p>
-            <a:r>
-              <a:t>근거: experiments/exp06_other_levers.py</a:t>
-            </a:r>
-          </a:p>
-          <a:p>
-            <a:r>
-              <a:t>증거 범위: 순차 시나리오</a:t>
+              <a:t>고정 20,000 + 가변 1,000 + 출력 1,500, Sonnet 단가, 100콜 조건의 계산이다.</a:t>
+            </a:r>
+          </a:p>
+          <a:p>
+            <a:r>
+              <a:t>히트율은 가정값이다. 실제 값은 자기 usage의 cache_read 필드로 측정해야 한다.</a:t>
+            </a:r>
+          </a:p>
+          <a:p>
+            <a:r>
+              <a:t>저장료·TTL·최소 길이는 모델별로 다르다. 미확인 기준은 할인 가정을 하지 않는다.</a:t>
+            </a:r>
+          </a:p>
+          <a:p>
+            <a:r>
+              <a:t>근거: experiments/exp03_prompt_caching.py</a:t>
+            </a:r>
+          </a:p>
+          <a:p>
+            <a:r>
+              <a:t>증거 범위: 비용 시나리오 (100콜)</a:t>
             </a:r>
           </a:p>
         </p:txBody>
@@ -1603,32 +1604,27 @@
           <a:lstStyle/>
           <a:p>
             <a:r>
-              <a:t>EXTERNAL=0은 '추가 종량 API 금액이 0'이라는 모델링 선택이다. 총비용이 0이라는 뜻이 아니다.</a:t>
-            </a:r>
-          </a:p>
-          <a:p>
-            <a:r>
-              <a:t>약관·품질·재현성은 별도로 확인해야 한다. 라우터가 이를 보증하지 않는다.</a:t>
-            </a:r>
-          </a:p>
-          <a:p>
-            <a:r>
-              <a:t>사람의 검토 시간과 구독료는 이 계산 밖이다.</a:t>
-            </a:r>
-          </a:p>
-          <a:p>
-            <a:r>
-              <a:t>복사·정리 단계에서 스펙 형식을 고정하면 다음 단계 입력이 줄어든다.</a:t>
-            </a:r>
-          </a:p>
-          <a:p>
-            <a:r>
-              <a:t>근거: lab/pricing.py TIER_SCENARIOS</a:t>
-            </a:r>
-          </a:p>
-          <a:p>
-            <a:r>
-              <a:t>증거 범위: 경로 분리</a:t>
+              <a:t>고정 20,000 + 가변 1,000 + 출력 1,500, Sonnet 단가, 100콜 조건의 계산이다.</a:t>
+            </a:r>
+          </a:p>
+          <a:p>
+            <a:r>
+              <a:t>적중률은 관측값이 아니라 가정 축이다. 자기 usage의 cache_read로 실측해야 한다.</a:t>
+            </a:r>
+          </a:p>
+          <a:p>
+            <a:r>
+              <a:t>캐시 저장료·TTL·최소 길이는 별도 조건이며, 미확인 모델은 할인을 가정하지 않는다.</a:t>
+            </a:r>
+          </a:p>
+          <a:p>
+            <a:r>
+              <a:t>근거: experiments/exp03_prompt_caching.py</a:t>
+            </a:r>
+          </a:p>
+          <a:p>
+            <a:r>
+              <a:t>증거 범위: 비용 시나리오 (100콜)</a:t>
             </a:r>
           </a:p>
         </p:txBody>
@@ -1698,27 +1694,32 @@
           <a:lstStyle/>
           <a:p>
             <a:r>
-              <a:t>자동화의 목적은 사람을 빼는 것이 아니라 기본값을 낮추는 것이다.</a:t>
-            </a:r>
-          </a:p>
-          <a:p>
-            <a:r>
-              <a:t>측정 없는 자동화는 조용히 손해를 만들 수 있다(미스 캐싱이 대표적이다).</a:t>
-            </a:r>
-          </a:p>
-          <a:p>
-            <a:r>
-              <a:t>이상 징후가 보이면 티어를 고정해 비교하는 폴백을 둔다.</a:t>
-            </a:r>
-          </a:p>
-          <a:p>
-            <a:r>
-              <a:t>근거: agent_setup/antigravity/AGENTS.md · docs/CORRECTIONS.md</a:t>
-            </a:r>
-          </a:p>
-          <a:p>
-            <a:r>
-              <a:t>증거 범위: 운영</a:t>
+              <a:t>EXTERNAL=0은 '추가 종량 API 금액이 0'이라는 모델링 선택이다. 총비용이 0이라는 뜻이 아니다.</a:t>
+            </a:r>
+          </a:p>
+          <a:p>
+            <a:r>
+              <a:t>약관·품질·재현성은 별도로 확인해야 한다. 라우터가 이를 보증하지 않는다.</a:t>
+            </a:r>
+          </a:p>
+          <a:p>
+            <a:r>
+              <a:t>사람의 검토 시간과 구독료는 이 계산 밖이다.</a:t>
+            </a:r>
+          </a:p>
+          <a:p>
+            <a:r>
+              <a:t>복사·정리 단계에서 스펙 형식을 고정하면 다음 단계 입력이 줄어든다.</a:t>
+            </a:r>
+          </a:p>
+          <a:p>
+            <a:r>
+              <a:t>근거: lab/pricing.py TIER_SCENARIOS</a:t>
+            </a:r>
+          </a:p>
+          <a:p>
+            <a:r>
+              <a:t>증거 범위: 경로 분리</a:t>
             </a:r>
           </a:p>
         </p:txBody>
@@ -1788,6 +1789,96 @@
           <a:lstStyle/>
           <a:p>
             <a:r>
+              <a:t>자동화의 목적은 사람을 빼는 것이 아니라 기본값을 낮추는 것이다.</a:t>
+            </a:r>
+          </a:p>
+          <a:p>
+            <a:r>
+              <a:t>측정 없는 자동화는 조용히 손해를 만들 수 있다(미스 캐싱이 대표적이다).</a:t>
+            </a:r>
+          </a:p>
+          <a:p>
+            <a:r>
+              <a:t>이상 징후가 보이면 티어를 고정해 비교하는 폴백을 둔다.</a:t>
+            </a:r>
+          </a:p>
+          <a:p>
+            <a:r>
+              <a:t>근거: agent_setup/antigravity/AGENTS.md · docs/CORRECTIONS.md</a:t>
+            </a:r>
+          </a:p>
+          <a:p>
+            <a:r>
+              <a:t>증거 범위: 운영</a:t>
+            </a:r>
+          </a:p>
+        </p:txBody>
+      </p:sp>
+      <p:sp>
+        <p:nvSpPr>
+          <p:cNvPr id="4" name="Slide Number Placeholder 3"/>
+          <p:cNvSpPr>
+            <a:spLocks noGrp="1"/>
+          </p:cNvSpPr>
+          <p:nvPr>
+            <p:ph type="sldNum" idx="5" sz="quarter"/>
+          </p:nvPr>
+        </p:nvSpPr>
+        <p:spPr/>
+      </p:sp>
+    </p:spTree>
+  </p:cSld>
+  <p:clrMapOvr>
+    <a:masterClrMapping/>
+  </p:clrMapOvr>
+</p:notes>
+</file>
+
+<file path=ppt/notesSlides/notesSlide23.xml><?xml version="1.0" encoding="utf-8"?>
+<p:notes xmlns:a="http://schemas.openxmlformats.org/drawingml/2006/main" xmlns:p="http://schemas.openxmlformats.org/presentationml/2006/main" xmlns:r="http://schemas.openxmlformats.org/officeDocument/2006/relationships">
+  <p:cSld>
+    <p:spTree>
+      <p:nvGrpSpPr>
+        <p:cNvPr id="1" name=""/>
+        <p:cNvGrpSpPr/>
+        <p:nvPr/>
+      </p:nvGrpSpPr>
+      <p:grpSpPr>
+        <a:xfrm>
+          <a:off x="0" y="0"/>
+          <a:ext cx="0" cy="0"/>
+          <a:chOff x="0" y="0"/>
+          <a:chExt cx="0" cy="0"/>
+        </a:xfrm>
+      </p:grpSpPr>
+      <p:sp>
+        <p:nvSpPr>
+          <p:cNvPr id="2" name="Slide Image Placeholder 1"/>
+          <p:cNvSpPr>
+            <a:spLocks noGrp="1"/>
+          </p:cNvSpPr>
+          <p:nvPr>
+            <p:ph type="sldImg" idx="2"/>
+          </p:nvPr>
+        </p:nvSpPr>
+        <p:spPr/>
+      </p:sp>
+      <p:sp>
+        <p:nvSpPr>
+          <p:cNvPr id="3" name="Notes Placeholder 2"/>
+          <p:cNvSpPr>
+            <a:spLocks noGrp="1"/>
+          </p:cNvSpPr>
+          <p:nvPr>
+            <p:ph type="body" idx="3" sz="quarter"/>
+          </p:nvPr>
+        </p:nvSpPr>
+        <p:spPr/>
+        <p:txBody>
+          <a:bodyPr/>
+          <a:lstStyle/>
+          <a:p>
+            <a:r>
               <a:t>두 가지 모두 설정 수준에서 시작할 수 있고 되돌리기 쉽다.</a:t>
             </a:r>
           </a:p>
@@ -1968,27 +2059,32 @@
           <a:lstStyle/>
           <a:p>
             <a:r>
-              <a:t>20턴 세션에 캐싱만 걸면 $1.91(+17%) — 이력 누적은 그대로 남기 때문이다.</a:t>
-            </a:r>
-          </a:p>
-          <a:p>
-            <a:r>
-              <a:t>요약은 품질에 영향을 준다. 압축 과정에서 잃는 정보가 재작업을 만들면 절감이 상쇄된다.</a:t>
-            </a:r>
-          </a:p>
-          <a:p>
-            <a:r>
-              <a:t>주기를 바꿔 가며 재작업률과 총비용을 함께 측정할 것을 권한다.</a:t>
-            </a:r>
-          </a:p>
-          <a:p>
-            <a:r>
-              <a:t>근거: experiments/exp04_agent_loop_sdd.py</a:t>
-            </a:r>
-          </a:p>
-          <a:p>
-            <a:r>
-              <a:t>증거 범위: 비용 시나리오</a:t>
+              <a:t>표 값은 모델별 공개 단가이며 계약·배치·장문 할증은 별도다.</a:t>
+            </a:r>
+          </a:p>
+          <a:p>
+            <a:r>
+              <a:t>출력÷입력과 캐시 읽기 배수는 모델마다 다르다 — 같은 배수를 일반화하지 않는다.</a:t>
+            </a:r>
+          </a:p>
+          <a:p>
+            <a:r>
+              <a:t>인트로 단가(Gemini 3.8/3.6 Flash)는 2026-12-31까지이며 이후 2배가 된다.</a:t>
+            </a:r>
+          </a:p>
+          <a:p>
+            <a:r>
+              <a:t>값을 손으로 옮겨 적지 않는다. 이 표는 생성기가 pricing에서 직접 만든다.</a:t>
+            </a:r>
+          </a:p>
+          <a:p>
+            <a:r>
+              <a:t>근거: lab/pricing.py MODELS</a:t>
+            </a:r>
+          </a:p>
+          <a:p>
+            <a:r>
+              <a:t>증거 범위: 가격표 스냅샷 (2026-09-20)</a:t>
             </a:r>
           </a:p>
         </p:txBody>
@@ -2058,27 +2154,27 @@
           <a:lstStyle/>
           <a:p>
             <a:r>
-              <a:t>같은 툴 작업량을 가정하고 메인·자식·요약 비용을 모두 합산한 값이다.</a:t>
-            </a:r>
-          </a:p>
-          <a:p>
-            <a:r>
-              <a:t>서브에이전트는 요약 품질과 실패·재시도 특성이 다르다. 비용만으로 우열을 단정하지 않는다.</a:t>
-            </a:r>
-          </a:p>
-          <a:p>
-            <a:r>
-              <a:t>과거의 -87%는 자식·요약을 빼고 계산한 값이어서 전체 절감으로 쓰지 않는다.</a:t>
-            </a:r>
-          </a:p>
-          <a:p>
-            <a:r>
-              <a:t>근거: experiments/exp11_tool_output_bloat.py</a:t>
-            </a:r>
-          </a:p>
-          <a:p>
-            <a:r>
-              <a:t>증거 범위: 전체 시스템 비용 시나리오</a:t>
+              <a:t>20턴 세션에 캐싱만 걸면 $1.91(+17%) — 이력 누적은 그대로 남기 때문이다.</a:t>
+            </a:r>
+          </a:p>
+          <a:p>
+            <a:r>
+              <a:t>요약은 품질에 영향을 준다. 압축 과정에서 잃는 정보가 재작업을 만들면 절감이 상쇄된다.</a:t>
+            </a:r>
+          </a:p>
+          <a:p>
+            <a:r>
+              <a:t>주기를 바꿔 가며 재작업률과 총비용을 함께 측정할 것을 권한다.</a:t>
+            </a:r>
+          </a:p>
+          <a:p>
+            <a:r>
+              <a:t>근거: experiments/exp04_agent_loop_sdd.py</a:t>
+            </a:r>
+          </a:p>
+          <a:p>
+            <a:r>
+              <a:t>증거 범위: 비용 시나리오</a:t>
             </a:r>
           </a:p>
         </p:txBody>
@@ -2148,27 +2244,27 @@
           <a:lstStyle/>
           <a:p>
             <a:r>
-              <a:t>분류는 규칙 기반이다. 학습된 라우터가 아니라 조건표에 가깝다.</a:t>
-            </a:r>
-          </a:p>
-          <a:p>
-            <a:r>
-              <a:t>구성한 반례 테스트는 회귀 검증이지 실사용 오류율 추정이 아니다.</a:t>
-            </a:r>
-          </a:p>
-          <a:p>
-            <a:r>
-              <a:t>오분류가 나면 상위 티어로 올리는 안전장치를 함께 둔다.</a:t>
-            </a:r>
-          </a:p>
-          <a:p>
-            <a:r>
-              <a:t>근거: agent_setup/router.py</a:t>
-            </a:r>
-          </a:p>
-          <a:p>
-            <a:r>
-              <a:t>증거 범위: 라우팅 배선</a:t>
+              <a:t>같은 툴 작업량을 가정하고 메인·자식·요약 비용을 모두 합산한 값이다.</a:t>
+            </a:r>
+          </a:p>
+          <a:p>
+            <a:r>
+              <a:t>서브에이전트는 요약 품질과 실패·재시도 특성이 다르다. 비용만으로 우열을 단정하지 않는다.</a:t>
+            </a:r>
+          </a:p>
+          <a:p>
+            <a:r>
+              <a:t>과거의 -87%는 자식·요약을 빼고 계산한 값이어서 전체 절감으로 쓰지 않는다.</a:t>
+            </a:r>
+          </a:p>
+          <a:p>
+            <a:r>
+              <a:t>근거: experiments/exp11_tool_output_bloat.py</a:t>
+            </a:r>
+          </a:p>
+          <a:p>
+            <a:r>
+              <a:t>증거 범위: 전체 시스템 비용 시나리오</a:t>
             </a:r>
           </a:p>
         </p:txBody>
@@ -2238,27 +2334,27 @@
           <a:lstStyle/>
           <a:p>
             <a:r>
-              <a:t>셋을 섞어 부르면 처방도 섞인다. 발표·회의에서 용어를 먼저 통일한다.</a:t>
-            </a:r>
-          </a:p>
-          <a:p>
-            <a:r>
-              <a:t>라우팅은 단가표, 리워크는 대화 이력 누적, 워크플로는 단계 배치가 대상이다.</a:t>
-            </a:r>
-          </a:p>
-          <a:p>
-            <a:r>
-              <a:t>효과를 말할 때는 어떤 정책의 값인지 명시한다.</a:t>
-            </a:r>
-          </a:p>
-          <a:p>
-            <a:r>
-              <a:t>근거: agent_setup/antigravity/AGENTS.md</a:t>
-            </a:r>
-          </a:p>
-          <a:p>
-            <a:r>
-              <a:t>증거 범위: 정책 구분</a:t>
+              <a:t>분류는 규칙 기반이다. 학습된 라우터가 아니라 조건표에 가깝다.</a:t>
+            </a:r>
+          </a:p>
+          <a:p>
+            <a:r>
+              <a:t>구성한 반례 테스트는 회귀 검증이지 실사용 오류율 추정이 아니다.</a:t>
+            </a:r>
+          </a:p>
+          <a:p>
+            <a:r>
+              <a:t>오분류가 나면 상위 티어로 올리는 안전장치를 함께 둔다.</a:t>
+            </a:r>
+          </a:p>
+          <a:p>
+            <a:r>
+              <a:t>근거: agent_setup/router.py</a:t>
+            </a:r>
+          </a:p>
+          <a:p>
+            <a:r>
+              <a:t>증거 범위: 라우팅 배선</a:t>
             </a:r>
           </a:p>
         </p:txBody>
@@ -2328,27 +2424,27 @@
           <a:lstStyle/>
           <a:p>
             <a:r>
-              <a:t>검출할 AC가 부실하면 A가 실패를 놓친다. 그래서 AC를 코드로 강제한다.</a:t>
-            </a:r>
-          </a:p>
-          <a:p>
-            <a:r>
-              <a:t>respec(다시 스펙)은 실행을 멈추는 무료 경로이고, 실행 비용만 청구된다.</a:t>
-            </a:r>
-          </a:p>
-          <a:p>
-            <a:r>
-              <a:t>이 정책의 값은 회귀 테스트로 고정한다. 실제 품질 효과는 미측정이다.</a:t>
-            </a:r>
-          </a:p>
-          <a:p>
-            <a:r>
-              <a:t>근거: agent_setup/router.py</a:t>
-            </a:r>
-          </a:p>
-          <a:p>
-            <a:r>
-              <a:t>증거 범위: 정책 A</a:t>
+              <a:t>셋을 섞어 부르면 처방도 섞인다. 발표·회의에서 용어를 먼저 통일한다.</a:t>
+            </a:r>
+          </a:p>
+          <a:p>
+            <a:r>
+              <a:t>라우팅은 단가표, 리워크는 대화 이력 누적, 워크플로는 단계 배치가 대상이다.</a:t>
+            </a:r>
+          </a:p>
+          <a:p>
+            <a:r>
+              <a:t>효과를 말할 때는 어떤 정책의 값인지 명시한다.</a:t>
+            </a:r>
+          </a:p>
+          <a:p>
+            <a:r>
+              <a:t>근거: agent_setup/antigravity/AGENTS.md</a:t>
+            </a:r>
+          </a:p>
+          <a:p>
+            <a:r>
+              <a:t>증거 범위: 정책 구분</a:t>
             </a:r>
           </a:p>
         </p:txBody>
@@ -2418,27 +2514,27 @@
           <a:lstStyle/>
           <a:p>
             <a:r>
-              <a:t>과거 '0/5 → 4/5'로 소개했던 수치는 원자료가 없어 철회했다. 지금 값은 저장 발화 재생 결과다.</a:t>
-            </a:r>
-          </a:p>
-          <a:p>
-            <a:r>
-              <a:t>재생은 가정 없는 재현이지만 표본이 짧다(6턴). 분류 정확도를 보장하지 않는다.</a:t>
-            </a:r>
-          </a:p>
-          <a:p>
-            <a:r>
-              <a:t>분류가 애매하면 escalate가 아니라 질문을 반환하도록 설계했다.</a:t>
-            </a:r>
-          </a:p>
-          <a:p>
-            <a:r>
-              <a:t>근거: analysis/replay_logs.py</a:t>
-            </a:r>
-          </a:p>
-          <a:p>
-            <a:r>
-              <a:t>증거 범위: 정책 B (로그 재생)</a:t>
+              <a:t>검출할 AC가 부실하면 A가 실패를 놓친다. 그래서 AC를 코드로 강제한다.</a:t>
+            </a:r>
+          </a:p>
+          <a:p>
+            <a:r>
+              <a:t>respec(다시 스펙)은 실행을 멈추는 무료 경로이고, 실행 비용만 청구된다.</a:t>
+            </a:r>
+          </a:p>
+          <a:p>
+            <a:r>
+              <a:t>이 정책의 값은 회귀 테스트로 고정한다. 실제 품질 효과는 미측정이다.</a:t>
+            </a:r>
+          </a:p>
+          <a:p>
+            <a:r>
+              <a:t>근거: agent_setup/router.py</a:t>
+            </a:r>
+          </a:p>
+          <a:p>
+            <a:r>
+              <a:t>증거 범위: 정책 A</a:t>
             </a:r>
           </a:p>
         </p:txBody>
@@ -5955,7 +6051,7 @@
                 <a:ea typeface="NanumGothic"/>
                 <a:cs typeface="NanumGothic"/>
               </a:rPr>
-              <a:t>순차 시나리오</a:t>
+              <a:t>정책 B (로그 재생)</a:t>
             </a:r>
           </a:p>
         </p:txBody>
@@ -5991,7 +6087,7 @@
                 <a:ea typeface="NanumGothic"/>
                 <a:cs typeface="NanumGothic"/>
               </a:rPr>
-              <a:t>레버는 곱해진다</a:t>
+              <a:t>사다리 B · 사용자 반려가 올린다</a:t>
             </a:r>
           </a:p>
         </p:txBody>
@@ -6027,7 +6123,7 @@
                 <a:ea typeface="NanumGothic"/>
                 <a:cs typeface="NanumGothic"/>
               </a:rPr>
-              <a:t>85.825% (잔여 14%)</a:t>
+              <a:t>저장 발화 6턴에서 3회 에스컬레이션</a:t>
             </a:r>
           </a:p>
         </p:txBody>
@@ -6063,7 +6159,7 @@
                 <a:ea typeface="NanumGothic"/>
                 <a:cs typeface="NanumGothic"/>
               </a:rPr>
-              <a:t>시맨틱 캐시 → 라우팅 → 캐싱 → verbosity/effort → 배치</a:t>
+              <a:t>같은 의도의 반복을 감지해 올린다</a:t>
             </a:r>
           </a:p>
         </p:txBody>
@@ -6099,7 +6195,7 @@
                 <a:ea typeface="NanumGothic"/>
                 <a:cs typeface="NanumGothic"/>
               </a:rPr>
-              <a:t>잔여 비용에 순차 적용한 산술 결과</a:t>
+              <a:t>스펙 변경·신규 작업은 '반려'가 아니다</a:t>
             </a:r>
           </a:p>
         </p:txBody>
@@ -6135,7 +6231,7 @@
                 <a:ea typeface="NanumGothic"/>
                 <a:cs typeface="NanumGothic"/>
               </a:rPr>
-              <a:t>레버 간 중복·상호작용은 검증하지 않았다</a:t>
+              <a:t>분류 신호가 없으면 올리지 않고 되묻는다</a:t>
             </a:r>
           </a:p>
         </p:txBody>
@@ -6171,7 +6267,7 @@
                 <a:ea typeface="NanumGothic"/>
                 <a:cs typeface="NanumGothic"/>
               </a:rPr>
-              <a:t>experiments/exp06_other_levers.py</a:t>
+              <a:t>analysis/replay_logs.py</a:t>
             </a:r>
           </a:p>
         </p:txBody>
@@ -6348,7 +6444,7 @@
                 <a:ea typeface="NanumGothic"/>
                 <a:cs typeface="NanumGothic"/>
               </a:rPr>
-              <a:t>상태 관리</a:t>
+              <a:t>순차 시나리오</a:t>
             </a:r>
           </a:p>
         </p:txBody>
@@ -6384,7 +6480,7 @@
                 <a:ea typeface="NanumGothic"/>
                 <a:cs typeface="NanumGothic"/>
               </a:rPr>
-              <a:t>상태를 작업별로 분리한다</a:t>
+              <a:t>레버는 곱해진다</a:t>
             </a:r>
           </a:p>
         </p:txBody>
@@ -6420,7 +6516,7 @@
                 <a:ea typeface="NanumGothic"/>
                 <a:cs typeface="NanumGothic"/>
               </a:rPr>
-              <a:t>새 작업은 새 상태로 시작</a:t>
+              <a:t>85.825% (잔여 14%)</a:t>
             </a:r>
           </a:p>
         </p:txBody>
@@ -6456,7 +6552,7 @@
                 <a:ea typeface="NanumGothic"/>
                 <a:cs typeface="NanumGothic"/>
               </a:rPr>
-              <a:t>task_id별로 의도 이력·시도 횟수·범위를 추적한다</a:t>
+              <a:t>시맨틱 캐시 → 라우팅 → 캐싱 → verbosity/effort → 배치</a:t>
             </a:r>
           </a:p>
         </p:txBody>
@@ -6492,7 +6588,7 @@
                 <a:ea typeface="NanumGothic"/>
                 <a:cs typeface="NanumGothic"/>
               </a:rPr>
-              <a:t>앞 작업의 반려 상태가 새 작업으로 새지 않는다</a:t>
+              <a:t>잔여 비용에 순차 적용한 산술 결과</a:t>
             </a:r>
           </a:p>
         </p:txBody>
@@ -6528,7 +6624,7 @@
                 <a:ea typeface="NanumGothic"/>
                 <a:cs typeface="NanumGothic"/>
               </a:rPr>
-              <a:t>초기화 전 내부 호출은 명시적 오류로 처리</a:t>
+              <a:t>레버 간 중복·상호작용은 검증하지 않았다</a:t>
             </a:r>
           </a:p>
         </p:txBody>
@@ -6564,7 +6660,7 @@
                 <a:ea typeface="NanumGothic"/>
                 <a:cs typeface="NanumGothic"/>
               </a:rPr>
-              <a:t>agent_setup/orchestrator.py</a:t>
+              <a:t>experiments/exp06_other_levers.py</a:t>
             </a:r>
           </a:p>
         </p:txBody>
@@ -6741,7 +6837,7 @@
                 <a:ea typeface="NanumGothic"/>
                 <a:cs typeface="NanumGothic"/>
               </a:rPr>
-              <a:t>비용 회귀</a:t>
+              <a:t>상태 관리</a:t>
             </a:r>
           </a:p>
         </p:txBody>
@@ -6777,7 +6873,7 @@
                 <a:ea typeface="NanumGothic"/>
                 <a:cs typeface="NanumGothic"/>
               </a:rPr>
-              <a:t>진단과 적용은 같은 함수로 계산한다</a:t>
+              <a:t>상태를 작업별로 분리한다</a:t>
             </a:r>
           </a:p>
         </p:txBody>
@@ -6813,7 +6909,7 @@
                 <a:ea typeface="NanumGothic"/>
                 <a:cs typeface="NanumGothic"/>
               </a:rPr>
-              <a:t>$0.05875 (같은 단계·같은 가정)</a:t>
+              <a:t>새 작업은 새 상태로 시작</a:t>
             </a:r>
           </a:p>
         </p:txBody>
@@ -6849,7 +6945,7 @@
                 <a:ea typeface="NanumGothic"/>
                 <a:cs typeface="NanumGothic"/>
               </a:rPr>
-              <a:t>범위 · 리셋 · 출력 상한 · 진단/적용을 한 곳에서 계산</a:t>
+              <a:t>task_id별로 의도 이력·시도 횟수·범위를 추적한다</a:t>
             </a:r>
           </a:p>
         </p:txBody>
@@ -6885,7 +6981,7 @@
                 <a:ea typeface="NanumGothic"/>
                 <a:cs typeface="NanumGothic"/>
               </a:rPr>
-              <a:t>두 경로가 같은 값을 내는지 테스트로 고정</a:t>
+              <a:t>앞 작업의 반려 상태가 새 작업으로 새지 않는다</a:t>
             </a:r>
           </a:p>
         </p:txBody>
@@ -6921,7 +7017,7 @@
                 <a:ea typeface="NanumGothic"/>
                 <a:cs typeface="NanumGothic"/>
               </a:rPr>
-              <a:t>티어 단가와 고정 입력 예산은 시나리오 값</a:t>
+              <a:t>초기화 전 내부 호출은 명시적 오류로 처리</a:t>
             </a:r>
           </a:p>
         </p:txBody>
@@ -6957,7 +7053,7 @@
                 <a:ea typeface="NanumGothic"/>
                 <a:cs typeface="NanumGothic"/>
               </a:rPr>
-              <a:t>agent_setup/router.py · tests/</a:t>
+              <a:t>agent_setup/orchestrator.py</a:t>
             </a:r>
           </a:p>
         </p:txBody>
@@ -7134,7 +7230,7 @@
                 <a:ea typeface="NanumGothic"/>
                 <a:cs typeface="NanumGothic"/>
               </a:rPr>
-              <a:t>비용 산식</a:t>
+              <a:t>비용 회귀</a:t>
             </a:r>
           </a:p>
         </p:txBody>
@@ -7170,7 +7266,7 @@
                 <a:ea typeface="NanumGothic"/>
                 <a:cs typeface="NanumGothic"/>
               </a:rPr>
-              <a:t>입력 증가분을 두 번 더하지 않는다</a:t>
+              <a:t>진단과 적용은 같은 함수로 계산한다</a:t>
             </a:r>
           </a:p>
         </p:txBody>
@@ -7206,7 +7302,7 @@
                 <a:ea typeface="NanumGothic"/>
                 <a:cs typeface="NanumGothic"/>
               </a:rPr>
-              <a:t>4,700을 한 번만 더한다</a:t>
+              <a:t>$0.05875 (같은 단계·같은 가정)</a:t>
             </a:r>
           </a:p>
         </p:txBody>
@@ -7242,7 +7338,7 @@
                 <a:ea typeface="NanumGothic"/>
                 <a:cs typeface="NanumGothic"/>
               </a:rPr>
-              <a:t>증가분은 직전 출력과 사용자 발화를 포함한 총량</a:t>
+              <a:t>범위 · 리셋 · 출력 상한 · 진단/적용을 한 곳에서 계산</a:t>
             </a:r>
           </a:p>
         </p:txBody>
@@ -7278,7 +7374,7 @@
                 <a:ea typeface="NanumGothic"/>
                 <a:cs typeface="NanumGothic"/>
               </a:rPr>
-              <a:t>출력 토큰을 다시 더하면 이중 계상이 된다</a:t>
+              <a:t>두 경로가 같은 값을 내는지 테스트로 고정</a:t>
             </a:r>
           </a:p>
         </p:txBody>
@@ -7314,7 +7410,7 @@
                 <a:ea typeface="NanumGothic"/>
                 <a:cs typeface="NanumGothic"/>
               </a:rPr>
-              <a:t>누적 예: 1,419 → 6,119 → 10,819</a:t>
+              <a:t>티어 단가와 고정 입력 예산은 시나리오 값</a:t>
             </a:r>
           </a:p>
         </p:txBody>
@@ -7350,7 +7446,7 @@
                 <a:ea typeface="NanumGothic"/>
                 <a:cs typeface="NanumGothic"/>
               </a:rPr>
-              <a:t>analysis/calibrate_growth.py</a:t>
+              <a:t>agent_setup/router.py · tests/</a:t>
             </a:r>
           </a:p>
         </p:txBody>
@@ -7527,7 +7623,7 @@
                 <a:ea typeface="NanumGothic"/>
                 <a:cs typeface="NanumGothic"/>
               </a:rPr>
-              <a:t>캐싱 배선</a:t>
+              <a:t>비용 산식</a:t>
             </a:r>
           </a:p>
         </p:txBody>
@@ -7563,7 +7659,7 @@
                 <a:ea typeface="NanumGothic"/>
                 <a:cs typeface="NanumGothic"/>
               </a:rPr>
-              <a:t>고정 접두부를 캐시에 태운다</a:t>
+              <a:t>입력 증가분을 두 번 더하지 않는다</a:t>
             </a:r>
           </a:p>
         </p:txBody>
@@ -7599,7 +7695,7 @@
                 <a:ea typeface="NanumGothic"/>
                 <a:cs typeface="NanumGothic"/>
               </a:rPr>
-              <a:t>규약·시스템 프롬프트는 매 턴 그대로</a:t>
+              <a:t>4,700을 한 번만 더한다</a:t>
             </a:r>
           </a:p>
         </p:txBody>
@@ -7635,7 +7731,7 @@
                 <a:ea typeface="NanumGothic"/>
                 <a:cs typeface="NanumGothic"/>
               </a:rPr>
-              <a:t>툴 정의와 규약 파일을 맨 앞 고정 블록으로 모은다</a:t>
+              <a:t>증가분은 직전 출력과 사용자 발화를 포함한 총량</a:t>
             </a:r>
           </a:p>
         </p:txBody>
@@ -7671,7 +7767,7 @@
                 <a:ea typeface="NanumGothic"/>
                 <a:cs typeface="NanumGothic"/>
               </a:rPr>
-              <a:t>변하는 값(사용자 입력·타임스탬프)은 뒤로 보낸다</a:t>
+              <a:t>출력 토큰을 다시 더하면 이중 계상이 된다</a:t>
             </a:r>
           </a:p>
         </p:txBody>
@@ -7707,7 +7803,7 @@
                 <a:ea typeface="NanumGothic"/>
                 <a:cs typeface="NanumGothic"/>
               </a:rPr>
-              <a:t>적중률을 대시보드로 본다</a:t>
+              <a:t>누적 예: 1,419 → 6,119 → 10,819</a:t>
             </a:r>
           </a:p>
         </p:txBody>
@@ -7743,7 +7839,7 @@
                 <a:ea typeface="NanumGothic"/>
                 <a:cs typeface="NanumGothic"/>
               </a:rPr>
-              <a:t>agent_setup/config.py</a:t>
+              <a:t>analysis/calibrate_growth.py</a:t>
             </a:r>
           </a:p>
         </p:txBody>
@@ -7920,7 +8016,7 @@
                 <a:ea typeface="NanumGothic"/>
                 <a:cs typeface="NanumGothic"/>
               </a:rPr>
-              <a:t>비용 시나리오</a:t>
+              <a:t>캐싱 배선</a:t>
             </a:r>
           </a:p>
         </p:txBody>
@@ -7956,7 +8052,7 @@
                 <a:ea typeface="NanumGothic"/>
                 <a:cs typeface="NanumGothic"/>
               </a:rPr>
-              <a:t>원칙 5 · 턴 수가 비용을 지배한다</a:t>
+              <a:t>고정 접두부를 캐시에 태운다</a:t>
             </a:r>
           </a:p>
         </p:txBody>
@@ -7992,7 +8088,7 @@
                 <a:ea typeface="NanumGothic"/>
                 <a:cs typeface="NanumGothic"/>
               </a:rPr>
-              <a:t>턴 2배 → 비용 3.1배</a:t>
+              <a:t>규약·시스템 프롬프트는 매 턴 그대로</a:t>
             </a:r>
           </a:p>
         </p:txBody>
@@ -8028,7 +8124,7 @@
                 <a:ea typeface="NanumGothic"/>
                 <a:cs typeface="NanumGothic"/>
               </a:rPr>
-              <a:t>5턴 $0.26 · 20턴 $2.32 · 50턴 $12.09</a:t>
+              <a:t>툴 정의와 규약 파일을 맨 앞 고정 블록으로 모은다</a:t>
             </a:r>
           </a:p>
         </p:txBody>
@@ -8064,7 +8160,7 @@
                 <a:ea typeface="NanumGothic"/>
                 <a:cs typeface="NanumGothic"/>
               </a:rPr>
-              <a:t>안 쓰는 코드도 매 턴 다시 실려 과금된다 (YAGNI)</a:t>
+              <a:t>변하는 값(사용자 입력·타임스탬프)은 뒤로 보낸다</a:t>
             </a:r>
           </a:p>
         </p:txBody>
@@ -8100,7 +8196,7 @@
                 <a:ea typeface="NanumGothic"/>
                 <a:cs typeface="NanumGothic"/>
               </a:rPr>
-              <a:t>컨텍스트는 길이보다 '반복'이 비쌉니다</a:t>
+              <a:t>적중률을 대시보드로 본다</a:t>
             </a:r>
           </a:p>
         </p:txBody>
@@ -8136,7 +8232,7 @@
                 <a:ea typeface="NanumGothic"/>
                 <a:cs typeface="NanumGothic"/>
               </a:rPr>
-              <a:t>experiments/exp04_agent_loop_sdd.py</a:t>
+              <a:t>agent_setup/config.py</a:t>
             </a:r>
           </a:p>
         </p:txBody>
@@ -8326,7 +8422,7 @@
         </p:nvSpPr>
         <p:spPr>
           <a:xfrm>
-            <a:off x="640080" y="566928"/>
+            <a:off x="640080" y="822960"/>
             <a:ext cx="10881360" cy="822960"/>
           </a:xfrm>
           <a:prstGeom prst="rect">
@@ -8349,7 +8445,7 @@
                 <a:ea typeface="NanumGothic"/>
                 <a:cs typeface="NanumGothic"/>
               </a:rPr>
-              <a:t>긴 세션일수록 가파르다</a:t>
+              <a:t>원칙 5 · 턴 수가 비용을 지배한다</a:t>
             </a:r>
           </a:p>
         </p:txBody>
@@ -8362,7 +8458,7 @@
         </p:nvSpPr>
         <p:spPr>
           <a:xfrm>
-            <a:off x="640080" y="1261872"/>
+            <a:off x="640080" y="1783080"/>
             <a:ext cx="10881360" cy="777240"/>
           </a:xfrm>
           <a:prstGeom prst="rect">
@@ -8385,7 +8481,7 @@
                 <a:ea typeface="NanumGothic"/>
                 <a:cs typeface="NanumGothic"/>
               </a:rPr>
-              <a:t>5턴 $0.26 → 50턴 $12.09</a:t>
+              <a:t>턴 2배 → 비용 3.1배</a:t>
             </a:r>
           </a:p>
         </p:txBody>
@@ -8398,7 +8494,7 @@
         </p:nvSpPr>
         <p:spPr>
           <a:xfrm>
-            <a:off x="777240" y="2029968"/>
+            <a:off x="777240" y="2862072"/>
             <a:ext cx="10652760" cy="612648"/>
           </a:xfrm>
           <a:prstGeom prst="rect">
@@ -8421,7 +8517,7 @@
                 <a:ea typeface="NanumGothic"/>
                 <a:cs typeface="NanumGothic"/>
               </a:rPr>
-              <a:t>20턴에 컴팩션을 걸면 $0.93 (60% 절감)</a:t>
+              <a:t>5턴 $0.26 · 20턴 $2.32 · 50턴 $12.09</a:t>
             </a:r>
           </a:p>
         </p:txBody>
@@ -8434,7 +8530,7 @@
         </p:nvSpPr>
         <p:spPr>
           <a:xfrm>
-            <a:off x="777240" y="2542032"/>
+            <a:off x="777240" y="3502152"/>
             <a:ext cx="10652760" cy="612648"/>
           </a:xfrm>
           <a:prstGeom prst="rect">
@@ -8457,59 +8553,71 @@
                 <a:ea typeface="NanumGothic"/>
                 <a:cs typeface="NanumGothic"/>
               </a:rPr>
-              <a:t>안 쓰는 코드도 매 턴 다시 실려 과금된다</a:t>
-            </a:r>
-          </a:p>
-        </p:txBody>
-      </p:sp>
-      <p:pic>
-        <p:nvPicPr>
-          <p:cNvPr id="9" name="Picture 8" descr="turns.png"/>
-          <p:cNvPicPr>
-            <a:picLocks noChangeAspect="1"/>
-          </p:cNvPicPr>
-          <p:nvPr/>
-        </p:nvPicPr>
-        <p:blipFill>
-          <a:blip r:embed="rId2"/>
-          <a:stretch>
-            <a:fillRect/>
-          </a:stretch>
-        </p:blipFill>
-        <p:spPr>
-          <a:xfrm>
-            <a:off x="777240" y="3101593"/>
-            <a:ext cx="10652760" cy="2959100"/>
-          </a:xfrm>
-          <a:prstGeom prst="rect">
-            <a:avLst/>
-          </a:prstGeom>
-        </p:spPr>
-      </p:pic>
-      <p:sp>
-        <p:nvSpPr>
-          <p:cNvPr id="10" name="audit:chart-caption"/>
-          <p:cNvSpPr txBox="1"/>
-          <p:nvPr/>
-        </p:nvSpPr>
-        <p:spPr>
-          <a:xfrm>
-            <a:off x="777240" y="6135624"/>
-            <a:ext cx="10652760" cy="237744"/>
-          </a:xfrm>
-          <a:prstGeom prst="rect">
-            <a:avLst/>
-          </a:prstGeom>
-          <a:noFill/>
-        </p:spPr>
-        <p:txBody>
-          <a:bodyPr wrap="square" lIns="0" rIns="0" tIns="0" bIns="0">
-            <a:spAutoFit/>
-          </a:bodyPr>
-          <a:lstStyle/>
-          <a:p>
-            <a:r>
-              <a:rPr sz="950" b="0">
+              <a:t>안 쓰는 코드도 매 턴 다시 실려 과금된다 (YAGNI)</a:t>
+            </a:r>
+          </a:p>
+        </p:txBody>
+      </p:sp>
+      <p:sp>
+        <p:nvSpPr>
+          <p:cNvPr id="9" name="audit:body-2"/>
+          <p:cNvSpPr txBox="1"/>
+          <p:nvPr/>
+        </p:nvSpPr>
+        <p:spPr>
+          <a:xfrm>
+            <a:off x="777240" y="4142231"/>
+            <a:ext cx="10652760" cy="612648"/>
+          </a:xfrm>
+          <a:prstGeom prst="rect">
+            <a:avLst/>
+          </a:prstGeom>
+          <a:noFill/>
+        </p:spPr>
+        <p:txBody>
+          <a:bodyPr wrap="square" lIns="0" rIns="0" tIns="0" bIns="0">
+            <a:spAutoFit/>
+          </a:bodyPr>
+          <a:lstStyle/>
+          <a:p>
+            <a:r>
+              <a:rPr sz="1750" b="0">
+                <a:solidFill>
+                  <a:srgbClr val="ECF1F6"/>
+                </a:solidFill>
+                <a:latin typeface="NanumGothic"/>
+                <a:ea typeface="NanumGothic"/>
+                <a:cs typeface="NanumGothic"/>
+              </a:rPr>
+              <a:t>컨텍스트는 길이보다 '반복'이 비쌉니다</a:t>
+            </a:r>
+          </a:p>
+        </p:txBody>
+      </p:sp>
+      <p:sp>
+        <p:nvSpPr>
+          <p:cNvPr id="10" name="audit:source"/>
+          <p:cNvSpPr txBox="1"/>
+          <p:nvPr/>
+        </p:nvSpPr>
+        <p:spPr>
+          <a:xfrm>
+            <a:off x="640080" y="6080760"/>
+            <a:ext cx="10972800" cy="274320"/>
+          </a:xfrm>
+          <a:prstGeom prst="rect">
+            <a:avLst/>
+          </a:prstGeom>
+          <a:noFill/>
+        </p:spPr>
+        <p:txBody>
+          <a:bodyPr wrap="square" lIns="0" rIns="0" tIns="0" bIns="0">
+            <a:spAutoFit/>
+          </a:bodyPr>
+          <a:lstStyle/>
+          <a:p>
+            <a:r>
+              <a:rPr sz="1000" b="0">
                 <a:solidFill>
                   <a:srgbClr val="93A4B5"/>
                 </a:solidFill>
@@ -8517,42 +8625,6 @@
                 <a:ea typeface="NanumGothic"/>
                 <a:cs typeface="NanumGothic"/>
               </a:rPr>
-              <a:t>그래프 · 세션 비용 (USD) · turns.png</a:t>
-            </a:r>
-          </a:p>
-        </p:txBody>
-      </p:sp>
-      <p:sp>
-        <p:nvSpPr>
-          <p:cNvPr id="11" name="audit:source"/>
-          <p:cNvSpPr txBox="1"/>
-          <p:nvPr/>
-        </p:nvSpPr>
-        <p:spPr>
-          <a:xfrm>
-            <a:off x="777240" y="6382512"/>
-            <a:ext cx="10972800" cy="274320"/>
-          </a:xfrm>
-          <a:prstGeom prst="rect">
-            <a:avLst/>
-          </a:prstGeom>
-          <a:noFill/>
-        </p:spPr>
-        <p:txBody>
-          <a:bodyPr wrap="square" lIns="0" rIns="0" tIns="0" bIns="0">
-            <a:spAutoFit/>
-          </a:bodyPr>
-          <a:lstStyle/>
-          <a:p>
-            <a:r>
-              <a:rPr sz="1000" b="0">
-                <a:solidFill>
-                  <a:srgbClr val="93A4B5"/>
-                </a:solidFill>
-                <a:latin typeface="NanumGothic"/>
-                <a:ea typeface="NanumGothic"/>
-                <a:cs typeface="NanumGothic"/>
-              </a:rPr>
               <a:t>experiments/exp04_agent_loop_sdd.py</a:t>
             </a:r>
           </a:p>
@@ -8560,13 +8632,13 @@
       </p:sp>
       <p:sp>
         <p:nvSpPr>
-          <p:cNvPr id="12" name="audit:footer"/>
-          <p:cNvSpPr txBox="1"/>
-          <p:nvPr/>
-        </p:nvSpPr>
-        <p:spPr>
-          <a:xfrm>
-            <a:off x="777240" y="6583680"/>
+          <p:cNvPr id="11" name="audit:footer"/>
+          <p:cNvSpPr txBox="1"/>
+          <p:nvPr/>
+        </p:nvSpPr>
+        <p:spPr>
+          <a:xfrm>
+            <a:off x="640080" y="6419088"/>
             <a:ext cx="10972800" cy="256032"/>
           </a:xfrm>
           <a:prstGeom prst="rect">
@@ -8730,7 +8802,7 @@
                 <a:ea typeface="NanumGothic"/>
                 <a:cs typeface="NanumGothic"/>
               </a:rPr>
-              <a:t>비용 시나리오 (100콜)</a:t>
+              <a:t>비용 시나리오</a:t>
             </a:r>
           </a:p>
         </p:txBody>
@@ -8743,7 +8815,7 @@
         </p:nvSpPr>
         <p:spPr>
           <a:xfrm>
-            <a:off x="640080" y="822960"/>
+            <a:off x="640080" y="566928"/>
             <a:ext cx="10881360" cy="822960"/>
           </a:xfrm>
           <a:prstGeom prst="rect">
@@ -8766,7 +8838,7 @@
                 <a:ea typeface="NanumGothic"/>
                 <a:cs typeface="NanumGothic"/>
               </a:rPr>
-              <a:t>캐싱 · 오늘 바로 켤 수 있는 레버</a:t>
+              <a:t>긴 세션일수록 가파르다</a:t>
             </a:r>
           </a:p>
         </p:txBody>
@@ -8779,7 +8851,7 @@
         </p:nvSpPr>
         <p:spPr>
           <a:xfrm>
-            <a:off x="640080" y="1783080"/>
+            <a:off x="640080" y="1188720"/>
             <a:ext cx="10881360" cy="777240"/>
           </a:xfrm>
           <a:prstGeom prst="rect">
@@ -8802,7 +8874,7 @@
                 <a:ea typeface="NanumGothic"/>
                 <a:cs typeface="NanumGothic"/>
               </a:rPr>
-              <a:t>$8.55 → $3.22 (62.4% 절감)</a:t>
+              <a:t>5턴 $0.26 → 50턴 $12.09</a:t>
             </a:r>
           </a:p>
         </p:txBody>
@@ -8815,7 +8887,7 @@
         </p:nvSpPr>
         <p:spPr>
           <a:xfrm>
-            <a:off x="777240" y="2862072"/>
+            <a:off x="777240" y="1920240"/>
             <a:ext cx="10652760" cy="612648"/>
           </a:xfrm>
           <a:prstGeom prst="rect">
@@ -8838,7 +8910,7 @@
                 <a:ea typeface="NanumGothic"/>
                 <a:cs typeface="NanumGothic"/>
               </a:rPr>
-              <a:t>쓰기 프리미엄은 두 번째 호출에서 회수된다</a:t>
+              <a:t>20턴에 컴팩션을 걸면 $0.93 (60% 절감)</a:t>
             </a:r>
           </a:p>
         </p:txBody>
@@ -8851,7 +8923,7 @@
         </p:nvSpPr>
         <p:spPr>
           <a:xfrm>
-            <a:off x="777240" y="3502152"/>
+            <a:off x="777240" y="2359152"/>
             <a:ext cx="10652760" cy="612648"/>
           </a:xfrm>
           <a:prstGeom prst="rect">
@@ -8874,71 +8946,59 @@
                 <a:ea typeface="NanumGothic"/>
                 <a:cs typeface="NanumGothic"/>
               </a:rPr>
-              <a:t>고정 블록(시스템 · 툴 정의 · 규약)을 맨 앞으로 모은다</a:t>
-            </a:r>
-          </a:p>
-        </p:txBody>
-      </p:sp>
-      <p:sp>
-        <p:nvSpPr>
-          <p:cNvPr id="9" name="audit:body-2"/>
-          <p:cNvSpPr txBox="1"/>
-          <p:nvPr/>
-        </p:nvSpPr>
-        <p:spPr>
-          <a:xfrm>
-            <a:off x="777240" y="4142231"/>
-            <a:ext cx="10652760" cy="612648"/>
-          </a:xfrm>
-          <a:prstGeom prst="rect">
-            <a:avLst/>
-          </a:prstGeom>
-          <a:noFill/>
-        </p:spPr>
-        <p:txBody>
-          <a:bodyPr wrap="square" lIns="0" rIns="0" tIns="0" bIns="0">
-            <a:spAutoFit/>
-          </a:bodyPr>
-          <a:lstStyle/>
-          <a:p>
-            <a:r>
-              <a:rPr sz="1750" b="0">
-                <a:solidFill>
-                  <a:srgbClr val="ECF1F6"/>
-                </a:solidFill>
-                <a:latin typeface="NanumGothic"/>
-                <a:ea typeface="NanumGothic"/>
-                <a:cs typeface="NanumGothic"/>
-              </a:rPr>
-              <a:t>최소 길이를 확인한다 — Haiku 4.5는 4,096토큰</a:t>
-            </a:r>
-          </a:p>
-        </p:txBody>
-      </p:sp>
-      <p:sp>
-        <p:nvSpPr>
-          <p:cNvPr id="10" name="audit:source"/>
-          <p:cNvSpPr txBox="1"/>
-          <p:nvPr/>
-        </p:nvSpPr>
-        <p:spPr>
-          <a:xfrm>
-            <a:off x="640080" y="6080760"/>
-            <a:ext cx="10972800" cy="274320"/>
-          </a:xfrm>
-          <a:prstGeom prst="rect">
-            <a:avLst/>
-          </a:prstGeom>
-          <a:noFill/>
-        </p:spPr>
-        <p:txBody>
-          <a:bodyPr wrap="square" lIns="0" rIns="0" tIns="0" bIns="0">
-            <a:spAutoFit/>
-          </a:bodyPr>
-          <a:lstStyle/>
-          <a:p>
-            <a:r>
-              <a:rPr sz="1000" b="0">
+              <a:t>안 쓰는 코드도 매 턴 다시 실려 과금된다</a:t>
+            </a:r>
+          </a:p>
+        </p:txBody>
+      </p:sp>
+      <p:pic>
+        <p:nvPicPr>
+          <p:cNvPr id="9" name="Picture 8" descr="turns.png"/>
+          <p:cNvPicPr>
+            <a:picLocks noChangeAspect="1"/>
+          </p:cNvPicPr>
+          <p:nvPr/>
+        </p:nvPicPr>
+        <p:blipFill>
+          <a:blip r:embed="rId2"/>
+          <a:stretch>
+            <a:fillRect/>
+          </a:stretch>
+        </p:blipFill>
+        <p:spPr>
+          <a:xfrm>
+            <a:off x="980030" y="2670048"/>
+            <a:ext cx="10247179" cy="3529584"/>
+          </a:xfrm>
+          <a:prstGeom prst="rect">
+            <a:avLst/>
+          </a:prstGeom>
+        </p:spPr>
+      </p:pic>
+      <p:sp>
+        <p:nvSpPr>
+          <p:cNvPr id="10" name="audit:chart-caption"/>
+          <p:cNvSpPr txBox="1"/>
+          <p:nvPr/>
+        </p:nvSpPr>
+        <p:spPr>
+          <a:xfrm>
+            <a:off x="777240" y="6217920"/>
+            <a:ext cx="5120640" cy="219456"/>
+          </a:xfrm>
+          <a:prstGeom prst="rect">
+            <a:avLst/>
+          </a:prstGeom>
+          <a:noFill/>
+        </p:spPr>
+        <p:txBody>
+          <a:bodyPr wrap="square" lIns="0" rIns="0" tIns="0" bIns="0">
+            <a:spAutoFit/>
+          </a:bodyPr>
+          <a:lstStyle/>
+          <a:p>
+            <a:r>
+              <a:rPr sz="950" b="0">
                 <a:solidFill>
                   <a:srgbClr val="93A4B5"/>
                 </a:solidFill>
@@ -8946,35 +9006,71 @@
                 <a:ea typeface="NanumGothic"/>
                 <a:cs typeface="NanumGothic"/>
               </a:rPr>
-              <a:t>experiments/exp03_prompt_caching.py</a:t>
-            </a:r>
-          </a:p>
-        </p:txBody>
-      </p:sp>
-      <p:sp>
-        <p:nvSpPr>
-          <p:cNvPr id="11" name="audit:footer"/>
-          <p:cNvSpPr txBox="1"/>
-          <p:nvPr/>
-        </p:nvSpPr>
-        <p:spPr>
-          <a:xfrm>
-            <a:off x="640080" y="6419088"/>
-            <a:ext cx="10972800" cy="256032"/>
-          </a:xfrm>
-          <a:prstGeom prst="rect">
-            <a:avLst/>
-          </a:prstGeom>
-          <a:noFill/>
-        </p:spPr>
-        <p:txBody>
-          <a:bodyPr wrap="square" lIns="0" rIns="0" tIns="0" bIns="0">
-            <a:spAutoFit/>
-          </a:bodyPr>
-          <a:lstStyle/>
-          <a:p>
-            <a:r>
-              <a:rPr sz="1000" b="0">
+              <a:t>그래프 · 세션 비용 (USD) · turns.png</a:t>
+            </a:r>
+          </a:p>
+        </p:txBody>
+      </p:sp>
+      <p:sp>
+        <p:nvSpPr>
+          <p:cNvPr id="11" name="audit:source"/>
+          <p:cNvSpPr txBox="1"/>
+          <p:nvPr/>
+        </p:nvSpPr>
+        <p:spPr>
+          <a:xfrm>
+            <a:off x="6035040" y="6217920"/>
+            <a:ext cx="5394960" cy="219456"/>
+          </a:xfrm>
+          <a:prstGeom prst="rect">
+            <a:avLst/>
+          </a:prstGeom>
+          <a:noFill/>
+        </p:spPr>
+        <p:txBody>
+          <a:bodyPr wrap="square" lIns="0" rIns="0" tIns="0" bIns="0">
+            <a:spAutoFit/>
+          </a:bodyPr>
+          <a:lstStyle/>
+          <a:p>
+            <a:r>
+              <a:rPr sz="950" b="0">
+                <a:solidFill>
+                  <a:srgbClr val="93A4B5"/>
+                </a:solidFill>
+                <a:latin typeface="NanumGothic"/>
+                <a:ea typeface="NanumGothic"/>
+                <a:cs typeface="NanumGothic"/>
+              </a:rPr>
+              <a:t>experiments/exp04_agent_loop_sdd.py</a:t>
+            </a:r>
+          </a:p>
+        </p:txBody>
+      </p:sp>
+      <p:sp>
+        <p:nvSpPr>
+          <p:cNvPr id="12" name="audit:footer"/>
+          <p:cNvSpPr txBox="1"/>
+          <p:nvPr/>
+        </p:nvSpPr>
+        <p:spPr>
+          <a:xfrm>
+            <a:off x="777240" y="6620256"/>
+            <a:ext cx="10972800" cy="219456"/>
+          </a:xfrm>
+          <a:prstGeom prst="rect">
+            <a:avLst/>
+          </a:prstGeom>
+          <a:noFill/>
+        </p:spPr>
+        <p:txBody>
+          <a:bodyPr wrap="square" lIns="0" rIns="0" tIns="0" bIns="0">
+            <a:spAutoFit/>
+          </a:bodyPr>
+          <a:lstStyle/>
+          <a:p>
+            <a:r>
+              <a:rPr sz="950" b="0">
                 <a:solidFill>
                   <a:srgbClr val="93A4B5"/>
                 </a:solidFill>
@@ -9123,7 +9219,7 @@
                 <a:ea typeface="NanumGothic"/>
                 <a:cs typeface="NanumGothic"/>
               </a:rPr>
-              <a:t>비용 시나리오 (100콜)</a:t>
+              <a:t>비용 시나리오 (20턴)</a:t>
             </a:r>
           </a:p>
         </p:txBody>
@@ -9159,7 +9255,7 @@
                 <a:ea typeface="NanumGothic"/>
                 <a:cs typeface="NanumGothic"/>
               </a:rPr>
-              <a:t>캐시는 조건이 맞을 때만 이득</a:t>
+              <a:t>세션 토큰의 4분의 3은 이력 재전송</a:t>
             </a:r>
           </a:p>
         </p:txBody>
@@ -9172,7 +9268,7 @@
         </p:nvSpPr>
         <p:spPr>
           <a:xfrm>
-            <a:off x="640080" y="1261872"/>
+            <a:off x="640080" y="1188720"/>
             <a:ext cx="10881360" cy="777240"/>
           </a:xfrm>
           <a:prstGeom prst="rect">
@@ -9195,7 +9291,7 @@
                 <a:ea typeface="NanumGothic"/>
                 <a:cs typeface="NanumGothic"/>
               </a:rPr>
-              <a:t>$8.55 → $3.219 (-62%)</a:t>
+              <a:t>고정 프리픽스 22.6% · 이력 75.1%</a:t>
             </a:r>
           </a:p>
         </p:txBody>
@@ -9208,7 +9304,7 @@
         </p:nvSpPr>
         <p:spPr>
           <a:xfrm>
-            <a:off x="777240" y="2029968"/>
+            <a:off x="777240" y="1920240"/>
             <a:ext cx="10652760" cy="612648"/>
           </a:xfrm>
           <a:prstGeom prst="rect">
@@ -9231,7 +9327,7 @@
                 <a:ea typeface="NanumGothic"/>
                 <a:cs typeface="NanumGothic"/>
               </a:rPr>
-              <a:t>프리픽스를 매번 바꾸면 $10.05 (+17.5%)</a:t>
+              <a:t>생성(출력)은 2.3%뿐이다</a:t>
             </a:r>
           </a:p>
         </p:txBody>
@@ -9244,7 +9340,7 @@
         </p:nvSpPr>
         <p:spPr>
           <a:xfrm>
-            <a:off x="777240" y="2542032"/>
+            <a:off x="777240" y="2359152"/>
             <a:ext cx="10652760" cy="612648"/>
           </a:xfrm>
           <a:prstGeom prst="rect">
@@ -9267,14 +9363,14 @@
                 <a:ea typeface="NanumGothic"/>
                 <a:cs typeface="NanumGothic"/>
               </a:rPr>
-              <a:t>고정 블록을 앞으로 모아 적중률을 올린다</a:t>
+              <a:t>그래서 '덜 쓰기'보다 '다시 안 보내기'가 크다</a:t>
             </a:r>
           </a:p>
         </p:txBody>
       </p:sp>
       <p:pic>
         <p:nvPicPr>
-          <p:cNvPr id="9" name="Picture 8" descr="cache.png"/>
+          <p:cNvPr id="9" name="Picture 8" descr="usage_mix.png"/>
           <p:cNvPicPr>
             <a:picLocks noChangeAspect="1"/>
           </p:cNvPicPr>
@@ -9288,8 +9384,8 @@
         </p:blipFill>
         <p:spPr>
           <a:xfrm>
-            <a:off x="777240" y="3101593"/>
-            <a:ext cx="10652760" cy="2959100"/>
+            <a:off x="980030" y="2670048"/>
+            <a:ext cx="10247179" cy="3529584"/>
           </a:xfrm>
           <a:prstGeom prst="rect">
             <a:avLst/>
@@ -9304,8 +9400,8 @@
         </p:nvSpPr>
         <p:spPr>
           <a:xfrm>
-            <a:off x="777240" y="6135624"/>
-            <a:ext cx="10652760" cy="237744"/>
+            <a:off x="777240" y="6217920"/>
+            <a:ext cx="5120640" cy="219456"/>
           </a:xfrm>
           <a:prstGeom prst="rect">
             <a:avLst/>
@@ -9327,7 +9423,7 @@
                 <a:ea typeface="NanumGothic"/>
                 <a:cs typeface="NanumGothic"/>
               </a:rPr>
-              <a:t>그래프 · 100콜 비용 (USD) · cache.png</a:t>
+              <a:t>그래프 · 20턴 세션 토큰 구성 · usage_mix.png</a:t>
             </a:r>
           </a:p>
         </p:txBody>
@@ -9340,22 +9436,22 @@
         </p:nvSpPr>
         <p:spPr>
           <a:xfrm>
-            <a:off x="777240" y="6382512"/>
-            <a:ext cx="10972800" cy="274320"/>
-          </a:xfrm>
-          <a:prstGeom prst="rect">
-            <a:avLst/>
-          </a:prstGeom>
-          <a:noFill/>
-        </p:spPr>
-        <p:txBody>
-          <a:bodyPr wrap="square" lIns="0" rIns="0" tIns="0" bIns="0">
-            <a:spAutoFit/>
-          </a:bodyPr>
-          <a:lstStyle/>
-          <a:p>
-            <a:r>
-              <a:rPr sz="1000" b="0">
+            <a:off x="6035040" y="6217920"/>
+            <a:ext cx="5394960" cy="219456"/>
+          </a:xfrm>
+          <a:prstGeom prst="rect">
+            <a:avLst/>
+          </a:prstGeom>
+          <a:noFill/>
+        </p:spPr>
+        <p:txBody>
+          <a:bodyPr wrap="square" lIns="0" rIns="0" tIns="0" bIns="0">
+            <a:spAutoFit/>
+          </a:bodyPr>
+          <a:lstStyle/>
+          <a:p>
+            <a:r>
+              <a:rPr sz="950" b="0">
                 <a:solidFill>
                   <a:srgbClr val="93A4B5"/>
                 </a:solidFill>
@@ -9363,7 +9459,7 @@
                 <a:ea typeface="NanumGothic"/>
                 <a:cs typeface="NanumGothic"/>
               </a:rPr>
-              <a:t>experiments/exp03_prompt_caching.py</a:t>
+              <a:t>experiments/exp04_agent_loop_sdd.py</a:t>
             </a:r>
           </a:p>
         </p:txBody>
@@ -9376,22 +9472,22 @@
         </p:nvSpPr>
         <p:spPr>
           <a:xfrm>
-            <a:off x="777240" y="6583680"/>
-            <a:ext cx="10972800" cy="256032"/>
-          </a:xfrm>
-          <a:prstGeom prst="rect">
-            <a:avLst/>
-          </a:prstGeom>
-          <a:noFill/>
-        </p:spPr>
-        <p:txBody>
-          <a:bodyPr wrap="square" lIns="0" rIns="0" tIns="0" bIns="0">
-            <a:spAutoFit/>
-          </a:bodyPr>
-          <a:lstStyle/>
-          <a:p>
-            <a:r>
-              <a:rPr sz="1000" b="0">
+            <a:off x="777240" y="6620256"/>
+            <a:ext cx="10972800" cy="219456"/>
+          </a:xfrm>
+          <a:prstGeom prst="rect">
+            <a:avLst/>
+          </a:prstGeom>
+          <a:noFill/>
+        </p:spPr>
+        <p:txBody>
+          <a:bodyPr wrap="square" lIns="0" rIns="0" tIns="0" bIns="0">
+            <a:spAutoFit/>
+          </a:bodyPr>
+          <a:lstStyle/>
+          <a:p>
+            <a:r>
+              <a:rPr sz="950" b="0">
                 <a:solidFill>
                   <a:srgbClr val="93A4B5"/>
                 </a:solidFill>
@@ -9540,7 +9636,7 @@
                 <a:ea typeface="NanumGothic"/>
                 <a:cs typeface="NanumGothic"/>
               </a:rPr>
-              <a:t>순차 시나리오</a:t>
+              <a:t>비용 시나리오 (100콜)</a:t>
             </a:r>
           </a:p>
         </p:txBody>
@@ -9553,7 +9649,7 @@
         </p:nvSpPr>
         <p:spPr>
           <a:xfrm>
-            <a:off x="640080" y="566928"/>
+            <a:off x="640080" y="822960"/>
             <a:ext cx="10881360" cy="822960"/>
           </a:xfrm>
           <a:prstGeom prst="rect">
@@ -9576,7 +9672,7 @@
                 <a:ea typeface="NanumGothic"/>
                 <a:cs typeface="NanumGothic"/>
               </a:rPr>
-              <a:t>다섯 레버를 겹치면</a:t>
+              <a:t>캐싱 · 오늘 바로 켤 수 있는 레버</a:t>
             </a:r>
           </a:p>
         </p:txBody>
@@ -9589,7 +9685,7 @@
         </p:nvSpPr>
         <p:spPr>
           <a:xfrm>
-            <a:off x="640080" y="1261872"/>
+            <a:off x="640080" y="1783080"/>
             <a:ext cx="10881360" cy="777240"/>
           </a:xfrm>
           <a:prstGeom prst="rect">
@@ -9612,7 +9708,7 @@
                 <a:ea typeface="NanumGothic"/>
                 <a:cs typeface="NanumGothic"/>
               </a:rPr>
-              <a:t>잔여 14.18%</a:t>
+              <a:t>$8.55 → $3.22 (62.4% 절감)</a:t>
             </a:r>
           </a:p>
         </p:txBody>
@@ -9625,7 +9721,7 @@
         </p:nvSpPr>
         <p:spPr>
           <a:xfrm>
-            <a:off x="777240" y="2029968"/>
+            <a:off x="777240" y="2862072"/>
             <a:ext cx="10652760" cy="612648"/>
           </a:xfrm>
           <a:prstGeom prst="rect">
@@ -9648,7 +9744,7 @@
                 <a:ea typeface="NanumGothic"/>
                 <a:cs typeface="NanumGothic"/>
               </a:rPr>
-              <a:t>시맨틱 캐시 → 라우팅 → 캐싱 → effort → 배치</a:t>
+              <a:t>쓰기 프리미엄은 두 번째 호출에서 회수된다</a:t>
             </a:r>
           </a:p>
         </p:txBody>
@@ -9661,7 +9757,7 @@
         </p:nvSpPr>
         <p:spPr>
           <a:xfrm>
-            <a:off x="777240" y="2542032"/>
+            <a:off x="777240" y="3502152"/>
             <a:ext cx="10652760" cy="612648"/>
           </a:xfrm>
           <a:prstGeom prst="rect">
@@ -9684,59 +9780,71 @@
                 <a:ea typeface="NanumGothic"/>
                 <a:cs typeface="NanumGothic"/>
               </a:rPr>
-              <a:t>각 레버가 자기 조건을 만족할 때의 순차 산술</a:t>
-            </a:r>
-          </a:p>
-        </p:txBody>
-      </p:sp>
-      <p:pic>
-        <p:nvPicPr>
-          <p:cNvPr id="9" name="Picture 8" descr="stack.png"/>
-          <p:cNvPicPr>
-            <a:picLocks noChangeAspect="1"/>
-          </p:cNvPicPr>
-          <p:nvPr/>
-        </p:nvPicPr>
-        <p:blipFill>
-          <a:blip r:embed="rId2"/>
-          <a:stretch>
-            <a:fillRect/>
-          </a:stretch>
-        </p:blipFill>
-        <p:spPr>
-          <a:xfrm>
-            <a:off x="777240" y="3101593"/>
-            <a:ext cx="10652760" cy="2959100"/>
-          </a:xfrm>
-          <a:prstGeom prst="rect">
-            <a:avLst/>
-          </a:prstGeom>
-        </p:spPr>
-      </p:pic>
-      <p:sp>
-        <p:nvSpPr>
-          <p:cNvPr id="10" name="audit:chart-caption"/>
-          <p:cNvSpPr txBox="1"/>
-          <p:nvPr/>
-        </p:nvSpPr>
-        <p:spPr>
-          <a:xfrm>
-            <a:off x="777240" y="6135624"/>
-            <a:ext cx="10652760" cy="237744"/>
-          </a:xfrm>
-          <a:prstGeom prst="rect">
-            <a:avLst/>
-          </a:prstGeom>
-          <a:noFill/>
-        </p:spPr>
-        <p:txBody>
-          <a:bodyPr wrap="square" lIns="0" rIns="0" tIns="0" bIns="0">
-            <a:spAutoFit/>
-          </a:bodyPr>
-          <a:lstStyle/>
-          <a:p>
-            <a:r>
-              <a:rPr sz="950" b="0">
+              <a:t>고정 블록(시스템 · 툴 정의 · 규약)을 맨 앞으로 모은다</a:t>
+            </a:r>
+          </a:p>
+        </p:txBody>
+      </p:sp>
+      <p:sp>
+        <p:nvSpPr>
+          <p:cNvPr id="9" name="audit:body-2"/>
+          <p:cNvSpPr txBox="1"/>
+          <p:nvPr/>
+        </p:nvSpPr>
+        <p:spPr>
+          <a:xfrm>
+            <a:off x="777240" y="4142231"/>
+            <a:ext cx="10652760" cy="612648"/>
+          </a:xfrm>
+          <a:prstGeom prst="rect">
+            <a:avLst/>
+          </a:prstGeom>
+          <a:noFill/>
+        </p:spPr>
+        <p:txBody>
+          <a:bodyPr wrap="square" lIns="0" rIns="0" tIns="0" bIns="0">
+            <a:spAutoFit/>
+          </a:bodyPr>
+          <a:lstStyle/>
+          <a:p>
+            <a:r>
+              <a:rPr sz="1750" b="0">
+                <a:solidFill>
+                  <a:srgbClr val="ECF1F6"/>
+                </a:solidFill>
+                <a:latin typeface="NanumGothic"/>
+                <a:ea typeface="NanumGothic"/>
+                <a:cs typeface="NanumGothic"/>
+              </a:rPr>
+              <a:t>최소 길이를 확인한다 — Haiku 4.5는 4,096토큰</a:t>
+            </a:r>
+          </a:p>
+        </p:txBody>
+      </p:sp>
+      <p:sp>
+        <p:nvSpPr>
+          <p:cNvPr id="10" name="audit:source"/>
+          <p:cNvSpPr txBox="1"/>
+          <p:nvPr/>
+        </p:nvSpPr>
+        <p:spPr>
+          <a:xfrm>
+            <a:off x="640080" y="6080760"/>
+            <a:ext cx="10972800" cy="274320"/>
+          </a:xfrm>
+          <a:prstGeom prst="rect">
+            <a:avLst/>
+          </a:prstGeom>
+          <a:noFill/>
+        </p:spPr>
+        <p:txBody>
+          <a:bodyPr wrap="square" lIns="0" rIns="0" tIns="0" bIns="0">
+            <a:spAutoFit/>
+          </a:bodyPr>
+          <a:lstStyle/>
+          <a:p>
+            <a:r>
+              <a:rPr sz="1000" b="0">
                 <a:solidFill>
                   <a:srgbClr val="93A4B5"/>
                 </a:solidFill>
@@ -9744,56 +9852,20 @@
                 <a:ea typeface="NanumGothic"/>
                 <a:cs typeface="NanumGothic"/>
               </a:rPr>
-              <a:t>그래프 · 남은 비율 (%) · stack.png</a:t>
-            </a:r>
-          </a:p>
-        </p:txBody>
-      </p:sp>
-      <p:sp>
-        <p:nvSpPr>
-          <p:cNvPr id="11" name="audit:source"/>
-          <p:cNvSpPr txBox="1"/>
-          <p:nvPr/>
-        </p:nvSpPr>
-        <p:spPr>
-          <a:xfrm>
-            <a:off x="777240" y="6382512"/>
-            <a:ext cx="10972800" cy="274320"/>
-          </a:xfrm>
-          <a:prstGeom prst="rect">
-            <a:avLst/>
-          </a:prstGeom>
-          <a:noFill/>
-        </p:spPr>
-        <p:txBody>
-          <a:bodyPr wrap="square" lIns="0" rIns="0" tIns="0" bIns="0">
-            <a:spAutoFit/>
-          </a:bodyPr>
-          <a:lstStyle/>
-          <a:p>
-            <a:r>
-              <a:rPr sz="1000" b="0">
-                <a:solidFill>
-                  <a:srgbClr val="93A4B5"/>
-                </a:solidFill>
-                <a:latin typeface="NanumGothic"/>
-                <a:ea typeface="NanumGothic"/>
-                <a:cs typeface="NanumGothic"/>
-              </a:rPr>
-              <a:t>experiments/exp06_other_levers.py</a:t>
-            </a:r>
-          </a:p>
-        </p:txBody>
-      </p:sp>
-      <p:sp>
-        <p:nvSpPr>
-          <p:cNvPr id="12" name="audit:footer"/>
-          <p:cNvSpPr txBox="1"/>
-          <p:nvPr/>
-        </p:nvSpPr>
-        <p:spPr>
-          <a:xfrm>
-            <a:off x="777240" y="6583680"/>
+              <a:t>experiments/exp03_prompt_caching.py</a:t>
+            </a:r>
+          </a:p>
+        </p:txBody>
+      </p:sp>
+      <p:sp>
+        <p:nvSpPr>
+          <p:cNvPr id="11" name="audit:footer"/>
+          <p:cNvSpPr txBox="1"/>
+          <p:nvPr/>
+        </p:nvSpPr>
+        <p:spPr>
+          <a:xfrm>
+            <a:off x="640080" y="6419088"/>
             <a:ext cx="10972800" cy="256032"/>
           </a:xfrm>
           <a:prstGeom prst="rect">
@@ -10350,7 +10422,7 @@
                 <a:ea typeface="NanumGothic"/>
                 <a:cs typeface="NanumGothic"/>
               </a:rPr>
-              <a:t>경로 분리</a:t>
+              <a:t>비용 시나리오 (100콜)</a:t>
             </a:r>
           </a:p>
         </p:txBody>
@@ -10363,7 +10435,7 @@
         </p:nvSpPr>
         <p:spPr>
           <a:xfrm>
-            <a:off x="640080" y="822960"/>
+            <a:off x="640080" y="566928"/>
             <a:ext cx="10881360" cy="822960"/>
           </a:xfrm>
           <a:prstGeom prst="rect">
@@ -10386,7 +10458,7 @@
                 <a:ea typeface="NanumGothic"/>
                 <a:cs typeface="NanumGothic"/>
               </a:rPr>
-              <a:t>웹 세션으로 넘기는 경로</a:t>
+              <a:t>적중률 22%면 본전</a:t>
             </a:r>
           </a:p>
         </p:txBody>
@@ -10399,7 +10471,7 @@
         </p:nvSpPr>
         <p:spPr>
           <a:xfrm>
-            <a:off x="640080" y="1783080"/>
+            <a:off x="640080" y="1188720"/>
             <a:ext cx="10881360" cy="777240"/>
           </a:xfrm>
           <a:prstGeom prst="rect">
@@ -10422,7 +10494,7 @@
                 <a:ea typeface="NanumGothic"/>
                 <a:cs typeface="NanumGothic"/>
               </a:rPr>
-              <a:t>구독제 경로는 증분 API 비용 0으로 모델링</a:t>
+              <a:t>캐시 없음 $8.550</a:t>
             </a:r>
           </a:p>
         </p:txBody>
@@ -10435,7 +10507,7 @@
         </p:nvSpPr>
         <p:spPr>
           <a:xfrm>
-            <a:off x="777240" y="2862072"/>
+            <a:off x="777240" y="1920240"/>
             <a:ext cx="10652760" cy="612648"/>
           </a:xfrm>
           <a:prstGeom prst="rect">
@@ -10458,7 +10530,7 @@
                 <a:ea typeface="NanumGothic"/>
                 <a:cs typeface="NanumGothic"/>
               </a:rPr>
-              <a:t>조사·정리는 웹 세션에서, 코드는 API에서</a:t>
+              <a:t>적중률이 오를수록 단조 감소한다</a:t>
             </a:r>
           </a:p>
         </p:txBody>
@@ -10471,7 +10543,7 @@
         </p:nvSpPr>
         <p:spPr>
           <a:xfrm>
-            <a:off x="777240" y="3502152"/>
+            <a:off x="777240" y="2359152"/>
             <a:ext cx="10652760" cy="612648"/>
           </a:xfrm>
           <a:prstGeom prst="rect">
@@ -10494,71 +10566,59 @@
                 <a:ea typeface="NanumGothic"/>
                 <a:cs typeface="NanumGothic"/>
               </a:rPr>
-              <a:t>옮겨 붙일 때 수용 기준 형식을 그대로 쓴다</a:t>
-            </a:r>
-          </a:p>
-        </p:txBody>
-      </p:sp>
-      <p:sp>
-        <p:nvSpPr>
-          <p:cNvPr id="9" name="audit:body-2"/>
-          <p:cNvSpPr txBox="1"/>
-          <p:nvPr/>
-        </p:nvSpPr>
-        <p:spPr>
-          <a:xfrm>
-            <a:off x="777240" y="4142231"/>
-            <a:ext cx="10652760" cy="612648"/>
-          </a:xfrm>
-          <a:prstGeom prst="rect">
-            <a:avLst/>
-          </a:prstGeom>
-          <a:noFill/>
-        </p:spPr>
-        <p:txBody>
-          <a:bodyPr wrap="square" lIns="0" rIns="0" tIns="0" bIns="0">
-            <a:spAutoFit/>
-          </a:bodyPr>
-          <a:lstStyle/>
-          <a:p>
-            <a:r>
-              <a:rPr sz="1750" b="0">
-                <a:solidFill>
-                  <a:srgbClr val="ECF1F6"/>
-                </a:solidFill>
-                <a:latin typeface="NanumGothic"/>
-                <a:ea typeface="NanumGothic"/>
-                <a:cs typeface="NanumGothic"/>
-              </a:rPr>
-              <a:t>이 경로의 증분 종량 비용은 0으로 모델링한다</a:t>
-            </a:r>
-          </a:p>
-        </p:txBody>
-      </p:sp>
-      <p:sp>
-        <p:nvSpPr>
-          <p:cNvPr id="10" name="audit:source"/>
-          <p:cNvSpPr txBox="1"/>
-          <p:nvPr/>
-        </p:nvSpPr>
-        <p:spPr>
-          <a:xfrm>
-            <a:off x="640080" y="6080760"/>
-            <a:ext cx="10972800" cy="274320"/>
-          </a:xfrm>
-          <a:prstGeom prst="rect">
-            <a:avLst/>
-          </a:prstGeom>
-          <a:noFill/>
-        </p:spPr>
-        <p:txBody>
-          <a:bodyPr wrap="square" lIns="0" rIns="0" tIns="0" bIns="0">
-            <a:spAutoFit/>
-          </a:bodyPr>
-          <a:lstStyle/>
-          <a:p>
-            <a:r>
-              <a:rPr sz="1000" b="0">
+              <a:t>미스가 섞이면 쓰기 프리미엄을 계속 문다</a:t>
+            </a:r>
+          </a:p>
+        </p:txBody>
+      </p:sp>
+      <p:pic>
+        <p:nvPicPr>
+          <p:cNvPr id="9" name="Picture 8" descr="cache_hit.png"/>
+          <p:cNvPicPr>
+            <a:picLocks noChangeAspect="1"/>
+          </p:cNvPicPr>
+          <p:nvPr/>
+        </p:nvPicPr>
+        <p:blipFill>
+          <a:blip r:embed="rId2"/>
+          <a:stretch>
+            <a:fillRect/>
+          </a:stretch>
+        </p:blipFill>
+        <p:spPr>
+          <a:xfrm>
+            <a:off x="980030" y="2670048"/>
+            <a:ext cx="10247179" cy="3529584"/>
+          </a:xfrm>
+          <a:prstGeom prst="rect">
+            <a:avLst/>
+          </a:prstGeom>
+        </p:spPr>
+      </p:pic>
+      <p:sp>
+        <p:nvSpPr>
+          <p:cNvPr id="10" name="audit:chart-caption"/>
+          <p:cNvSpPr txBox="1"/>
+          <p:nvPr/>
+        </p:nvSpPr>
+        <p:spPr>
+          <a:xfrm>
+            <a:off x="777240" y="6217920"/>
+            <a:ext cx="5120640" cy="219456"/>
+          </a:xfrm>
+          <a:prstGeom prst="rect">
+            <a:avLst/>
+          </a:prstGeom>
+          <a:noFill/>
+        </p:spPr>
+        <p:txBody>
+          <a:bodyPr wrap="square" lIns="0" rIns="0" tIns="0" bIns="0">
+            <a:spAutoFit/>
+          </a:bodyPr>
+          <a:lstStyle/>
+          <a:p>
+            <a:r>
+              <a:rPr sz="950" b="0">
                 <a:solidFill>
                   <a:srgbClr val="93A4B5"/>
                 </a:solidFill>
@@ -10566,35 +10626,71 @@
                 <a:ea typeface="NanumGothic"/>
                 <a:cs typeface="NanumGothic"/>
               </a:rPr>
-              <a:t>lab/pricing.py TIER_SCENARIOS</a:t>
-            </a:r>
-          </a:p>
-        </p:txBody>
-      </p:sp>
-      <p:sp>
-        <p:nvSpPr>
-          <p:cNvPr id="11" name="audit:footer"/>
-          <p:cNvSpPr txBox="1"/>
-          <p:nvPr/>
-        </p:nvSpPr>
-        <p:spPr>
-          <a:xfrm>
-            <a:off x="640080" y="6419088"/>
-            <a:ext cx="10972800" cy="256032"/>
-          </a:xfrm>
-          <a:prstGeom prst="rect">
-            <a:avLst/>
-          </a:prstGeom>
-          <a:noFill/>
-        </p:spPr>
-        <p:txBody>
-          <a:bodyPr wrap="square" lIns="0" rIns="0" tIns="0" bIns="0">
-            <a:spAutoFit/>
-          </a:bodyPr>
-          <a:lstStyle/>
-          <a:p>
-            <a:r>
-              <a:rPr sz="1000" b="0">
+              <a:t>그래프 · 적중률별 비용 (USD) · cache_hit.png</a:t>
+            </a:r>
+          </a:p>
+        </p:txBody>
+      </p:sp>
+      <p:sp>
+        <p:nvSpPr>
+          <p:cNvPr id="11" name="audit:source"/>
+          <p:cNvSpPr txBox="1"/>
+          <p:nvPr/>
+        </p:nvSpPr>
+        <p:spPr>
+          <a:xfrm>
+            <a:off x="6035040" y="6217920"/>
+            <a:ext cx="5394960" cy="219456"/>
+          </a:xfrm>
+          <a:prstGeom prst="rect">
+            <a:avLst/>
+          </a:prstGeom>
+          <a:noFill/>
+        </p:spPr>
+        <p:txBody>
+          <a:bodyPr wrap="square" lIns="0" rIns="0" tIns="0" bIns="0">
+            <a:spAutoFit/>
+          </a:bodyPr>
+          <a:lstStyle/>
+          <a:p>
+            <a:r>
+              <a:rPr sz="950" b="0">
+                <a:solidFill>
+                  <a:srgbClr val="93A4B5"/>
+                </a:solidFill>
+                <a:latin typeface="NanumGothic"/>
+                <a:ea typeface="NanumGothic"/>
+                <a:cs typeface="NanumGothic"/>
+              </a:rPr>
+              <a:t>experiments/exp03_prompt_caching.py</a:t>
+            </a:r>
+          </a:p>
+        </p:txBody>
+      </p:sp>
+      <p:sp>
+        <p:nvSpPr>
+          <p:cNvPr id="12" name="audit:footer"/>
+          <p:cNvSpPr txBox="1"/>
+          <p:nvPr/>
+        </p:nvSpPr>
+        <p:spPr>
+          <a:xfrm>
+            <a:off x="777240" y="6620256"/>
+            <a:ext cx="10972800" cy="219456"/>
+          </a:xfrm>
+          <a:prstGeom prst="rect">
+            <a:avLst/>
+          </a:prstGeom>
+          <a:noFill/>
+        </p:spPr>
+        <p:txBody>
+          <a:bodyPr wrap="square" lIns="0" rIns="0" tIns="0" bIns="0">
+            <a:spAutoFit/>
+          </a:bodyPr>
+          <a:lstStyle/>
+          <a:p>
+            <a:r>
+              <a:rPr sz="950" b="0">
                 <a:solidFill>
                   <a:srgbClr val="93A4B5"/>
                 </a:solidFill>
@@ -10743,7 +10839,7 @@
                 <a:ea typeface="NanumGothic"/>
                 <a:cs typeface="NanumGothic"/>
               </a:rPr>
-              <a:t>운영</a:t>
+              <a:t>경로 분리</a:t>
             </a:r>
           </a:p>
         </p:txBody>
@@ -10779,7 +10875,7 @@
                 <a:ea typeface="NanumGothic"/>
                 <a:cs typeface="NanumGothic"/>
               </a:rPr>
-              <a:t>적용 순서와 측정 루프</a:t>
+              <a:t>웹 세션으로 넘기는 경로</a:t>
             </a:r>
           </a:p>
         </p:txBody>
@@ -10815,7 +10911,7 @@
                 <a:ea typeface="NanumGothic"/>
                 <a:cs typeface="NanumGothic"/>
               </a:rPr>
-              <a:t>켜고 → 재고 → 고친다</a:t>
+              <a:t>구독제 경로는 증분 API 비용 0으로 모델링</a:t>
             </a:r>
           </a:p>
         </p:txBody>
@@ -10851,7 +10947,7 @@
                 <a:ea typeface="NanumGothic"/>
                 <a:cs typeface="NanumGothic"/>
               </a:rPr>
-              <a:t>되돌리기 쉬운 것부터 켠다 (캐시 · effort · 배치)</a:t>
+              <a:t>조사·정리는 웹 세션에서, 코드는 API에서</a:t>
             </a:r>
           </a:p>
         </p:txBody>
@@ -10887,7 +10983,7 @@
                 <a:ea typeface="NanumGothic"/>
                 <a:cs typeface="NanumGothic"/>
               </a:rPr>
-              <a:t>적중률·reasoning 비율·턴 수를 주간으로 본다</a:t>
+              <a:t>옮겨 붙일 때 수용 기준 형식을 그대로 쓴다</a:t>
             </a:r>
           </a:p>
         </p:txBody>
@@ -10923,7 +11019,7 @@
                 <a:ea typeface="NanumGothic"/>
                 <a:cs typeface="NanumGothic"/>
               </a:rPr>
-              <a:t>절감률 목표가 아니라 품질 게이트를 먼저 정한다</a:t>
+              <a:t>이 경로의 증분 종량 비용은 0으로 모델링한다</a:t>
             </a:r>
           </a:p>
         </p:txBody>
@@ -10959,7 +11055,7 @@
                 <a:ea typeface="NanumGothic"/>
                 <a:cs typeface="NanumGothic"/>
               </a:rPr>
-              <a:t>agent_setup/antigravity/AGENTS.md · docs/CORRECTIONS.md</a:t>
+              <a:t>lab/pricing.py TIER_SCENARIOS</a:t>
             </a:r>
           </a:p>
         </p:txBody>
@@ -11136,6 +11232,399 @@
                 <a:ea typeface="NanumGothic"/>
                 <a:cs typeface="NanumGothic"/>
               </a:rPr>
+              <a:t>운영</a:t>
+            </a:r>
+          </a:p>
+        </p:txBody>
+      </p:sp>
+      <p:sp>
+        <p:nvSpPr>
+          <p:cNvPr id="5" name="audit:title"/>
+          <p:cNvSpPr txBox="1"/>
+          <p:nvPr/>
+        </p:nvSpPr>
+        <p:spPr>
+          <a:xfrm>
+            <a:off x="640080" y="822960"/>
+            <a:ext cx="10881360" cy="822960"/>
+          </a:xfrm>
+          <a:prstGeom prst="rect">
+            <a:avLst/>
+          </a:prstGeom>
+          <a:noFill/>
+        </p:spPr>
+        <p:txBody>
+          <a:bodyPr wrap="square" lIns="0" rIns="0" tIns="0" bIns="0">
+            <a:spAutoFit/>
+          </a:bodyPr>
+          <a:lstStyle/>
+          <a:p>
+            <a:r>
+              <a:rPr sz="2900" b="1">
+                <a:solidFill>
+                  <a:srgbClr val="ECF1F6"/>
+                </a:solidFill>
+                <a:latin typeface="NanumGothic"/>
+                <a:ea typeface="NanumGothic"/>
+                <a:cs typeface="NanumGothic"/>
+              </a:rPr>
+              <a:t>적용 순서와 측정 루프</a:t>
+            </a:r>
+          </a:p>
+        </p:txBody>
+      </p:sp>
+      <p:sp>
+        <p:nvSpPr>
+          <p:cNvPr id="6" name="audit:hero"/>
+          <p:cNvSpPr txBox="1"/>
+          <p:nvPr/>
+        </p:nvSpPr>
+        <p:spPr>
+          <a:xfrm>
+            <a:off x="640080" y="1783080"/>
+            <a:ext cx="10881360" cy="777240"/>
+          </a:xfrm>
+          <a:prstGeom prst="rect">
+            <a:avLst/>
+          </a:prstGeom>
+          <a:noFill/>
+        </p:spPr>
+        <p:txBody>
+          <a:bodyPr wrap="square" lIns="0" rIns="0" tIns="0" bIns="0">
+            <a:spAutoFit/>
+          </a:bodyPr>
+          <a:lstStyle/>
+          <a:p>
+            <a:r>
+              <a:rPr sz="2900" b="1">
+                <a:solidFill>
+                  <a:srgbClr val="36D399"/>
+                </a:solidFill>
+                <a:latin typeface="NanumGothic"/>
+                <a:ea typeface="NanumGothic"/>
+                <a:cs typeface="NanumGothic"/>
+              </a:rPr>
+              <a:t>켜고 → 재고 → 고친다</a:t>
+            </a:r>
+          </a:p>
+        </p:txBody>
+      </p:sp>
+      <p:sp>
+        <p:nvSpPr>
+          <p:cNvPr id="7" name="audit:body-0"/>
+          <p:cNvSpPr txBox="1"/>
+          <p:nvPr/>
+        </p:nvSpPr>
+        <p:spPr>
+          <a:xfrm>
+            <a:off x="777240" y="2862072"/>
+            <a:ext cx="10652760" cy="612648"/>
+          </a:xfrm>
+          <a:prstGeom prst="rect">
+            <a:avLst/>
+          </a:prstGeom>
+          <a:noFill/>
+        </p:spPr>
+        <p:txBody>
+          <a:bodyPr wrap="square" lIns="0" rIns="0" tIns="0" bIns="0">
+            <a:spAutoFit/>
+          </a:bodyPr>
+          <a:lstStyle/>
+          <a:p>
+            <a:r>
+              <a:rPr sz="1750" b="0">
+                <a:solidFill>
+                  <a:srgbClr val="ECF1F6"/>
+                </a:solidFill>
+                <a:latin typeface="NanumGothic"/>
+                <a:ea typeface="NanumGothic"/>
+                <a:cs typeface="NanumGothic"/>
+              </a:rPr>
+              <a:t>되돌리기 쉬운 것부터 켠다 (캐시 · effort · 배치)</a:t>
+            </a:r>
+          </a:p>
+        </p:txBody>
+      </p:sp>
+      <p:sp>
+        <p:nvSpPr>
+          <p:cNvPr id="8" name="audit:body-1"/>
+          <p:cNvSpPr txBox="1"/>
+          <p:nvPr/>
+        </p:nvSpPr>
+        <p:spPr>
+          <a:xfrm>
+            <a:off x="777240" y="3502152"/>
+            <a:ext cx="10652760" cy="612648"/>
+          </a:xfrm>
+          <a:prstGeom prst="rect">
+            <a:avLst/>
+          </a:prstGeom>
+          <a:noFill/>
+        </p:spPr>
+        <p:txBody>
+          <a:bodyPr wrap="square" lIns="0" rIns="0" tIns="0" bIns="0">
+            <a:spAutoFit/>
+          </a:bodyPr>
+          <a:lstStyle/>
+          <a:p>
+            <a:r>
+              <a:rPr sz="1750" b="0">
+                <a:solidFill>
+                  <a:srgbClr val="ECF1F6"/>
+                </a:solidFill>
+                <a:latin typeface="NanumGothic"/>
+                <a:ea typeface="NanumGothic"/>
+                <a:cs typeface="NanumGothic"/>
+              </a:rPr>
+              <a:t>적중률·reasoning 비율·턴 수를 주간으로 본다</a:t>
+            </a:r>
+          </a:p>
+        </p:txBody>
+      </p:sp>
+      <p:sp>
+        <p:nvSpPr>
+          <p:cNvPr id="9" name="audit:body-2"/>
+          <p:cNvSpPr txBox="1"/>
+          <p:nvPr/>
+        </p:nvSpPr>
+        <p:spPr>
+          <a:xfrm>
+            <a:off x="777240" y="4142231"/>
+            <a:ext cx="10652760" cy="612648"/>
+          </a:xfrm>
+          <a:prstGeom prst="rect">
+            <a:avLst/>
+          </a:prstGeom>
+          <a:noFill/>
+        </p:spPr>
+        <p:txBody>
+          <a:bodyPr wrap="square" lIns="0" rIns="0" tIns="0" bIns="0">
+            <a:spAutoFit/>
+          </a:bodyPr>
+          <a:lstStyle/>
+          <a:p>
+            <a:r>
+              <a:rPr sz="1750" b="0">
+                <a:solidFill>
+                  <a:srgbClr val="ECF1F6"/>
+                </a:solidFill>
+                <a:latin typeface="NanumGothic"/>
+                <a:ea typeface="NanumGothic"/>
+                <a:cs typeface="NanumGothic"/>
+              </a:rPr>
+              <a:t>절감률 목표가 아니라 품질 게이트를 먼저 정한다</a:t>
+            </a:r>
+          </a:p>
+        </p:txBody>
+      </p:sp>
+      <p:sp>
+        <p:nvSpPr>
+          <p:cNvPr id="10" name="audit:source"/>
+          <p:cNvSpPr txBox="1"/>
+          <p:nvPr/>
+        </p:nvSpPr>
+        <p:spPr>
+          <a:xfrm>
+            <a:off x="640080" y="6080760"/>
+            <a:ext cx="10972800" cy="274320"/>
+          </a:xfrm>
+          <a:prstGeom prst="rect">
+            <a:avLst/>
+          </a:prstGeom>
+          <a:noFill/>
+        </p:spPr>
+        <p:txBody>
+          <a:bodyPr wrap="square" lIns="0" rIns="0" tIns="0" bIns="0">
+            <a:spAutoFit/>
+          </a:bodyPr>
+          <a:lstStyle/>
+          <a:p>
+            <a:r>
+              <a:rPr sz="1000" b="0">
+                <a:solidFill>
+                  <a:srgbClr val="93A4B5"/>
+                </a:solidFill>
+                <a:latin typeface="NanumGothic"/>
+                <a:ea typeface="NanumGothic"/>
+                <a:cs typeface="NanumGothic"/>
+              </a:rPr>
+              <a:t>agent_setup/antigravity/AGENTS.md · docs/CORRECTIONS.md</a:t>
+            </a:r>
+          </a:p>
+        </p:txBody>
+      </p:sp>
+      <p:sp>
+        <p:nvSpPr>
+          <p:cNvPr id="11" name="audit:footer"/>
+          <p:cNvSpPr txBox="1"/>
+          <p:nvPr/>
+        </p:nvSpPr>
+        <p:spPr>
+          <a:xfrm>
+            <a:off x="640080" y="6419088"/>
+            <a:ext cx="10972800" cy="256032"/>
+          </a:xfrm>
+          <a:prstGeom prst="rect">
+            <a:avLst/>
+          </a:prstGeom>
+          <a:noFill/>
+        </p:spPr>
+        <p:txBody>
+          <a:bodyPr wrap="square" lIns="0" rIns="0" tIns="0" bIns="0">
+            <a:spAutoFit/>
+          </a:bodyPr>
+          <a:lstStyle/>
+          <a:p>
+            <a:r>
+              <a:rPr sz="1000" b="0">
+                <a:solidFill>
+                  <a:srgbClr val="93A4B5"/>
+                </a:solidFill>
+                <a:latin typeface="NanumGothic"/>
+                <a:ea typeface="NanumGothic"/>
+                <a:cs typeface="NanumGothic"/>
+              </a:rPr>
+              <a:t>2026-09-20  ·  근거와 조건을 함께 인용</a:t>
+            </a:r>
+          </a:p>
+        </p:txBody>
+      </p:sp>
+    </p:spTree>
+  </p:cSld>
+  <p:clrMapOvr>
+    <a:masterClrMapping/>
+  </p:clrMapOvr>
+</p:sld>
+</file>
+
+<file path=ppt/slides/slide23.xml><?xml version="1.0" encoding="utf-8"?>
+<p:sld xmlns:a="http://schemas.openxmlformats.org/drawingml/2006/main" xmlns:p="http://schemas.openxmlformats.org/presentationml/2006/main" xmlns:r="http://schemas.openxmlformats.org/officeDocument/2006/relationships">
+  <p:cSld>
+    <p:bg>
+      <p:bgPr>
+        <a:solidFill>
+          <a:srgbClr val="0E141B"/>
+        </a:solidFill>
+        <a:effectLst/>
+      </p:bgPr>
+    </p:bg>
+    <p:spTree>
+      <p:nvGrpSpPr>
+        <p:cNvPr id="1" name=""/>
+        <p:cNvGrpSpPr/>
+        <p:nvPr/>
+      </p:nvGrpSpPr>
+      <p:grpSpPr/>
+      <p:sp>
+        <p:nvSpPr>
+          <p:cNvPr id="2" name="Rectangle 1"/>
+          <p:cNvSpPr/>
+          <p:nvPr/>
+        </p:nvSpPr>
+        <p:spPr>
+          <a:xfrm>
+            <a:off x="0" y="0"/>
+            <a:ext cx="100584" cy="6858000"/>
+          </a:xfrm>
+          <a:prstGeom prst="rect">
+            <a:avLst/>
+          </a:prstGeom>
+          <a:solidFill>
+            <a:srgbClr val="36D399"/>
+          </a:solidFill>
+          <a:ln>
+            <a:noFill/>
+          </a:ln>
+        </p:spPr>
+        <p:style>
+          <a:lnRef idx="1">
+            <a:schemeClr val="accent1"/>
+          </a:lnRef>
+          <a:fillRef idx="3">
+            <a:schemeClr val="accent1"/>
+          </a:fillRef>
+          <a:effectRef idx="2">
+            <a:schemeClr val="accent1"/>
+          </a:effectRef>
+          <a:fontRef idx="minor">
+            <a:schemeClr val="lt1"/>
+          </a:fontRef>
+        </p:style>
+        <p:txBody>
+          <a:bodyPr rtlCol="0" anchor="ctr"/>
+          <a:lstStyle/>
+          <a:p>
+            <a:pPr algn="ctr"/>
+          </a:p>
+        </p:txBody>
+      </p:sp>
+      <p:sp>
+        <p:nvSpPr>
+          <p:cNvPr id="3" name="audit:index"/>
+          <p:cNvSpPr txBox="1"/>
+          <p:nvPr/>
+        </p:nvSpPr>
+        <p:spPr>
+          <a:xfrm>
+            <a:off x="640080" y="274320"/>
+            <a:ext cx="4572000" cy="274320"/>
+          </a:xfrm>
+          <a:prstGeom prst="rect">
+            <a:avLst/>
+          </a:prstGeom>
+          <a:noFill/>
+        </p:spPr>
+        <p:txBody>
+          <a:bodyPr wrap="square" lIns="0" rIns="0" tIns="0" bIns="0">
+            <a:spAutoFit/>
+          </a:bodyPr>
+          <a:lstStyle/>
+          <a:p>
+            <a:r>
+              <a:rPr sz="1100" b="0">
+                <a:solidFill>
+                  <a:srgbClr val="93A4B5"/>
+                </a:solidFill>
+                <a:latin typeface="NanumGothic"/>
+                <a:ea typeface="NanumGothic"/>
+                <a:cs typeface="NanumGothic"/>
+              </a:rPr>
+              <a:t>TOKEN COST LAB  /  23</a:t>
+            </a:r>
+          </a:p>
+        </p:txBody>
+      </p:sp>
+      <p:sp>
+        <p:nvSpPr>
+          <p:cNvPr id="4" name="audit:scope"/>
+          <p:cNvSpPr txBox="1"/>
+          <p:nvPr/>
+        </p:nvSpPr>
+        <p:spPr>
+          <a:xfrm>
+            <a:off x="5760720" y="274320"/>
+            <a:ext cx="5760720" cy="274320"/>
+          </a:xfrm>
+          <a:prstGeom prst="rect">
+            <a:avLst/>
+          </a:prstGeom>
+          <a:noFill/>
+        </p:spPr>
+        <p:txBody>
+          <a:bodyPr wrap="square" lIns="0" rIns="0" tIns="0" bIns="0">
+            <a:spAutoFit/>
+          </a:bodyPr>
+          <a:lstStyle/>
+          <a:p>
+            <a:r>
+              <a:rPr sz="1100" b="0">
+                <a:solidFill>
+                  <a:srgbClr val="36D399"/>
+                </a:solidFill>
+                <a:latin typeface="NanumGothic"/>
+                <a:ea typeface="NanumGothic"/>
+                <a:cs typeface="NanumGothic"/>
+              </a:rPr>
               <a:t>마무리</a:t>
             </a:r>
           </a:p>
@@ -11578,7 +12067,7 @@
         </p:nvSpPr>
         <p:spPr>
           <a:xfrm>
-            <a:off x="640080" y="1261872"/>
+            <a:off x="640080" y="1188720"/>
             <a:ext cx="10881360" cy="777240"/>
           </a:xfrm>
           <a:prstGeom prst="rect">
@@ -11614,7 +12103,7 @@
         </p:nvSpPr>
         <p:spPr>
           <a:xfrm>
-            <a:off x="777240" y="2029968"/>
+            <a:off x="777240" y="1920240"/>
             <a:ext cx="10652760" cy="612648"/>
           </a:xfrm>
           <a:prstGeom prst="rect">
@@ -11650,7 +12139,7 @@
         </p:nvSpPr>
         <p:spPr>
           <a:xfrm>
-            <a:off x="777240" y="2542032"/>
+            <a:off x="777240" y="2359152"/>
             <a:ext cx="10652760" cy="612648"/>
           </a:xfrm>
           <a:prstGeom prst="rect">
@@ -11694,8 +12183,8 @@
         </p:blipFill>
         <p:spPr>
           <a:xfrm>
-            <a:off x="777240" y="3101593"/>
-            <a:ext cx="10652760" cy="2959100"/>
+            <a:off x="980030" y="2670048"/>
+            <a:ext cx="10247179" cy="3529584"/>
           </a:xfrm>
           <a:prstGeom prst="rect">
             <a:avLst/>
@@ -11710,8 +12199,8 @@
         </p:nvSpPr>
         <p:spPr>
           <a:xfrm>
-            <a:off x="777240" y="6135624"/>
-            <a:ext cx="10652760" cy="237744"/>
+            <a:off x="777240" y="6217920"/>
+            <a:ext cx="5120640" cy="219456"/>
           </a:xfrm>
           <a:prstGeom prst="rect">
             <a:avLst/>
@@ -11746,22 +12235,22 @@
         </p:nvSpPr>
         <p:spPr>
           <a:xfrm>
-            <a:off x="777240" y="6382512"/>
-            <a:ext cx="10972800" cy="274320"/>
-          </a:xfrm>
-          <a:prstGeom prst="rect">
-            <a:avLst/>
-          </a:prstGeom>
-          <a:noFill/>
-        </p:spPr>
-        <p:txBody>
-          <a:bodyPr wrap="square" lIns="0" rIns="0" tIns="0" bIns="0">
-            <a:spAutoFit/>
-          </a:bodyPr>
-          <a:lstStyle/>
-          <a:p>
-            <a:r>
-              <a:rPr sz="1000" b="0">
+            <a:off x="6035040" y="6217920"/>
+            <a:ext cx="5394960" cy="219456"/>
+          </a:xfrm>
+          <a:prstGeom prst="rect">
+            <a:avLst/>
+          </a:prstGeom>
+          <a:noFill/>
+        </p:spPr>
+        <p:txBody>
+          <a:bodyPr wrap="square" lIns="0" rIns="0" tIns="0" bIns="0">
+            <a:spAutoFit/>
+          </a:bodyPr>
+          <a:lstStyle/>
+          <a:p>
+            <a:r>
+              <a:rPr sz="950" b="0">
                 <a:solidFill>
                   <a:srgbClr val="93A4B5"/>
                 </a:solidFill>
@@ -11782,22 +12271,22 @@
         </p:nvSpPr>
         <p:spPr>
           <a:xfrm>
-            <a:off x="777240" y="6583680"/>
-            <a:ext cx="10972800" cy="256032"/>
-          </a:xfrm>
-          <a:prstGeom prst="rect">
-            <a:avLst/>
-          </a:prstGeom>
-          <a:noFill/>
-        </p:spPr>
-        <p:txBody>
-          <a:bodyPr wrap="square" lIns="0" rIns="0" tIns="0" bIns="0">
-            <a:spAutoFit/>
-          </a:bodyPr>
-          <a:lstStyle/>
-          <a:p>
-            <a:r>
-              <a:rPr sz="1000" b="0">
+            <a:off x="777240" y="6620256"/>
+            <a:ext cx="10972800" cy="219456"/>
+          </a:xfrm>
+          <a:prstGeom prst="rect">
+            <a:avLst/>
+          </a:prstGeom>
+          <a:noFill/>
+        </p:spPr>
+        <p:txBody>
+          <a:bodyPr wrap="square" lIns="0" rIns="0" tIns="0" bIns="0">
+            <a:spAutoFit/>
+          </a:bodyPr>
+          <a:lstStyle/>
+          <a:p>
+            <a:r>
+              <a:rPr sz="950" b="0">
                 <a:solidFill>
                   <a:srgbClr val="93A4B5"/>
                 </a:solidFill>
@@ -11946,7 +12435,7 @@
                 <a:ea typeface="NanumGothic"/>
                 <a:cs typeface="NanumGothic"/>
               </a:rPr>
-              <a:t>비용 시나리오</a:t>
+              <a:t>가격표 스냅샷 (2026-09-20)</a:t>
             </a:r>
           </a:p>
         </p:txBody>
@@ -11959,7 +12448,7 @@
         </p:nvSpPr>
         <p:spPr>
           <a:xfrm>
-            <a:off x="640080" y="822960"/>
+            <a:off x="640080" y="566928"/>
             <a:ext cx="10881360" cy="822960"/>
           </a:xfrm>
           <a:prstGeom prst="rect">
@@ -11982,7 +12471,7 @@
                 <a:ea typeface="NanumGothic"/>
                 <a:cs typeface="NanumGothic"/>
               </a:rPr>
-              <a:t>긴 세션은 컴팩션으로 접는다</a:t>
+              <a:t>단가 표로 다시 보기</a:t>
             </a:r>
           </a:p>
         </p:txBody>
@@ -11995,7 +12484,7 @@
         </p:nvSpPr>
         <p:spPr>
           <a:xfrm>
-            <a:off x="640080" y="1783080"/>
+            <a:off x="640080" y="1188720"/>
             <a:ext cx="10881360" cy="777240"/>
           </a:xfrm>
           <a:prstGeom prst="rect">
@@ -12018,7 +12507,7 @@
                 <a:ea typeface="NanumGothic"/>
                 <a:cs typeface="NanumGothic"/>
               </a:rPr>
-              <a:t>$2.32 → $0.93 (60% 절감)</a:t>
+              <a:t>출력÷입력 4~8배, 캐시 읽기 0.02~0.1배</a:t>
             </a:r>
           </a:p>
         </p:txBody>
@@ -12031,7 +12520,7 @@
         </p:nvSpPr>
         <p:spPr>
           <a:xfrm>
-            <a:off x="777240" y="2862072"/>
+            <a:off x="777240" y="1920240"/>
             <a:ext cx="10652760" cy="612648"/>
           </a:xfrm>
           <a:prstGeom prst="rect">
@@ -12054,7 +12543,7 @@
                 <a:ea typeface="NanumGothic"/>
                 <a:cs typeface="NanumGothic"/>
               </a:rPr>
-              <a:t>10턴마다 접으면 $1.23 (47% 절감)</a:t>
+              <a:t>단가는 2026-09-20 공개 리스트 스냅샷 (USD / 100만 토큰)</a:t>
             </a:r>
           </a:p>
         </p:txBody>
@@ -12067,7 +12556,7 @@
         </p:nvSpPr>
         <p:spPr>
           <a:xfrm>
-            <a:off x="777240" y="3502152"/>
+            <a:off x="777240" y="2359152"/>
             <a:ext cx="10652760" cy="612648"/>
           </a:xfrm>
           <a:prstGeom prst="rect">
@@ -12090,47 +12579,894 @@
                 <a:ea typeface="NanumGothic"/>
                 <a:cs typeface="NanumGothic"/>
               </a:rPr>
-              <a:t>너무 자주 접으면 요약 호출이 이득을 먹는다</a:t>
-            </a:r>
-          </a:p>
-        </p:txBody>
-      </p:sp>
-      <p:sp>
-        <p:nvSpPr>
-          <p:cNvPr id="9" name="audit:body-2"/>
-          <p:cNvSpPr txBox="1"/>
-          <p:nvPr/>
-        </p:nvSpPr>
-        <p:spPr>
-          <a:xfrm>
-            <a:off x="777240" y="4142231"/>
-            <a:ext cx="10652760" cy="612648"/>
-          </a:xfrm>
-          <a:prstGeom prst="rect">
-            <a:avLst/>
-          </a:prstGeom>
-          <a:noFill/>
-        </p:spPr>
-        <p:txBody>
-          <a:bodyPr wrap="square" lIns="0" rIns="0" tIns="0" bIns="0">
-            <a:spAutoFit/>
-          </a:bodyPr>
-          <a:lstStyle/>
-          <a:p>
-            <a:r>
-              <a:rPr sz="1750" b="0">
-                <a:solidFill>
-                  <a:srgbClr val="ECF1F6"/>
-                </a:solidFill>
-                <a:latin typeface="NanumGothic"/>
-                <a:ea typeface="NanumGothic"/>
-                <a:cs typeface="NanumGothic"/>
-              </a:rPr>
-              <a:t>최적 주기는 세션 길이와 요약 비용으로 정해진다</a:t>
-            </a:r>
-          </a:p>
-        </p:txBody>
-      </p:sp>
+              <a:t>라이브 조회값이 아니라 저장된 표라서, 갱신은 한 곳에서 한다</a:t>
+            </a:r>
+          </a:p>
+        </p:txBody>
+      </p:sp>
+      <p:graphicFrame>
+        <p:nvGraphicFramePr>
+          <p:cNvPr id="9" name="Table 8"/>
+          <p:cNvGraphicFramePr>
+            <a:graphicFrameLocks noGrp="1"/>
+          </p:cNvGraphicFramePr>
+          <p:nvPr/>
+        </p:nvGraphicFramePr>
+        <p:xfrm>
+          <a:off x="777240" y="2761488"/>
+          <a:ext cx="10652760" cy="2816352"/>
+        </p:xfrm>
+        <a:graphic>
+          <a:graphicData uri="http://schemas.openxmlformats.org/drawingml/2006/table">
+            <a:tbl>
+              <a:tblPr>
+                <a:tableStyleId>{5C22544A-7EE6-4342-B048-85BDC9FD1C3A}</a:tableStyleId>
+              </a:tblPr>
+              <a:tblGrid>
+                <a:gridCol w="3337560"/>
+                <a:gridCol w="1828800"/>
+                <a:gridCol w="1828800"/>
+                <a:gridCol w="1828800"/>
+                <a:gridCol w="1828800"/>
+              </a:tblGrid>
+              <a:tr h="402336">
+                <a:tc>
+                  <a:txBody>
+                    <a:bodyPr wrap="square"/>
+                    <a:lstStyle/>
+                    <a:p>
+                      <a:r>
+                        <a:rPr sz="1400" b="1">
+                          <a:solidFill>
+                            <a:srgbClr val="36D399"/>
+                          </a:solidFill>
+                          <a:latin typeface="NanumGothic"/>
+                          <a:ea typeface="NanumGothic"/>
+                          <a:cs typeface="NanumGothic"/>
+                        </a:rPr>
+                        <a:t>모델</a:t>
+                      </a:r>
+                    </a:p>
+                  </a:txBody>
+                  <a:tcPr marL="82296" marR="82296" marT="18288" marB="18288">
+                    <a:solidFill>
+                      <a:srgbClr val="1B2A38"/>
+                    </a:solidFill>
+                  </a:tcPr>
+                </a:tc>
+                <a:tc>
+                  <a:txBody>
+                    <a:bodyPr wrap="square"/>
+                    <a:lstStyle/>
+                    <a:p>
+                      <a:r>
+                        <a:rPr sz="1400" b="1">
+                          <a:solidFill>
+                            <a:srgbClr val="36D399"/>
+                          </a:solidFill>
+                          <a:latin typeface="NanumGothic"/>
+                          <a:ea typeface="NanumGothic"/>
+                          <a:cs typeface="NanumGothic"/>
+                        </a:rPr>
+                        <a:t>입력 $/1M</a:t>
+                      </a:r>
+                    </a:p>
+                  </a:txBody>
+                  <a:tcPr marL="82296" marR="82296" marT="18288" marB="18288">
+                    <a:solidFill>
+                      <a:srgbClr val="1B2A38"/>
+                    </a:solidFill>
+                  </a:tcPr>
+                </a:tc>
+                <a:tc>
+                  <a:txBody>
+                    <a:bodyPr wrap="square"/>
+                    <a:lstStyle/>
+                    <a:p>
+                      <a:r>
+                        <a:rPr sz="1400" b="1">
+                          <a:solidFill>
+                            <a:srgbClr val="36D399"/>
+                          </a:solidFill>
+                          <a:latin typeface="NanumGothic"/>
+                          <a:ea typeface="NanumGothic"/>
+                          <a:cs typeface="NanumGothic"/>
+                        </a:rPr>
+                        <a:t>출력 $/1M</a:t>
+                      </a:r>
+                    </a:p>
+                  </a:txBody>
+                  <a:tcPr marL="82296" marR="82296" marT="18288" marB="18288">
+                    <a:solidFill>
+                      <a:srgbClr val="1B2A38"/>
+                    </a:solidFill>
+                  </a:tcPr>
+                </a:tc>
+                <a:tc>
+                  <a:txBody>
+                    <a:bodyPr wrap="square"/>
+                    <a:lstStyle/>
+                    <a:p>
+                      <a:r>
+                        <a:rPr sz="1400" b="1">
+                          <a:solidFill>
+                            <a:srgbClr val="36D399"/>
+                          </a:solidFill>
+                          <a:latin typeface="NanumGothic"/>
+                          <a:ea typeface="NanumGothic"/>
+                          <a:cs typeface="NanumGothic"/>
+                        </a:rPr>
+                        <a:t>출력÷입력</a:t>
+                      </a:r>
+                    </a:p>
+                  </a:txBody>
+                  <a:tcPr marL="82296" marR="82296" marT="18288" marB="18288">
+                    <a:solidFill>
+                      <a:srgbClr val="1B2A38"/>
+                    </a:solidFill>
+                  </a:tcPr>
+                </a:tc>
+                <a:tc>
+                  <a:txBody>
+                    <a:bodyPr wrap="square"/>
+                    <a:lstStyle/>
+                    <a:p>
+                      <a:r>
+                        <a:rPr sz="1400" b="1">
+                          <a:solidFill>
+                            <a:srgbClr val="36D399"/>
+                          </a:solidFill>
+                          <a:latin typeface="NanumGothic"/>
+                          <a:ea typeface="NanumGothic"/>
+                          <a:cs typeface="NanumGothic"/>
+                        </a:rPr>
+                        <a:t>캐시 읽기</a:t>
+                      </a:r>
+                    </a:p>
+                  </a:txBody>
+                  <a:tcPr marL="82296" marR="82296" marT="18288" marB="18288">
+                    <a:solidFill>
+                      <a:srgbClr val="1B2A38"/>
+                    </a:solidFill>
+                  </a:tcPr>
+                </a:tc>
+              </a:tr>
+              <a:tr h="402336">
+                <a:tc>
+                  <a:txBody>
+                    <a:bodyPr wrap="square"/>
+                    <a:lstStyle/>
+                    <a:p>
+                      <a:r>
+                        <a:rPr sz="1350" b="0">
+                          <a:solidFill>
+                            <a:srgbClr val="93A4B5"/>
+                          </a:solidFill>
+                          <a:latin typeface="NanumGothic"/>
+                          <a:ea typeface="NanumGothic"/>
+                          <a:cs typeface="NanumGothic"/>
+                        </a:rPr>
+                        <a:t>Claude Opus 4.6</a:t>
+                      </a:r>
+                    </a:p>
+                  </a:txBody>
+                  <a:tcPr marL="82296" marR="82296" marT="18288" marB="18288">
+                    <a:solidFill>
+                      <a:srgbClr val="111A24"/>
+                    </a:solidFill>
+                  </a:tcPr>
+                </a:tc>
+                <a:tc>
+                  <a:txBody>
+                    <a:bodyPr wrap="square"/>
+                    <a:lstStyle/>
+                    <a:p>
+                      <a:r>
+                        <a:rPr sz="1350" b="1">
+                          <a:solidFill>
+                            <a:srgbClr val="ECF1F6"/>
+                          </a:solidFill>
+                          <a:latin typeface="NanumGothic"/>
+                          <a:ea typeface="NanumGothic"/>
+                          <a:cs typeface="NanumGothic"/>
+                        </a:rPr>
+                        <a:t>$5</a:t>
+                      </a:r>
+                    </a:p>
+                  </a:txBody>
+                  <a:tcPr marL="82296" marR="82296" marT="18288" marB="18288">
+                    <a:solidFill>
+                      <a:srgbClr val="111A24"/>
+                    </a:solidFill>
+                  </a:tcPr>
+                </a:tc>
+                <a:tc>
+                  <a:txBody>
+                    <a:bodyPr wrap="square"/>
+                    <a:lstStyle/>
+                    <a:p>
+                      <a:r>
+                        <a:rPr sz="1350" b="1">
+                          <a:solidFill>
+                            <a:srgbClr val="ECF1F6"/>
+                          </a:solidFill>
+                          <a:latin typeface="NanumGothic"/>
+                          <a:ea typeface="NanumGothic"/>
+                          <a:cs typeface="NanumGothic"/>
+                        </a:rPr>
+                        <a:t>$25</a:t>
+                      </a:r>
+                    </a:p>
+                  </a:txBody>
+                  <a:tcPr marL="82296" marR="82296" marT="18288" marB="18288">
+                    <a:solidFill>
+                      <a:srgbClr val="111A24"/>
+                    </a:solidFill>
+                  </a:tcPr>
+                </a:tc>
+                <a:tc>
+                  <a:txBody>
+                    <a:bodyPr wrap="square"/>
+                    <a:lstStyle/>
+                    <a:p>
+                      <a:r>
+                        <a:rPr sz="1350" b="1">
+                          <a:solidFill>
+                            <a:srgbClr val="ECF1F6"/>
+                          </a:solidFill>
+                          <a:latin typeface="NanumGothic"/>
+                          <a:ea typeface="NanumGothic"/>
+                          <a:cs typeface="NanumGothic"/>
+                        </a:rPr>
+                        <a:t>5배</a:t>
+                      </a:r>
+                    </a:p>
+                  </a:txBody>
+                  <a:tcPr marL="82296" marR="82296" marT="18288" marB="18288">
+                    <a:solidFill>
+                      <a:srgbClr val="111A24"/>
+                    </a:solidFill>
+                  </a:tcPr>
+                </a:tc>
+                <a:tc>
+                  <a:txBody>
+                    <a:bodyPr wrap="square"/>
+                    <a:lstStyle/>
+                    <a:p>
+                      <a:r>
+                        <a:rPr sz="1350" b="1">
+                          <a:solidFill>
+                            <a:srgbClr val="ECF1F6"/>
+                          </a:solidFill>
+                          <a:latin typeface="NanumGothic"/>
+                          <a:ea typeface="NanumGothic"/>
+                          <a:cs typeface="NanumGothic"/>
+                        </a:rPr>
+                        <a:t>0.1배</a:t>
+                      </a:r>
+                    </a:p>
+                  </a:txBody>
+                  <a:tcPr marL="82296" marR="82296" marT="18288" marB="18288">
+                    <a:solidFill>
+                      <a:srgbClr val="111A24"/>
+                    </a:solidFill>
+                  </a:tcPr>
+                </a:tc>
+              </a:tr>
+              <a:tr h="402336">
+                <a:tc>
+                  <a:txBody>
+                    <a:bodyPr wrap="square"/>
+                    <a:lstStyle/>
+                    <a:p>
+                      <a:r>
+                        <a:rPr sz="1350" b="0">
+                          <a:solidFill>
+                            <a:srgbClr val="93A4B5"/>
+                          </a:solidFill>
+                          <a:latin typeface="NanumGothic"/>
+                          <a:ea typeface="NanumGothic"/>
+                          <a:cs typeface="NanumGothic"/>
+                        </a:rPr>
+                        <a:t>Claude Sonnet 4.6</a:t>
+                      </a:r>
+                    </a:p>
+                  </a:txBody>
+                  <a:tcPr marL="82296" marR="82296" marT="18288" marB="18288">
+                    <a:solidFill>
+                      <a:srgbClr val="18222E"/>
+                    </a:solidFill>
+                  </a:tcPr>
+                </a:tc>
+                <a:tc>
+                  <a:txBody>
+                    <a:bodyPr wrap="square"/>
+                    <a:lstStyle/>
+                    <a:p>
+                      <a:r>
+                        <a:rPr sz="1350" b="1">
+                          <a:solidFill>
+                            <a:srgbClr val="ECF1F6"/>
+                          </a:solidFill>
+                          <a:latin typeface="NanumGothic"/>
+                          <a:ea typeface="NanumGothic"/>
+                          <a:cs typeface="NanumGothic"/>
+                        </a:rPr>
+                        <a:t>$3</a:t>
+                      </a:r>
+                    </a:p>
+                  </a:txBody>
+                  <a:tcPr marL="82296" marR="82296" marT="18288" marB="18288">
+                    <a:solidFill>
+                      <a:srgbClr val="18222E"/>
+                    </a:solidFill>
+                  </a:tcPr>
+                </a:tc>
+                <a:tc>
+                  <a:txBody>
+                    <a:bodyPr wrap="square"/>
+                    <a:lstStyle/>
+                    <a:p>
+                      <a:r>
+                        <a:rPr sz="1350" b="1">
+                          <a:solidFill>
+                            <a:srgbClr val="ECF1F6"/>
+                          </a:solidFill>
+                          <a:latin typeface="NanumGothic"/>
+                          <a:ea typeface="NanumGothic"/>
+                          <a:cs typeface="NanumGothic"/>
+                        </a:rPr>
+                        <a:t>$15</a:t>
+                      </a:r>
+                    </a:p>
+                  </a:txBody>
+                  <a:tcPr marL="82296" marR="82296" marT="18288" marB="18288">
+                    <a:solidFill>
+                      <a:srgbClr val="18222E"/>
+                    </a:solidFill>
+                  </a:tcPr>
+                </a:tc>
+                <a:tc>
+                  <a:txBody>
+                    <a:bodyPr wrap="square"/>
+                    <a:lstStyle/>
+                    <a:p>
+                      <a:r>
+                        <a:rPr sz="1350" b="1">
+                          <a:solidFill>
+                            <a:srgbClr val="ECF1F6"/>
+                          </a:solidFill>
+                          <a:latin typeface="NanumGothic"/>
+                          <a:ea typeface="NanumGothic"/>
+                          <a:cs typeface="NanumGothic"/>
+                        </a:rPr>
+                        <a:t>5배</a:t>
+                      </a:r>
+                    </a:p>
+                  </a:txBody>
+                  <a:tcPr marL="82296" marR="82296" marT="18288" marB="18288">
+                    <a:solidFill>
+                      <a:srgbClr val="18222E"/>
+                    </a:solidFill>
+                  </a:tcPr>
+                </a:tc>
+                <a:tc>
+                  <a:txBody>
+                    <a:bodyPr wrap="square"/>
+                    <a:lstStyle/>
+                    <a:p>
+                      <a:r>
+                        <a:rPr sz="1350" b="1">
+                          <a:solidFill>
+                            <a:srgbClr val="ECF1F6"/>
+                          </a:solidFill>
+                          <a:latin typeface="NanumGothic"/>
+                          <a:ea typeface="NanumGothic"/>
+                          <a:cs typeface="NanumGothic"/>
+                        </a:rPr>
+                        <a:t>0.1배</a:t>
+                      </a:r>
+                    </a:p>
+                  </a:txBody>
+                  <a:tcPr marL="82296" marR="82296" marT="18288" marB="18288">
+                    <a:solidFill>
+                      <a:srgbClr val="18222E"/>
+                    </a:solidFill>
+                  </a:tcPr>
+                </a:tc>
+              </a:tr>
+              <a:tr h="402336">
+                <a:tc>
+                  <a:txBody>
+                    <a:bodyPr wrap="square"/>
+                    <a:lstStyle/>
+                    <a:p>
+                      <a:r>
+                        <a:rPr sz="1350" b="0">
+                          <a:solidFill>
+                            <a:srgbClr val="93A4B5"/>
+                          </a:solidFill>
+                          <a:latin typeface="NanumGothic"/>
+                          <a:ea typeface="NanumGothic"/>
+                          <a:cs typeface="NanumGothic"/>
+                        </a:rPr>
+                        <a:t>GPT-5</a:t>
+                      </a:r>
+                    </a:p>
+                  </a:txBody>
+                  <a:tcPr marL="82296" marR="82296" marT="18288" marB="18288">
+                    <a:solidFill>
+                      <a:srgbClr val="111A24"/>
+                    </a:solidFill>
+                  </a:tcPr>
+                </a:tc>
+                <a:tc>
+                  <a:txBody>
+                    <a:bodyPr wrap="square"/>
+                    <a:lstStyle/>
+                    <a:p>
+                      <a:r>
+                        <a:rPr sz="1350" b="1">
+                          <a:solidFill>
+                            <a:srgbClr val="ECF1F6"/>
+                          </a:solidFill>
+                          <a:latin typeface="NanumGothic"/>
+                          <a:ea typeface="NanumGothic"/>
+                          <a:cs typeface="NanumGothic"/>
+                        </a:rPr>
+                        <a:t>$1.25</a:t>
+                      </a:r>
+                    </a:p>
+                  </a:txBody>
+                  <a:tcPr marL="82296" marR="82296" marT="18288" marB="18288">
+                    <a:solidFill>
+                      <a:srgbClr val="111A24"/>
+                    </a:solidFill>
+                  </a:tcPr>
+                </a:tc>
+                <a:tc>
+                  <a:txBody>
+                    <a:bodyPr wrap="square"/>
+                    <a:lstStyle/>
+                    <a:p>
+                      <a:r>
+                        <a:rPr sz="1350" b="1">
+                          <a:solidFill>
+                            <a:srgbClr val="ECF1F6"/>
+                          </a:solidFill>
+                          <a:latin typeface="NanumGothic"/>
+                          <a:ea typeface="NanumGothic"/>
+                          <a:cs typeface="NanumGothic"/>
+                        </a:rPr>
+                        <a:t>$10</a:t>
+                      </a:r>
+                    </a:p>
+                  </a:txBody>
+                  <a:tcPr marL="82296" marR="82296" marT="18288" marB="18288">
+                    <a:solidFill>
+                      <a:srgbClr val="111A24"/>
+                    </a:solidFill>
+                  </a:tcPr>
+                </a:tc>
+                <a:tc>
+                  <a:txBody>
+                    <a:bodyPr wrap="square"/>
+                    <a:lstStyle/>
+                    <a:p>
+                      <a:r>
+                        <a:rPr sz="1350" b="1">
+                          <a:solidFill>
+                            <a:srgbClr val="ECF1F6"/>
+                          </a:solidFill>
+                          <a:latin typeface="NanumGothic"/>
+                          <a:ea typeface="NanumGothic"/>
+                          <a:cs typeface="NanumGothic"/>
+                        </a:rPr>
+                        <a:t>8배</a:t>
+                      </a:r>
+                    </a:p>
+                  </a:txBody>
+                  <a:tcPr marL="82296" marR="82296" marT="18288" marB="18288">
+                    <a:solidFill>
+                      <a:srgbClr val="111A24"/>
+                    </a:solidFill>
+                  </a:tcPr>
+                </a:tc>
+                <a:tc>
+                  <a:txBody>
+                    <a:bodyPr wrap="square"/>
+                    <a:lstStyle/>
+                    <a:p>
+                      <a:r>
+                        <a:rPr sz="1350" b="1">
+                          <a:solidFill>
+                            <a:srgbClr val="ECF1F6"/>
+                          </a:solidFill>
+                          <a:latin typeface="NanumGothic"/>
+                          <a:ea typeface="NanumGothic"/>
+                          <a:cs typeface="NanumGothic"/>
+                        </a:rPr>
+                        <a:t>0.1배</a:t>
+                      </a:r>
+                    </a:p>
+                  </a:txBody>
+                  <a:tcPr marL="82296" marR="82296" marT="18288" marB="18288">
+                    <a:solidFill>
+                      <a:srgbClr val="111A24"/>
+                    </a:solidFill>
+                  </a:tcPr>
+                </a:tc>
+              </a:tr>
+              <a:tr h="402336">
+                <a:tc>
+                  <a:txBody>
+                    <a:bodyPr wrap="square"/>
+                    <a:lstStyle/>
+                    <a:p>
+                      <a:r>
+                        <a:rPr sz="1350" b="0">
+                          <a:solidFill>
+                            <a:srgbClr val="93A4B5"/>
+                          </a:solidFill>
+                          <a:latin typeface="NanumGothic"/>
+                          <a:ea typeface="NanumGothic"/>
+                          <a:cs typeface="NanumGothic"/>
+                        </a:rPr>
+                        <a:t>Gemini 3.1 Pro Preview (≤200k)</a:t>
+                      </a:r>
+                    </a:p>
+                  </a:txBody>
+                  <a:tcPr marL="82296" marR="82296" marT="18288" marB="18288">
+                    <a:solidFill>
+                      <a:srgbClr val="18222E"/>
+                    </a:solidFill>
+                  </a:tcPr>
+                </a:tc>
+                <a:tc>
+                  <a:txBody>
+                    <a:bodyPr wrap="square"/>
+                    <a:lstStyle/>
+                    <a:p>
+                      <a:r>
+                        <a:rPr sz="1350" b="1">
+                          <a:solidFill>
+                            <a:srgbClr val="ECF1F6"/>
+                          </a:solidFill>
+                          <a:latin typeface="NanumGothic"/>
+                          <a:ea typeface="NanumGothic"/>
+                          <a:cs typeface="NanumGothic"/>
+                        </a:rPr>
+                        <a:t>$2</a:t>
+                      </a:r>
+                    </a:p>
+                  </a:txBody>
+                  <a:tcPr marL="82296" marR="82296" marT="18288" marB="18288">
+                    <a:solidFill>
+                      <a:srgbClr val="18222E"/>
+                    </a:solidFill>
+                  </a:tcPr>
+                </a:tc>
+                <a:tc>
+                  <a:txBody>
+                    <a:bodyPr wrap="square"/>
+                    <a:lstStyle/>
+                    <a:p>
+                      <a:r>
+                        <a:rPr sz="1350" b="1">
+                          <a:solidFill>
+                            <a:srgbClr val="ECF1F6"/>
+                          </a:solidFill>
+                          <a:latin typeface="NanumGothic"/>
+                          <a:ea typeface="NanumGothic"/>
+                          <a:cs typeface="NanumGothic"/>
+                        </a:rPr>
+                        <a:t>$12</a:t>
+                      </a:r>
+                    </a:p>
+                  </a:txBody>
+                  <a:tcPr marL="82296" marR="82296" marT="18288" marB="18288">
+                    <a:solidFill>
+                      <a:srgbClr val="18222E"/>
+                    </a:solidFill>
+                  </a:tcPr>
+                </a:tc>
+                <a:tc>
+                  <a:txBody>
+                    <a:bodyPr wrap="square"/>
+                    <a:lstStyle/>
+                    <a:p>
+                      <a:r>
+                        <a:rPr sz="1350" b="1">
+                          <a:solidFill>
+                            <a:srgbClr val="ECF1F6"/>
+                          </a:solidFill>
+                          <a:latin typeface="NanumGothic"/>
+                          <a:ea typeface="NanumGothic"/>
+                          <a:cs typeface="NanumGothic"/>
+                        </a:rPr>
+                        <a:t>6배</a:t>
+                      </a:r>
+                    </a:p>
+                  </a:txBody>
+                  <a:tcPr marL="82296" marR="82296" marT="18288" marB="18288">
+                    <a:solidFill>
+                      <a:srgbClr val="18222E"/>
+                    </a:solidFill>
+                  </a:tcPr>
+                </a:tc>
+                <a:tc>
+                  <a:txBody>
+                    <a:bodyPr wrap="square"/>
+                    <a:lstStyle/>
+                    <a:p>
+                      <a:r>
+                        <a:rPr sz="1350" b="1">
+                          <a:solidFill>
+                            <a:srgbClr val="ECF1F6"/>
+                          </a:solidFill>
+                          <a:latin typeface="NanumGothic"/>
+                          <a:ea typeface="NanumGothic"/>
+                          <a:cs typeface="NanumGothic"/>
+                        </a:rPr>
+                        <a:t>0.1배</a:t>
+                      </a:r>
+                    </a:p>
+                  </a:txBody>
+                  <a:tcPr marL="82296" marR="82296" marT="18288" marB="18288">
+                    <a:solidFill>
+                      <a:srgbClr val="18222E"/>
+                    </a:solidFill>
+                  </a:tcPr>
+                </a:tc>
+              </a:tr>
+              <a:tr h="402336">
+                <a:tc>
+                  <a:txBody>
+                    <a:bodyPr wrap="square"/>
+                    <a:lstStyle/>
+                    <a:p>
+                      <a:r>
+                        <a:rPr sz="1350" b="0">
+                          <a:solidFill>
+                            <a:srgbClr val="93A4B5"/>
+                          </a:solidFill>
+                          <a:latin typeface="NanumGothic"/>
+                          <a:ea typeface="NanumGothic"/>
+                          <a:cs typeface="NanumGothic"/>
+                        </a:rPr>
+                        <a:t>Gemini 3.1 Flash-Lite</a:t>
+                      </a:r>
+                    </a:p>
+                  </a:txBody>
+                  <a:tcPr marL="82296" marR="82296" marT="18288" marB="18288">
+                    <a:solidFill>
+                      <a:srgbClr val="111A24"/>
+                    </a:solidFill>
+                  </a:tcPr>
+                </a:tc>
+                <a:tc>
+                  <a:txBody>
+                    <a:bodyPr wrap="square"/>
+                    <a:lstStyle/>
+                    <a:p>
+                      <a:r>
+                        <a:rPr sz="1350" b="1">
+                          <a:solidFill>
+                            <a:srgbClr val="ECF1F6"/>
+                          </a:solidFill>
+                          <a:latin typeface="NanumGothic"/>
+                          <a:ea typeface="NanumGothic"/>
+                          <a:cs typeface="NanumGothic"/>
+                        </a:rPr>
+                        <a:t>$0.25</a:t>
+                      </a:r>
+                    </a:p>
+                  </a:txBody>
+                  <a:tcPr marL="82296" marR="82296" marT="18288" marB="18288">
+                    <a:solidFill>
+                      <a:srgbClr val="111A24"/>
+                    </a:solidFill>
+                  </a:tcPr>
+                </a:tc>
+                <a:tc>
+                  <a:txBody>
+                    <a:bodyPr wrap="square"/>
+                    <a:lstStyle/>
+                    <a:p>
+                      <a:r>
+                        <a:rPr sz="1350" b="1">
+                          <a:solidFill>
+                            <a:srgbClr val="ECF1F6"/>
+                          </a:solidFill>
+                          <a:latin typeface="NanumGothic"/>
+                          <a:ea typeface="NanumGothic"/>
+                          <a:cs typeface="NanumGothic"/>
+                        </a:rPr>
+                        <a:t>$1.5</a:t>
+                      </a:r>
+                    </a:p>
+                  </a:txBody>
+                  <a:tcPr marL="82296" marR="82296" marT="18288" marB="18288">
+                    <a:solidFill>
+                      <a:srgbClr val="111A24"/>
+                    </a:solidFill>
+                  </a:tcPr>
+                </a:tc>
+                <a:tc>
+                  <a:txBody>
+                    <a:bodyPr wrap="square"/>
+                    <a:lstStyle/>
+                    <a:p>
+                      <a:r>
+                        <a:rPr sz="1350" b="1">
+                          <a:solidFill>
+                            <a:srgbClr val="ECF1F6"/>
+                          </a:solidFill>
+                          <a:latin typeface="NanumGothic"/>
+                          <a:ea typeface="NanumGothic"/>
+                          <a:cs typeface="NanumGothic"/>
+                        </a:rPr>
+                        <a:t>6배</a:t>
+                      </a:r>
+                    </a:p>
+                  </a:txBody>
+                  <a:tcPr marL="82296" marR="82296" marT="18288" marB="18288">
+                    <a:solidFill>
+                      <a:srgbClr val="111A24"/>
+                    </a:solidFill>
+                  </a:tcPr>
+                </a:tc>
+                <a:tc>
+                  <a:txBody>
+                    <a:bodyPr wrap="square"/>
+                    <a:lstStyle/>
+                    <a:p>
+                      <a:r>
+                        <a:rPr sz="1350" b="1">
+                          <a:solidFill>
+                            <a:srgbClr val="ECF1F6"/>
+                          </a:solidFill>
+                          <a:latin typeface="NanumGothic"/>
+                          <a:ea typeface="NanumGothic"/>
+                          <a:cs typeface="NanumGothic"/>
+                        </a:rPr>
+                        <a:t>0.1배</a:t>
+                      </a:r>
+                    </a:p>
+                  </a:txBody>
+                  <a:tcPr marL="82296" marR="82296" marT="18288" marB="18288">
+                    <a:solidFill>
+                      <a:srgbClr val="111A24"/>
+                    </a:solidFill>
+                  </a:tcPr>
+                </a:tc>
+              </a:tr>
+              <a:tr h="402336">
+                <a:tc>
+                  <a:txBody>
+                    <a:bodyPr wrap="square"/>
+                    <a:lstStyle/>
+                    <a:p>
+                      <a:r>
+                        <a:rPr sz="1350" b="0">
+                          <a:solidFill>
+                            <a:srgbClr val="93A4B5"/>
+                          </a:solidFill>
+                          <a:latin typeface="NanumGothic"/>
+                          <a:ea typeface="NanumGothic"/>
+                          <a:cs typeface="NanumGothic"/>
+                        </a:rPr>
+                        <a:t>DeepSeek V4.1 Flash (peak)</a:t>
+                      </a:r>
+                    </a:p>
+                  </a:txBody>
+                  <a:tcPr marL="82296" marR="82296" marT="18288" marB="18288">
+                    <a:solidFill>
+                      <a:srgbClr val="18222E"/>
+                    </a:solidFill>
+                  </a:tcPr>
+                </a:tc>
+                <a:tc>
+                  <a:txBody>
+                    <a:bodyPr wrap="square"/>
+                    <a:lstStyle/>
+                    <a:p>
+                      <a:r>
+                        <a:rPr sz="1350" b="1">
+                          <a:solidFill>
+                            <a:srgbClr val="ECF1F6"/>
+                          </a:solidFill>
+                          <a:latin typeface="NanumGothic"/>
+                          <a:ea typeface="NanumGothic"/>
+                          <a:cs typeface="NanumGothic"/>
+                        </a:rPr>
+                        <a:t>$0.3</a:t>
+                      </a:r>
+                    </a:p>
+                  </a:txBody>
+                  <a:tcPr marL="82296" marR="82296" marT="18288" marB="18288">
+                    <a:solidFill>
+                      <a:srgbClr val="18222E"/>
+                    </a:solidFill>
+                  </a:tcPr>
+                </a:tc>
+                <a:tc>
+                  <a:txBody>
+                    <a:bodyPr wrap="square"/>
+                    <a:lstStyle/>
+                    <a:p>
+                      <a:r>
+                        <a:rPr sz="1350" b="1">
+                          <a:solidFill>
+                            <a:srgbClr val="ECF1F6"/>
+                          </a:solidFill>
+                          <a:latin typeface="NanumGothic"/>
+                          <a:ea typeface="NanumGothic"/>
+                          <a:cs typeface="NanumGothic"/>
+                        </a:rPr>
+                        <a:t>$1.2</a:t>
+                      </a:r>
+                    </a:p>
+                  </a:txBody>
+                  <a:tcPr marL="82296" marR="82296" marT="18288" marB="18288">
+                    <a:solidFill>
+                      <a:srgbClr val="18222E"/>
+                    </a:solidFill>
+                  </a:tcPr>
+                </a:tc>
+                <a:tc>
+                  <a:txBody>
+                    <a:bodyPr wrap="square"/>
+                    <a:lstStyle/>
+                    <a:p>
+                      <a:r>
+                        <a:rPr sz="1350" b="1">
+                          <a:solidFill>
+                            <a:srgbClr val="ECF1F6"/>
+                          </a:solidFill>
+                          <a:latin typeface="NanumGothic"/>
+                          <a:ea typeface="NanumGothic"/>
+                          <a:cs typeface="NanumGothic"/>
+                        </a:rPr>
+                        <a:t>4배</a:t>
+                      </a:r>
+                    </a:p>
+                  </a:txBody>
+                  <a:tcPr marL="82296" marR="82296" marT="18288" marB="18288">
+                    <a:solidFill>
+                      <a:srgbClr val="18222E"/>
+                    </a:solidFill>
+                  </a:tcPr>
+                </a:tc>
+                <a:tc>
+                  <a:txBody>
+                    <a:bodyPr wrap="square"/>
+                    <a:lstStyle/>
+                    <a:p>
+                      <a:r>
+                        <a:rPr sz="1350" b="1">
+                          <a:solidFill>
+                            <a:srgbClr val="ECF1F6"/>
+                          </a:solidFill>
+                          <a:latin typeface="NanumGothic"/>
+                          <a:ea typeface="NanumGothic"/>
+                          <a:cs typeface="NanumGothic"/>
+                        </a:rPr>
+                        <a:t>0.02배</a:t>
+                      </a:r>
+                    </a:p>
+                  </a:txBody>
+                  <a:tcPr marL="82296" marR="82296" marT="18288" marB="18288">
+                    <a:solidFill>
+                      <a:srgbClr val="18222E"/>
+                    </a:solidFill>
+                  </a:tcPr>
+                </a:tc>
+              </a:tr>
+            </a:tbl>
+          </a:graphicData>
+        </a:graphic>
+      </p:graphicFrame>
       <p:sp>
         <p:nvSpPr>
           <p:cNvPr id="10" name="audit:source"/>
@@ -12139,7 +13475,7 @@
         </p:nvSpPr>
         <p:spPr>
           <a:xfrm>
-            <a:off x="640080" y="6080760"/>
+            <a:off x="640080" y="6144768"/>
             <a:ext cx="10972800" cy="274320"/>
           </a:xfrm>
           <a:prstGeom prst="rect">
@@ -12162,7 +13498,7 @@
                 <a:ea typeface="NanumGothic"/>
                 <a:cs typeface="NanumGothic"/>
               </a:rPr>
-              <a:t>experiments/exp04_agent_loop_sdd.py</a:t>
+              <a:t>lab/pricing.py MODELS</a:t>
             </a:r>
           </a:p>
         </p:txBody>
@@ -12175,7 +13511,7 @@
         </p:nvSpPr>
         <p:spPr>
           <a:xfrm>
-            <a:off x="640080" y="6419088"/>
+            <a:off x="640080" y="6455664"/>
             <a:ext cx="10972800" cy="256032"/>
           </a:xfrm>
           <a:prstGeom prst="rect">
@@ -12339,7 +13675,7 @@
                 <a:ea typeface="NanumGothic"/>
                 <a:cs typeface="NanumGothic"/>
               </a:rPr>
-              <a:t>전체 시스템 비용 시나리오</a:t>
+              <a:t>비용 시나리오</a:t>
             </a:r>
           </a:p>
         </p:txBody>
@@ -12375,7 +13711,7 @@
                 <a:ea typeface="NanumGothic"/>
                 <a:cs typeface="NanumGothic"/>
               </a:rPr>
-              <a:t>툴 출력과 서브에이전트는 전체 비용으로 본다</a:t>
+              <a:t>긴 세션은 컴팩션으로 접는다</a:t>
             </a:r>
           </a:p>
         </p:txBody>
@@ -12411,7 +13747,7 @@
                 <a:ea typeface="NanumGothic"/>
                 <a:cs typeface="NanumGothic"/>
               </a:rPr>
-              <a:t>$5.6010 → $2.7360</a:t>
+              <a:t>$2.32 → $0.93 (60% 절감)</a:t>
             </a:r>
           </a:p>
         </p:txBody>
@@ -12447,7 +13783,7 @@
                 <a:ea typeface="NanumGothic"/>
                 <a:cs typeface="NanumGothic"/>
               </a:rPr>
-              <a:t>툴 읽기 누적 전송 1,680,000 토큰 (20턴)</a:t>
+              <a:t>10턴마다 접으면 $1.23 (47% 절감)</a:t>
             </a:r>
           </a:p>
         </p:txBody>
@@ -12483,7 +13819,7 @@
                 <a:ea typeface="NanumGothic"/>
                 <a:cs typeface="NanumGothic"/>
               </a:rPr>
-              <a:t>컴팩션 $3.4425 · 서브에이전트 $2.736</a:t>
+              <a:t>너무 자주 접으면 요약 호출이 이득을 먹는다</a:t>
             </a:r>
           </a:p>
         </p:txBody>
@@ -12519,7 +13855,7 @@
                 <a:ea typeface="NanumGothic"/>
                 <a:cs typeface="NanumGothic"/>
               </a:rPr>
-              <a:t>자식 호출·요약 비용까지 포함해 비교한다</a:t>
+              <a:t>최적 주기는 세션 길이와 요약 비용으로 정해진다</a:t>
             </a:r>
           </a:p>
         </p:txBody>
@@ -12555,7 +13891,7 @@
                 <a:ea typeface="NanumGothic"/>
                 <a:cs typeface="NanumGothic"/>
               </a:rPr>
-              <a:t>experiments/exp11_tool_output_bloat.py</a:t>
+              <a:t>experiments/exp04_agent_loop_sdd.py</a:t>
             </a:r>
           </a:p>
         </p:txBody>
@@ -12732,7 +14068,7 @@
                 <a:ea typeface="NanumGothic"/>
                 <a:cs typeface="NanumGothic"/>
               </a:rPr>
-              <a:t>라우팅 배선</a:t>
+              <a:t>전체 시스템 비용 시나리오</a:t>
             </a:r>
           </a:p>
         </p:txBody>
@@ -12768,7 +14104,7 @@
                 <a:ea typeface="NanumGothic"/>
                 <a:cs typeface="NanumGothic"/>
               </a:rPr>
-              <a:t>무엇을 자동화하는가</a:t>
+              <a:t>툴 출력과 서브에이전트는 전체 비용으로 본다</a:t>
             </a:r>
           </a:p>
         </p:txBody>
@@ -12804,7 +14140,7 @@
                 <a:ea typeface="NanumGothic"/>
                 <a:cs typeface="NanumGothic"/>
               </a:rPr>
-              <a:t>요청마다 사람이 모델을 고르지 않는다</a:t>
+              <a:t>$5.6010 → $2.7360</a:t>
             </a:r>
           </a:p>
         </p:txBody>
@@ -12840,7 +14176,7 @@
                 <a:ea typeface="NanumGothic"/>
                 <a:cs typeface="NanumGothic"/>
               </a:rPr>
-              <a:t>설계 · 구현 · 설명 · 정형 작업을 분류해 티어를 고른다</a:t>
+              <a:t>툴 읽기 누적 전송 1,680,000 토큰 (20턴)</a:t>
             </a:r>
           </a:p>
         </p:txBody>
@@ -12876,7 +14212,7 @@
                 <a:ea typeface="NanumGothic"/>
                 <a:cs typeface="NanumGothic"/>
               </a:rPr>
-              <a:t>부수 단어(파일 업로드·검색)보다 작업 목적을 먼저 본다</a:t>
+              <a:t>컴팩션 $3.4425 · 서브에이전트 $2.736</a:t>
             </a:r>
           </a:p>
         </p:txBody>
@@ -12912,7 +14248,7 @@
                 <a:ea typeface="NanumGothic"/>
                 <a:cs typeface="NanumGothic"/>
               </a:rPr>
-              <a:t>비용 예산과 출력 상한을 함께 건다</a:t>
+              <a:t>자식 호출·요약 비용까지 포함해 비교한다</a:t>
             </a:r>
           </a:p>
         </p:txBody>
@@ -12948,7 +14284,7 @@
                 <a:ea typeface="NanumGothic"/>
                 <a:cs typeface="NanumGothic"/>
               </a:rPr>
-              <a:t>agent_setup/router.py</a:t>
+              <a:t>experiments/exp11_tool_output_bloat.py</a:t>
             </a:r>
           </a:p>
         </p:txBody>
@@ -13125,7 +14461,7 @@
                 <a:ea typeface="NanumGothic"/>
                 <a:cs typeface="NanumGothic"/>
               </a:rPr>
-              <a:t>정책 구분</a:t>
+              <a:t>라우팅 배선</a:t>
             </a:r>
           </a:p>
         </p:txBody>
@@ -13161,7 +14497,7 @@
                 <a:ea typeface="NanumGothic"/>
                 <a:cs typeface="NanumGothic"/>
               </a:rPr>
-              <a:t>두 정책을 섞지 않는다</a:t>
+              <a:t>무엇을 자동화하는가</a:t>
             </a:r>
           </a:p>
         </p:txBody>
@@ -13197,7 +14533,7 @@
                 <a:ea typeface="NanumGothic"/>
                 <a:cs typeface="NanumGothic"/>
               </a:rPr>
-              <a:t>라우팅 · 리워크 · 워크플로 컨트롤</a:t>
+              <a:t>요청마다 사람이 모델을 고르지 않는다</a:t>
             </a:r>
           </a:p>
         </p:txBody>
@@ -13233,7 +14569,7 @@
                 <a:ea typeface="NanumGothic"/>
                 <a:cs typeface="NanumGothic"/>
               </a:rPr>
-              <a:t>라우팅: 요청 한 건을 어느 티어로 보낼지 고른다</a:t>
+              <a:t>설계 · 구현 · 설명 · 정형 작업을 분류해 티어를 고른다</a:t>
             </a:r>
           </a:p>
         </p:txBody>
@@ -13269,7 +14605,7 @@
                 <a:ea typeface="NanumGothic"/>
                 <a:cs typeface="NanumGothic"/>
               </a:rPr>
-              <a:t>리워크: 같은 일을 다시 시키는 구간을 관리한다</a:t>
+              <a:t>부수 단어(파일 업로드·검색)보다 작업 목적을 먼저 본다</a:t>
             </a:r>
           </a:p>
         </p:txBody>
@@ -13305,7 +14641,7 @@
                 <a:ea typeface="NanumGothic"/>
                 <a:cs typeface="NanumGothic"/>
               </a:rPr>
-              <a:t>워크플로 컨트롤: 앞의 둘을 포함하는 상위 개념</a:t>
+              <a:t>비용 예산과 출력 상한을 함께 건다</a:t>
             </a:r>
           </a:p>
         </p:txBody>
@@ -13341,7 +14677,7 @@
                 <a:ea typeface="NanumGothic"/>
                 <a:cs typeface="NanumGothic"/>
               </a:rPr>
-              <a:t>agent_setup/antigravity/AGENTS.md</a:t>
+              <a:t>agent_setup/router.py</a:t>
             </a:r>
           </a:p>
         </p:txBody>
@@ -13518,7 +14854,7 @@
                 <a:ea typeface="NanumGothic"/>
                 <a:cs typeface="NanumGothic"/>
               </a:rPr>
-              <a:t>정책 A</a:t>
+              <a:t>정책 구분</a:t>
             </a:r>
           </a:p>
         </p:txBody>
@@ -13554,7 +14890,7 @@
                 <a:ea typeface="NanumGothic"/>
                 <a:cs typeface="NanumGothic"/>
               </a:rPr>
-              <a:t>사다리 A · 내부 실패가 올린다</a:t>
+              <a:t>두 정책을 섞지 않는다</a:t>
             </a:r>
           </a:p>
         </p:txBody>
@@ -13590,7 +14926,7 @@
                 <a:ea typeface="NanumGothic"/>
                 <a:cs typeface="NanumGothic"/>
               </a:rPr>
-              <a:t>테스트가 실패하면 턴 안에서 올린다</a:t>
+              <a:t>라우팅 · 리워크 · 워크플로 컨트롤</a:t>
             </a:r>
           </a:p>
         </p:txBody>
@@ -13626,7 +14962,7 @@
                 <a:ea typeface="NanumGothic"/>
                 <a:cs typeface="NanumGothic"/>
               </a:rPr>
-              <a:t>수용 기준(AC)이 없으면 올릴 근거도 없다</a:t>
+              <a:t>라우팅: 요청 한 건을 어느 티어로 보낼지 고른다</a:t>
             </a:r>
           </a:p>
         </p:txBody>
@@ -13662,7 +14998,7 @@
                 <a:ea typeface="NanumGothic"/>
                 <a:cs typeface="NanumGothic"/>
               </a:rPr>
-              <a:t>같은 실패가 반복될수록 누적 비용이 커진다</a:t>
+              <a:t>리워크: 같은 일을 다시 시키는 구간을 관리한다</a:t>
             </a:r>
           </a:p>
         </p:txBody>
@@ -13698,7 +15034,7 @@
                 <a:ea typeface="NanumGothic"/>
                 <a:cs typeface="NanumGothic"/>
               </a:rPr>
-              <a:t>진단과 적용을 같은 함수로 계산한다</a:t>
+              <a:t>워크플로 컨트롤: 앞의 둘을 포함하는 상위 개념</a:t>
             </a:r>
           </a:p>
         </p:txBody>
@@ -13734,7 +15070,7 @@
                 <a:ea typeface="NanumGothic"/>
                 <a:cs typeface="NanumGothic"/>
               </a:rPr>
-              <a:t>agent_setup/router.py</a:t>
+              <a:t>agent_setup/antigravity/AGENTS.md</a:t>
             </a:r>
           </a:p>
         </p:txBody>
@@ -13911,7 +15247,7 @@
                 <a:ea typeface="NanumGothic"/>
                 <a:cs typeface="NanumGothic"/>
               </a:rPr>
-              <a:t>정책 B (로그 재생)</a:t>
+              <a:t>정책 A</a:t>
             </a:r>
           </a:p>
         </p:txBody>
@@ -13947,7 +15283,7 @@
                 <a:ea typeface="NanumGothic"/>
                 <a:cs typeface="NanumGothic"/>
               </a:rPr>
-              <a:t>사다리 B · 사용자 반려가 올린다</a:t>
+              <a:t>사다리 A · 내부 실패가 올린다</a:t>
             </a:r>
           </a:p>
         </p:txBody>
@@ -13983,7 +15319,7 @@
                 <a:ea typeface="NanumGothic"/>
                 <a:cs typeface="NanumGothic"/>
               </a:rPr>
-              <a:t>저장 발화 6턴에서 3회 에스컬레이션</a:t>
+              <a:t>테스트가 실패하면 턴 안에서 올린다</a:t>
             </a:r>
           </a:p>
         </p:txBody>
@@ -14019,7 +15355,7 @@
                 <a:ea typeface="NanumGothic"/>
                 <a:cs typeface="NanumGothic"/>
               </a:rPr>
-              <a:t>같은 의도의 반복을 감지해 올린다</a:t>
+              <a:t>수용 기준(AC)이 없으면 올릴 근거도 없다</a:t>
             </a:r>
           </a:p>
         </p:txBody>
@@ -14055,7 +15391,7 @@
                 <a:ea typeface="NanumGothic"/>
                 <a:cs typeface="NanumGothic"/>
               </a:rPr>
-              <a:t>스펙 변경·신규 작업은 '반려'가 아니다</a:t>
+              <a:t>같은 실패가 반복될수록 누적 비용이 커진다</a:t>
             </a:r>
           </a:p>
         </p:txBody>
@@ -14091,7 +15427,7 @@
                 <a:ea typeface="NanumGothic"/>
                 <a:cs typeface="NanumGothic"/>
               </a:rPr>
-              <a:t>분류 신호가 없으면 올리지 않고 되묻는다</a:t>
+              <a:t>진단과 적용을 같은 함수로 계산한다</a:t>
             </a:r>
           </a:p>
         </p:txBody>
@@ -14127,7 +15463,7 @@
                 <a:ea typeface="NanumGothic"/>
                 <a:cs typeface="NanumGothic"/>
               </a:rPr>
-              <a:t>analysis/replay_logs.py</a:t>
+              <a:t>agent_setup/router.py</a:t>
             </a:r>
           </a:p>
         </p:txBody>
